--- a/catalan.pptx
+++ b/catalan.pptx
@@ -206,7 +206,7 @@
           <a:p>
             <a:fld id="{2CA80483-8405-594F-95F8-D3FBF1CBF066}" type="datetimeFigureOut">
               <a:rPr lang="en-US" smtClean="0"/>
-              <a:t>4/17/2026</a:t>
+              <a:t>4/18/2026</a:t>
             </a:fld>
             <a:endParaRPr lang="en-US"/>
           </a:p>
@@ -6725,7 +6725,7 @@
           <a:p>
             <a:fld id="{66E687FF-D228-AF49-87D5-A473DBACE8EB}" type="datetime1">
               <a:rPr lang="en-US" smtClean="0"/>
-              <a:t>4/17/2026</a:t>
+              <a:t>4/18/2026</a:t>
             </a:fld>
             <a:endParaRPr lang="en-US"/>
           </a:p>
@@ -7402,17 +7402,25 @@
           <a:p>
             <a:r>
               <a:rPr lang="en-US" dirty="0"/>
+              <a:t>Introducing parallelism does not result in better performance</a:t>
+            </a:r>
+          </a:p>
+          <a:p>
+            <a:pPr lvl="1"/>
+            <a:r>
+              <a:rPr lang="en-US" dirty="0"/>
               <a:t>Time complexity is worse than sequential because overhead dependencies</a:t>
             </a:r>
           </a:p>
           <a:p>
+            <a:pPr lvl="1"/>
             <a:r>
               <a:rPr lang="en-US" dirty="0"/>
               <a:t>Space complexity is worse than sequential because multithreaded still uses N manager threads and up to 4 worker threads</a:t>
             </a:r>
           </a:p>
           <a:p>
-            <a:pPr lvl="1"/>
+            <a:pPr lvl="2"/>
             <a:r>
               <a:rPr lang="en-US" dirty="0"/>
               <a:t>Pre-thread stack allocation is also higher</a:t>
@@ -7485,8 +7493,8 @@
           <a:chExt cx="0" cy="0"/>
         </a:xfrm>
       </p:grpSpPr>
-      <mc:AlternateContent xmlns:mc="http://schemas.openxmlformats.org/markup-compatibility/2006">
-        <mc:Choice xmlns:a14="http://schemas.microsoft.com/office/drawing/2010/main" Requires="a14">
+      <mc:AlternateContent xmlns:mc="http://schemas.openxmlformats.org/markup-compatibility/2006" xmlns:a14="http://schemas.microsoft.com/office/drawing/2010/main">
+        <mc:Choice Requires="a14">
           <p:sp>
             <p:nvSpPr>
               <p:cNvPr id="3" name="Content Placeholder 2">
@@ -7708,7 +7716,7 @@
             </p:txBody>
           </p:sp>
         </mc:Choice>
-        <mc:Fallback>
+        <mc:Fallback xmlns="">
           <p:sp>
             <p:nvSpPr>
               <p:cNvPr id="3" name="Content Placeholder 2">
@@ -7896,8 +7904,8 @@
           <a:chExt cx="0" cy="0"/>
         </a:xfrm>
       </p:grpSpPr>
-      <mc:AlternateContent xmlns:mc="http://schemas.openxmlformats.org/markup-compatibility/2006">
-        <mc:Choice xmlns:a14="http://schemas.microsoft.com/office/drawing/2010/main" Requires="a14">
+      <mc:AlternateContent xmlns:mc="http://schemas.openxmlformats.org/markup-compatibility/2006" xmlns:a14="http://schemas.microsoft.com/office/drawing/2010/main">
+        <mc:Choice Requires="a14">
           <p:sp>
             <p:nvSpPr>
               <p:cNvPr id="2" name="Content Placeholder 1">
@@ -8104,7 +8112,7 @@
             </p:txBody>
           </p:sp>
         </mc:Choice>
-        <mc:Fallback>
+        <mc:Fallback xmlns="">
           <p:sp>
             <p:nvSpPr>
               <p:cNvPr id="2" name="Content Placeholder 1">
@@ -8267,8 +8275,8 @@
           <a:chExt cx="0" cy="0"/>
         </a:xfrm>
       </p:grpSpPr>
-      <mc:AlternateContent xmlns:mc="http://schemas.openxmlformats.org/markup-compatibility/2006">
-        <mc:Choice xmlns:a14="http://schemas.microsoft.com/office/drawing/2010/main" Requires="a14">
+      <mc:AlternateContent xmlns:mc="http://schemas.openxmlformats.org/markup-compatibility/2006" xmlns:a14="http://schemas.microsoft.com/office/drawing/2010/main">
+        <mc:Choice Requires="a14">
           <p:sp>
             <p:nvSpPr>
               <p:cNvPr id="2" name="Content Placeholder 1">
@@ -8658,7 +8666,7 @@
             </p:txBody>
           </p:sp>
         </mc:Choice>
-        <mc:Fallback>
+        <mc:Fallback xmlns="">
           <p:sp>
             <p:nvSpPr>
               <p:cNvPr id="2" name="Content Placeholder 1">
@@ -9179,8 +9187,8 @@
           <a:chExt cx="0" cy="0"/>
         </a:xfrm>
       </p:grpSpPr>
-      <mc:AlternateContent xmlns:mc="http://schemas.openxmlformats.org/markup-compatibility/2006">
-        <mc:Choice xmlns:a14="http://schemas.microsoft.com/office/drawing/2010/main" Requires="a14">
+      <mc:AlternateContent xmlns:mc="http://schemas.openxmlformats.org/markup-compatibility/2006" xmlns:a14="http://schemas.microsoft.com/office/drawing/2010/main">
+        <mc:Choice Requires="a14">
           <p:sp>
             <p:nvSpPr>
               <p:cNvPr id="2" name="Content Placeholder 1">
@@ -9436,7 +9444,7 @@
             </p:txBody>
           </p:sp>
         </mc:Choice>
-        <mc:Fallback>
+        <mc:Fallback xmlns="">
           <p:sp>
             <p:nvSpPr>
               <p:cNvPr id="2" name="Content Placeholder 1">
@@ -9629,55 +9637,342 @@
           <a:chExt cx="0" cy="0"/>
         </a:xfrm>
       </p:grpSpPr>
+      <p:sp>
+        <p:nvSpPr>
+          <p:cNvPr id="6" name="Content Placeholder 5">
+            <a:extLst>
+              <a:ext uri="{FF2B5EF4-FFF2-40B4-BE49-F238E27FC236}">
+                <a16:creationId xmlns:a16="http://schemas.microsoft.com/office/drawing/2014/main" id="{F0405C86-1588-F943-FD88-08AD735CF119}"/>
+              </a:ext>
+            </a:extLst>
+          </p:cNvPr>
+          <p:cNvSpPr>
+            <a:spLocks noGrp="1"/>
+          </p:cNvSpPr>
+          <p:nvPr>
+            <p:ph sz="half" idx="1"/>
+          </p:nvPr>
+        </p:nvSpPr>
+        <p:spPr>
+          <a:xfrm>
+            <a:off x="402264" y="1390262"/>
+            <a:ext cx="5541336" cy="4760752"/>
+          </a:xfrm>
+        </p:spPr>
+        <p:txBody>
+          <a:bodyPr>
+            <a:normAutofit lnSpcReduction="10000"/>
+          </a:bodyPr>
+          <a:lstStyle/>
+          <a:p>
+            <a:pPr marL="0" indent="0">
+              <a:buNone/>
+            </a:pPr>
+            <a:r>
+              <a:rPr lang="en-US" b="1" dirty="0"/>
+              <a:t>Methodology:</a:t>
+            </a:r>
+          </a:p>
+          <a:p>
+            <a:pPr marL="0" indent="0">
+              <a:buNone/>
+            </a:pPr>
+            <a:r>
+              <a:rPr lang="en-US" dirty="0"/>
+              <a:t>1. Initialize C(0)</a:t>
+            </a:r>
+            <a:br>
+              <a:rPr lang="en-US" dirty="0"/>
+            </a:br>
+            <a:r>
+              <a:rPr lang="en-US" dirty="0"/>
+              <a:t>2. Assign one manager thread per Catalan number</a:t>
+            </a:r>
+            <a:br>
+              <a:rPr lang="en-US" dirty="0"/>
+            </a:br>
+            <a:r>
+              <a:rPr lang="en-US" dirty="0"/>
+              <a:t>3. Wait for dependencies to be satisfied</a:t>
+            </a:r>
+            <a:br>
+              <a:rPr lang="en-US" dirty="0"/>
+            </a:br>
+            <a:r>
+              <a:rPr lang="en-US" dirty="0"/>
+              <a:t>4. Split each recurrence into worker-thread chunks</a:t>
+            </a:r>
+            <a:br>
+              <a:rPr lang="en-US" dirty="0"/>
+            </a:br>
+            <a:r>
+              <a:rPr lang="en-US" dirty="0"/>
+              <a:t>5. Compute partial sums in parallel</a:t>
+            </a:r>
+            <a:br>
+              <a:rPr lang="en-US" dirty="0"/>
+            </a:br>
+            <a:r>
+              <a:rPr lang="en-US" dirty="0"/>
+              <a:t>6. Combine and store results</a:t>
+            </a:r>
+            <a:br>
+              <a:rPr lang="en-US" dirty="0"/>
+            </a:br>
+            <a:r>
+              <a:rPr lang="en-US" dirty="0"/>
+              <a:t>7. Notify manager threads</a:t>
+            </a:r>
+          </a:p>
+          <a:p>
+            <a:pPr marL="0" indent="0">
+              <a:buNone/>
+            </a:pPr>
+            <a:endParaRPr lang="en-US" dirty="0"/>
+          </a:p>
+        </p:txBody>
+      </p:sp>
+      <p:pic>
+        <p:nvPicPr>
+          <p:cNvPr id="3" name="Content Placeholder 2">
+            <a:extLst>
+              <a:ext uri="{FF2B5EF4-FFF2-40B4-BE49-F238E27FC236}">
+                <a16:creationId xmlns:a16="http://schemas.microsoft.com/office/drawing/2014/main" id="{8F163B48-7DAC-79C0-49C3-EA5648CAFDCE}"/>
+              </a:ext>
+            </a:extLst>
+          </p:cNvPr>
+          <p:cNvPicPr>
+            <a:picLocks noGrp="1" noChangeAspect="1"/>
+          </p:cNvPicPr>
+          <p:nvPr>
+            <p:ph sz="half" idx="2"/>
+          </p:nvPr>
+        </p:nvPicPr>
+        <p:blipFill>
+          <a:blip r:embed="rId2"/>
+          <a:stretch>
+            <a:fillRect/>
+          </a:stretch>
+        </p:blipFill>
+        <p:spPr>
+          <a:xfrm>
+            <a:off x="6040621" y="1971449"/>
+            <a:ext cx="5772150" cy="1984433"/>
+          </a:xfrm>
+          <a:prstGeom prst="rect">
+            <a:avLst/>
+          </a:prstGeom>
+        </p:spPr>
+      </p:pic>
+      <p:sp>
+        <p:nvSpPr>
+          <p:cNvPr id="4" name="Title 3">
+            <a:extLst>
+              <a:ext uri="{FF2B5EF4-FFF2-40B4-BE49-F238E27FC236}">
+                <a16:creationId xmlns:a16="http://schemas.microsoft.com/office/drawing/2014/main" id="{857DD158-8775-D326-E8A2-DEA92A9DAE5A}"/>
+              </a:ext>
+            </a:extLst>
+          </p:cNvPr>
+          <p:cNvSpPr>
+            <a:spLocks noGrp="1"/>
+          </p:cNvSpPr>
+          <p:nvPr>
+            <p:ph type="title"/>
+          </p:nvPr>
+        </p:nvSpPr>
+        <p:spPr>
+          <a:xfrm>
+            <a:off x="402264" y="365125"/>
+            <a:ext cx="6065113" cy="1325563"/>
+          </a:xfrm>
+        </p:spPr>
+        <p:txBody>
+          <a:bodyPr/>
+          <a:lstStyle/>
+          <a:p>
+            <a:r>
+              <a:rPr lang="en-US" dirty="0"/>
+              <a:t>Multithread solution</a:t>
+            </a:r>
+          </a:p>
+        </p:txBody>
+      </p:sp>
+      <p:sp>
+        <p:nvSpPr>
+          <p:cNvPr id="5" name="Footer Placeholder 4">
+            <a:extLst>
+              <a:ext uri="{FF2B5EF4-FFF2-40B4-BE49-F238E27FC236}">
+                <a16:creationId xmlns:a16="http://schemas.microsoft.com/office/drawing/2014/main" id="{681395FF-1A3E-6D1D-791C-517B4F2E72E5}"/>
+              </a:ext>
+            </a:extLst>
+          </p:cNvPr>
+          <p:cNvSpPr>
+            <a:spLocks noGrp="1"/>
+          </p:cNvSpPr>
+          <p:nvPr>
+            <p:ph type="ftr" sz="quarter" idx="11"/>
+          </p:nvPr>
+        </p:nvSpPr>
+        <p:spPr/>
+        <p:txBody>
+          <a:bodyPr/>
+          <a:lstStyle/>
+          <a:p>
+            <a:r>
+              <a:rPr lang="en-US"/>
+              <a:t>UNIVERSITY OF SOUTH FLORIDA</a:t>
+            </a:r>
+            <a:endParaRPr lang="en-US" dirty="0"/>
+          </a:p>
+        </p:txBody>
+      </p:sp>
       <mc:AlternateContent xmlns:mc="http://schemas.openxmlformats.org/markup-compatibility/2006">
         <mc:Choice xmlns:a14="http://schemas.microsoft.com/office/drawing/2010/main" Requires="a14">
           <p:sp>
             <p:nvSpPr>
-              <p:cNvPr id="6" name="Content Placeholder 5">
+              <p:cNvPr id="9" name="TextBox 8">
                 <a:extLst>
                   <a:ext uri="{FF2B5EF4-FFF2-40B4-BE49-F238E27FC236}">
-                    <a16:creationId xmlns:a16="http://schemas.microsoft.com/office/drawing/2014/main" id="{F0405C86-1588-F943-FD88-08AD735CF119}"/>
+                    <a16:creationId xmlns:a16="http://schemas.microsoft.com/office/drawing/2014/main" id="{0A4D7A0E-3DCD-B59C-8124-1E58D8DDD71B}"/>
                   </a:ext>
                 </a:extLst>
               </p:cNvPr>
-              <p:cNvSpPr>
-                <a:spLocks noGrp="1"/>
-              </p:cNvSpPr>
-              <p:nvPr>
-                <p:ph sz="half" idx="1"/>
-              </p:nvPr>
+              <p:cNvSpPr txBox="1"/>
+              <p:nvPr/>
             </p:nvSpPr>
-            <p:spPr/>
+            <p:spPr>
+              <a:xfrm>
+                <a:off x="6467377" y="4881000"/>
+                <a:ext cx="5541336" cy="890500"/>
+              </a:xfrm>
+              <a:prstGeom prst="rect">
+                <a:avLst/>
+              </a:prstGeom>
+            </p:spPr>
             <p:txBody>
-              <a:bodyPr>
+              <a:bodyPr vert="horz" lIns="91440" tIns="45720" rIns="91440" bIns="45720" rtlCol="0">
                 <a:normAutofit/>
               </a:bodyPr>
-              <a:lstStyle/>
+              <a:lstStyle>
+                <a:lvl1pPr indent="0">
+                  <a:lnSpc>
+                    <a:spcPct val="90000"/>
+                  </a:lnSpc>
+                  <a:spcBef>
+                    <a:spcPts val="1000"/>
+                  </a:spcBef>
+                  <a:buFont typeface="Arial" panose="020B0604020202020204" pitchFamily="34" charset="0"/>
+                  <a:buNone/>
+                  <a:defRPr sz="2800" b="1">
+                    <a:solidFill>
+                      <a:schemeClr val="tx2"/>
+                    </a:solidFill>
+                  </a:defRPr>
+                </a:lvl1pPr>
+                <a:lvl2pPr marL="685783" indent="-228594">
+                  <a:lnSpc>
+                    <a:spcPct val="90000"/>
+                  </a:lnSpc>
+                  <a:spcBef>
+                    <a:spcPts val="500"/>
+                  </a:spcBef>
+                  <a:buFont typeface="Arial" panose="020B0604020202020204" pitchFamily="34" charset="0"/>
+                  <a:buChar char="•"/>
+                  <a:defRPr sz="2400">
+                    <a:solidFill>
+                      <a:schemeClr val="tx2"/>
+                    </a:solidFill>
+                  </a:defRPr>
+                </a:lvl2pPr>
+                <a:lvl3pPr marL="1142971" indent="-228594">
+                  <a:lnSpc>
+                    <a:spcPct val="90000"/>
+                  </a:lnSpc>
+                  <a:spcBef>
+                    <a:spcPts val="500"/>
+                  </a:spcBef>
+                  <a:buFont typeface="Arial" panose="020B0604020202020204" pitchFamily="34" charset="0"/>
+                  <a:buChar char="•"/>
+                  <a:defRPr sz="2000">
+                    <a:solidFill>
+                      <a:schemeClr val="tx2"/>
+                    </a:solidFill>
+                  </a:defRPr>
+                </a:lvl3pPr>
+                <a:lvl4pPr marL="1600160" indent="-228594">
+                  <a:lnSpc>
+                    <a:spcPct val="90000"/>
+                  </a:lnSpc>
+                  <a:spcBef>
+                    <a:spcPts val="500"/>
+                  </a:spcBef>
+                  <a:buFont typeface="Arial" panose="020B0604020202020204" pitchFamily="34" charset="0"/>
+                  <a:buChar char="•"/>
+                  <a:defRPr>
+                    <a:solidFill>
+                      <a:schemeClr val="tx2"/>
+                    </a:solidFill>
+                  </a:defRPr>
+                </a:lvl4pPr>
+                <a:lvl5pPr marL="2057349" indent="-228594">
+                  <a:lnSpc>
+                    <a:spcPct val="90000"/>
+                  </a:lnSpc>
+                  <a:spcBef>
+                    <a:spcPts val="500"/>
+                  </a:spcBef>
+                  <a:buFont typeface="Arial" panose="020B0604020202020204" pitchFamily="34" charset="0"/>
+                  <a:buChar char="•"/>
+                  <a:defRPr>
+                    <a:solidFill>
+                      <a:schemeClr val="tx2"/>
+                    </a:solidFill>
+                  </a:defRPr>
+                </a:lvl5pPr>
+                <a:lvl6pPr marL="2514537" indent="-228594">
+                  <a:lnSpc>
+                    <a:spcPct val="90000"/>
+                  </a:lnSpc>
+                  <a:spcBef>
+                    <a:spcPts val="500"/>
+                  </a:spcBef>
+                  <a:buFont typeface="Arial" panose="020B0604020202020204" pitchFamily="34" charset="0"/>
+                  <a:buChar char="•"/>
+                </a:lvl6pPr>
+                <a:lvl7pPr marL="2971726" indent="-228594">
+                  <a:lnSpc>
+                    <a:spcPct val="90000"/>
+                  </a:lnSpc>
+                  <a:spcBef>
+                    <a:spcPts val="500"/>
+                  </a:spcBef>
+                  <a:buFont typeface="Arial" panose="020B0604020202020204" pitchFamily="34" charset="0"/>
+                  <a:buChar char="•"/>
+                </a:lvl7pPr>
+                <a:lvl8pPr marL="3428914" indent="-228594">
+                  <a:lnSpc>
+                    <a:spcPct val="90000"/>
+                  </a:lnSpc>
+                  <a:spcBef>
+                    <a:spcPts val="500"/>
+                  </a:spcBef>
+                  <a:buFont typeface="Arial" panose="020B0604020202020204" pitchFamily="34" charset="0"/>
+                  <a:buChar char="•"/>
+                </a:lvl8pPr>
+                <a:lvl9pPr marL="3886103" indent="-228594">
+                  <a:lnSpc>
+                    <a:spcPct val="90000"/>
+                  </a:lnSpc>
+                  <a:spcBef>
+                    <a:spcPts val="500"/>
+                  </a:spcBef>
+                  <a:buFont typeface="Arial" panose="020B0604020202020204" pitchFamily="34" charset="0"/>
+                  <a:buChar char="•"/>
+                </a:lvl9pPr>
+              </a:lstStyle>
               <a:p>
-                <a:pPr marL="0" indent="0">
-                  <a:buNone/>
-                </a:pPr>
-                <a:r>
-                  <a:rPr lang="en-US" b="1" dirty="0"/>
-                  <a:t>Goal: </a:t>
-                </a:r>
                 <a:r>
                   <a:rPr lang="en-US" dirty="0"/>
-                  <a:t>compute Catalan numbers C(0) to C(n) </a:t>
-                </a:r>
-              </a:p>
-              <a:p>
-                <a:pPr marL="0" indent="0">
-                  <a:buNone/>
-                </a:pPr>
-                <a:endParaRPr lang="en-US" b="1" dirty="0"/>
-              </a:p>
-              <a:p>
-                <a:pPr marL="0" indent="0">
-                  <a:buNone/>
-                </a:pPr>
-                <a:r>
-                  <a:rPr lang="en-US" b="1" dirty="0"/>
                   <a:t>Key formula: </a:t>
                 </a:r>
                 <a14:m>
@@ -9685,41 +9980,31 @@
                     <m:sSub>
                       <m:sSubPr>
                         <m:ctrlPr>
-                          <a:rPr lang="en-US" i="1">
-                            <a:latin typeface="Cambria Math" panose="02040503050406030204" pitchFamily="18" charset="0"/>
-                          </a:rPr>
+                          <a:rPr lang="en-US"/>
                         </m:ctrlPr>
                       </m:sSubPr>
                       <m:e>
                         <m:r>
-                          <a:rPr lang="en-US" i="1">
-                            <a:latin typeface="Cambria Math" panose="02040503050406030204" pitchFamily="18" charset="0"/>
-                          </a:rPr>
+                          <a:rPr lang="en-US"/>
                           <m:t>𝐶</m:t>
                         </m:r>
                       </m:e>
                       <m:sub>
                         <m:r>
-                          <a:rPr lang="en-US" i="1">
-                            <a:latin typeface="Cambria Math" panose="02040503050406030204" pitchFamily="18" charset="0"/>
-                          </a:rPr>
+                          <a:rPr lang="en-US"/>
                           <m:t>𝑛</m:t>
                         </m:r>
                       </m:sub>
                     </m:sSub>
                     <m:r>
-                      <a:rPr lang="en-US" i="1">
-                        <a:latin typeface="Cambria Math" panose="02040503050406030204" pitchFamily="18" charset="0"/>
-                      </a:rPr>
+                      <a:rPr lang="en-US"/>
                       <m:t>= </m:t>
                     </m:r>
                     <m:nary>
                       <m:naryPr>
                         <m:chr m:val="∑"/>
                         <m:ctrlPr>
-                          <a:rPr lang="en-US" i="1">
-                            <a:latin typeface="Cambria Math" panose="02040503050406030204" pitchFamily="18" charset="0"/>
-                          </a:rPr>
+                          <a:rPr lang="en-US"/>
                         </m:ctrlPr>
                       </m:naryPr>
                       <m:sub>
@@ -9727,29 +10012,21 @@
                           <m:rPr>
                             <m:brk m:alnAt="23"/>
                           </m:rPr>
-                          <a:rPr lang="en-US" i="1">
-                            <a:latin typeface="Cambria Math" panose="02040503050406030204" pitchFamily="18" charset="0"/>
-                          </a:rPr>
+                          <a:rPr lang="en-US"/>
                           <m:t>𝑖</m:t>
                         </m:r>
                         <m:r>
-                          <a:rPr lang="en-US" i="1">
-                            <a:latin typeface="Cambria Math" panose="02040503050406030204" pitchFamily="18" charset="0"/>
-                          </a:rPr>
+                          <a:rPr lang="en-US"/>
                           <m:t>=0</m:t>
                         </m:r>
                       </m:sub>
                       <m:sup>
                         <m:r>
-                          <a:rPr lang="en-US" i="1">
-                            <a:latin typeface="Cambria Math" panose="02040503050406030204" pitchFamily="18" charset="0"/>
-                          </a:rPr>
+                          <a:rPr lang="en-US"/>
                           <m:t>𝑛</m:t>
                         </m:r>
                         <m:r>
-                          <a:rPr lang="en-US" i="1">
-                            <a:latin typeface="Cambria Math" panose="02040503050406030204" pitchFamily="18" charset="0"/>
-                          </a:rPr>
+                          <a:rPr lang="en-US"/>
                           <m:t>−1</m:t>
                         </m:r>
                       </m:sup>
@@ -9757,24 +10034,18 @@
                         <m:sSub>
                           <m:sSubPr>
                             <m:ctrlPr>
-                              <a:rPr lang="en-US" i="1">
-                                <a:latin typeface="Cambria Math" panose="02040503050406030204" pitchFamily="18" charset="0"/>
-                              </a:rPr>
+                              <a:rPr lang="en-US"/>
                             </m:ctrlPr>
                           </m:sSubPr>
                           <m:e>
                             <m:r>
-                              <a:rPr lang="en-US" i="1">
-                                <a:latin typeface="Cambria Math" panose="02040503050406030204" pitchFamily="18" charset="0"/>
-                              </a:rPr>
+                              <a:rPr lang="en-US"/>
                               <m:t>𝐶</m:t>
                             </m:r>
                           </m:e>
                           <m:sub>
                             <m:r>
-                              <a:rPr lang="en-US" i="1">
-                                <a:latin typeface="Cambria Math" panose="02040503050406030204" pitchFamily="18" charset="0"/>
-                              </a:rPr>
+                              <a:rPr lang="en-US"/>
                               <m:t>𝑖</m:t>
                             </m:r>
                           </m:sub>
@@ -9782,36 +10053,26 @@
                         <m:sSub>
                           <m:sSubPr>
                             <m:ctrlPr>
-                              <a:rPr lang="en-US" i="1">
-                                <a:latin typeface="Cambria Math" panose="02040503050406030204" pitchFamily="18" charset="0"/>
-                              </a:rPr>
+                              <a:rPr lang="en-US"/>
                             </m:ctrlPr>
                           </m:sSubPr>
                           <m:e>
                             <m:r>
-                              <a:rPr lang="en-US" i="1">
-                                <a:latin typeface="Cambria Math" panose="02040503050406030204" pitchFamily="18" charset="0"/>
-                              </a:rPr>
+                              <a:rPr lang="en-US"/>
                               <m:t>𝐶</m:t>
                             </m:r>
                           </m:e>
                           <m:sub>
                             <m:r>
-                              <a:rPr lang="en-US" i="1">
-                                <a:latin typeface="Cambria Math" panose="02040503050406030204" pitchFamily="18" charset="0"/>
-                              </a:rPr>
+                              <a:rPr lang="en-US"/>
                               <m:t>𝑛</m:t>
                             </m:r>
                             <m:r>
-                              <a:rPr lang="en-US" i="1">
-                                <a:latin typeface="Cambria Math" panose="02040503050406030204" pitchFamily="18" charset="0"/>
-                              </a:rPr>
+                              <a:rPr lang="en-US"/>
                               <m:t>−1−</m:t>
                             </m:r>
                             <m:r>
-                              <a:rPr lang="en-US" i="1">
-                                <a:latin typeface="Cambria Math" panose="02040503050406030204" pitchFamily="18" charset="0"/>
-                              </a:rPr>
+                              <a:rPr lang="en-US"/>
                               <m:t>𝑖</m:t>
                             </m:r>
                           </m:sub>
@@ -9822,37 +10083,36 @@
                 </a14:m>
                 <a:endParaRPr lang="en-US" dirty="0"/>
               </a:p>
-              <a:p>
-                <a:pPr marL="0" indent="0">
-                  <a:buNone/>
-                </a:pPr>
-                <a:endParaRPr lang="en-US" dirty="0"/>
-              </a:p>
             </p:txBody>
           </p:sp>
         </mc:Choice>
         <mc:Fallback>
           <p:sp>
             <p:nvSpPr>
-              <p:cNvPr id="6" name="Content Placeholder 5">
+              <p:cNvPr id="9" name="TextBox 8">
                 <a:extLst>
                   <a:ext uri="{FF2B5EF4-FFF2-40B4-BE49-F238E27FC236}">
-                    <a16:creationId xmlns:a16="http://schemas.microsoft.com/office/drawing/2014/main" id="{F0405C86-1588-F943-FD88-08AD735CF119}"/>
+                    <a16:creationId xmlns:a16="http://schemas.microsoft.com/office/drawing/2014/main" id="{0A4D7A0E-3DCD-B59C-8124-1E58D8DDD71B}"/>
                   </a:ext>
                 </a:extLst>
               </p:cNvPr>
-              <p:cNvSpPr>
-                <a:spLocks noGrp="1" noRot="1" noChangeAspect="1" noMove="1" noResize="1" noEditPoints="1" noAdjustHandles="1" noChangeArrowheads="1" noChangeShapeType="1" noTextEdit="1"/>
+              <p:cNvSpPr txBox="1">
+                <a:spLocks noRot="1" noChangeAspect="1" noMove="1" noResize="1" noEditPoints="1" noAdjustHandles="1" noChangeArrowheads="1" noChangeShapeType="1" noTextEdit="1"/>
               </p:cNvSpPr>
-              <p:nvPr>
-                <p:ph sz="half" idx="1"/>
-              </p:nvPr>
+              <p:nvPr/>
             </p:nvSpPr>
             <p:spPr>
+              <a:xfrm>
+                <a:off x="6467377" y="4881000"/>
+                <a:ext cx="5541336" cy="890500"/>
+              </a:xfrm>
+              <a:prstGeom prst="rect">
+                <a:avLst/>
+              </a:prstGeom>
               <a:blipFill>
-                <a:blip r:embed="rId2"/>
+                <a:blip r:embed="rId3"/>
                 <a:stretch>
-                  <a:fillRect l="-2310" t="-2381" r="-880"/>
+                  <a:fillRect l="-2310" t="-10274"/>
                 </a:stretch>
               </a:blipFill>
             </p:spPr>
@@ -9873,157 +10133,158 @@
       </mc:AlternateContent>
       <p:sp>
         <p:nvSpPr>
-          <p:cNvPr id="7" name="Content Placeholder 6">
-            <a:extLst>
-              <a:ext uri="{FF2B5EF4-FFF2-40B4-BE49-F238E27FC236}">
-                <a16:creationId xmlns:a16="http://schemas.microsoft.com/office/drawing/2014/main" id="{63CB4BBB-66D2-68B2-20ED-09EF6612A0F6}"/>
-              </a:ext>
-            </a:extLst>
-          </p:cNvPr>
-          <p:cNvSpPr>
-            <a:spLocks noGrp="1"/>
-          </p:cNvSpPr>
-          <p:nvPr>
-            <p:ph sz="half" idx="2"/>
-          </p:nvPr>
-        </p:nvSpPr>
-        <p:spPr>
-          <a:xfrm>
-            <a:off x="6292700" y="1815735"/>
-            <a:ext cx="5771781" cy="4351339"/>
-          </a:xfrm>
-        </p:spPr>
-        <p:txBody>
-          <a:bodyPr>
-            <a:normAutofit fontScale="92500" lnSpcReduction="10000"/>
+          <p:cNvPr id="11" name="TextBox 10">
+            <a:extLst>
+              <a:ext uri="{FF2B5EF4-FFF2-40B4-BE49-F238E27FC236}">
+                <a16:creationId xmlns:a16="http://schemas.microsoft.com/office/drawing/2014/main" id="{0CED00D9-0798-BEC8-59CB-30CC098F6057}"/>
+              </a:ext>
+            </a:extLst>
+          </p:cNvPr>
+          <p:cNvSpPr txBox="1"/>
+          <p:nvPr/>
+        </p:nvSpPr>
+        <p:spPr>
+          <a:xfrm>
+            <a:off x="6189268" y="810704"/>
+            <a:ext cx="6097554" cy="867930"/>
+          </a:xfrm>
+          <a:prstGeom prst="rect">
+            <a:avLst/>
+          </a:prstGeom>
+        </p:spPr>
+        <p:txBody>
+          <a:bodyPr vert="horz" lIns="91440" tIns="45720" rIns="91440" bIns="45720" rtlCol="0">
+            <a:normAutofit/>
           </a:bodyPr>
-          <a:lstStyle/>
-          <a:p>
-            <a:pPr marL="0" indent="0">
+          <a:lstStyle>
+            <a:defPPr>
+              <a:defRPr lang="en-US"/>
+            </a:defPPr>
+            <a:lvl1pPr indent="0">
+              <a:lnSpc>
+                <a:spcPct val="90000"/>
+              </a:lnSpc>
+              <a:spcBef>
+                <a:spcPts val="1000"/>
+              </a:spcBef>
+              <a:buFont typeface="Arial" panose="020B0604020202020204" pitchFamily="34" charset="0"/>
               <a:buNone/>
-            </a:pPr>
-            <a:r>
-              <a:rPr lang="en-US" b="1" dirty="0"/>
-              <a:t>Methodology:</a:t>
-            </a:r>
-          </a:p>
-          <a:p>
-            <a:pPr marL="0" indent="0">
-              <a:buNone/>
-            </a:pPr>
-            <a:r>
-              <a:rPr lang="en-US" dirty="0"/>
-              <a:t>1. Initialize C(0)</a:t>
-            </a:r>
-            <a:br>
-              <a:rPr lang="en-US" dirty="0"/>
-            </a:br>
-            <a:r>
-              <a:rPr lang="en-US" dirty="0"/>
-              <a:t>2. Assign one manager thread per Catalan number</a:t>
-            </a:r>
-            <a:br>
-              <a:rPr lang="en-US" dirty="0"/>
-            </a:br>
-            <a:r>
-              <a:rPr lang="en-US" dirty="0"/>
-              <a:t>3. Wait for dependencies to be satisfied</a:t>
-            </a:r>
-            <a:br>
-              <a:rPr lang="en-US" dirty="0"/>
-            </a:br>
-            <a:r>
-              <a:rPr lang="en-US" dirty="0"/>
-              <a:t>4. Split each recurrence into worker-thread chunks</a:t>
-            </a:r>
-            <a:br>
-              <a:rPr lang="en-US" dirty="0"/>
-            </a:br>
-            <a:r>
-              <a:rPr lang="en-US" dirty="0"/>
-              <a:t>5. Compute partial sums in parallel</a:t>
-            </a:r>
-            <a:br>
-              <a:rPr lang="en-US" dirty="0"/>
-            </a:br>
-            <a:r>
-              <a:rPr lang="en-US" dirty="0"/>
-              <a:t>6. Combine and store results</a:t>
-            </a:r>
-            <a:br>
-              <a:rPr lang="en-US" dirty="0"/>
-            </a:br>
-            <a:r>
-              <a:rPr lang="en-US" dirty="0"/>
-              <a:t>7. Notify dependent threads</a:t>
-            </a:r>
-            <a:br>
-              <a:rPr lang="en-US" dirty="0"/>
-            </a:br>
-            <a:r>
-              <a:rPr lang="en-US" dirty="0"/>
-              <a:t>8. Verify against baseline</a:t>
-            </a:r>
-          </a:p>
-          <a:p>
-            <a:endParaRPr lang="en-US" dirty="0"/>
-          </a:p>
-        </p:txBody>
-      </p:sp>
-      <p:sp>
-        <p:nvSpPr>
-          <p:cNvPr id="4" name="Title 3">
-            <a:extLst>
-              <a:ext uri="{FF2B5EF4-FFF2-40B4-BE49-F238E27FC236}">
-                <a16:creationId xmlns:a16="http://schemas.microsoft.com/office/drawing/2014/main" id="{857DD158-8775-D326-E8A2-DEA92A9DAE5A}"/>
-              </a:ext>
-            </a:extLst>
-          </p:cNvPr>
-          <p:cNvSpPr>
-            <a:spLocks noGrp="1"/>
-          </p:cNvSpPr>
-          <p:nvPr>
-            <p:ph type="title"/>
-          </p:nvPr>
-        </p:nvSpPr>
-        <p:spPr/>
-        <p:txBody>
-          <a:bodyPr/>
-          <a:lstStyle/>
-          <a:p>
-            <a:r>
-              <a:rPr lang="en-US" dirty="0"/>
-              <a:t>Multithread solution</a:t>
-            </a:r>
-          </a:p>
-        </p:txBody>
-      </p:sp>
-      <p:sp>
-        <p:nvSpPr>
-          <p:cNvPr id="5" name="Footer Placeholder 4">
-            <a:extLst>
-              <a:ext uri="{FF2B5EF4-FFF2-40B4-BE49-F238E27FC236}">
-                <a16:creationId xmlns:a16="http://schemas.microsoft.com/office/drawing/2014/main" id="{681395FF-1A3E-6D1D-791C-517B4F2E72E5}"/>
-              </a:ext>
-            </a:extLst>
-          </p:cNvPr>
-          <p:cNvSpPr>
-            <a:spLocks noGrp="1"/>
-          </p:cNvSpPr>
-          <p:nvPr>
-            <p:ph type="ftr" sz="quarter" idx="11"/>
-          </p:nvPr>
-        </p:nvSpPr>
-        <p:spPr/>
-        <p:txBody>
-          <a:bodyPr/>
-          <a:lstStyle/>
-          <a:p>
-            <a:r>
-              <a:rPr lang="en-US"/>
-              <a:t>UNIVERSITY OF SOUTH FLORIDA</a:t>
-            </a:r>
-            <a:endParaRPr lang="en-US" dirty="0"/>
+              <a:defRPr sz="2800" b="1">
+                <a:solidFill>
+                  <a:schemeClr val="tx2"/>
+                </a:solidFill>
+              </a:defRPr>
+            </a:lvl1pPr>
+            <a:lvl2pPr marL="685783" indent="-228594">
+              <a:lnSpc>
+                <a:spcPct val="90000"/>
+              </a:lnSpc>
+              <a:spcBef>
+                <a:spcPts val="500"/>
+              </a:spcBef>
+              <a:buFont typeface="Arial" panose="020B0604020202020204" pitchFamily="34" charset="0"/>
+              <a:buChar char="•"/>
+              <a:defRPr sz="2400">
+                <a:solidFill>
+                  <a:schemeClr val="tx2"/>
+                </a:solidFill>
+              </a:defRPr>
+            </a:lvl2pPr>
+            <a:lvl3pPr marL="1142971" indent="-228594">
+              <a:lnSpc>
+                <a:spcPct val="90000"/>
+              </a:lnSpc>
+              <a:spcBef>
+                <a:spcPts val="500"/>
+              </a:spcBef>
+              <a:buFont typeface="Arial" panose="020B0604020202020204" pitchFamily="34" charset="0"/>
+              <a:buChar char="•"/>
+              <a:defRPr sz="2000">
+                <a:solidFill>
+                  <a:schemeClr val="tx2"/>
+                </a:solidFill>
+              </a:defRPr>
+            </a:lvl3pPr>
+            <a:lvl4pPr marL="1600160" indent="-228594">
+              <a:lnSpc>
+                <a:spcPct val="90000"/>
+              </a:lnSpc>
+              <a:spcBef>
+                <a:spcPts val="500"/>
+              </a:spcBef>
+              <a:buFont typeface="Arial" panose="020B0604020202020204" pitchFamily="34" charset="0"/>
+              <a:buChar char="•"/>
+              <a:defRPr>
+                <a:solidFill>
+                  <a:schemeClr val="tx2"/>
+                </a:solidFill>
+              </a:defRPr>
+            </a:lvl4pPr>
+            <a:lvl5pPr marL="2057349" indent="-228594">
+              <a:lnSpc>
+                <a:spcPct val="90000"/>
+              </a:lnSpc>
+              <a:spcBef>
+                <a:spcPts val="500"/>
+              </a:spcBef>
+              <a:buFont typeface="Arial" panose="020B0604020202020204" pitchFamily="34" charset="0"/>
+              <a:buChar char="•"/>
+              <a:defRPr>
+                <a:solidFill>
+                  <a:schemeClr val="tx2"/>
+                </a:solidFill>
+              </a:defRPr>
+            </a:lvl5pPr>
+            <a:lvl6pPr marL="2514537" indent="-228594">
+              <a:lnSpc>
+                <a:spcPct val="90000"/>
+              </a:lnSpc>
+              <a:spcBef>
+                <a:spcPts val="500"/>
+              </a:spcBef>
+              <a:buFont typeface="Arial" panose="020B0604020202020204" pitchFamily="34" charset="0"/>
+              <a:buChar char="•"/>
+            </a:lvl6pPr>
+            <a:lvl7pPr marL="2971726" indent="-228594">
+              <a:lnSpc>
+                <a:spcPct val="90000"/>
+              </a:lnSpc>
+              <a:spcBef>
+                <a:spcPts val="500"/>
+              </a:spcBef>
+              <a:buFont typeface="Arial" panose="020B0604020202020204" pitchFamily="34" charset="0"/>
+              <a:buChar char="•"/>
+            </a:lvl7pPr>
+            <a:lvl8pPr marL="3428914" indent="-228594">
+              <a:lnSpc>
+                <a:spcPct val="90000"/>
+              </a:lnSpc>
+              <a:spcBef>
+                <a:spcPts val="500"/>
+              </a:spcBef>
+              <a:buFont typeface="Arial" panose="020B0604020202020204" pitchFamily="34" charset="0"/>
+              <a:buChar char="•"/>
+            </a:lvl8pPr>
+            <a:lvl9pPr marL="3886103" indent="-228594">
+              <a:lnSpc>
+                <a:spcPct val="90000"/>
+              </a:lnSpc>
+              <a:spcBef>
+                <a:spcPts val="500"/>
+              </a:spcBef>
+              <a:buFont typeface="Arial" panose="020B0604020202020204" pitchFamily="34" charset="0"/>
+              <a:buChar char="•"/>
+            </a:lvl9pPr>
+          </a:lstStyle>
+          <a:p>
+            <a:r>
+              <a:rPr lang="en-US" dirty="0"/>
+              <a:t>Goal: </a:t>
+            </a:r>
+            <a:r>
+              <a:rPr lang="en-US" b="0" dirty="0"/>
+              <a:t>compute Catalan numbers C(0) to C(n) </a:t>
+            </a:r>
           </a:p>
         </p:txBody>
       </p:sp>
@@ -10948,18 +11209,130 @@
           <a:prstGeom prst="rect">
             <a:avLst/>
           </a:prstGeom>
-          <a:noFill/>
-        </p:spPr>
-        <p:txBody>
-          <a:bodyPr wrap="square" rtlCol="0">
-            <a:spAutoFit/>
+        </p:spPr>
+        <p:txBody>
+          <a:bodyPr vert="horz" lIns="91440" tIns="45720" rIns="91440" bIns="45720" rtlCol="0">
+            <a:normAutofit/>
           </a:bodyPr>
-          <a:lstStyle/>
-          <a:p>
-            <a:pPr marL="285750" indent="-285750">
+          <a:lstStyle>
+            <a:lvl1pPr marL="228594" indent="-228594">
+              <a:lnSpc>
+                <a:spcPct val="90000"/>
+              </a:lnSpc>
+              <a:spcBef>
+                <a:spcPts val="1000"/>
+              </a:spcBef>
               <a:buFont typeface="Arial" panose="020B0604020202020204" pitchFamily="34" charset="0"/>
               <a:buChar char="•"/>
-            </a:pPr>
+              <a:defRPr sz="2800">
+                <a:solidFill>
+                  <a:schemeClr val="tx2"/>
+                </a:solidFill>
+              </a:defRPr>
+            </a:lvl1pPr>
+            <a:lvl2pPr marL="685783" lvl="1" indent="-228594">
+              <a:lnSpc>
+                <a:spcPct val="90000"/>
+              </a:lnSpc>
+              <a:spcBef>
+                <a:spcPts val="500"/>
+              </a:spcBef>
+              <a:buFont typeface="Arial" panose="020B0604020202020204" pitchFamily="34" charset="0"/>
+              <a:buChar char="•"/>
+              <a:defRPr sz="2400">
+                <a:solidFill>
+                  <a:schemeClr val="tx2"/>
+                </a:solidFill>
+              </a:defRPr>
+            </a:lvl2pPr>
+            <a:lvl3pPr marL="1142971" lvl="2" indent="-228594">
+              <a:lnSpc>
+                <a:spcPct val="90000"/>
+              </a:lnSpc>
+              <a:spcBef>
+                <a:spcPts val="500"/>
+              </a:spcBef>
+              <a:buFont typeface="Arial" panose="020B0604020202020204" pitchFamily="34" charset="0"/>
+              <a:buChar char="•"/>
+              <a:defRPr sz="2000" i="1">
+                <a:solidFill>
+                  <a:schemeClr val="tx2"/>
+                </a:solidFill>
+                <a:latin typeface="Cambria Math" panose="02040503050406030204" pitchFamily="18" charset="0"/>
+              </a:defRPr>
+            </a:lvl3pPr>
+            <a:lvl4pPr marL="1600160" indent="-228594">
+              <a:lnSpc>
+                <a:spcPct val="90000"/>
+              </a:lnSpc>
+              <a:spcBef>
+                <a:spcPts val="500"/>
+              </a:spcBef>
+              <a:buFont typeface="Arial" panose="020B0604020202020204" pitchFamily="34" charset="0"/>
+              <a:buChar char="•"/>
+              <a:defRPr>
+                <a:solidFill>
+                  <a:schemeClr val="tx2"/>
+                </a:solidFill>
+              </a:defRPr>
+            </a:lvl4pPr>
+            <a:lvl5pPr marL="2057349" indent="-228594">
+              <a:lnSpc>
+                <a:spcPct val="90000"/>
+              </a:lnSpc>
+              <a:spcBef>
+                <a:spcPts val="500"/>
+              </a:spcBef>
+              <a:buFont typeface="Arial" panose="020B0604020202020204" pitchFamily="34" charset="0"/>
+              <a:buChar char="•"/>
+              <a:defRPr>
+                <a:solidFill>
+                  <a:schemeClr val="tx2"/>
+                </a:solidFill>
+              </a:defRPr>
+            </a:lvl5pPr>
+            <a:lvl6pPr marL="2514537" indent="-228594">
+              <a:lnSpc>
+                <a:spcPct val="90000"/>
+              </a:lnSpc>
+              <a:spcBef>
+                <a:spcPts val="500"/>
+              </a:spcBef>
+              <a:buFont typeface="Arial" panose="020B0604020202020204" pitchFamily="34" charset="0"/>
+              <a:buChar char="•"/>
+            </a:lvl6pPr>
+            <a:lvl7pPr marL="2971726" indent="-228594">
+              <a:lnSpc>
+                <a:spcPct val="90000"/>
+              </a:lnSpc>
+              <a:spcBef>
+                <a:spcPts val="500"/>
+              </a:spcBef>
+              <a:buFont typeface="Arial" panose="020B0604020202020204" pitchFamily="34" charset="0"/>
+              <a:buChar char="•"/>
+            </a:lvl7pPr>
+            <a:lvl8pPr marL="3428914" indent="-228594">
+              <a:lnSpc>
+                <a:spcPct val="90000"/>
+              </a:lnSpc>
+              <a:spcBef>
+                <a:spcPts val="500"/>
+              </a:spcBef>
+              <a:buFont typeface="Arial" panose="020B0604020202020204" pitchFamily="34" charset="0"/>
+              <a:buChar char="•"/>
+            </a:lvl8pPr>
+            <a:lvl9pPr marL="3886103" indent="-228594">
+              <a:lnSpc>
+                <a:spcPct val="90000"/>
+              </a:lnSpc>
+              <a:spcBef>
+                <a:spcPts val="500"/>
+              </a:spcBef>
+              <a:buFont typeface="Arial" panose="020B0604020202020204" pitchFamily="34" charset="0"/>
+              <a:buChar char="•"/>
+            </a:lvl9pPr>
+          </a:lstStyle>
+          <a:p>
             <a:r>
               <a:rPr lang="en-US" dirty="0"/>
               <a:t>Each manager waits until all dependencies are satisfied before executing their own Catalan number</a:t>
@@ -10997,8 +11370,8 @@
           <a:chExt cx="0" cy="0"/>
         </a:xfrm>
       </p:grpSpPr>
-      <mc:AlternateContent xmlns:mc="http://schemas.openxmlformats.org/markup-compatibility/2006">
-        <mc:Choice xmlns:a14="http://schemas.microsoft.com/office/drawing/2010/main" Requires="a14">
+      <mc:AlternateContent xmlns:mc="http://schemas.openxmlformats.org/markup-compatibility/2006" xmlns:a14="http://schemas.microsoft.com/office/drawing/2010/main">
+        <mc:Choice Requires="a14">
           <p:sp>
             <p:nvSpPr>
               <p:cNvPr id="5" name="Content Placeholder 4">
@@ -11263,7 +11636,7 @@
             </p:txBody>
           </p:sp>
         </mc:Choice>
-        <mc:Fallback>
+        <mc:Fallback xmlns="">
           <p:sp>
             <p:nvSpPr>
               <p:cNvPr id="5" name="Content Placeholder 4">

--- a/catalan.pptx
+++ b/catalan.pptx
@@ -5,19 +5,20 @@
     <p:sldMasterId id="2147483660" r:id="rId1"/>
   </p:sldMasterIdLst>
   <p:notesMasterIdLst>
-    <p:notesMasterId r:id="rId12"/>
+    <p:notesMasterId r:id="rId13"/>
   </p:notesMasterIdLst>
   <p:sldIdLst>
     <p:sldId id="271" r:id="rId2"/>
     <p:sldId id="257" r:id="rId3"/>
-    <p:sldId id="272" r:id="rId4"/>
-    <p:sldId id="279" r:id="rId5"/>
-    <p:sldId id="273" r:id="rId6"/>
-    <p:sldId id="274" r:id="rId7"/>
-    <p:sldId id="275" r:id="rId8"/>
-    <p:sldId id="276" r:id="rId9"/>
-    <p:sldId id="277" r:id="rId10"/>
-    <p:sldId id="278" r:id="rId11"/>
+    <p:sldId id="280" r:id="rId4"/>
+    <p:sldId id="272" r:id="rId5"/>
+    <p:sldId id="279" r:id="rId6"/>
+    <p:sldId id="273" r:id="rId7"/>
+    <p:sldId id="274" r:id="rId8"/>
+    <p:sldId id="275" r:id="rId9"/>
+    <p:sldId id="276" r:id="rId10"/>
+    <p:sldId id="277" r:id="rId11"/>
+    <p:sldId id="278" r:id="rId12"/>
   </p:sldIdLst>
   <p:sldSz cx="12192000" cy="6858000"/>
   <p:notesSz cx="6858000" cy="9144000"/>
@@ -206,7 +207,7 @@
           <a:p>
             <a:fld id="{2CA80483-8405-594F-95F8-D3FBF1CBF066}" type="datetimeFigureOut">
               <a:rPr lang="en-US" smtClean="0"/>
-              <a:t>4/18/2026</a:t>
+              <a:t>4/20/2026</a:t>
             </a:fld>
             <a:endParaRPr lang="en-US"/>
           </a:p>
@@ -6725,7 +6726,7 @@
           <a:p>
             <a:fld id="{66E687FF-D228-AF49-87D5-A473DBACE8EB}" type="datetime1">
               <a:rPr lang="en-US" smtClean="0"/>
-              <a:t>4/18/2026</a:t>
+              <a:t>4/20/2026</a:t>
             </a:fld>
             <a:endParaRPr lang="en-US"/>
           </a:p>
@@ -7168,7 +7169,7 @@
           <a:p>
             <a:r>
               <a:rPr lang="en-US" dirty="0"/>
-              <a:t>Calculating Catalan numbers in a Multithreading System </a:t>
+              <a:t>Calculating Catalan Numbers in a Multithreading System </a:t>
             </a:r>
           </a:p>
         </p:txBody>
@@ -7335,4025 +7336,6 @@
 </file>
 
 <file path=ppt/slides/slide10.xml><?xml version="1.0" encoding="utf-8"?>
-<p:sld xmlns:a="http://schemas.openxmlformats.org/drawingml/2006/main" xmlns:r="http://schemas.openxmlformats.org/officeDocument/2006/relationships" xmlns:p="http://schemas.openxmlformats.org/presentationml/2006/main">
-  <p:cSld>
-    <p:spTree>
-      <p:nvGrpSpPr>
-        <p:cNvPr id="1" name=""/>
-        <p:cNvGrpSpPr/>
-        <p:nvPr/>
-      </p:nvGrpSpPr>
-      <p:grpSpPr>
-        <a:xfrm>
-          <a:off x="0" y="0"/>
-          <a:ext cx="0" cy="0"/>
-          <a:chOff x="0" y="0"/>
-          <a:chExt cx="0" cy="0"/>
-        </a:xfrm>
-      </p:grpSpPr>
-      <p:sp>
-        <p:nvSpPr>
-          <p:cNvPr id="4" name="Title 3">
-            <a:extLst>
-              <a:ext uri="{FF2B5EF4-FFF2-40B4-BE49-F238E27FC236}">
-                <a16:creationId xmlns:a16="http://schemas.microsoft.com/office/drawing/2014/main" id="{76870588-E252-23C9-F404-2F04BFE7C525}"/>
-              </a:ext>
-            </a:extLst>
-          </p:cNvPr>
-          <p:cNvSpPr>
-            <a:spLocks noGrp="1"/>
-          </p:cNvSpPr>
-          <p:nvPr>
-            <p:ph type="title"/>
-          </p:nvPr>
-        </p:nvSpPr>
-        <p:spPr/>
-        <p:txBody>
-          <a:bodyPr/>
-          <a:lstStyle/>
-          <a:p>
-            <a:r>
-              <a:rPr lang="en-US" dirty="0"/>
-              <a:t>Conclusion</a:t>
-            </a:r>
-          </a:p>
-        </p:txBody>
-      </p:sp>
-      <p:sp>
-        <p:nvSpPr>
-          <p:cNvPr id="6" name="Content Placeholder 5">
-            <a:extLst>
-              <a:ext uri="{FF2B5EF4-FFF2-40B4-BE49-F238E27FC236}">
-                <a16:creationId xmlns:a16="http://schemas.microsoft.com/office/drawing/2014/main" id="{7325E256-9085-B3F3-2B3D-A1A079299B58}"/>
-              </a:ext>
-            </a:extLst>
-          </p:cNvPr>
-          <p:cNvSpPr>
-            <a:spLocks noGrp="1"/>
-          </p:cNvSpPr>
-          <p:nvPr>
-            <p:ph idx="1"/>
-          </p:nvPr>
-        </p:nvSpPr>
-        <p:spPr/>
-        <p:txBody>
-          <a:bodyPr/>
-          <a:lstStyle/>
-          <a:p>
-            <a:r>
-              <a:rPr lang="en-US" dirty="0"/>
-              <a:t>Introducing parallelism does not result in better performance</a:t>
-            </a:r>
-          </a:p>
-          <a:p>
-            <a:pPr lvl="1"/>
-            <a:r>
-              <a:rPr lang="en-US" dirty="0"/>
-              <a:t>Time complexity is worse than sequential because overhead dependencies</a:t>
-            </a:r>
-          </a:p>
-          <a:p>
-            <a:pPr lvl="1"/>
-            <a:r>
-              <a:rPr lang="en-US" dirty="0"/>
-              <a:t>Space complexity is worse than sequential because multithreaded still uses N manager threads and up to 4 worker threads</a:t>
-            </a:r>
-          </a:p>
-          <a:p>
-            <a:pPr lvl="2"/>
-            <a:r>
-              <a:rPr lang="en-US" dirty="0"/>
-              <a:t>Pre-thread stack allocation is also higher</a:t>
-            </a:r>
-          </a:p>
-          <a:p>
-            <a:r>
-              <a:rPr lang="en-US" dirty="0"/>
-              <a:t>Project demonstrated proper thread creation, use of mutexes, condition variables, and guaranteeing mutual exclusion.</a:t>
-            </a:r>
-          </a:p>
-        </p:txBody>
-      </p:sp>
-      <p:sp>
-        <p:nvSpPr>
-          <p:cNvPr id="5" name="Footer Placeholder 4">
-            <a:extLst>
-              <a:ext uri="{FF2B5EF4-FFF2-40B4-BE49-F238E27FC236}">
-                <a16:creationId xmlns:a16="http://schemas.microsoft.com/office/drawing/2014/main" id="{81FD0F43-8A7B-9794-1870-D2CBC42D8014}"/>
-              </a:ext>
-            </a:extLst>
-          </p:cNvPr>
-          <p:cNvSpPr>
-            <a:spLocks noGrp="1"/>
-          </p:cNvSpPr>
-          <p:nvPr>
-            <p:ph type="ftr" sz="quarter" idx="11"/>
-          </p:nvPr>
-        </p:nvSpPr>
-        <p:spPr/>
-        <p:txBody>
-          <a:bodyPr/>
-          <a:lstStyle/>
-          <a:p>
-            <a:r>
-              <a:rPr lang="en-US"/>
-              <a:t>UNIVERSITY OF SOUTH FLORIDA</a:t>
-            </a:r>
-            <a:endParaRPr lang="en-US" dirty="0"/>
-          </a:p>
-        </p:txBody>
-      </p:sp>
-    </p:spTree>
-    <p:extLst>
-      <p:ext uri="{BB962C8B-B14F-4D97-AF65-F5344CB8AC3E}">
-        <p14:creationId xmlns:p14="http://schemas.microsoft.com/office/powerpoint/2010/main" val="2288985525"/>
-      </p:ext>
-    </p:extLst>
-  </p:cSld>
-  <p:clrMapOvr>
-    <a:masterClrMapping/>
-  </p:clrMapOvr>
-</p:sld>
-</file>
-
-<file path=ppt/slides/slide2.xml><?xml version="1.0" encoding="utf-8"?>
-<p:sld xmlns:a="http://schemas.openxmlformats.org/drawingml/2006/main" xmlns:r="http://schemas.openxmlformats.org/officeDocument/2006/relationships" xmlns:p="http://schemas.openxmlformats.org/presentationml/2006/main">
-  <p:cSld>
-    <p:spTree>
-      <p:nvGrpSpPr>
-        <p:cNvPr id="1" name=""/>
-        <p:cNvGrpSpPr/>
-        <p:nvPr/>
-      </p:nvGrpSpPr>
-      <p:grpSpPr>
-        <a:xfrm>
-          <a:off x="0" y="0"/>
-          <a:ext cx="0" cy="0"/>
-          <a:chOff x="0" y="0"/>
-          <a:chExt cx="0" cy="0"/>
-        </a:xfrm>
-      </p:grpSpPr>
-      <mc:AlternateContent xmlns:mc="http://schemas.openxmlformats.org/markup-compatibility/2006" xmlns:a14="http://schemas.microsoft.com/office/drawing/2010/main">
-        <mc:Choice Requires="a14">
-          <p:sp>
-            <p:nvSpPr>
-              <p:cNvPr id="3" name="Content Placeholder 2">
-                <a:extLst>
-                  <a:ext uri="{FF2B5EF4-FFF2-40B4-BE49-F238E27FC236}">
-                    <a16:creationId xmlns:a16="http://schemas.microsoft.com/office/drawing/2014/main" id="{D2899071-5D4E-E842-8268-8CD319DBFD10}"/>
-                  </a:ext>
-                </a:extLst>
-              </p:cNvPr>
-              <p:cNvSpPr>
-                <a:spLocks noGrp="1"/>
-              </p:cNvSpPr>
-              <p:nvPr>
-                <p:ph sz="half" idx="1"/>
-              </p:nvPr>
-            </p:nvSpPr>
-            <p:spPr/>
-            <p:txBody>
-              <a:bodyPr/>
-              <a:lstStyle/>
-              <a:p>
-                <a:r>
-                  <a:rPr lang="en-US" dirty="0"/>
-                  <a:t>Sequence of numbers</a:t>
-                </a:r>
-              </a:p>
-              <a:p>
-                <a:pPr lvl="1"/>
-                <a:r>
-                  <a:rPr lang="en-US" dirty="0"/>
-                  <a:t>&lt;1,1,2,5,14,42,132,429…&gt;</a:t>
-                </a:r>
-              </a:p>
-              <a:p>
-                <a:pPr lvl="1"/>
-                <a14:m>
-                  <m:oMath xmlns:m="http://schemas.openxmlformats.org/officeDocument/2006/math">
-                    <m:sSub>
-                      <m:sSubPr>
-                        <m:ctrlPr>
-                          <a:rPr lang="en-US" b="0" i="1" smtClean="0">
-                            <a:latin typeface="Cambria Math" panose="02040503050406030204" pitchFamily="18" charset="0"/>
-                          </a:rPr>
-                        </m:ctrlPr>
-                      </m:sSubPr>
-                      <m:e>
-                        <m:r>
-                          <a:rPr lang="en-US" b="0" i="1" smtClean="0">
-                            <a:latin typeface="Cambria Math" panose="02040503050406030204" pitchFamily="18" charset="0"/>
-                          </a:rPr>
-                          <m:t>𝐶</m:t>
-                        </m:r>
-                      </m:e>
-                      <m:sub>
-                        <m:r>
-                          <a:rPr lang="en-US" b="0" i="1" smtClean="0">
-                            <a:latin typeface="Cambria Math" panose="02040503050406030204" pitchFamily="18" charset="0"/>
-                          </a:rPr>
-                          <m:t>𝑛</m:t>
-                        </m:r>
-                      </m:sub>
-                    </m:sSub>
-                    <m:r>
-                      <a:rPr lang="en-US" b="0" i="1" smtClean="0">
-                        <a:latin typeface="Cambria Math" panose="02040503050406030204" pitchFamily="18" charset="0"/>
-                      </a:rPr>
-                      <m:t>= </m:t>
-                    </m:r>
-                    <m:nary>
-                      <m:naryPr>
-                        <m:chr m:val="∑"/>
-                        <m:ctrlPr>
-                          <a:rPr lang="en-US" b="0" i="1" smtClean="0">
-                            <a:latin typeface="Cambria Math" panose="02040503050406030204" pitchFamily="18" charset="0"/>
-                          </a:rPr>
-                        </m:ctrlPr>
-                      </m:naryPr>
-                      <m:sub>
-                        <m:r>
-                          <m:rPr>
-                            <m:brk m:alnAt="23"/>
-                          </m:rPr>
-                          <a:rPr lang="en-US" b="0" i="1" smtClean="0">
-                            <a:latin typeface="Cambria Math" panose="02040503050406030204" pitchFamily="18" charset="0"/>
-                          </a:rPr>
-                          <m:t>𝑖</m:t>
-                        </m:r>
-                        <m:r>
-                          <a:rPr lang="en-US" b="0" i="1" smtClean="0">
-                            <a:latin typeface="Cambria Math" panose="02040503050406030204" pitchFamily="18" charset="0"/>
-                          </a:rPr>
-                          <m:t>=0</m:t>
-                        </m:r>
-                      </m:sub>
-                      <m:sup>
-                        <m:r>
-                          <a:rPr lang="en-US" b="0" i="1" smtClean="0">
-                            <a:latin typeface="Cambria Math" panose="02040503050406030204" pitchFamily="18" charset="0"/>
-                          </a:rPr>
-                          <m:t>𝑛</m:t>
-                        </m:r>
-                        <m:r>
-                          <a:rPr lang="en-US" b="0" i="1" smtClean="0">
-                            <a:latin typeface="Cambria Math" panose="02040503050406030204" pitchFamily="18" charset="0"/>
-                          </a:rPr>
-                          <m:t>−1</m:t>
-                        </m:r>
-                      </m:sup>
-                      <m:e>
-                        <m:sSub>
-                          <m:sSubPr>
-                            <m:ctrlPr>
-                              <a:rPr lang="en-US" b="0" i="1" smtClean="0">
-                                <a:latin typeface="Cambria Math" panose="02040503050406030204" pitchFamily="18" charset="0"/>
-                              </a:rPr>
-                            </m:ctrlPr>
-                          </m:sSubPr>
-                          <m:e>
-                            <m:r>
-                              <a:rPr lang="en-US" b="0" i="1" smtClean="0">
-                                <a:latin typeface="Cambria Math" panose="02040503050406030204" pitchFamily="18" charset="0"/>
-                              </a:rPr>
-                              <m:t>𝐶</m:t>
-                            </m:r>
-                          </m:e>
-                          <m:sub>
-                            <m:r>
-                              <a:rPr lang="en-US" b="0" i="1" smtClean="0">
-                                <a:latin typeface="Cambria Math" panose="02040503050406030204" pitchFamily="18" charset="0"/>
-                              </a:rPr>
-                              <m:t>𝑖</m:t>
-                            </m:r>
-                          </m:sub>
-                        </m:sSub>
-                        <m:sSub>
-                          <m:sSubPr>
-                            <m:ctrlPr>
-                              <a:rPr lang="en-US" b="0" i="1" smtClean="0">
-                                <a:latin typeface="Cambria Math" panose="02040503050406030204" pitchFamily="18" charset="0"/>
-                              </a:rPr>
-                            </m:ctrlPr>
-                          </m:sSubPr>
-                          <m:e>
-                            <m:r>
-                              <a:rPr lang="en-US" b="0" i="1" smtClean="0">
-                                <a:latin typeface="Cambria Math" panose="02040503050406030204" pitchFamily="18" charset="0"/>
-                              </a:rPr>
-                              <m:t>𝐶</m:t>
-                            </m:r>
-                          </m:e>
-                          <m:sub>
-                            <m:r>
-                              <a:rPr lang="en-US" b="0" i="1" smtClean="0">
-                                <a:latin typeface="Cambria Math" panose="02040503050406030204" pitchFamily="18" charset="0"/>
-                              </a:rPr>
-                              <m:t>𝑛</m:t>
-                            </m:r>
-                            <m:r>
-                              <a:rPr lang="en-US" b="0" i="1" smtClean="0">
-                                <a:latin typeface="Cambria Math" panose="02040503050406030204" pitchFamily="18" charset="0"/>
-                              </a:rPr>
-                              <m:t>−1−</m:t>
-                            </m:r>
-                            <m:r>
-                              <a:rPr lang="en-US" b="0" i="1" smtClean="0">
-                                <a:latin typeface="Cambria Math" panose="02040503050406030204" pitchFamily="18" charset="0"/>
-                              </a:rPr>
-                              <m:t>𝑖</m:t>
-                            </m:r>
-                          </m:sub>
-                        </m:sSub>
-                      </m:e>
-                    </m:nary>
-                  </m:oMath>
-                </a14:m>
-                <a:endParaRPr lang="en-US" dirty="0"/>
-              </a:p>
-              <a:p>
-                <a:r>
-                  <a:rPr lang="en-US" dirty="0"/>
-                  <a:t>Appear in many computer science problems:</a:t>
-                </a:r>
-              </a:p>
-              <a:p>
-                <a:pPr lvl="1"/>
-                <a:r>
-                  <a:rPr lang="en-US" dirty="0"/>
-                  <a:t>Balanced parenthesis</a:t>
-                </a:r>
-              </a:p>
-              <a:p>
-                <a:pPr lvl="1"/>
-                <a:r>
-                  <a:rPr lang="en-US" dirty="0"/>
-                  <a:t>Mountain ranges</a:t>
-                </a:r>
-              </a:p>
-              <a:p>
-                <a:pPr lvl="1"/>
-                <a:r>
-                  <a:rPr lang="en-US" dirty="0"/>
-                  <a:t>Binary trees</a:t>
-                </a:r>
-              </a:p>
-              <a:p>
-                <a:pPr lvl="1"/>
-                <a:r>
-                  <a:rPr lang="en-US" dirty="0"/>
-                  <a:t>Hand across a table</a:t>
-                </a:r>
-              </a:p>
-              <a:p>
-                <a:pPr lvl="1"/>
-                <a:r>
-                  <a:rPr lang="en-US" dirty="0"/>
-                  <a:t>…</a:t>
-                </a:r>
-              </a:p>
-            </p:txBody>
-          </p:sp>
-        </mc:Choice>
-        <mc:Fallback xmlns="">
-          <p:sp>
-            <p:nvSpPr>
-              <p:cNvPr id="3" name="Content Placeholder 2">
-                <a:extLst>
-                  <a:ext uri="{FF2B5EF4-FFF2-40B4-BE49-F238E27FC236}">
-                    <a16:creationId xmlns:a16="http://schemas.microsoft.com/office/drawing/2014/main" id="{D2899071-5D4E-E842-8268-8CD319DBFD10}"/>
-                  </a:ext>
-                </a:extLst>
-              </p:cNvPr>
-              <p:cNvSpPr>
-                <a:spLocks noGrp="1" noRot="1" noChangeAspect="1" noMove="1" noResize="1" noEditPoints="1" noAdjustHandles="1" noChangeArrowheads="1" noChangeShapeType="1" noTextEdit="1"/>
-              </p:cNvSpPr>
-              <p:nvPr>
-                <p:ph sz="half" idx="1"/>
-              </p:nvPr>
-            </p:nvSpPr>
-            <p:spPr>
-              <a:blipFill>
-                <a:blip r:embed="rId2"/>
-                <a:stretch>
-                  <a:fillRect l="-1980" t="-2381"/>
-                </a:stretch>
-              </a:blipFill>
-            </p:spPr>
-            <p:txBody>
-              <a:bodyPr/>
-              <a:lstStyle/>
-              <a:p>
-                <a:r>
-                  <a:rPr lang="en-US">
-                    <a:noFill/>
-                  </a:rPr>
-                  <a:t> </a:t>
-                </a:r>
-              </a:p>
-            </p:txBody>
-          </p:sp>
-        </mc:Fallback>
-      </mc:AlternateContent>
-      <p:pic>
-        <p:nvPicPr>
-          <p:cNvPr id="22" name="Content Placeholder 21">
-            <a:extLst>
-              <a:ext uri="{FF2B5EF4-FFF2-40B4-BE49-F238E27FC236}">
-                <a16:creationId xmlns:a16="http://schemas.microsoft.com/office/drawing/2014/main" id="{2D4CEBBF-0110-FADA-C6C4-37DA4C4D0327}"/>
-              </a:ext>
-            </a:extLst>
-          </p:cNvPr>
-          <p:cNvPicPr>
-            <a:picLocks noGrp="1" noChangeAspect="1"/>
-          </p:cNvPicPr>
-          <p:nvPr>
-            <p:ph sz="half" idx="2"/>
-          </p:nvPr>
-        </p:nvPicPr>
-        <p:blipFill>
-          <a:blip r:embed="rId3"/>
-          <a:stretch>
-            <a:fillRect/>
-          </a:stretch>
-        </p:blipFill>
-        <p:spPr>
-          <a:xfrm>
-            <a:off x="6388150" y="1027906"/>
-            <a:ext cx="5515745" cy="2905530"/>
-          </a:xfrm>
-          <a:prstGeom prst="rect">
-            <a:avLst/>
-          </a:prstGeom>
-        </p:spPr>
-      </p:pic>
-      <p:sp>
-        <p:nvSpPr>
-          <p:cNvPr id="2" name="Title 1">
-            <a:extLst>
-              <a:ext uri="{FF2B5EF4-FFF2-40B4-BE49-F238E27FC236}">
-                <a16:creationId xmlns:a16="http://schemas.microsoft.com/office/drawing/2014/main" id="{D5501552-3E8D-AC46-ADA9-3E2E03330691}"/>
-              </a:ext>
-            </a:extLst>
-          </p:cNvPr>
-          <p:cNvSpPr>
-            <a:spLocks noGrp="1"/>
-          </p:cNvSpPr>
-          <p:nvPr>
-            <p:ph type="title"/>
-          </p:nvPr>
-        </p:nvSpPr>
-        <p:spPr/>
-        <p:txBody>
-          <a:bodyPr/>
-          <a:lstStyle/>
-          <a:p>
-            <a:r>
-              <a:rPr lang="en-US" dirty="0"/>
-              <a:t>Catalan Numbers</a:t>
-            </a:r>
-          </a:p>
-        </p:txBody>
-      </p:sp>
-      <p:sp>
-        <p:nvSpPr>
-          <p:cNvPr id="8" name="Footer Placeholder 7">
-            <a:extLst>
-              <a:ext uri="{FF2B5EF4-FFF2-40B4-BE49-F238E27FC236}">
-                <a16:creationId xmlns:a16="http://schemas.microsoft.com/office/drawing/2014/main" id="{EB74D134-B645-6440-A1F5-73CEC1A36CEC}"/>
-              </a:ext>
-            </a:extLst>
-          </p:cNvPr>
-          <p:cNvSpPr>
-            <a:spLocks noGrp="1"/>
-          </p:cNvSpPr>
-          <p:nvPr>
-            <p:ph type="ftr" sz="quarter" idx="11"/>
-          </p:nvPr>
-        </p:nvSpPr>
-        <p:spPr/>
-        <p:txBody>
-          <a:bodyPr/>
-          <a:lstStyle/>
-          <a:p>
-            <a:r>
-              <a:rPr lang="en-US" dirty="0"/>
-              <a:t>UNIVERSITY OF SOUTH FLORIDA</a:t>
-            </a:r>
-          </a:p>
-        </p:txBody>
-      </p:sp>
-      <p:pic>
-        <p:nvPicPr>
-          <p:cNvPr id="24" name="Picture 23">
-            <a:extLst>
-              <a:ext uri="{FF2B5EF4-FFF2-40B4-BE49-F238E27FC236}">
-                <a16:creationId xmlns:a16="http://schemas.microsoft.com/office/drawing/2014/main" id="{7CB80B7D-91F0-072C-978B-935D1AC1032E}"/>
-              </a:ext>
-            </a:extLst>
-          </p:cNvPr>
-          <p:cNvPicPr>
-            <a:picLocks noChangeAspect="1"/>
-          </p:cNvPicPr>
-          <p:nvPr/>
-        </p:nvPicPr>
-        <p:blipFill>
-          <a:blip r:embed="rId4"/>
-          <a:stretch>
-            <a:fillRect/>
-          </a:stretch>
-        </p:blipFill>
-        <p:spPr>
-          <a:xfrm>
-            <a:off x="7002599" y="4465288"/>
-            <a:ext cx="4286848" cy="1305107"/>
-          </a:xfrm>
-          <a:prstGeom prst="rect">
-            <a:avLst/>
-          </a:prstGeom>
-        </p:spPr>
-      </p:pic>
-    </p:spTree>
-    <p:extLst>
-      <p:ext uri="{BB962C8B-B14F-4D97-AF65-F5344CB8AC3E}">
-        <p14:creationId xmlns:p14="http://schemas.microsoft.com/office/powerpoint/2010/main" val="332255437"/>
-      </p:ext>
-    </p:extLst>
-  </p:cSld>
-  <p:clrMapOvr>
-    <a:masterClrMapping/>
-  </p:clrMapOvr>
-</p:sld>
-</file>
-
-<file path=ppt/slides/slide3.xml><?xml version="1.0" encoding="utf-8"?>
-<p:sld xmlns:a="http://schemas.openxmlformats.org/drawingml/2006/main" xmlns:r="http://schemas.openxmlformats.org/officeDocument/2006/relationships" xmlns:p="http://schemas.openxmlformats.org/presentationml/2006/main">
-  <p:cSld>
-    <p:spTree>
-      <p:nvGrpSpPr>
-        <p:cNvPr id="1" name=""/>
-        <p:cNvGrpSpPr/>
-        <p:nvPr/>
-      </p:nvGrpSpPr>
-      <p:grpSpPr>
-        <a:xfrm>
-          <a:off x="0" y="0"/>
-          <a:ext cx="0" cy="0"/>
-          <a:chOff x="0" y="0"/>
-          <a:chExt cx="0" cy="0"/>
-        </a:xfrm>
-      </p:grpSpPr>
-      <mc:AlternateContent xmlns:mc="http://schemas.openxmlformats.org/markup-compatibility/2006" xmlns:a14="http://schemas.microsoft.com/office/drawing/2010/main">
-        <mc:Choice Requires="a14">
-          <p:sp>
-            <p:nvSpPr>
-              <p:cNvPr id="2" name="Content Placeholder 1">
-                <a:extLst>
-                  <a:ext uri="{FF2B5EF4-FFF2-40B4-BE49-F238E27FC236}">
-                    <a16:creationId xmlns:a16="http://schemas.microsoft.com/office/drawing/2014/main" id="{3671555A-F350-3CF8-04A4-71144124F362}"/>
-                  </a:ext>
-                </a:extLst>
-              </p:cNvPr>
-              <p:cNvSpPr>
-                <a:spLocks noGrp="1"/>
-              </p:cNvSpPr>
-              <p:nvPr>
-                <p:ph sz="half" idx="1"/>
-              </p:nvPr>
-            </p:nvSpPr>
-            <p:spPr>
-              <a:xfrm>
-                <a:off x="402264" y="1799674"/>
-                <a:ext cx="6054520" cy="4351339"/>
-              </a:xfrm>
-            </p:spPr>
-            <p:txBody>
-              <a:bodyPr/>
-              <a:lstStyle/>
-              <a:p>
-                <a:r>
-                  <a:rPr lang="en-US" dirty="0"/>
-                  <a:t>Sequence grows very fast!</a:t>
-                </a:r>
-              </a:p>
-              <a:p>
-                <a14:m>
-                  <m:oMath xmlns:m="http://schemas.openxmlformats.org/officeDocument/2006/math">
-                    <m:r>
-                      <a:rPr lang="en-US" i="1" dirty="0" smtClean="0">
-                        <a:latin typeface="Cambria Math" panose="02040503050406030204" pitchFamily="18" charset="0"/>
-                      </a:rPr>
-                      <m:t>𝐶𝑜𝑚𝑝𝑙𝑒𝑥𝑖𝑡𝑦</m:t>
-                    </m:r>
-                    <m:r>
-                      <a:rPr lang="en-US" i="1" dirty="0">
-                        <a:latin typeface="Cambria Math" panose="02040503050406030204" pitchFamily="18" charset="0"/>
-                      </a:rPr>
-                      <m:t> </m:t>
-                    </m:r>
-                    <m:r>
-                      <a:rPr lang="en-US" i="1" dirty="0" smtClean="0">
-                        <a:latin typeface="Cambria Math" panose="02040503050406030204" pitchFamily="18" charset="0"/>
-                      </a:rPr>
-                      <m:t>=</m:t>
-                    </m:r>
-                    <m:r>
-                      <a:rPr lang="en-US" i="1" dirty="0">
-                        <a:latin typeface="Cambria Math" panose="02040503050406030204" pitchFamily="18" charset="0"/>
-                      </a:rPr>
-                      <m:t> </m:t>
-                    </m:r>
-                    <m:r>
-                      <a:rPr lang="en-US" i="1" dirty="0" smtClean="0">
-                        <a:latin typeface="Cambria Math" panose="02040503050406030204" pitchFamily="18" charset="0"/>
-                      </a:rPr>
-                      <m:t>𝑂</m:t>
-                    </m:r>
-                    <m:d>
-                      <m:dPr>
-                        <m:ctrlPr>
-                          <a:rPr lang="en-US" i="1" dirty="0" smtClean="0">
-                            <a:latin typeface="Cambria Math" panose="02040503050406030204" pitchFamily="18" charset="0"/>
-                          </a:rPr>
-                        </m:ctrlPr>
-                      </m:dPr>
-                      <m:e>
-                        <m:sSup>
-                          <m:sSupPr>
-                            <m:ctrlPr>
-                              <a:rPr lang="en-US" i="1" dirty="0" smtClean="0">
-                                <a:latin typeface="Cambria Math" panose="02040503050406030204" pitchFamily="18" charset="0"/>
-                              </a:rPr>
-                            </m:ctrlPr>
-                          </m:sSupPr>
-                          <m:e>
-                            <m:r>
-                              <a:rPr lang="en-US" i="1" dirty="0" smtClean="0">
-                                <a:latin typeface="Cambria Math" panose="02040503050406030204" pitchFamily="18" charset="0"/>
-                              </a:rPr>
-                              <m:t>𝑛</m:t>
-                            </m:r>
-                          </m:e>
-                          <m:sup>
-                            <m:r>
-                              <a:rPr lang="en-US" i="1" dirty="0" smtClean="0">
-                                <a:latin typeface="Cambria Math" panose="02040503050406030204" pitchFamily="18" charset="0"/>
-                              </a:rPr>
-                              <m:t>2</m:t>
-                            </m:r>
-                          </m:sup>
-                        </m:sSup>
-                      </m:e>
-                    </m:d>
-                  </m:oMath>
-                </a14:m>
-                <a:endParaRPr lang="en-US" dirty="0"/>
-              </a:p>
-              <a:p>
-                <a:pPr lvl="1"/>
-                <a:r>
-                  <a:rPr lang="en-US" dirty="0"/>
-                  <a:t>Every </a:t>
-                </a:r>
-                <a14:m>
-                  <m:oMath xmlns:m="http://schemas.openxmlformats.org/officeDocument/2006/math">
-                    <m:r>
-                      <a:rPr lang="en-US" i="1" dirty="0">
-                        <a:latin typeface="Cambria Math" panose="02040503050406030204" pitchFamily="18" charset="0"/>
-                      </a:rPr>
-                      <m:t>𝐶</m:t>
-                    </m:r>
-                    <m:d>
-                      <m:dPr>
-                        <m:ctrlPr>
-                          <a:rPr lang="en-US" i="1" dirty="0">
-                            <a:latin typeface="Cambria Math" panose="02040503050406030204" pitchFamily="18" charset="0"/>
-                          </a:rPr>
-                        </m:ctrlPr>
-                      </m:dPr>
-                      <m:e>
-                        <m:r>
-                          <a:rPr lang="en-US" i="1" dirty="0">
-                            <a:latin typeface="Cambria Math" panose="02040503050406030204" pitchFamily="18" charset="0"/>
-                          </a:rPr>
-                          <m:t>𝑛</m:t>
-                        </m:r>
-                      </m:e>
-                    </m:d>
-                  </m:oMath>
-                </a14:m>
-                <a:r>
-                  <a:rPr lang="en-US" dirty="0"/>
-                  <a:t>requires summing </a:t>
-                </a:r>
-                <a14:m>
-                  <m:oMath xmlns:m="http://schemas.openxmlformats.org/officeDocument/2006/math">
-                    <m:r>
-                      <a:rPr lang="en-US" i="1" dirty="0">
-                        <a:latin typeface="Cambria Math" panose="02040503050406030204" pitchFamily="18" charset="0"/>
-                      </a:rPr>
-                      <m:t>𝑛</m:t>
-                    </m:r>
-                  </m:oMath>
-                </a14:m>
-                <a:r>
-                  <a:rPr lang="en-US" dirty="0"/>
-                  <a:t> products</a:t>
-                </a:r>
-              </a:p>
-              <a:p>
-                <a:r>
-                  <a:rPr lang="en-US" dirty="0"/>
-                  <a:t>Memory grows with n</a:t>
-                </a:r>
-              </a:p>
-              <a:p>
-                <a:pPr lvl="1"/>
-                <a:r>
-                  <a:rPr lang="en-US" dirty="0"/>
-                  <a:t>Need to store all values up to </a:t>
-                </a:r>
-                <a14:m>
-                  <m:oMath xmlns:m="http://schemas.openxmlformats.org/officeDocument/2006/math">
-                    <m:r>
-                      <a:rPr lang="en-US" i="1" dirty="0" smtClean="0">
-                        <a:latin typeface="Cambria Math" panose="02040503050406030204" pitchFamily="18" charset="0"/>
-                      </a:rPr>
-                      <m:t>𝐶</m:t>
-                    </m:r>
-                    <m:d>
-                      <m:dPr>
-                        <m:ctrlPr>
-                          <a:rPr lang="en-US" i="1" dirty="0" smtClean="0">
-                            <a:latin typeface="Cambria Math" panose="02040503050406030204" pitchFamily="18" charset="0"/>
-                          </a:rPr>
-                        </m:ctrlPr>
-                      </m:dPr>
-                      <m:e>
-                        <m:r>
-                          <a:rPr lang="en-US" i="1" dirty="0" smtClean="0">
-                            <a:latin typeface="Cambria Math" panose="02040503050406030204" pitchFamily="18" charset="0"/>
-                          </a:rPr>
-                          <m:t>𝑛</m:t>
-                        </m:r>
-                      </m:e>
-                    </m:d>
-                  </m:oMath>
-                </a14:m>
-                <a:endParaRPr lang="en-US" dirty="0"/>
-              </a:p>
-              <a:p>
-                <a:r>
-                  <a:rPr lang="en-US" dirty="0"/>
-                  <a:t>Quick overflow</a:t>
-                </a:r>
-              </a:p>
-            </p:txBody>
-          </p:sp>
-        </mc:Choice>
-        <mc:Fallback xmlns="">
-          <p:sp>
-            <p:nvSpPr>
-              <p:cNvPr id="2" name="Content Placeholder 1">
-                <a:extLst>
-                  <a:ext uri="{FF2B5EF4-FFF2-40B4-BE49-F238E27FC236}">
-                    <a16:creationId xmlns:a16="http://schemas.microsoft.com/office/drawing/2014/main" id="{3671555A-F350-3CF8-04A4-71144124F362}"/>
-                  </a:ext>
-                </a:extLst>
-              </p:cNvPr>
-              <p:cNvSpPr>
-                <a:spLocks noGrp="1" noRot="1" noChangeAspect="1" noMove="1" noResize="1" noEditPoints="1" noAdjustHandles="1" noChangeArrowheads="1" noChangeShapeType="1" noTextEdit="1"/>
-              </p:cNvSpPr>
-              <p:nvPr>
-                <p:ph sz="half" idx="1"/>
-              </p:nvPr>
-            </p:nvSpPr>
-            <p:spPr>
-              <a:xfrm>
-                <a:off x="402264" y="1799674"/>
-                <a:ext cx="6054520" cy="4351339"/>
-              </a:xfrm>
-              <a:blipFill>
-                <a:blip r:embed="rId2"/>
-                <a:stretch>
-                  <a:fillRect l="-1813" t="-2381"/>
-                </a:stretch>
-              </a:blipFill>
-            </p:spPr>
-            <p:txBody>
-              <a:bodyPr/>
-              <a:lstStyle/>
-              <a:p>
-                <a:r>
-                  <a:rPr lang="en-US">
-                    <a:noFill/>
-                  </a:rPr>
-                  <a:t> </a:t>
-                </a:r>
-              </a:p>
-            </p:txBody>
-          </p:sp>
-        </mc:Fallback>
-      </mc:AlternateContent>
-      <p:pic>
-        <p:nvPicPr>
-          <p:cNvPr id="7" name="Content Placeholder 6">
-            <a:extLst>
-              <a:ext uri="{FF2B5EF4-FFF2-40B4-BE49-F238E27FC236}">
-                <a16:creationId xmlns:a16="http://schemas.microsoft.com/office/drawing/2014/main" id="{8F602B06-601E-6787-0493-5B1BFCFED8E6}"/>
-              </a:ext>
-            </a:extLst>
-          </p:cNvPr>
-          <p:cNvPicPr>
-            <a:picLocks noGrp="1" noChangeAspect="1"/>
-          </p:cNvPicPr>
-          <p:nvPr>
-            <p:ph sz="half" idx="2"/>
-          </p:nvPr>
-        </p:nvPicPr>
-        <p:blipFill>
-          <a:blip r:embed="rId3"/>
-          <a:stretch>
-            <a:fillRect/>
-          </a:stretch>
-        </p:blipFill>
-        <p:spPr>
-          <a:xfrm>
-            <a:off x="6630032" y="2406666"/>
-            <a:ext cx="5489804" cy="1829934"/>
-          </a:xfrm>
-          <a:prstGeom prst="rect">
-            <a:avLst/>
-          </a:prstGeom>
-        </p:spPr>
-      </p:pic>
-      <p:sp>
-        <p:nvSpPr>
-          <p:cNvPr id="4" name="Title 3">
-            <a:extLst>
-              <a:ext uri="{FF2B5EF4-FFF2-40B4-BE49-F238E27FC236}">
-                <a16:creationId xmlns:a16="http://schemas.microsoft.com/office/drawing/2014/main" id="{28AE832F-2D71-D278-EE41-040F14114463}"/>
-              </a:ext>
-            </a:extLst>
-          </p:cNvPr>
-          <p:cNvSpPr>
-            <a:spLocks noGrp="1"/>
-          </p:cNvSpPr>
-          <p:nvPr>
-            <p:ph type="title"/>
-          </p:nvPr>
-        </p:nvSpPr>
-        <p:spPr/>
-        <p:txBody>
-          <a:bodyPr/>
-          <a:lstStyle/>
-          <a:p>
-            <a:r>
-              <a:rPr lang="en-US" dirty="0"/>
-              <a:t>Problem</a:t>
-            </a:r>
-          </a:p>
-        </p:txBody>
-      </p:sp>
-      <p:sp>
-        <p:nvSpPr>
-          <p:cNvPr id="5" name="Footer Placeholder 4">
-            <a:extLst>
-              <a:ext uri="{FF2B5EF4-FFF2-40B4-BE49-F238E27FC236}">
-                <a16:creationId xmlns:a16="http://schemas.microsoft.com/office/drawing/2014/main" id="{10F8432E-66C9-8EB6-DD45-6FB8F2A47EAF}"/>
-              </a:ext>
-            </a:extLst>
-          </p:cNvPr>
-          <p:cNvSpPr>
-            <a:spLocks noGrp="1"/>
-          </p:cNvSpPr>
-          <p:nvPr>
-            <p:ph type="ftr" sz="quarter" idx="11"/>
-          </p:nvPr>
-        </p:nvSpPr>
-        <p:spPr/>
-        <p:txBody>
-          <a:bodyPr/>
-          <a:lstStyle/>
-          <a:p>
-            <a:r>
-              <a:rPr lang="en-US"/>
-              <a:t>UNIVERSITY OF SOUTH FLORIDA</a:t>
-            </a:r>
-            <a:endParaRPr lang="en-US" dirty="0"/>
-          </a:p>
-        </p:txBody>
-      </p:sp>
-    </p:spTree>
-    <p:extLst>
-      <p:ext uri="{BB962C8B-B14F-4D97-AF65-F5344CB8AC3E}">
-        <p14:creationId xmlns:p14="http://schemas.microsoft.com/office/powerpoint/2010/main" val="2343945214"/>
-      </p:ext>
-    </p:extLst>
-  </p:cSld>
-  <p:clrMapOvr>
-    <a:masterClrMapping/>
-  </p:clrMapOvr>
-</p:sld>
-</file>
-
-<file path=ppt/slides/slide4.xml><?xml version="1.0" encoding="utf-8"?>
-<p:sld xmlns:a="http://schemas.openxmlformats.org/drawingml/2006/main" xmlns:r="http://schemas.openxmlformats.org/officeDocument/2006/relationships" xmlns:p="http://schemas.openxmlformats.org/presentationml/2006/main">
-  <p:cSld>
-    <p:spTree>
-      <p:nvGrpSpPr>
-        <p:cNvPr id="1" name=""/>
-        <p:cNvGrpSpPr/>
-        <p:nvPr/>
-      </p:nvGrpSpPr>
-      <p:grpSpPr>
-        <a:xfrm>
-          <a:off x="0" y="0"/>
-          <a:ext cx="0" cy="0"/>
-          <a:chOff x="0" y="0"/>
-          <a:chExt cx="0" cy="0"/>
-        </a:xfrm>
-      </p:grpSpPr>
-      <mc:AlternateContent xmlns:mc="http://schemas.openxmlformats.org/markup-compatibility/2006" xmlns:a14="http://schemas.microsoft.com/office/drawing/2010/main">
-        <mc:Choice Requires="a14">
-          <p:sp>
-            <p:nvSpPr>
-              <p:cNvPr id="2" name="Content Placeholder 1">
-                <a:extLst>
-                  <a:ext uri="{FF2B5EF4-FFF2-40B4-BE49-F238E27FC236}">
-                    <a16:creationId xmlns:a16="http://schemas.microsoft.com/office/drawing/2014/main" id="{CFC38F14-52B9-8D90-DB5C-3C13B6D0F444}"/>
-                  </a:ext>
-                </a:extLst>
-              </p:cNvPr>
-              <p:cNvSpPr>
-                <a:spLocks noGrp="1"/>
-              </p:cNvSpPr>
-              <p:nvPr>
-                <p:ph sz="half" idx="1"/>
-              </p:nvPr>
-            </p:nvSpPr>
-            <p:spPr>
-              <a:xfrm>
-                <a:off x="402264" y="1799674"/>
-                <a:ext cx="4679945" cy="4351339"/>
-              </a:xfrm>
-            </p:spPr>
-            <p:txBody>
-              <a:bodyPr/>
-              <a:lstStyle/>
-              <a:p>
-                <a14:m>
-                  <m:oMath xmlns:m="http://schemas.openxmlformats.org/officeDocument/2006/math">
-                    <m:sSub>
-                      <m:sSubPr>
-                        <m:ctrlPr>
-                          <a:rPr lang="en-US" i="1" dirty="0" smtClean="0">
-                            <a:latin typeface="Cambria Math" panose="02040503050406030204" pitchFamily="18" charset="0"/>
-                          </a:rPr>
-                        </m:ctrlPr>
-                      </m:sSubPr>
-                      <m:e>
-                        <m:r>
-                          <a:rPr lang="en-US" i="1" dirty="0" smtClean="0">
-                            <a:latin typeface="Cambria Math" panose="02040503050406030204" pitchFamily="18" charset="0"/>
-                          </a:rPr>
-                          <m:t>𝐶</m:t>
-                        </m:r>
-                      </m:e>
-                      <m:sub>
-                        <m:r>
-                          <a:rPr lang="en-US" i="1" dirty="0" smtClean="0">
-                            <a:latin typeface="Cambria Math" panose="02040503050406030204" pitchFamily="18" charset="0"/>
-                          </a:rPr>
-                          <m:t>1</m:t>
-                        </m:r>
-                      </m:sub>
-                    </m:sSub>
-                  </m:oMath>
-                </a14:m>
-                <a:r>
-                  <a:rPr lang="en-US" dirty="0"/>
-                  <a:t> depends on </a:t>
-                </a:r>
-                <a14:m>
-                  <m:oMath xmlns:m="http://schemas.openxmlformats.org/officeDocument/2006/math">
-                    <m:sSub>
-                      <m:sSubPr>
-                        <m:ctrlPr>
-                          <a:rPr lang="en-US" i="1" dirty="0" smtClean="0">
-                            <a:latin typeface="Cambria Math" panose="02040503050406030204" pitchFamily="18" charset="0"/>
-                          </a:rPr>
-                        </m:ctrlPr>
-                      </m:sSubPr>
-                      <m:e>
-                        <m:r>
-                          <a:rPr lang="en-US" i="1" dirty="0" smtClean="0">
-                            <a:latin typeface="Cambria Math" panose="02040503050406030204" pitchFamily="18" charset="0"/>
-                          </a:rPr>
-                          <m:t>𝐶</m:t>
-                        </m:r>
-                      </m:e>
-                      <m:sub>
-                        <m:r>
-                          <a:rPr lang="en-US" i="1" dirty="0" smtClean="0">
-                            <a:latin typeface="Cambria Math" panose="02040503050406030204" pitchFamily="18" charset="0"/>
-                          </a:rPr>
-                          <m:t>0</m:t>
-                        </m:r>
-                      </m:sub>
-                    </m:sSub>
-                  </m:oMath>
-                </a14:m>
-                <a:r>
-                  <a:rPr lang="en-US" dirty="0"/>
-                  <a:t>, </a:t>
-                </a:r>
-                <a14:m>
-                  <m:oMath xmlns:m="http://schemas.openxmlformats.org/officeDocument/2006/math">
-                    <m:sSub>
-                      <m:sSubPr>
-                        <m:ctrlPr>
-                          <a:rPr lang="en-US" i="1" dirty="0" smtClean="0">
-                            <a:latin typeface="Cambria Math" panose="02040503050406030204" pitchFamily="18" charset="0"/>
-                          </a:rPr>
-                        </m:ctrlPr>
-                      </m:sSubPr>
-                      <m:e>
-                        <m:r>
-                          <a:rPr lang="en-US" i="1" dirty="0" smtClean="0">
-                            <a:latin typeface="Cambria Math" panose="02040503050406030204" pitchFamily="18" charset="0"/>
-                          </a:rPr>
-                          <m:t>𝐶</m:t>
-                        </m:r>
-                      </m:e>
-                      <m:sub>
-                        <m:r>
-                          <a:rPr lang="en-US" i="1" dirty="0" smtClean="0">
-                            <a:latin typeface="Cambria Math" panose="02040503050406030204" pitchFamily="18" charset="0"/>
-                          </a:rPr>
-                          <m:t>2</m:t>
-                        </m:r>
-                      </m:sub>
-                    </m:sSub>
-                  </m:oMath>
-                </a14:m>
-                <a:r>
-                  <a:rPr lang="en-US" dirty="0"/>
-                  <a:t> on </a:t>
-                </a:r>
-                <a14:m>
-                  <m:oMath xmlns:m="http://schemas.openxmlformats.org/officeDocument/2006/math">
-                    <m:sSub>
-                      <m:sSubPr>
-                        <m:ctrlPr>
-                          <a:rPr lang="en-US" i="1" dirty="0" smtClean="0">
-                            <a:latin typeface="Cambria Math" panose="02040503050406030204" pitchFamily="18" charset="0"/>
-                          </a:rPr>
-                        </m:ctrlPr>
-                      </m:sSubPr>
-                      <m:e>
-                        <m:r>
-                          <a:rPr lang="en-US" i="1" dirty="0" smtClean="0">
-                            <a:latin typeface="Cambria Math" panose="02040503050406030204" pitchFamily="18" charset="0"/>
-                          </a:rPr>
-                          <m:t>𝐶</m:t>
-                        </m:r>
-                      </m:e>
-                      <m:sub>
-                        <m:r>
-                          <a:rPr lang="en-US" i="1" dirty="0" smtClean="0">
-                            <a:latin typeface="Cambria Math" panose="02040503050406030204" pitchFamily="18" charset="0"/>
-                          </a:rPr>
-                          <m:t>1</m:t>
-                        </m:r>
-                      </m:sub>
-                    </m:sSub>
-                  </m:oMath>
-                </a14:m>
-                <a:r>
-                  <a:rPr lang="en-US" dirty="0"/>
-                  <a:t>, C_3 on C_2, and </a:t>
-                </a:r>
-                <a14:m>
-                  <m:oMath xmlns:m="http://schemas.openxmlformats.org/officeDocument/2006/math">
-                    <m:sSub>
-                      <m:sSubPr>
-                        <m:ctrlPr>
-                          <a:rPr lang="en-US" i="1" dirty="0" smtClean="0">
-                            <a:latin typeface="Cambria Math" panose="02040503050406030204" pitchFamily="18" charset="0"/>
-                          </a:rPr>
-                        </m:ctrlPr>
-                      </m:sSubPr>
-                      <m:e>
-                        <m:r>
-                          <a:rPr lang="en-US" i="1" dirty="0" smtClean="0">
-                            <a:latin typeface="Cambria Math" panose="02040503050406030204" pitchFamily="18" charset="0"/>
-                          </a:rPr>
-                          <m:t>𝐶</m:t>
-                        </m:r>
-                      </m:e>
-                      <m:sub>
-                        <m:r>
-                          <a:rPr lang="en-US" i="1" dirty="0" smtClean="0">
-                            <a:latin typeface="Cambria Math" panose="02040503050406030204" pitchFamily="18" charset="0"/>
-                          </a:rPr>
-                          <m:t>𝑛</m:t>
-                        </m:r>
-                      </m:sub>
-                    </m:sSub>
-                  </m:oMath>
-                </a14:m>
-                <a:r>
-                  <a:rPr lang="en-US" dirty="0"/>
-                  <a:t> on </a:t>
-                </a:r>
-                <a14:m>
-                  <m:oMath xmlns:m="http://schemas.openxmlformats.org/officeDocument/2006/math">
-                    <m:sSub>
-                      <m:sSubPr>
-                        <m:ctrlPr>
-                          <a:rPr lang="en-US" i="1" dirty="0" smtClean="0">
-                            <a:latin typeface="Cambria Math" panose="02040503050406030204" pitchFamily="18" charset="0"/>
-                          </a:rPr>
-                        </m:ctrlPr>
-                      </m:sSubPr>
-                      <m:e>
-                        <m:r>
-                          <a:rPr lang="en-US" i="1" dirty="0" smtClean="0">
-                            <a:latin typeface="Cambria Math" panose="02040503050406030204" pitchFamily="18" charset="0"/>
-                          </a:rPr>
-                          <m:t>𝐶</m:t>
-                        </m:r>
-                      </m:e>
-                      <m:sub>
-                        <m:r>
-                          <a:rPr lang="en-US" i="1" dirty="0" smtClean="0">
-                            <a:latin typeface="Cambria Math" panose="02040503050406030204" pitchFamily="18" charset="0"/>
-                          </a:rPr>
-                          <m:t>𝑛</m:t>
-                        </m:r>
-                        <m:r>
-                          <a:rPr lang="en-US" i="1" dirty="0" smtClean="0">
-                            <a:latin typeface="Cambria Math" panose="02040503050406030204" pitchFamily="18" charset="0"/>
-                          </a:rPr>
-                          <m:t>−1</m:t>
-                        </m:r>
-                      </m:sub>
-                    </m:sSub>
-                  </m:oMath>
-                </a14:m>
-                <a:r>
-                  <a:rPr lang="en-US" dirty="0"/>
-                  <a:t>.</a:t>
-                </a:r>
-              </a:p>
-              <a:p>
-                <a:r>
-                  <a:rPr lang="en-US" dirty="0"/>
-                  <a:t>Partial sums can be parallelized </a:t>
-                </a:r>
-              </a:p>
-              <a:p>
-                <a:pPr lvl="1"/>
-                <a:r>
-                  <a:rPr lang="en-US" dirty="0"/>
-                  <a:t>Thread 1 handles </a:t>
-                </a:r>
-                <a14:m>
-                  <m:oMath xmlns:m="http://schemas.openxmlformats.org/officeDocument/2006/math">
-                    <m:sSub>
-                      <m:sSubPr>
-                        <m:ctrlPr>
-                          <a:rPr lang="en-US" i="1" dirty="0" smtClean="0">
-                            <a:latin typeface="Cambria Math" panose="02040503050406030204" pitchFamily="18" charset="0"/>
-                          </a:rPr>
-                        </m:ctrlPr>
-                      </m:sSubPr>
-                      <m:e>
-                        <m:r>
-                          <a:rPr lang="en-US" i="1" dirty="0" smtClean="0">
-                            <a:latin typeface="Cambria Math" panose="02040503050406030204" pitchFamily="18" charset="0"/>
-                          </a:rPr>
-                          <m:t>𝐶</m:t>
-                        </m:r>
-                      </m:e>
-                      <m:sub>
-                        <m:r>
-                          <a:rPr lang="en-US" i="1" dirty="0" smtClean="0">
-                            <a:latin typeface="Cambria Math" panose="02040503050406030204" pitchFamily="18" charset="0"/>
-                          </a:rPr>
-                          <m:t>1</m:t>
-                        </m:r>
-                      </m:sub>
-                    </m:sSub>
-                    <m:sSub>
-                      <m:sSubPr>
-                        <m:ctrlPr>
-                          <a:rPr lang="en-US" i="1" dirty="0" smtClean="0">
-                            <a:latin typeface="Cambria Math" panose="02040503050406030204" pitchFamily="18" charset="0"/>
-                          </a:rPr>
-                        </m:ctrlPr>
-                      </m:sSubPr>
-                      <m:e>
-                        <m:r>
-                          <a:rPr lang="en-US" b="0" i="1" dirty="0" smtClean="0">
-                            <a:latin typeface="Cambria Math" panose="02040503050406030204" pitchFamily="18" charset="0"/>
-                          </a:rPr>
-                          <m:t>×</m:t>
-                        </m:r>
-                        <m:r>
-                          <a:rPr lang="en-US" i="1" dirty="0" smtClean="0">
-                            <a:latin typeface="Cambria Math" panose="02040503050406030204" pitchFamily="18" charset="0"/>
-                          </a:rPr>
-                          <m:t>𝐶</m:t>
-                        </m:r>
-                      </m:e>
-                      <m:sub>
-                        <m:r>
-                          <a:rPr lang="en-US" i="1" dirty="0" smtClean="0">
-                            <a:latin typeface="Cambria Math" panose="02040503050406030204" pitchFamily="18" charset="0"/>
-                          </a:rPr>
-                          <m:t>0</m:t>
-                        </m:r>
-                      </m:sub>
-                    </m:sSub>
-                  </m:oMath>
-                </a14:m>
-                <a:endParaRPr lang="en-US" dirty="0"/>
-              </a:p>
-              <a:p>
-                <a:pPr lvl="1"/>
-                <a:r>
-                  <a:rPr lang="en-US" dirty="0"/>
-                  <a:t>Thread 2 handles </a:t>
-                </a:r>
-                <a14:m>
-                  <m:oMath xmlns:m="http://schemas.openxmlformats.org/officeDocument/2006/math">
-                    <m:sSub>
-                      <m:sSubPr>
-                        <m:ctrlPr>
-                          <a:rPr lang="en-US" i="1" dirty="0" smtClean="0">
-                            <a:latin typeface="Cambria Math" panose="02040503050406030204" pitchFamily="18" charset="0"/>
-                          </a:rPr>
-                        </m:ctrlPr>
-                      </m:sSubPr>
-                      <m:e>
-                        <m:r>
-                          <a:rPr lang="en-US" i="1" dirty="0" smtClean="0">
-                            <a:latin typeface="Cambria Math" panose="02040503050406030204" pitchFamily="18" charset="0"/>
-                          </a:rPr>
-                          <m:t>𝐶</m:t>
-                        </m:r>
-                      </m:e>
-                      <m:sub>
-                        <m:r>
-                          <a:rPr lang="en-US" i="1" dirty="0" smtClean="0">
-                            <a:latin typeface="Cambria Math" panose="02040503050406030204" pitchFamily="18" charset="0"/>
-                          </a:rPr>
-                          <m:t>0</m:t>
-                        </m:r>
-                      </m:sub>
-                    </m:sSub>
-                    <m:sSub>
-                      <m:sSubPr>
-                        <m:ctrlPr>
-                          <a:rPr lang="en-US" b="0" i="1" dirty="0" smtClean="0">
-                            <a:latin typeface="Cambria Math" panose="02040503050406030204" pitchFamily="18" charset="0"/>
-                          </a:rPr>
-                        </m:ctrlPr>
-                      </m:sSubPr>
-                      <m:e>
-                        <m:r>
-                          <a:rPr lang="en-US" b="0" i="1" dirty="0" smtClean="0">
-                            <a:latin typeface="Cambria Math" panose="02040503050406030204" pitchFamily="18" charset="0"/>
-                          </a:rPr>
-                          <m:t>×</m:t>
-                        </m:r>
-                        <m:r>
-                          <a:rPr lang="en-US" i="1" dirty="0" smtClean="0">
-                            <a:latin typeface="Cambria Math" panose="02040503050406030204" pitchFamily="18" charset="0"/>
-                          </a:rPr>
-                          <m:t>𝐶</m:t>
-                        </m:r>
-                      </m:e>
-                      <m:sub>
-                        <m:r>
-                          <a:rPr lang="en-US" i="1" dirty="0">
-                            <a:latin typeface="Cambria Math" panose="02040503050406030204" pitchFamily="18" charset="0"/>
-                          </a:rPr>
-                          <m:t>1</m:t>
-                        </m:r>
-                      </m:sub>
-                    </m:sSub>
-                    <m:r>
-                      <a:rPr lang="en-US" b="0" i="1" dirty="0" smtClean="0">
-                        <a:latin typeface="Cambria Math" panose="02040503050406030204" pitchFamily="18" charset="0"/>
-                      </a:rPr>
-                      <m:t> </m:t>
-                    </m:r>
-                  </m:oMath>
-                </a14:m>
-                <a:endParaRPr lang="en-US" b="0" dirty="0"/>
-              </a:p>
-              <a:p>
-                <a:pPr lvl="1"/>
-                <a:r>
-                  <a:rPr lang="en-US" dirty="0"/>
-                  <a:t>Parent thread sums the terms</a:t>
-                </a:r>
-              </a:p>
-            </p:txBody>
-          </p:sp>
-        </mc:Choice>
-        <mc:Fallback xmlns="">
-          <p:sp>
-            <p:nvSpPr>
-              <p:cNvPr id="2" name="Content Placeholder 1">
-                <a:extLst>
-                  <a:ext uri="{FF2B5EF4-FFF2-40B4-BE49-F238E27FC236}">
-                    <a16:creationId xmlns:a16="http://schemas.microsoft.com/office/drawing/2014/main" id="{CFC38F14-52B9-8D90-DB5C-3C13B6D0F444}"/>
-                  </a:ext>
-                </a:extLst>
-              </p:cNvPr>
-              <p:cNvSpPr>
-                <a:spLocks noGrp="1" noRot="1" noChangeAspect="1" noMove="1" noResize="1" noEditPoints="1" noAdjustHandles="1" noChangeArrowheads="1" noChangeShapeType="1" noTextEdit="1"/>
-              </p:cNvSpPr>
-              <p:nvPr>
-                <p:ph sz="half" idx="1"/>
-              </p:nvPr>
-            </p:nvSpPr>
-            <p:spPr>
-              <a:xfrm>
-                <a:off x="402264" y="1799674"/>
-                <a:ext cx="4679945" cy="4351339"/>
-              </a:xfrm>
-              <a:blipFill>
-                <a:blip r:embed="rId2"/>
-                <a:stretch>
-                  <a:fillRect l="-2344" t="-2381" r="-3516"/>
-                </a:stretch>
-              </a:blipFill>
-            </p:spPr>
-            <p:txBody>
-              <a:bodyPr/>
-              <a:lstStyle/>
-              <a:p>
-                <a:r>
-                  <a:rPr lang="en-US">
-                    <a:noFill/>
-                  </a:rPr>
-                  <a:t> </a:t>
-                </a:r>
-              </a:p>
-            </p:txBody>
-          </p:sp>
-        </mc:Fallback>
-      </mc:AlternateContent>
-      <p:sp>
-        <p:nvSpPr>
-          <p:cNvPr id="4" name="Title 3">
-            <a:extLst>
-              <a:ext uri="{FF2B5EF4-FFF2-40B4-BE49-F238E27FC236}">
-                <a16:creationId xmlns:a16="http://schemas.microsoft.com/office/drawing/2014/main" id="{D4227124-A71A-DF3C-7543-93507A261427}"/>
-              </a:ext>
-            </a:extLst>
-          </p:cNvPr>
-          <p:cNvSpPr>
-            <a:spLocks noGrp="1"/>
-          </p:cNvSpPr>
-          <p:nvPr>
-            <p:ph type="title"/>
-          </p:nvPr>
-        </p:nvSpPr>
-        <p:spPr/>
-        <p:txBody>
-          <a:bodyPr/>
-          <a:lstStyle/>
-          <a:p>
-            <a:r>
-              <a:rPr lang="en-US" dirty="0"/>
-              <a:t>Observations</a:t>
-            </a:r>
-          </a:p>
-        </p:txBody>
-      </p:sp>
-      <p:sp>
-        <p:nvSpPr>
-          <p:cNvPr id="5" name="Footer Placeholder 4">
-            <a:extLst>
-              <a:ext uri="{FF2B5EF4-FFF2-40B4-BE49-F238E27FC236}">
-                <a16:creationId xmlns:a16="http://schemas.microsoft.com/office/drawing/2014/main" id="{8ADC4F44-90E4-A486-9C8D-24DA481532FB}"/>
-              </a:ext>
-            </a:extLst>
-          </p:cNvPr>
-          <p:cNvSpPr>
-            <a:spLocks noGrp="1"/>
-          </p:cNvSpPr>
-          <p:nvPr>
-            <p:ph type="ftr" sz="quarter" idx="11"/>
-          </p:nvPr>
-        </p:nvSpPr>
-        <p:spPr/>
-        <p:txBody>
-          <a:bodyPr/>
-          <a:lstStyle/>
-          <a:p>
-            <a:r>
-              <a:rPr lang="en-US"/>
-              <a:t>UNIVERSITY OF SOUTH FLORIDA</a:t>
-            </a:r>
-            <a:endParaRPr lang="en-US" dirty="0"/>
-          </a:p>
-        </p:txBody>
-      </p:sp>
-      <p:pic>
-        <p:nvPicPr>
-          <p:cNvPr id="11" name="Content Placeholder 6">
-            <a:extLst>
-              <a:ext uri="{FF2B5EF4-FFF2-40B4-BE49-F238E27FC236}">
-                <a16:creationId xmlns:a16="http://schemas.microsoft.com/office/drawing/2014/main" id="{7F6C5769-7E39-A43F-53EC-64E30FCEC4B6}"/>
-              </a:ext>
-            </a:extLst>
-          </p:cNvPr>
-          <p:cNvPicPr>
-            <a:picLocks noGrp="1" noChangeAspect="1"/>
-          </p:cNvPicPr>
-          <p:nvPr>
-            <p:ph sz="half" idx="2"/>
-          </p:nvPr>
-        </p:nvPicPr>
-        <p:blipFill>
-          <a:blip r:embed="rId3"/>
-          <a:srcRect r="28369"/>
-          <a:stretch>
-            <a:fillRect/>
-          </a:stretch>
-        </p:blipFill>
-        <p:spPr>
-          <a:xfrm>
-            <a:off x="5524835" y="1918353"/>
-            <a:ext cx="6264901" cy="2915361"/>
-          </a:xfrm>
-          <a:prstGeom prst="rect">
-            <a:avLst/>
-          </a:prstGeom>
-        </p:spPr>
-      </p:pic>
-      <p:sp>
-        <p:nvSpPr>
-          <p:cNvPr id="12" name="Rectangle: Rounded Corners 11">
-            <a:extLst>
-              <a:ext uri="{FF2B5EF4-FFF2-40B4-BE49-F238E27FC236}">
-                <a16:creationId xmlns:a16="http://schemas.microsoft.com/office/drawing/2014/main" id="{F4FC83F5-ABC2-3894-3C15-FAFE50CA7F30}"/>
-              </a:ext>
-            </a:extLst>
-          </p:cNvPr>
-          <p:cNvSpPr/>
-          <p:nvPr/>
-        </p:nvSpPr>
-        <p:spPr>
-          <a:xfrm>
-            <a:off x="6188766" y="2226365"/>
-            <a:ext cx="735495" cy="400979"/>
-          </a:xfrm>
-          <a:prstGeom prst="roundRect">
-            <a:avLst/>
-          </a:prstGeom>
-          <a:solidFill>
-            <a:schemeClr val="accent1">
-              <a:alpha val="20000"/>
-            </a:schemeClr>
-          </a:solidFill>
-        </p:spPr>
-        <p:style>
-          <a:lnRef idx="2">
-            <a:schemeClr val="accent1">
-              <a:shade val="15000"/>
-            </a:schemeClr>
-          </a:lnRef>
-          <a:fillRef idx="1">
-            <a:schemeClr val="accent1"/>
-          </a:fillRef>
-          <a:effectRef idx="0">
-            <a:schemeClr val="accent1"/>
-          </a:effectRef>
-          <a:fontRef idx="minor">
-            <a:schemeClr val="lt1"/>
-          </a:fontRef>
-        </p:style>
-        <p:txBody>
-          <a:bodyPr rtlCol="0" anchor="ctr"/>
-          <a:lstStyle/>
-          <a:p>
-            <a:pPr algn="ctr"/>
-            <a:endParaRPr lang="en-US"/>
-          </a:p>
-        </p:txBody>
-      </p:sp>
-      <p:sp>
-        <p:nvSpPr>
-          <p:cNvPr id="13" name="Rectangle: Rounded Corners 12">
-            <a:extLst>
-              <a:ext uri="{FF2B5EF4-FFF2-40B4-BE49-F238E27FC236}">
-                <a16:creationId xmlns:a16="http://schemas.microsoft.com/office/drawing/2014/main" id="{03689925-820B-2D46-2DF1-112C5F005A15}"/>
-              </a:ext>
-            </a:extLst>
-          </p:cNvPr>
-          <p:cNvSpPr/>
-          <p:nvPr/>
-        </p:nvSpPr>
-        <p:spPr>
-          <a:xfrm>
-            <a:off x="7147199" y="2627343"/>
-            <a:ext cx="1539600" cy="400979"/>
-          </a:xfrm>
-          <a:prstGeom prst="roundRect">
-            <a:avLst/>
-          </a:prstGeom>
-          <a:solidFill>
-            <a:srgbClr val="F080A0">
-              <a:alpha val="20000"/>
-            </a:srgbClr>
-          </a:solidFill>
-        </p:spPr>
-        <p:style>
-          <a:lnRef idx="2">
-            <a:schemeClr val="accent1">
-              <a:shade val="15000"/>
-            </a:schemeClr>
-          </a:lnRef>
-          <a:fillRef idx="1">
-            <a:schemeClr val="accent1"/>
-          </a:fillRef>
-          <a:effectRef idx="0">
-            <a:schemeClr val="accent1"/>
-          </a:effectRef>
-          <a:fontRef idx="minor">
-            <a:schemeClr val="lt1"/>
-          </a:fontRef>
-        </p:style>
-        <p:txBody>
-          <a:bodyPr rtlCol="0" anchor="ctr"/>
-          <a:lstStyle/>
-          <a:p>
-            <a:pPr algn="ctr"/>
-            <a:endParaRPr lang="en-US"/>
-          </a:p>
-        </p:txBody>
-      </p:sp>
-      <p:sp>
-        <p:nvSpPr>
-          <p:cNvPr id="14" name="Rectangle: Rounded Corners 13">
-            <a:extLst>
-              <a:ext uri="{FF2B5EF4-FFF2-40B4-BE49-F238E27FC236}">
-                <a16:creationId xmlns:a16="http://schemas.microsoft.com/office/drawing/2014/main" id="{3B2D4AAB-49D8-E96B-A692-55C7B62A8075}"/>
-              </a:ext>
-            </a:extLst>
-          </p:cNvPr>
-          <p:cNvSpPr/>
-          <p:nvPr/>
-        </p:nvSpPr>
-        <p:spPr>
-          <a:xfrm>
-            <a:off x="6188766" y="2654519"/>
-            <a:ext cx="735495" cy="400979"/>
-          </a:xfrm>
-          <a:prstGeom prst="roundRect">
-            <a:avLst/>
-          </a:prstGeom>
-          <a:solidFill>
-            <a:schemeClr val="accent1">
-              <a:alpha val="20000"/>
-            </a:schemeClr>
-          </a:solidFill>
-        </p:spPr>
-        <p:style>
-          <a:lnRef idx="2">
-            <a:schemeClr val="accent1">
-              <a:shade val="15000"/>
-            </a:schemeClr>
-          </a:lnRef>
-          <a:fillRef idx="1">
-            <a:schemeClr val="accent1"/>
-          </a:fillRef>
-          <a:effectRef idx="0">
-            <a:schemeClr val="accent1"/>
-          </a:effectRef>
-          <a:fontRef idx="minor">
-            <a:schemeClr val="lt1"/>
-          </a:fontRef>
-        </p:style>
-        <p:txBody>
-          <a:bodyPr rtlCol="0" anchor="ctr"/>
-          <a:lstStyle/>
-          <a:p>
-            <a:pPr algn="ctr"/>
-            <a:endParaRPr lang="en-US"/>
-          </a:p>
-        </p:txBody>
-      </p:sp>
-      <p:sp>
-        <p:nvSpPr>
-          <p:cNvPr id="15" name="Rectangle: Rounded Corners 14">
-            <a:extLst>
-              <a:ext uri="{FF2B5EF4-FFF2-40B4-BE49-F238E27FC236}">
-                <a16:creationId xmlns:a16="http://schemas.microsoft.com/office/drawing/2014/main" id="{2DF16232-B9D5-1C25-F4CF-45D08FA94A64}"/>
-              </a:ext>
-            </a:extLst>
-          </p:cNvPr>
-          <p:cNvSpPr/>
-          <p:nvPr/>
-        </p:nvSpPr>
-        <p:spPr>
-          <a:xfrm>
-            <a:off x="6192280" y="3082342"/>
-            <a:ext cx="1576601" cy="400979"/>
-          </a:xfrm>
-          <a:prstGeom prst="roundRect">
-            <a:avLst/>
-          </a:prstGeom>
-          <a:solidFill>
-            <a:schemeClr val="accent1">
-              <a:alpha val="20000"/>
-            </a:schemeClr>
-          </a:solidFill>
-        </p:spPr>
-        <p:style>
-          <a:lnRef idx="2">
-            <a:schemeClr val="accent1">
-              <a:shade val="15000"/>
-            </a:schemeClr>
-          </a:lnRef>
-          <a:fillRef idx="1">
-            <a:schemeClr val="accent1"/>
-          </a:fillRef>
-          <a:effectRef idx="0">
-            <a:schemeClr val="accent1"/>
-          </a:effectRef>
-          <a:fontRef idx="minor">
-            <a:schemeClr val="lt1"/>
-          </a:fontRef>
-        </p:style>
-        <p:txBody>
-          <a:bodyPr rtlCol="0" anchor="ctr"/>
-          <a:lstStyle/>
-          <a:p>
-            <a:pPr algn="ctr"/>
-            <a:endParaRPr lang="en-US"/>
-          </a:p>
-        </p:txBody>
-      </p:sp>
-      <p:sp>
-        <p:nvSpPr>
-          <p:cNvPr id="17" name="Rectangle: Rounded Corners 16">
-            <a:extLst>
-              <a:ext uri="{FF2B5EF4-FFF2-40B4-BE49-F238E27FC236}">
-                <a16:creationId xmlns:a16="http://schemas.microsoft.com/office/drawing/2014/main" id="{783117D7-99A8-20C0-1304-7971A6B49BE2}"/>
-              </a:ext>
-            </a:extLst>
-          </p:cNvPr>
-          <p:cNvSpPr/>
-          <p:nvPr/>
-        </p:nvSpPr>
-        <p:spPr>
-          <a:xfrm>
-            <a:off x="8065266" y="3055498"/>
-            <a:ext cx="1539600" cy="400979"/>
-          </a:xfrm>
-          <a:prstGeom prst="roundRect">
-            <a:avLst/>
-          </a:prstGeom>
-          <a:solidFill>
-            <a:srgbClr val="F080A0">
-              <a:alpha val="20000"/>
-            </a:srgbClr>
-          </a:solidFill>
-        </p:spPr>
-        <p:style>
-          <a:lnRef idx="2">
-            <a:schemeClr val="accent1">
-              <a:shade val="15000"/>
-            </a:schemeClr>
-          </a:lnRef>
-          <a:fillRef idx="1">
-            <a:schemeClr val="accent1"/>
-          </a:fillRef>
-          <a:effectRef idx="0">
-            <a:schemeClr val="accent1"/>
-          </a:effectRef>
-          <a:fontRef idx="minor">
-            <a:schemeClr val="lt1"/>
-          </a:fontRef>
-        </p:style>
-        <p:txBody>
-          <a:bodyPr rtlCol="0" anchor="ctr"/>
-          <a:lstStyle/>
-          <a:p>
-            <a:pPr algn="ctr"/>
-            <a:endParaRPr lang="en-US"/>
-          </a:p>
-        </p:txBody>
-      </p:sp>
-      <p:sp>
-        <p:nvSpPr>
-          <p:cNvPr id="18" name="Rectangle: Rounded Corners 17">
-            <a:extLst>
-              <a:ext uri="{FF2B5EF4-FFF2-40B4-BE49-F238E27FC236}">
-                <a16:creationId xmlns:a16="http://schemas.microsoft.com/office/drawing/2014/main" id="{9FFA6D23-F3E4-6088-EC42-2068A8956399}"/>
-              </a:ext>
-            </a:extLst>
-          </p:cNvPr>
-          <p:cNvSpPr/>
-          <p:nvPr/>
-        </p:nvSpPr>
-        <p:spPr>
-          <a:xfrm>
-            <a:off x="6185451" y="1798210"/>
-            <a:ext cx="735495" cy="400979"/>
-          </a:xfrm>
-          <a:prstGeom prst="roundRect">
-            <a:avLst/>
-          </a:prstGeom>
-          <a:solidFill>
-            <a:schemeClr val="accent1">
-              <a:alpha val="20000"/>
-            </a:schemeClr>
-          </a:solidFill>
-        </p:spPr>
-        <p:style>
-          <a:lnRef idx="2">
-            <a:schemeClr val="accent1">
-              <a:shade val="15000"/>
-            </a:schemeClr>
-          </a:lnRef>
-          <a:fillRef idx="1">
-            <a:schemeClr val="accent1"/>
-          </a:fillRef>
-          <a:effectRef idx="0">
-            <a:schemeClr val="accent1"/>
-          </a:effectRef>
-          <a:fontRef idx="minor">
-            <a:schemeClr val="lt1"/>
-          </a:fontRef>
-        </p:style>
-        <p:txBody>
-          <a:bodyPr rtlCol="0" anchor="ctr"/>
-          <a:lstStyle/>
-          <a:p>
-            <a:pPr algn="ctr"/>
-            <a:endParaRPr lang="en-US"/>
-          </a:p>
-        </p:txBody>
-      </p:sp>
-      <p:sp>
-        <p:nvSpPr>
-          <p:cNvPr id="19" name="Rectangle: Rounded Corners 18">
-            <a:extLst>
-              <a:ext uri="{FF2B5EF4-FFF2-40B4-BE49-F238E27FC236}">
-                <a16:creationId xmlns:a16="http://schemas.microsoft.com/office/drawing/2014/main" id="{3CBAB640-AED2-2CF7-85D9-944D39B03D12}"/>
-              </a:ext>
-            </a:extLst>
-          </p:cNvPr>
-          <p:cNvSpPr/>
-          <p:nvPr/>
-        </p:nvSpPr>
-        <p:spPr>
-          <a:xfrm>
-            <a:off x="7140575" y="2209905"/>
-            <a:ext cx="1539600" cy="400979"/>
-          </a:xfrm>
-          <a:prstGeom prst="roundRect">
-            <a:avLst/>
-          </a:prstGeom>
-          <a:solidFill>
-            <a:srgbClr val="F080A0">
-              <a:alpha val="20000"/>
-            </a:srgbClr>
-          </a:solidFill>
-        </p:spPr>
-        <p:style>
-          <a:lnRef idx="2">
-            <a:schemeClr val="accent1">
-              <a:shade val="15000"/>
-            </a:schemeClr>
-          </a:lnRef>
-          <a:fillRef idx="1">
-            <a:schemeClr val="accent1"/>
-          </a:fillRef>
-          <a:effectRef idx="0">
-            <a:schemeClr val="accent1"/>
-          </a:effectRef>
-          <a:fontRef idx="minor">
-            <a:schemeClr val="lt1"/>
-          </a:fontRef>
-        </p:style>
-        <p:txBody>
-          <a:bodyPr rtlCol="0" anchor="ctr"/>
-          <a:lstStyle/>
-          <a:p>
-            <a:pPr algn="ctr"/>
-            <a:endParaRPr lang="en-US"/>
-          </a:p>
-        </p:txBody>
-      </p:sp>
-    </p:spTree>
-    <p:extLst>
-      <p:ext uri="{BB962C8B-B14F-4D97-AF65-F5344CB8AC3E}">
-        <p14:creationId xmlns:p14="http://schemas.microsoft.com/office/powerpoint/2010/main" val="3706186684"/>
-      </p:ext>
-    </p:extLst>
-  </p:cSld>
-  <p:clrMapOvr>
-    <a:masterClrMapping/>
-  </p:clrMapOvr>
-</p:sld>
-</file>
-
-<file path=ppt/slides/slide5.xml><?xml version="1.0" encoding="utf-8"?>
-<p:sld xmlns:a="http://schemas.openxmlformats.org/drawingml/2006/main" xmlns:r="http://schemas.openxmlformats.org/officeDocument/2006/relationships" xmlns:p="http://schemas.openxmlformats.org/presentationml/2006/main">
-  <p:cSld>
-    <p:spTree>
-      <p:nvGrpSpPr>
-        <p:cNvPr id="1" name=""/>
-        <p:cNvGrpSpPr/>
-        <p:nvPr/>
-      </p:nvGrpSpPr>
-      <p:grpSpPr>
-        <a:xfrm>
-          <a:off x="0" y="0"/>
-          <a:ext cx="0" cy="0"/>
-          <a:chOff x="0" y="0"/>
-          <a:chExt cx="0" cy="0"/>
-        </a:xfrm>
-      </p:grpSpPr>
-      <mc:AlternateContent xmlns:mc="http://schemas.openxmlformats.org/markup-compatibility/2006" xmlns:a14="http://schemas.microsoft.com/office/drawing/2010/main">
-        <mc:Choice Requires="a14">
-          <p:sp>
-            <p:nvSpPr>
-              <p:cNvPr id="2" name="Content Placeholder 1">
-                <a:extLst>
-                  <a:ext uri="{FF2B5EF4-FFF2-40B4-BE49-F238E27FC236}">
-                    <a16:creationId xmlns:a16="http://schemas.microsoft.com/office/drawing/2014/main" id="{F152A18D-DBEB-07F5-D91D-0C0BB588AD51}"/>
-                  </a:ext>
-                </a:extLst>
-              </p:cNvPr>
-              <p:cNvSpPr>
-                <a:spLocks noGrp="1"/>
-              </p:cNvSpPr>
-              <p:nvPr>
-                <p:ph sz="half" idx="1"/>
-              </p:nvPr>
-            </p:nvSpPr>
-            <p:spPr>
-              <a:xfrm>
-                <a:off x="402264" y="1799674"/>
-                <a:ext cx="5905230" cy="4351339"/>
-              </a:xfrm>
-            </p:spPr>
-            <p:txBody>
-              <a:bodyPr>
-                <a:normAutofit fontScale="77500" lnSpcReduction="20000"/>
-              </a:bodyPr>
-              <a:lstStyle/>
-              <a:p>
-                <a:r>
-                  <a:rPr lang="en-US" dirty="0"/>
-                  <a:t>Plain recursion</a:t>
-                </a:r>
-              </a:p>
-              <a:p>
-                <a:pPr lvl="1"/>
-                <a:r>
-                  <a:rPr lang="en-US" dirty="0">
-                    <a:solidFill>
-                      <a:srgbClr val="00B0F0"/>
-                    </a:solidFill>
-                  </a:rPr>
-                  <a:t>(+) </a:t>
-                </a:r>
-                <a:r>
-                  <a:rPr lang="en-US" dirty="0"/>
-                  <a:t>Easy recursive formula and code</a:t>
-                </a:r>
-              </a:p>
-              <a:p>
-                <a:pPr lvl="1"/>
-                <a:r>
-                  <a:rPr lang="en-US" dirty="0">
-                    <a:solidFill>
-                      <a:srgbClr val="00B0F0"/>
-                    </a:solidFill>
-                  </a:rPr>
-                  <a:t>(+) </a:t>
-                </a:r>
-                <a:r>
-                  <a:rPr lang="en-US" dirty="0"/>
-                  <a:t>Fine for </a:t>
-                </a:r>
-                <a14:m>
-                  <m:oMath xmlns:m="http://schemas.openxmlformats.org/officeDocument/2006/math">
-                    <m:r>
-                      <a:rPr lang="en-US" i="1" dirty="0" smtClean="0">
-                        <a:latin typeface="Cambria Math" panose="02040503050406030204" pitchFamily="18" charset="0"/>
-                      </a:rPr>
-                      <m:t>𝑛</m:t>
-                    </m:r>
-                    <m:r>
-                      <a:rPr lang="en-US" i="1" dirty="0" smtClean="0">
-                        <a:latin typeface="Cambria Math" panose="02040503050406030204" pitchFamily="18" charset="0"/>
-                      </a:rPr>
-                      <m:t>&lt;= 10</m:t>
-                    </m:r>
-                  </m:oMath>
-                </a14:m>
-                <a:r>
-                  <a:rPr lang="en-US" dirty="0"/>
-                  <a:t> </a:t>
-                </a:r>
-              </a:p>
-              <a:p>
-                <a:pPr lvl="1"/>
-                <a:r>
-                  <a:rPr lang="en-US" dirty="0">
-                    <a:solidFill>
-                      <a:srgbClr val="FF6987"/>
-                    </a:solidFill>
-                  </a:rPr>
-                  <a:t>(-) </a:t>
-                </a:r>
-                <a:r>
-                  <a:rPr lang="en-US" dirty="0"/>
-                  <a:t>Massive repeated work</a:t>
-                </a:r>
-              </a:p>
-              <a:p>
-                <a:pPr lvl="1"/>
-                <a:r>
-                  <a:rPr lang="en-US" dirty="0">
-                    <a:solidFill>
-                      <a:srgbClr val="FF6987"/>
-                    </a:solidFill>
-                  </a:rPr>
-                  <a:t>(-) </a:t>
-                </a:r>
-                <a:r>
-                  <a:rPr lang="en-US" dirty="0"/>
-                  <a:t>Quick stack overflow</a:t>
-                </a:r>
-              </a:p>
-              <a:p>
-                <a:pPr lvl="1"/>
-                <a:r>
-                  <a:rPr lang="en-US" dirty="0">
-                    <a:solidFill>
-                      <a:srgbClr val="FF6987"/>
-                    </a:solidFill>
-                  </a:rPr>
-                  <a:t>(-)</a:t>
-                </a:r>
-                <a:r>
-                  <a:rPr lang="en-US" dirty="0"/>
-                  <a:t> Does not scale</a:t>
-                </a:r>
-              </a:p>
-              <a:p>
-                <a:r>
-                  <a:rPr lang="en-US" dirty="0"/>
-                  <a:t>Memorized recursion</a:t>
-                </a:r>
-              </a:p>
-              <a:p>
-                <a:pPr lvl="1"/>
-                <a:r>
-                  <a:rPr lang="en-US" dirty="0">
-                    <a:solidFill>
-                      <a:srgbClr val="00B0F0"/>
-                    </a:solidFill>
-                  </a:rPr>
-                  <a:t>(+)</a:t>
-                </a:r>
-                <a:r>
-                  <a:rPr lang="en-US" dirty="0"/>
-                  <a:t> Avoids repeated work</a:t>
-                </a:r>
-              </a:p>
-              <a:p>
-                <a:pPr lvl="1"/>
-                <a:r>
-                  <a:rPr lang="en-US" dirty="0">
-                    <a:solidFill>
-                      <a:srgbClr val="00B0F0"/>
-                    </a:solidFill>
-                  </a:rPr>
-                  <a:t>(+)</a:t>
-                </a:r>
-                <a:r>
-                  <a:rPr lang="en-US" dirty="0"/>
-                  <a:t> Parallelizable</a:t>
-                </a:r>
-              </a:p>
-              <a:p>
-                <a:pPr lvl="1"/>
-                <a:r>
-                  <a:rPr lang="en-US" dirty="0">
-                    <a:solidFill>
-                      <a:srgbClr val="F080A0"/>
-                    </a:solidFill>
-                  </a:rPr>
-                  <a:t>(-)</a:t>
-                </a:r>
-                <a:r>
-                  <a:rPr lang="en-US" dirty="0"/>
-                  <a:t> recursion overhead</a:t>
-                </a:r>
-              </a:p>
-              <a:p>
-                <a:r>
-                  <a:rPr lang="en-US" dirty="0"/>
-                  <a:t>Iterative DP</a:t>
-                </a:r>
-              </a:p>
-              <a:p>
-                <a:pPr lvl="1"/>
-                <a:r>
-                  <a:rPr lang="en-US" dirty="0">
-                    <a:solidFill>
-                      <a:srgbClr val="00B0F0"/>
-                    </a:solidFill>
-                  </a:rPr>
-                  <a:t>(+) </a:t>
-                </a:r>
-                <a:r>
-                  <a:rPr lang="en-US" dirty="0"/>
-                  <a:t>fast</a:t>
-                </a:r>
-              </a:p>
-              <a:p>
-                <a:pPr lvl="1"/>
-                <a:r>
-                  <a:rPr lang="en-US" dirty="0">
-                    <a:solidFill>
-                      <a:srgbClr val="00B0F0"/>
-                    </a:solidFill>
-                  </a:rPr>
-                  <a:t>(+)</a:t>
-                </a:r>
-                <a:r>
-                  <a:rPr lang="en-US" dirty="0"/>
-                  <a:t> stable</a:t>
-                </a:r>
-              </a:p>
-              <a:p>
-                <a:pPr lvl="1"/>
-                <a:r>
-                  <a:rPr lang="en-US" dirty="0">
-                    <a:solidFill>
-                      <a:srgbClr val="FF6987"/>
-                    </a:solidFill>
-                  </a:rPr>
-                  <a:t>(-)</a:t>
-                </a:r>
-                <a:r>
-                  <a:rPr lang="en-US" dirty="0"/>
-                  <a:t> no parallelization</a:t>
-                </a:r>
-              </a:p>
-              <a:p>
-                <a:pPr lvl="1"/>
-                <a:r>
-                  <a:rPr lang="en-US" dirty="0">
-                    <a:solidFill>
-                      <a:srgbClr val="FF6987"/>
-                    </a:solidFill>
-                  </a:rPr>
-                  <a:t>(-) </a:t>
-                </a:r>
-                <a:r>
-                  <a:rPr lang="en-US" dirty="0"/>
-                  <a:t>harder implementation</a:t>
-                </a:r>
-              </a:p>
-              <a:p>
-                <a:endParaRPr lang="en-US" dirty="0"/>
-              </a:p>
-              <a:p>
-                <a:pPr lvl="1"/>
-                <a:endParaRPr lang="en-US" dirty="0"/>
-              </a:p>
-            </p:txBody>
-          </p:sp>
-        </mc:Choice>
-        <mc:Fallback xmlns="">
-          <p:sp>
-            <p:nvSpPr>
-              <p:cNvPr id="2" name="Content Placeholder 1">
-                <a:extLst>
-                  <a:ext uri="{FF2B5EF4-FFF2-40B4-BE49-F238E27FC236}">
-                    <a16:creationId xmlns:a16="http://schemas.microsoft.com/office/drawing/2014/main" id="{F152A18D-DBEB-07F5-D91D-0C0BB588AD51}"/>
-                  </a:ext>
-                </a:extLst>
-              </p:cNvPr>
-              <p:cNvSpPr>
-                <a:spLocks noGrp="1" noRot="1" noChangeAspect="1" noMove="1" noResize="1" noEditPoints="1" noAdjustHandles="1" noChangeArrowheads="1" noChangeShapeType="1" noTextEdit="1"/>
-              </p:cNvSpPr>
-              <p:nvPr>
-                <p:ph sz="half" idx="1"/>
-              </p:nvPr>
-            </p:nvSpPr>
-            <p:spPr>
-              <a:xfrm>
-                <a:off x="402264" y="1799674"/>
-                <a:ext cx="5905230" cy="4351339"/>
-              </a:xfrm>
-              <a:blipFill>
-                <a:blip r:embed="rId2"/>
-                <a:stretch>
-                  <a:fillRect l="-1238" t="-3081"/>
-                </a:stretch>
-              </a:blipFill>
-            </p:spPr>
-            <p:txBody>
-              <a:bodyPr/>
-              <a:lstStyle/>
-              <a:p>
-                <a:r>
-                  <a:rPr lang="en-US">
-                    <a:noFill/>
-                  </a:rPr>
-                  <a:t> </a:t>
-                </a:r>
-              </a:p>
-            </p:txBody>
-          </p:sp>
-        </mc:Fallback>
-      </mc:AlternateContent>
-      <p:pic>
-        <p:nvPicPr>
-          <p:cNvPr id="8" name="Content Placeholder 7">
-            <a:extLst>
-              <a:ext uri="{FF2B5EF4-FFF2-40B4-BE49-F238E27FC236}">
-                <a16:creationId xmlns:a16="http://schemas.microsoft.com/office/drawing/2014/main" id="{FDD72F23-A12C-F229-13A4-62BB0DBCD587}"/>
-              </a:ext>
-            </a:extLst>
-          </p:cNvPr>
-          <p:cNvPicPr>
-            <a:picLocks noGrp="1" noChangeAspect="1"/>
-          </p:cNvPicPr>
-          <p:nvPr>
-            <p:ph sz="half" idx="2"/>
-          </p:nvPr>
-        </p:nvPicPr>
-        <p:blipFill>
-          <a:blip r:embed="rId3"/>
-          <a:stretch>
-            <a:fillRect/>
-          </a:stretch>
-        </p:blipFill>
-        <p:spPr>
-          <a:xfrm>
-            <a:off x="6799871" y="590978"/>
-            <a:ext cx="4039164" cy="1924319"/>
-          </a:xfrm>
-          <a:prstGeom prst="rect">
-            <a:avLst/>
-          </a:prstGeom>
-        </p:spPr>
-      </p:pic>
-      <p:sp>
-        <p:nvSpPr>
-          <p:cNvPr id="4" name="Title 3">
-            <a:extLst>
-              <a:ext uri="{FF2B5EF4-FFF2-40B4-BE49-F238E27FC236}">
-                <a16:creationId xmlns:a16="http://schemas.microsoft.com/office/drawing/2014/main" id="{50951B58-0855-2B93-5B27-11C3FB655EBC}"/>
-              </a:ext>
-            </a:extLst>
-          </p:cNvPr>
-          <p:cNvSpPr>
-            <a:spLocks noGrp="1"/>
-          </p:cNvSpPr>
-          <p:nvPr>
-            <p:ph type="title"/>
-          </p:nvPr>
-        </p:nvSpPr>
-        <p:spPr/>
-        <p:txBody>
-          <a:bodyPr/>
-          <a:lstStyle/>
-          <a:p>
-            <a:r>
-              <a:rPr lang="en-US" dirty="0"/>
-              <a:t>Possible Solution/Issues</a:t>
-            </a:r>
-          </a:p>
-        </p:txBody>
-      </p:sp>
-      <p:sp>
-        <p:nvSpPr>
-          <p:cNvPr id="5" name="Footer Placeholder 4">
-            <a:extLst>
-              <a:ext uri="{FF2B5EF4-FFF2-40B4-BE49-F238E27FC236}">
-                <a16:creationId xmlns:a16="http://schemas.microsoft.com/office/drawing/2014/main" id="{11365555-6A05-2F81-9E6D-7A4293873804}"/>
-              </a:ext>
-            </a:extLst>
-          </p:cNvPr>
-          <p:cNvSpPr>
-            <a:spLocks noGrp="1"/>
-          </p:cNvSpPr>
-          <p:nvPr>
-            <p:ph type="ftr" sz="quarter" idx="11"/>
-          </p:nvPr>
-        </p:nvSpPr>
-        <p:spPr/>
-        <p:txBody>
-          <a:bodyPr/>
-          <a:lstStyle/>
-          <a:p>
-            <a:r>
-              <a:rPr lang="en-US"/>
-              <a:t>UNIVERSITY OF SOUTH FLORIDA</a:t>
-            </a:r>
-            <a:endParaRPr lang="en-US" dirty="0"/>
-          </a:p>
-        </p:txBody>
-      </p:sp>
-      <p:pic>
-        <p:nvPicPr>
-          <p:cNvPr id="10" name="Picture 9">
-            <a:extLst>
-              <a:ext uri="{FF2B5EF4-FFF2-40B4-BE49-F238E27FC236}">
-                <a16:creationId xmlns:a16="http://schemas.microsoft.com/office/drawing/2014/main" id="{22C96384-F66A-0FF0-DA94-FF5333D8C89F}"/>
-              </a:ext>
-            </a:extLst>
-          </p:cNvPr>
-          <p:cNvPicPr>
-            <a:picLocks noChangeAspect="1"/>
-          </p:cNvPicPr>
-          <p:nvPr/>
-        </p:nvPicPr>
-        <p:blipFill>
-          <a:blip r:embed="rId4"/>
-          <a:stretch>
-            <a:fillRect/>
-          </a:stretch>
-        </p:blipFill>
-        <p:spPr>
-          <a:xfrm>
-            <a:off x="6799871" y="2796059"/>
-            <a:ext cx="4791744" cy="3286584"/>
-          </a:xfrm>
-          <a:prstGeom prst="rect">
-            <a:avLst/>
-          </a:prstGeom>
-        </p:spPr>
-      </p:pic>
-    </p:spTree>
-    <p:extLst>
-      <p:ext uri="{BB962C8B-B14F-4D97-AF65-F5344CB8AC3E}">
-        <p14:creationId xmlns:p14="http://schemas.microsoft.com/office/powerpoint/2010/main" val="1335829411"/>
-      </p:ext>
-    </p:extLst>
-  </p:cSld>
-  <p:clrMapOvr>
-    <a:masterClrMapping/>
-  </p:clrMapOvr>
-</p:sld>
-</file>
-
-<file path=ppt/slides/slide6.xml><?xml version="1.0" encoding="utf-8"?>
-<p:sld xmlns:a="http://schemas.openxmlformats.org/drawingml/2006/main" xmlns:r="http://schemas.openxmlformats.org/officeDocument/2006/relationships" xmlns:p="http://schemas.openxmlformats.org/presentationml/2006/main">
-  <p:cSld>
-    <p:spTree>
-      <p:nvGrpSpPr>
-        <p:cNvPr id="1" name=""/>
-        <p:cNvGrpSpPr/>
-        <p:nvPr/>
-      </p:nvGrpSpPr>
-      <p:grpSpPr>
-        <a:xfrm>
-          <a:off x="0" y="0"/>
-          <a:ext cx="0" cy="0"/>
-          <a:chOff x="0" y="0"/>
-          <a:chExt cx="0" cy="0"/>
-        </a:xfrm>
-      </p:grpSpPr>
-      <p:sp>
-        <p:nvSpPr>
-          <p:cNvPr id="6" name="Content Placeholder 5">
-            <a:extLst>
-              <a:ext uri="{FF2B5EF4-FFF2-40B4-BE49-F238E27FC236}">
-                <a16:creationId xmlns:a16="http://schemas.microsoft.com/office/drawing/2014/main" id="{F0405C86-1588-F943-FD88-08AD735CF119}"/>
-              </a:ext>
-            </a:extLst>
-          </p:cNvPr>
-          <p:cNvSpPr>
-            <a:spLocks noGrp="1"/>
-          </p:cNvSpPr>
-          <p:nvPr>
-            <p:ph sz="half" idx="1"/>
-          </p:nvPr>
-        </p:nvSpPr>
-        <p:spPr>
-          <a:xfrm>
-            <a:off x="402264" y="1390262"/>
-            <a:ext cx="5541336" cy="4760752"/>
-          </a:xfrm>
-        </p:spPr>
-        <p:txBody>
-          <a:bodyPr>
-            <a:normAutofit lnSpcReduction="10000"/>
-          </a:bodyPr>
-          <a:lstStyle/>
-          <a:p>
-            <a:pPr marL="0" indent="0">
-              <a:buNone/>
-            </a:pPr>
-            <a:r>
-              <a:rPr lang="en-US" b="1" dirty="0"/>
-              <a:t>Methodology:</a:t>
-            </a:r>
-          </a:p>
-          <a:p>
-            <a:pPr marL="0" indent="0">
-              <a:buNone/>
-            </a:pPr>
-            <a:r>
-              <a:rPr lang="en-US" dirty="0"/>
-              <a:t>1. Initialize C(0)</a:t>
-            </a:r>
-            <a:br>
-              <a:rPr lang="en-US" dirty="0"/>
-            </a:br>
-            <a:r>
-              <a:rPr lang="en-US" dirty="0"/>
-              <a:t>2. Assign one manager thread per Catalan number</a:t>
-            </a:r>
-            <a:br>
-              <a:rPr lang="en-US" dirty="0"/>
-            </a:br>
-            <a:r>
-              <a:rPr lang="en-US" dirty="0"/>
-              <a:t>3. Wait for dependencies to be satisfied</a:t>
-            </a:r>
-            <a:br>
-              <a:rPr lang="en-US" dirty="0"/>
-            </a:br>
-            <a:r>
-              <a:rPr lang="en-US" dirty="0"/>
-              <a:t>4. Split each recurrence into worker-thread chunks</a:t>
-            </a:r>
-            <a:br>
-              <a:rPr lang="en-US" dirty="0"/>
-            </a:br>
-            <a:r>
-              <a:rPr lang="en-US" dirty="0"/>
-              <a:t>5. Compute partial sums in parallel</a:t>
-            </a:r>
-            <a:br>
-              <a:rPr lang="en-US" dirty="0"/>
-            </a:br>
-            <a:r>
-              <a:rPr lang="en-US" dirty="0"/>
-              <a:t>6. Combine and store results</a:t>
-            </a:r>
-            <a:br>
-              <a:rPr lang="en-US" dirty="0"/>
-            </a:br>
-            <a:r>
-              <a:rPr lang="en-US" dirty="0"/>
-              <a:t>7. Notify manager threads</a:t>
-            </a:r>
-          </a:p>
-          <a:p>
-            <a:pPr marL="0" indent="0">
-              <a:buNone/>
-            </a:pPr>
-            <a:endParaRPr lang="en-US" dirty="0"/>
-          </a:p>
-        </p:txBody>
-      </p:sp>
-      <p:pic>
-        <p:nvPicPr>
-          <p:cNvPr id="3" name="Content Placeholder 2">
-            <a:extLst>
-              <a:ext uri="{FF2B5EF4-FFF2-40B4-BE49-F238E27FC236}">
-                <a16:creationId xmlns:a16="http://schemas.microsoft.com/office/drawing/2014/main" id="{8F163B48-7DAC-79C0-49C3-EA5648CAFDCE}"/>
-              </a:ext>
-            </a:extLst>
-          </p:cNvPr>
-          <p:cNvPicPr>
-            <a:picLocks noGrp="1" noChangeAspect="1"/>
-          </p:cNvPicPr>
-          <p:nvPr>
-            <p:ph sz="half" idx="2"/>
-          </p:nvPr>
-        </p:nvPicPr>
-        <p:blipFill>
-          <a:blip r:embed="rId2"/>
-          <a:stretch>
-            <a:fillRect/>
-          </a:stretch>
-        </p:blipFill>
-        <p:spPr>
-          <a:xfrm>
-            <a:off x="6040621" y="1971449"/>
-            <a:ext cx="5772150" cy="1984433"/>
-          </a:xfrm>
-          <a:prstGeom prst="rect">
-            <a:avLst/>
-          </a:prstGeom>
-        </p:spPr>
-      </p:pic>
-      <p:sp>
-        <p:nvSpPr>
-          <p:cNvPr id="4" name="Title 3">
-            <a:extLst>
-              <a:ext uri="{FF2B5EF4-FFF2-40B4-BE49-F238E27FC236}">
-                <a16:creationId xmlns:a16="http://schemas.microsoft.com/office/drawing/2014/main" id="{857DD158-8775-D326-E8A2-DEA92A9DAE5A}"/>
-              </a:ext>
-            </a:extLst>
-          </p:cNvPr>
-          <p:cNvSpPr>
-            <a:spLocks noGrp="1"/>
-          </p:cNvSpPr>
-          <p:nvPr>
-            <p:ph type="title"/>
-          </p:nvPr>
-        </p:nvSpPr>
-        <p:spPr>
-          <a:xfrm>
-            <a:off x="402264" y="365125"/>
-            <a:ext cx="6065113" cy="1325563"/>
-          </a:xfrm>
-        </p:spPr>
-        <p:txBody>
-          <a:bodyPr/>
-          <a:lstStyle/>
-          <a:p>
-            <a:r>
-              <a:rPr lang="en-US" dirty="0"/>
-              <a:t>Multithread solution</a:t>
-            </a:r>
-          </a:p>
-        </p:txBody>
-      </p:sp>
-      <p:sp>
-        <p:nvSpPr>
-          <p:cNvPr id="5" name="Footer Placeholder 4">
-            <a:extLst>
-              <a:ext uri="{FF2B5EF4-FFF2-40B4-BE49-F238E27FC236}">
-                <a16:creationId xmlns:a16="http://schemas.microsoft.com/office/drawing/2014/main" id="{681395FF-1A3E-6D1D-791C-517B4F2E72E5}"/>
-              </a:ext>
-            </a:extLst>
-          </p:cNvPr>
-          <p:cNvSpPr>
-            <a:spLocks noGrp="1"/>
-          </p:cNvSpPr>
-          <p:nvPr>
-            <p:ph type="ftr" sz="quarter" idx="11"/>
-          </p:nvPr>
-        </p:nvSpPr>
-        <p:spPr/>
-        <p:txBody>
-          <a:bodyPr/>
-          <a:lstStyle/>
-          <a:p>
-            <a:r>
-              <a:rPr lang="en-US"/>
-              <a:t>UNIVERSITY OF SOUTH FLORIDA</a:t>
-            </a:r>
-            <a:endParaRPr lang="en-US" dirty="0"/>
-          </a:p>
-        </p:txBody>
-      </p:sp>
-      <mc:AlternateContent xmlns:mc="http://schemas.openxmlformats.org/markup-compatibility/2006">
-        <mc:Choice xmlns:a14="http://schemas.microsoft.com/office/drawing/2010/main" Requires="a14">
-          <p:sp>
-            <p:nvSpPr>
-              <p:cNvPr id="9" name="TextBox 8">
-                <a:extLst>
-                  <a:ext uri="{FF2B5EF4-FFF2-40B4-BE49-F238E27FC236}">
-                    <a16:creationId xmlns:a16="http://schemas.microsoft.com/office/drawing/2014/main" id="{0A4D7A0E-3DCD-B59C-8124-1E58D8DDD71B}"/>
-                  </a:ext>
-                </a:extLst>
-              </p:cNvPr>
-              <p:cNvSpPr txBox="1"/>
-              <p:nvPr/>
-            </p:nvSpPr>
-            <p:spPr>
-              <a:xfrm>
-                <a:off x="6467377" y="4881000"/>
-                <a:ext cx="5541336" cy="890500"/>
-              </a:xfrm>
-              <a:prstGeom prst="rect">
-                <a:avLst/>
-              </a:prstGeom>
-            </p:spPr>
-            <p:txBody>
-              <a:bodyPr vert="horz" lIns="91440" tIns="45720" rIns="91440" bIns="45720" rtlCol="0">
-                <a:normAutofit/>
-              </a:bodyPr>
-              <a:lstStyle>
-                <a:lvl1pPr indent="0">
-                  <a:lnSpc>
-                    <a:spcPct val="90000"/>
-                  </a:lnSpc>
-                  <a:spcBef>
-                    <a:spcPts val="1000"/>
-                  </a:spcBef>
-                  <a:buFont typeface="Arial" panose="020B0604020202020204" pitchFamily="34" charset="0"/>
-                  <a:buNone/>
-                  <a:defRPr sz="2800" b="1">
-                    <a:solidFill>
-                      <a:schemeClr val="tx2"/>
-                    </a:solidFill>
-                  </a:defRPr>
-                </a:lvl1pPr>
-                <a:lvl2pPr marL="685783" indent="-228594">
-                  <a:lnSpc>
-                    <a:spcPct val="90000"/>
-                  </a:lnSpc>
-                  <a:spcBef>
-                    <a:spcPts val="500"/>
-                  </a:spcBef>
-                  <a:buFont typeface="Arial" panose="020B0604020202020204" pitchFamily="34" charset="0"/>
-                  <a:buChar char="•"/>
-                  <a:defRPr sz="2400">
-                    <a:solidFill>
-                      <a:schemeClr val="tx2"/>
-                    </a:solidFill>
-                  </a:defRPr>
-                </a:lvl2pPr>
-                <a:lvl3pPr marL="1142971" indent="-228594">
-                  <a:lnSpc>
-                    <a:spcPct val="90000"/>
-                  </a:lnSpc>
-                  <a:spcBef>
-                    <a:spcPts val="500"/>
-                  </a:spcBef>
-                  <a:buFont typeface="Arial" panose="020B0604020202020204" pitchFamily="34" charset="0"/>
-                  <a:buChar char="•"/>
-                  <a:defRPr sz="2000">
-                    <a:solidFill>
-                      <a:schemeClr val="tx2"/>
-                    </a:solidFill>
-                  </a:defRPr>
-                </a:lvl3pPr>
-                <a:lvl4pPr marL="1600160" indent="-228594">
-                  <a:lnSpc>
-                    <a:spcPct val="90000"/>
-                  </a:lnSpc>
-                  <a:spcBef>
-                    <a:spcPts val="500"/>
-                  </a:spcBef>
-                  <a:buFont typeface="Arial" panose="020B0604020202020204" pitchFamily="34" charset="0"/>
-                  <a:buChar char="•"/>
-                  <a:defRPr>
-                    <a:solidFill>
-                      <a:schemeClr val="tx2"/>
-                    </a:solidFill>
-                  </a:defRPr>
-                </a:lvl4pPr>
-                <a:lvl5pPr marL="2057349" indent="-228594">
-                  <a:lnSpc>
-                    <a:spcPct val="90000"/>
-                  </a:lnSpc>
-                  <a:spcBef>
-                    <a:spcPts val="500"/>
-                  </a:spcBef>
-                  <a:buFont typeface="Arial" panose="020B0604020202020204" pitchFamily="34" charset="0"/>
-                  <a:buChar char="•"/>
-                  <a:defRPr>
-                    <a:solidFill>
-                      <a:schemeClr val="tx2"/>
-                    </a:solidFill>
-                  </a:defRPr>
-                </a:lvl5pPr>
-                <a:lvl6pPr marL="2514537" indent="-228594">
-                  <a:lnSpc>
-                    <a:spcPct val="90000"/>
-                  </a:lnSpc>
-                  <a:spcBef>
-                    <a:spcPts val="500"/>
-                  </a:spcBef>
-                  <a:buFont typeface="Arial" panose="020B0604020202020204" pitchFamily="34" charset="0"/>
-                  <a:buChar char="•"/>
-                </a:lvl6pPr>
-                <a:lvl7pPr marL="2971726" indent="-228594">
-                  <a:lnSpc>
-                    <a:spcPct val="90000"/>
-                  </a:lnSpc>
-                  <a:spcBef>
-                    <a:spcPts val="500"/>
-                  </a:spcBef>
-                  <a:buFont typeface="Arial" panose="020B0604020202020204" pitchFamily="34" charset="0"/>
-                  <a:buChar char="•"/>
-                </a:lvl7pPr>
-                <a:lvl8pPr marL="3428914" indent="-228594">
-                  <a:lnSpc>
-                    <a:spcPct val="90000"/>
-                  </a:lnSpc>
-                  <a:spcBef>
-                    <a:spcPts val="500"/>
-                  </a:spcBef>
-                  <a:buFont typeface="Arial" panose="020B0604020202020204" pitchFamily="34" charset="0"/>
-                  <a:buChar char="•"/>
-                </a:lvl8pPr>
-                <a:lvl9pPr marL="3886103" indent="-228594">
-                  <a:lnSpc>
-                    <a:spcPct val="90000"/>
-                  </a:lnSpc>
-                  <a:spcBef>
-                    <a:spcPts val="500"/>
-                  </a:spcBef>
-                  <a:buFont typeface="Arial" panose="020B0604020202020204" pitchFamily="34" charset="0"/>
-                  <a:buChar char="•"/>
-                </a:lvl9pPr>
-              </a:lstStyle>
-              <a:p>
-                <a:r>
-                  <a:rPr lang="en-US" dirty="0"/>
-                  <a:t>Key formula: </a:t>
-                </a:r>
-                <a14:m>
-                  <m:oMath xmlns:m="http://schemas.openxmlformats.org/officeDocument/2006/math">
-                    <m:sSub>
-                      <m:sSubPr>
-                        <m:ctrlPr>
-                          <a:rPr lang="en-US"/>
-                        </m:ctrlPr>
-                      </m:sSubPr>
-                      <m:e>
-                        <m:r>
-                          <a:rPr lang="en-US"/>
-                          <m:t>𝐶</m:t>
-                        </m:r>
-                      </m:e>
-                      <m:sub>
-                        <m:r>
-                          <a:rPr lang="en-US"/>
-                          <m:t>𝑛</m:t>
-                        </m:r>
-                      </m:sub>
-                    </m:sSub>
-                    <m:r>
-                      <a:rPr lang="en-US"/>
-                      <m:t>= </m:t>
-                    </m:r>
-                    <m:nary>
-                      <m:naryPr>
-                        <m:chr m:val="∑"/>
-                        <m:ctrlPr>
-                          <a:rPr lang="en-US"/>
-                        </m:ctrlPr>
-                      </m:naryPr>
-                      <m:sub>
-                        <m:r>
-                          <m:rPr>
-                            <m:brk m:alnAt="23"/>
-                          </m:rPr>
-                          <a:rPr lang="en-US"/>
-                          <m:t>𝑖</m:t>
-                        </m:r>
-                        <m:r>
-                          <a:rPr lang="en-US"/>
-                          <m:t>=0</m:t>
-                        </m:r>
-                      </m:sub>
-                      <m:sup>
-                        <m:r>
-                          <a:rPr lang="en-US"/>
-                          <m:t>𝑛</m:t>
-                        </m:r>
-                        <m:r>
-                          <a:rPr lang="en-US"/>
-                          <m:t>−1</m:t>
-                        </m:r>
-                      </m:sup>
-                      <m:e>
-                        <m:sSub>
-                          <m:sSubPr>
-                            <m:ctrlPr>
-                              <a:rPr lang="en-US"/>
-                            </m:ctrlPr>
-                          </m:sSubPr>
-                          <m:e>
-                            <m:r>
-                              <a:rPr lang="en-US"/>
-                              <m:t>𝐶</m:t>
-                            </m:r>
-                          </m:e>
-                          <m:sub>
-                            <m:r>
-                              <a:rPr lang="en-US"/>
-                              <m:t>𝑖</m:t>
-                            </m:r>
-                          </m:sub>
-                        </m:sSub>
-                        <m:sSub>
-                          <m:sSubPr>
-                            <m:ctrlPr>
-                              <a:rPr lang="en-US"/>
-                            </m:ctrlPr>
-                          </m:sSubPr>
-                          <m:e>
-                            <m:r>
-                              <a:rPr lang="en-US"/>
-                              <m:t>𝐶</m:t>
-                            </m:r>
-                          </m:e>
-                          <m:sub>
-                            <m:r>
-                              <a:rPr lang="en-US"/>
-                              <m:t>𝑛</m:t>
-                            </m:r>
-                            <m:r>
-                              <a:rPr lang="en-US"/>
-                              <m:t>−1−</m:t>
-                            </m:r>
-                            <m:r>
-                              <a:rPr lang="en-US"/>
-                              <m:t>𝑖</m:t>
-                            </m:r>
-                          </m:sub>
-                        </m:sSub>
-                      </m:e>
-                    </m:nary>
-                  </m:oMath>
-                </a14:m>
-                <a:endParaRPr lang="en-US" dirty="0"/>
-              </a:p>
-            </p:txBody>
-          </p:sp>
-        </mc:Choice>
-        <mc:Fallback>
-          <p:sp>
-            <p:nvSpPr>
-              <p:cNvPr id="9" name="TextBox 8">
-                <a:extLst>
-                  <a:ext uri="{FF2B5EF4-FFF2-40B4-BE49-F238E27FC236}">
-                    <a16:creationId xmlns:a16="http://schemas.microsoft.com/office/drawing/2014/main" id="{0A4D7A0E-3DCD-B59C-8124-1E58D8DDD71B}"/>
-                  </a:ext>
-                </a:extLst>
-              </p:cNvPr>
-              <p:cNvSpPr txBox="1">
-                <a:spLocks noRot="1" noChangeAspect="1" noMove="1" noResize="1" noEditPoints="1" noAdjustHandles="1" noChangeArrowheads="1" noChangeShapeType="1" noTextEdit="1"/>
-              </p:cNvSpPr>
-              <p:nvPr/>
-            </p:nvSpPr>
-            <p:spPr>
-              <a:xfrm>
-                <a:off x="6467377" y="4881000"/>
-                <a:ext cx="5541336" cy="890500"/>
-              </a:xfrm>
-              <a:prstGeom prst="rect">
-                <a:avLst/>
-              </a:prstGeom>
-              <a:blipFill>
-                <a:blip r:embed="rId3"/>
-                <a:stretch>
-                  <a:fillRect l="-2310" t="-10274"/>
-                </a:stretch>
-              </a:blipFill>
-            </p:spPr>
-            <p:txBody>
-              <a:bodyPr/>
-              <a:lstStyle/>
-              <a:p>
-                <a:r>
-                  <a:rPr lang="en-US">
-                    <a:noFill/>
-                  </a:rPr>
-                  <a:t> </a:t>
-                </a:r>
-              </a:p>
-            </p:txBody>
-          </p:sp>
-        </mc:Fallback>
-      </mc:AlternateContent>
-      <p:sp>
-        <p:nvSpPr>
-          <p:cNvPr id="11" name="TextBox 10">
-            <a:extLst>
-              <a:ext uri="{FF2B5EF4-FFF2-40B4-BE49-F238E27FC236}">
-                <a16:creationId xmlns:a16="http://schemas.microsoft.com/office/drawing/2014/main" id="{0CED00D9-0798-BEC8-59CB-30CC098F6057}"/>
-              </a:ext>
-            </a:extLst>
-          </p:cNvPr>
-          <p:cNvSpPr txBox="1"/>
-          <p:nvPr/>
-        </p:nvSpPr>
-        <p:spPr>
-          <a:xfrm>
-            <a:off x="6189268" y="810704"/>
-            <a:ext cx="6097554" cy="867930"/>
-          </a:xfrm>
-          <a:prstGeom prst="rect">
-            <a:avLst/>
-          </a:prstGeom>
-        </p:spPr>
-        <p:txBody>
-          <a:bodyPr vert="horz" lIns="91440" tIns="45720" rIns="91440" bIns="45720" rtlCol="0">
-            <a:normAutofit/>
-          </a:bodyPr>
-          <a:lstStyle>
-            <a:defPPr>
-              <a:defRPr lang="en-US"/>
-            </a:defPPr>
-            <a:lvl1pPr indent="0">
-              <a:lnSpc>
-                <a:spcPct val="90000"/>
-              </a:lnSpc>
-              <a:spcBef>
-                <a:spcPts val="1000"/>
-              </a:spcBef>
-              <a:buFont typeface="Arial" panose="020B0604020202020204" pitchFamily="34" charset="0"/>
-              <a:buNone/>
-              <a:defRPr sz="2800" b="1">
-                <a:solidFill>
-                  <a:schemeClr val="tx2"/>
-                </a:solidFill>
-              </a:defRPr>
-            </a:lvl1pPr>
-            <a:lvl2pPr marL="685783" indent="-228594">
-              <a:lnSpc>
-                <a:spcPct val="90000"/>
-              </a:lnSpc>
-              <a:spcBef>
-                <a:spcPts val="500"/>
-              </a:spcBef>
-              <a:buFont typeface="Arial" panose="020B0604020202020204" pitchFamily="34" charset="0"/>
-              <a:buChar char="•"/>
-              <a:defRPr sz="2400">
-                <a:solidFill>
-                  <a:schemeClr val="tx2"/>
-                </a:solidFill>
-              </a:defRPr>
-            </a:lvl2pPr>
-            <a:lvl3pPr marL="1142971" indent="-228594">
-              <a:lnSpc>
-                <a:spcPct val="90000"/>
-              </a:lnSpc>
-              <a:spcBef>
-                <a:spcPts val="500"/>
-              </a:spcBef>
-              <a:buFont typeface="Arial" panose="020B0604020202020204" pitchFamily="34" charset="0"/>
-              <a:buChar char="•"/>
-              <a:defRPr sz="2000">
-                <a:solidFill>
-                  <a:schemeClr val="tx2"/>
-                </a:solidFill>
-              </a:defRPr>
-            </a:lvl3pPr>
-            <a:lvl4pPr marL="1600160" indent="-228594">
-              <a:lnSpc>
-                <a:spcPct val="90000"/>
-              </a:lnSpc>
-              <a:spcBef>
-                <a:spcPts val="500"/>
-              </a:spcBef>
-              <a:buFont typeface="Arial" panose="020B0604020202020204" pitchFamily="34" charset="0"/>
-              <a:buChar char="•"/>
-              <a:defRPr>
-                <a:solidFill>
-                  <a:schemeClr val="tx2"/>
-                </a:solidFill>
-              </a:defRPr>
-            </a:lvl4pPr>
-            <a:lvl5pPr marL="2057349" indent="-228594">
-              <a:lnSpc>
-                <a:spcPct val="90000"/>
-              </a:lnSpc>
-              <a:spcBef>
-                <a:spcPts val="500"/>
-              </a:spcBef>
-              <a:buFont typeface="Arial" panose="020B0604020202020204" pitchFamily="34" charset="0"/>
-              <a:buChar char="•"/>
-              <a:defRPr>
-                <a:solidFill>
-                  <a:schemeClr val="tx2"/>
-                </a:solidFill>
-              </a:defRPr>
-            </a:lvl5pPr>
-            <a:lvl6pPr marL="2514537" indent="-228594">
-              <a:lnSpc>
-                <a:spcPct val="90000"/>
-              </a:lnSpc>
-              <a:spcBef>
-                <a:spcPts val="500"/>
-              </a:spcBef>
-              <a:buFont typeface="Arial" panose="020B0604020202020204" pitchFamily="34" charset="0"/>
-              <a:buChar char="•"/>
-            </a:lvl6pPr>
-            <a:lvl7pPr marL="2971726" indent="-228594">
-              <a:lnSpc>
-                <a:spcPct val="90000"/>
-              </a:lnSpc>
-              <a:spcBef>
-                <a:spcPts val="500"/>
-              </a:spcBef>
-              <a:buFont typeface="Arial" panose="020B0604020202020204" pitchFamily="34" charset="0"/>
-              <a:buChar char="•"/>
-            </a:lvl7pPr>
-            <a:lvl8pPr marL="3428914" indent="-228594">
-              <a:lnSpc>
-                <a:spcPct val="90000"/>
-              </a:lnSpc>
-              <a:spcBef>
-                <a:spcPts val="500"/>
-              </a:spcBef>
-              <a:buFont typeface="Arial" panose="020B0604020202020204" pitchFamily="34" charset="0"/>
-              <a:buChar char="•"/>
-            </a:lvl8pPr>
-            <a:lvl9pPr marL="3886103" indent="-228594">
-              <a:lnSpc>
-                <a:spcPct val="90000"/>
-              </a:lnSpc>
-              <a:spcBef>
-                <a:spcPts val="500"/>
-              </a:spcBef>
-              <a:buFont typeface="Arial" panose="020B0604020202020204" pitchFamily="34" charset="0"/>
-              <a:buChar char="•"/>
-            </a:lvl9pPr>
-          </a:lstStyle>
-          <a:p>
-            <a:r>
-              <a:rPr lang="en-US" dirty="0"/>
-              <a:t>Goal: </a:t>
-            </a:r>
-            <a:r>
-              <a:rPr lang="en-US" b="0" dirty="0"/>
-              <a:t>compute Catalan numbers C(0) to C(n) </a:t>
-            </a:r>
-          </a:p>
-        </p:txBody>
-      </p:sp>
-    </p:spTree>
-    <p:extLst>
-      <p:ext uri="{BB962C8B-B14F-4D97-AF65-F5344CB8AC3E}">
-        <p14:creationId xmlns:p14="http://schemas.microsoft.com/office/powerpoint/2010/main" val="2043867751"/>
-      </p:ext>
-    </p:extLst>
-  </p:cSld>
-  <p:clrMapOvr>
-    <a:masterClrMapping/>
-  </p:clrMapOvr>
-</p:sld>
-</file>
-
-<file path=ppt/slides/slide7.xml><?xml version="1.0" encoding="utf-8"?>
-<p:sld xmlns:a="http://schemas.openxmlformats.org/drawingml/2006/main" xmlns:r="http://schemas.openxmlformats.org/officeDocument/2006/relationships" xmlns:p="http://schemas.openxmlformats.org/presentationml/2006/main">
-  <p:cSld>
-    <p:spTree>
-      <p:nvGrpSpPr>
-        <p:cNvPr id="1" name=""/>
-        <p:cNvGrpSpPr/>
-        <p:nvPr/>
-      </p:nvGrpSpPr>
-      <p:grpSpPr>
-        <a:xfrm>
-          <a:off x="0" y="0"/>
-          <a:ext cx="0" cy="0"/>
-          <a:chOff x="0" y="0"/>
-          <a:chExt cx="0" cy="0"/>
-        </a:xfrm>
-      </p:grpSpPr>
-      <p:sp>
-        <p:nvSpPr>
-          <p:cNvPr id="2" name="Title 1">
-            <a:extLst>
-              <a:ext uri="{FF2B5EF4-FFF2-40B4-BE49-F238E27FC236}">
-                <a16:creationId xmlns:a16="http://schemas.microsoft.com/office/drawing/2014/main" id="{6616F6ED-3640-AFF1-4116-AC1BDCC562FC}"/>
-              </a:ext>
-            </a:extLst>
-          </p:cNvPr>
-          <p:cNvSpPr>
-            <a:spLocks noGrp="1"/>
-          </p:cNvSpPr>
-          <p:nvPr>
-            <p:ph type="title"/>
-          </p:nvPr>
-        </p:nvSpPr>
-        <p:spPr/>
-        <p:txBody>
-          <a:bodyPr/>
-          <a:lstStyle/>
-          <a:p>
-            <a:r>
-              <a:rPr lang="en-US" dirty="0"/>
-              <a:t>Process flow</a:t>
-            </a:r>
-          </a:p>
-        </p:txBody>
-      </p:sp>
-      <p:sp>
-        <p:nvSpPr>
-          <p:cNvPr id="4" name="Footer Placeholder 3">
-            <a:extLst>
-              <a:ext uri="{FF2B5EF4-FFF2-40B4-BE49-F238E27FC236}">
-                <a16:creationId xmlns:a16="http://schemas.microsoft.com/office/drawing/2014/main" id="{21ADF440-B156-2739-EC49-CD48F34D520B}"/>
-              </a:ext>
-            </a:extLst>
-          </p:cNvPr>
-          <p:cNvSpPr>
-            <a:spLocks noGrp="1"/>
-          </p:cNvSpPr>
-          <p:nvPr>
-            <p:ph type="ftr" sz="quarter" idx="11"/>
-          </p:nvPr>
-        </p:nvSpPr>
-        <p:spPr/>
-        <p:txBody>
-          <a:bodyPr/>
-          <a:lstStyle/>
-          <a:p>
-            <a:r>
-              <a:rPr lang="en-US"/>
-              <a:t>UNIVERSITY OF SOUTH FLORIDA</a:t>
-            </a:r>
-            <a:endParaRPr lang="en-US" dirty="0"/>
-          </a:p>
-        </p:txBody>
-      </p:sp>
-      <p:pic>
-        <p:nvPicPr>
-          <p:cNvPr id="9" name="Picture 8">
-            <a:extLst>
-              <a:ext uri="{FF2B5EF4-FFF2-40B4-BE49-F238E27FC236}">
-                <a16:creationId xmlns:a16="http://schemas.microsoft.com/office/drawing/2014/main" id="{5D2EC52B-D92E-EEC3-FDEB-571C6E6E142B}"/>
-              </a:ext>
-            </a:extLst>
-          </p:cNvPr>
-          <p:cNvPicPr>
-            <a:picLocks noChangeAspect="1"/>
-          </p:cNvPicPr>
-          <p:nvPr/>
-        </p:nvPicPr>
-        <p:blipFill>
-          <a:blip r:embed="rId2"/>
-          <a:stretch>
-            <a:fillRect/>
-          </a:stretch>
-        </p:blipFill>
-        <p:spPr>
-          <a:xfrm>
-            <a:off x="5370078" y="867475"/>
-            <a:ext cx="6442693" cy="4286390"/>
-          </a:xfrm>
-          <a:prstGeom prst="rect">
-            <a:avLst/>
-          </a:prstGeom>
-        </p:spPr>
-      </p:pic>
-      <p:sp>
-        <p:nvSpPr>
-          <p:cNvPr id="10" name="Content Placeholder 9">
-            <a:extLst>
-              <a:ext uri="{FF2B5EF4-FFF2-40B4-BE49-F238E27FC236}">
-                <a16:creationId xmlns:a16="http://schemas.microsoft.com/office/drawing/2014/main" id="{B90541E3-8677-8F82-F7BF-357D6C8E5C3E}"/>
-              </a:ext>
-            </a:extLst>
-          </p:cNvPr>
-          <p:cNvSpPr>
-            <a:spLocks noGrp="1"/>
-          </p:cNvSpPr>
-          <p:nvPr>
-            <p:ph idx="1"/>
-          </p:nvPr>
-        </p:nvSpPr>
-        <p:spPr>
-          <a:xfrm>
-            <a:off x="402264" y="1446245"/>
-            <a:ext cx="7090218" cy="4730720"/>
-          </a:xfrm>
-        </p:spPr>
-        <p:txBody>
-          <a:bodyPr>
-            <a:normAutofit fontScale="70000" lnSpcReduction="20000"/>
-          </a:bodyPr>
-          <a:lstStyle/>
-          <a:p>
-            <a:pPr marL="514350" indent="-514350">
-              <a:buFont typeface="+mj-lt"/>
-              <a:buAutoNum type="arabicPeriod"/>
-            </a:pPr>
-            <a:r>
-              <a:rPr lang="en-US" dirty="0"/>
-              <a:t>Start</a:t>
-            </a:r>
-          </a:p>
-          <a:p>
-            <a:pPr lvl="1"/>
-            <a:r>
-              <a:rPr lang="en-US" dirty="0"/>
-              <a:t>Execute program</a:t>
-            </a:r>
-          </a:p>
-          <a:p>
-            <a:pPr marL="514350" indent="-514350">
-              <a:buFont typeface="+mj-lt"/>
-              <a:buAutoNum type="arabicPeriod"/>
-            </a:pPr>
-            <a:r>
-              <a:rPr lang="en-US" dirty="0"/>
-              <a:t>Read input</a:t>
-            </a:r>
-          </a:p>
-          <a:p>
-            <a:pPr lvl="1"/>
-            <a:r>
-              <a:rPr lang="en-US" dirty="0"/>
-              <a:t>Read input.txt</a:t>
-            </a:r>
-          </a:p>
-          <a:p>
-            <a:pPr lvl="1"/>
-            <a:r>
-              <a:rPr lang="en-US" dirty="0"/>
-              <a:t>Set C(0) and C(1) = 1</a:t>
-            </a:r>
-          </a:p>
-          <a:p>
-            <a:pPr marL="514350" indent="-514350">
-              <a:buFont typeface="+mj-lt"/>
-              <a:buAutoNum type="arabicPeriod"/>
-            </a:pPr>
-            <a:r>
-              <a:rPr lang="en-US" dirty="0"/>
-              <a:t>Spawn manager threads</a:t>
-            </a:r>
-          </a:p>
-          <a:p>
-            <a:pPr lvl="1">
-              <a:buFont typeface="Wingdings" panose="05000000000000000000" pitchFamily="2" charset="2"/>
-              <a:buChar char="§"/>
-            </a:pPr>
-            <a:r>
-              <a:rPr lang="en-US" dirty="0"/>
-              <a:t>Program creates one thread per Catalan Number</a:t>
-            </a:r>
-          </a:p>
-          <a:p>
-            <a:pPr marL="514350" indent="-514350">
-              <a:buFont typeface="+mj-lt"/>
-              <a:buAutoNum type="arabicPeriod"/>
-            </a:pPr>
-            <a:r>
-              <a:rPr lang="en-US" dirty="0"/>
-              <a:t>Wait for dependencies to be satisfied</a:t>
-            </a:r>
-          </a:p>
-          <a:p>
-            <a:pPr lvl="1"/>
-            <a:r>
-              <a:rPr lang="en-US" dirty="0"/>
-              <a:t>Managers wait until all previous Catalan numbers are computed</a:t>
-            </a:r>
-          </a:p>
-          <a:p>
-            <a:pPr marL="514350" indent="-514350">
-              <a:buFont typeface="+mj-lt"/>
-              <a:buAutoNum type="arabicPeriod"/>
-            </a:pPr>
-            <a:r>
-              <a:rPr lang="en-US" dirty="0"/>
-              <a:t>Split each recurrence into worker-thread chunks</a:t>
-            </a:r>
-          </a:p>
-          <a:p>
-            <a:pPr lvl="1">
-              <a:buFont typeface="Wingdings" panose="05000000000000000000" pitchFamily="2" charset="2"/>
-              <a:buChar char="§"/>
-            </a:pPr>
-            <a:r>
-              <a:rPr lang="en-US" dirty="0"/>
-              <a:t>Each manager uses up to 4 threads to compute inner calculation</a:t>
-            </a:r>
-          </a:p>
-          <a:p>
-            <a:pPr marL="514350" indent="-514350">
-              <a:buFont typeface="+mj-lt"/>
-              <a:buAutoNum type="arabicPeriod"/>
-            </a:pPr>
-            <a:r>
-              <a:rPr lang="en-US" dirty="0"/>
-              <a:t>Compute partial sums in parallel</a:t>
-            </a:r>
-          </a:p>
-          <a:p>
-            <a:pPr marL="514350" indent="-514350">
-              <a:buFont typeface="+mj-lt"/>
-              <a:buAutoNum type="arabicPeriod"/>
-            </a:pPr>
-            <a:r>
-              <a:rPr lang="en-US" dirty="0"/>
-              <a:t>Combine and store results</a:t>
-            </a:r>
-          </a:p>
-          <a:p>
-            <a:pPr marL="514350" indent="-514350">
-              <a:buFont typeface="+mj-lt"/>
-              <a:buAutoNum type="arabicPeriod"/>
-            </a:pPr>
-            <a:r>
-              <a:rPr lang="en-US" dirty="0"/>
-              <a:t>Notify waiting threads</a:t>
-            </a:r>
-          </a:p>
-          <a:p>
-            <a:pPr marL="971539" lvl="1" indent="-514350">
-              <a:buFont typeface="+mj-lt"/>
-              <a:buAutoNum type="arabicPeriod"/>
-            </a:pPr>
-            <a:r>
-              <a:rPr lang="en-US" dirty="0"/>
-              <a:t>Each manager begins work once C(n-1) are computed</a:t>
-            </a:r>
-          </a:p>
-        </p:txBody>
-      </p:sp>
-    </p:spTree>
-    <p:extLst>
-      <p:ext uri="{BB962C8B-B14F-4D97-AF65-F5344CB8AC3E}">
-        <p14:creationId xmlns:p14="http://schemas.microsoft.com/office/powerpoint/2010/main" val="3309814980"/>
-      </p:ext>
-    </p:extLst>
-  </p:cSld>
-  <p:clrMapOvr>
-    <a:masterClrMapping/>
-  </p:clrMapOvr>
-</p:sld>
-</file>
-
-<file path=ppt/slides/slide8.xml><?xml version="1.0" encoding="utf-8"?>
-<p:sld xmlns:a="http://schemas.openxmlformats.org/drawingml/2006/main" xmlns:r="http://schemas.openxmlformats.org/officeDocument/2006/relationships" xmlns:p="http://schemas.openxmlformats.org/presentationml/2006/main">
-  <p:cSld>
-    <p:spTree>
-      <p:nvGrpSpPr>
-        <p:cNvPr id="1" name=""/>
-        <p:cNvGrpSpPr/>
-        <p:nvPr/>
-      </p:nvGrpSpPr>
-      <p:grpSpPr>
-        <a:xfrm>
-          <a:off x="0" y="0"/>
-          <a:ext cx="0" cy="0"/>
-          <a:chOff x="0" y="0"/>
-          <a:chExt cx="0" cy="0"/>
-        </a:xfrm>
-      </p:grpSpPr>
-      <p:sp>
-        <p:nvSpPr>
-          <p:cNvPr id="2" name="Title 1">
-            <a:extLst>
-              <a:ext uri="{FF2B5EF4-FFF2-40B4-BE49-F238E27FC236}">
-                <a16:creationId xmlns:a16="http://schemas.microsoft.com/office/drawing/2014/main" id="{E2B760E5-37E5-3A10-808B-CBB9DC1C6560}"/>
-              </a:ext>
-            </a:extLst>
-          </p:cNvPr>
-          <p:cNvSpPr>
-            <a:spLocks noGrp="1"/>
-          </p:cNvSpPr>
-          <p:nvPr>
-            <p:ph type="title"/>
-          </p:nvPr>
-        </p:nvSpPr>
-        <p:spPr/>
-        <p:txBody>
-          <a:bodyPr/>
-          <a:lstStyle/>
-          <a:p>
-            <a:r>
-              <a:rPr lang="en-US" dirty="0"/>
-              <a:t>Results</a:t>
-            </a:r>
-          </a:p>
-        </p:txBody>
-      </p:sp>
-      <p:pic>
-        <p:nvPicPr>
-          <p:cNvPr id="8" name="Content Placeholder 7">
-            <a:extLst>
-              <a:ext uri="{FF2B5EF4-FFF2-40B4-BE49-F238E27FC236}">
-                <a16:creationId xmlns:a16="http://schemas.microsoft.com/office/drawing/2014/main" id="{3B2E6F4A-452F-0A37-CE17-BD2EE23CA95D}"/>
-              </a:ext>
-            </a:extLst>
-          </p:cNvPr>
-          <p:cNvPicPr>
-            <a:picLocks noGrp="1" noChangeAspect="1"/>
-          </p:cNvPicPr>
-          <p:nvPr>
-            <p:ph idx="1"/>
-          </p:nvPr>
-        </p:nvPicPr>
-        <p:blipFill>
-          <a:blip r:embed="rId2"/>
-          <a:stretch>
-            <a:fillRect/>
-          </a:stretch>
-        </p:blipFill>
-        <p:spPr>
-          <a:xfrm>
-            <a:off x="3796224" y="859253"/>
-            <a:ext cx="4258269" cy="2000529"/>
-          </a:xfrm>
-          <a:prstGeom prst="rect">
-            <a:avLst/>
-          </a:prstGeom>
-        </p:spPr>
-      </p:pic>
-      <p:sp>
-        <p:nvSpPr>
-          <p:cNvPr id="4" name="Footer Placeholder 3">
-            <a:extLst>
-              <a:ext uri="{FF2B5EF4-FFF2-40B4-BE49-F238E27FC236}">
-                <a16:creationId xmlns:a16="http://schemas.microsoft.com/office/drawing/2014/main" id="{D1465F81-02CA-5378-79A8-C3476530A582}"/>
-              </a:ext>
-            </a:extLst>
-          </p:cNvPr>
-          <p:cNvSpPr>
-            <a:spLocks noGrp="1"/>
-          </p:cNvSpPr>
-          <p:nvPr>
-            <p:ph type="ftr" sz="quarter" idx="11"/>
-          </p:nvPr>
-        </p:nvSpPr>
-        <p:spPr/>
-        <p:txBody>
-          <a:bodyPr/>
-          <a:lstStyle/>
-          <a:p>
-            <a:r>
-              <a:rPr lang="en-US"/>
-              <a:t>UNIVERSITY OF SOUTH FLORIDA</a:t>
-            </a:r>
-            <a:endParaRPr lang="en-US" dirty="0"/>
-          </a:p>
-        </p:txBody>
-      </p:sp>
-      <p:pic>
-        <p:nvPicPr>
-          <p:cNvPr id="10" name="Picture 9">
-            <a:extLst>
-              <a:ext uri="{FF2B5EF4-FFF2-40B4-BE49-F238E27FC236}">
-                <a16:creationId xmlns:a16="http://schemas.microsoft.com/office/drawing/2014/main" id="{EE02A094-4503-8CFA-7967-27B134A0F009}"/>
-              </a:ext>
-            </a:extLst>
-          </p:cNvPr>
-          <p:cNvPicPr>
-            <a:picLocks noChangeAspect="1"/>
-          </p:cNvPicPr>
-          <p:nvPr/>
-        </p:nvPicPr>
-        <p:blipFill>
-          <a:blip r:embed="rId3"/>
-          <a:stretch>
-            <a:fillRect/>
-          </a:stretch>
-        </p:blipFill>
-        <p:spPr>
-          <a:xfrm>
-            <a:off x="3853381" y="3062607"/>
-            <a:ext cx="4143953" cy="2448267"/>
-          </a:xfrm>
-          <a:prstGeom prst="rect">
-            <a:avLst/>
-          </a:prstGeom>
-        </p:spPr>
-      </p:pic>
-      <p:pic>
-        <p:nvPicPr>
-          <p:cNvPr id="12" name="Picture 11">
-            <a:extLst>
-              <a:ext uri="{FF2B5EF4-FFF2-40B4-BE49-F238E27FC236}">
-                <a16:creationId xmlns:a16="http://schemas.microsoft.com/office/drawing/2014/main" id="{FC3D8EF8-189E-177B-FFA9-EEEF1A356D56}"/>
-              </a:ext>
-            </a:extLst>
-          </p:cNvPr>
-          <p:cNvPicPr>
-            <a:picLocks noChangeAspect="1"/>
-          </p:cNvPicPr>
-          <p:nvPr/>
-        </p:nvPicPr>
-        <p:blipFill>
-          <a:blip r:embed="rId4"/>
-          <a:stretch>
-            <a:fillRect/>
-          </a:stretch>
-        </p:blipFill>
-        <p:spPr>
-          <a:xfrm>
-            <a:off x="8054493" y="944525"/>
-            <a:ext cx="4105848" cy="2314898"/>
-          </a:xfrm>
-          <a:prstGeom prst="rect">
-            <a:avLst/>
-          </a:prstGeom>
-        </p:spPr>
-      </p:pic>
-      <p:pic>
-        <p:nvPicPr>
-          <p:cNvPr id="14" name="Picture 13">
-            <a:extLst>
-              <a:ext uri="{FF2B5EF4-FFF2-40B4-BE49-F238E27FC236}">
-                <a16:creationId xmlns:a16="http://schemas.microsoft.com/office/drawing/2014/main" id="{64210DC5-F4F5-DA3F-F5B4-2FEC744164E4}"/>
-              </a:ext>
-            </a:extLst>
-          </p:cNvPr>
-          <p:cNvPicPr>
-            <a:picLocks noChangeAspect="1"/>
-          </p:cNvPicPr>
-          <p:nvPr/>
-        </p:nvPicPr>
-        <p:blipFill>
-          <a:blip r:embed="rId5"/>
-          <a:stretch>
-            <a:fillRect/>
-          </a:stretch>
-        </p:blipFill>
-        <p:spPr>
-          <a:xfrm>
-            <a:off x="8054493" y="3329345"/>
-            <a:ext cx="4105848" cy="2181529"/>
-          </a:xfrm>
-          <a:prstGeom prst="rect">
-            <a:avLst/>
-          </a:prstGeom>
-        </p:spPr>
-      </p:pic>
-      <p:sp>
-        <p:nvSpPr>
-          <p:cNvPr id="15" name="Rectangle 14">
-            <a:extLst>
-              <a:ext uri="{FF2B5EF4-FFF2-40B4-BE49-F238E27FC236}">
-                <a16:creationId xmlns:a16="http://schemas.microsoft.com/office/drawing/2014/main" id="{C229781F-2574-83AB-1573-DAEC4C3A2A76}"/>
-              </a:ext>
-            </a:extLst>
-          </p:cNvPr>
-          <p:cNvSpPr/>
-          <p:nvPr/>
-        </p:nvSpPr>
-        <p:spPr>
-          <a:xfrm>
-            <a:off x="3708197" y="2638295"/>
-            <a:ext cx="3497344" cy="202825"/>
-          </a:xfrm>
-          <a:prstGeom prst="rect">
-            <a:avLst/>
-          </a:prstGeom>
-          <a:solidFill>
-            <a:srgbClr val="00B0F0">
-              <a:alpha val="40000"/>
-            </a:srgbClr>
-          </a:solidFill>
-        </p:spPr>
-        <p:style>
-          <a:lnRef idx="2">
-            <a:schemeClr val="accent1">
-              <a:shade val="15000"/>
-            </a:schemeClr>
-          </a:lnRef>
-          <a:fillRef idx="1">
-            <a:schemeClr val="accent1"/>
-          </a:fillRef>
-          <a:effectRef idx="0">
-            <a:schemeClr val="accent1"/>
-          </a:effectRef>
-          <a:fontRef idx="minor">
-            <a:schemeClr val="lt1"/>
-          </a:fontRef>
-        </p:style>
-        <p:txBody>
-          <a:bodyPr rtlCol="0" anchor="ctr"/>
-          <a:lstStyle/>
-          <a:p>
-            <a:pPr algn="ctr"/>
-            <a:endParaRPr lang="en-US"/>
-          </a:p>
-        </p:txBody>
-      </p:sp>
-      <p:sp>
-        <p:nvSpPr>
-          <p:cNvPr id="16" name="Rectangle 15">
-            <a:extLst>
-              <a:ext uri="{FF2B5EF4-FFF2-40B4-BE49-F238E27FC236}">
-                <a16:creationId xmlns:a16="http://schemas.microsoft.com/office/drawing/2014/main" id="{ACBCD392-7487-3340-615F-0F9F3A91BABF}"/>
-              </a:ext>
-            </a:extLst>
-          </p:cNvPr>
-          <p:cNvSpPr/>
-          <p:nvPr/>
-        </p:nvSpPr>
-        <p:spPr>
-          <a:xfrm>
-            <a:off x="3708197" y="5345051"/>
-            <a:ext cx="3497344" cy="202825"/>
-          </a:xfrm>
-          <a:prstGeom prst="rect">
-            <a:avLst/>
-          </a:prstGeom>
-          <a:solidFill>
-            <a:srgbClr val="00B0F0">
-              <a:alpha val="40000"/>
-            </a:srgbClr>
-          </a:solidFill>
-        </p:spPr>
-        <p:style>
-          <a:lnRef idx="2">
-            <a:schemeClr val="accent1">
-              <a:shade val="15000"/>
-            </a:schemeClr>
-          </a:lnRef>
-          <a:fillRef idx="1">
-            <a:schemeClr val="accent1"/>
-          </a:fillRef>
-          <a:effectRef idx="0">
-            <a:schemeClr val="accent1"/>
-          </a:effectRef>
-          <a:fontRef idx="minor">
-            <a:schemeClr val="lt1"/>
-          </a:fontRef>
-        </p:style>
-        <p:txBody>
-          <a:bodyPr rtlCol="0" anchor="ctr"/>
-          <a:lstStyle/>
-          <a:p>
-            <a:pPr algn="ctr"/>
-            <a:endParaRPr lang="en-US"/>
-          </a:p>
-        </p:txBody>
-      </p:sp>
-      <p:sp>
-        <p:nvSpPr>
-          <p:cNvPr id="17" name="Rectangle 16">
-            <a:extLst>
-              <a:ext uri="{FF2B5EF4-FFF2-40B4-BE49-F238E27FC236}">
-                <a16:creationId xmlns:a16="http://schemas.microsoft.com/office/drawing/2014/main" id="{617EE609-84A9-6273-8EB4-614DBF752B03}"/>
-              </a:ext>
-            </a:extLst>
-          </p:cNvPr>
-          <p:cNvSpPr/>
-          <p:nvPr/>
-        </p:nvSpPr>
-        <p:spPr>
-          <a:xfrm>
-            <a:off x="7997334" y="3034098"/>
-            <a:ext cx="3497344" cy="202825"/>
-          </a:xfrm>
-          <a:prstGeom prst="rect">
-            <a:avLst/>
-          </a:prstGeom>
-          <a:solidFill>
-            <a:srgbClr val="00B0F0">
-              <a:alpha val="40000"/>
-            </a:srgbClr>
-          </a:solidFill>
-        </p:spPr>
-        <p:style>
-          <a:lnRef idx="2">
-            <a:schemeClr val="accent1">
-              <a:shade val="15000"/>
-            </a:schemeClr>
-          </a:lnRef>
-          <a:fillRef idx="1">
-            <a:schemeClr val="accent1"/>
-          </a:fillRef>
-          <a:effectRef idx="0">
-            <a:schemeClr val="accent1"/>
-          </a:effectRef>
-          <a:fontRef idx="minor">
-            <a:schemeClr val="lt1"/>
-          </a:fontRef>
-        </p:style>
-        <p:txBody>
-          <a:bodyPr rtlCol="0" anchor="ctr"/>
-          <a:lstStyle/>
-          <a:p>
-            <a:pPr algn="ctr"/>
-            <a:endParaRPr lang="en-US"/>
-          </a:p>
-        </p:txBody>
-      </p:sp>
-      <p:sp>
-        <p:nvSpPr>
-          <p:cNvPr id="18" name="Rectangle 17">
-            <a:extLst>
-              <a:ext uri="{FF2B5EF4-FFF2-40B4-BE49-F238E27FC236}">
-                <a16:creationId xmlns:a16="http://schemas.microsoft.com/office/drawing/2014/main" id="{326C791C-F75F-8810-ADCA-FEC3FAFA1EAE}"/>
-              </a:ext>
-            </a:extLst>
-          </p:cNvPr>
-          <p:cNvSpPr/>
-          <p:nvPr/>
-        </p:nvSpPr>
-        <p:spPr>
-          <a:xfrm>
-            <a:off x="7997334" y="5326550"/>
-            <a:ext cx="3497344" cy="202825"/>
-          </a:xfrm>
-          <a:prstGeom prst="rect">
-            <a:avLst/>
-          </a:prstGeom>
-          <a:solidFill>
-            <a:srgbClr val="00B0F0">
-              <a:alpha val="40000"/>
-            </a:srgbClr>
-          </a:solidFill>
-        </p:spPr>
-        <p:style>
-          <a:lnRef idx="2">
-            <a:schemeClr val="accent1">
-              <a:shade val="15000"/>
-            </a:schemeClr>
-          </a:lnRef>
-          <a:fillRef idx="1">
-            <a:schemeClr val="accent1"/>
-          </a:fillRef>
-          <a:effectRef idx="0">
-            <a:schemeClr val="accent1"/>
-          </a:effectRef>
-          <a:fontRef idx="minor">
-            <a:schemeClr val="lt1"/>
-          </a:fontRef>
-        </p:style>
-        <p:txBody>
-          <a:bodyPr rtlCol="0" anchor="ctr"/>
-          <a:lstStyle/>
-          <a:p>
-            <a:pPr algn="ctr"/>
-            <a:endParaRPr lang="en-US"/>
-          </a:p>
-        </p:txBody>
-      </p:sp>
-      <p:sp>
-        <p:nvSpPr>
-          <p:cNvPr id="19" name="Rectangle 18">
-            <a:extLst>
-              <a:ext uri="{FF2B5EF4-FFF2-40B4-BE49-F238E27FC236}">
-                <a16:creationId xmlns:a16="http://schemas.microsoft.com/office/drawing/2014/main" id="{4D019782-9F36-8701-CDAB-367875343CAD}"/>
-              </a:ext>
-            </a:extLst>
-          </p:cNvPr>
-          <p:cNvSpPr/>
-          <p:nvPr/>
-        </p:nvSpPr>
-        <p:spPr>
-          <a:xfrm>
-            <a:off x="3796223" y="1514569"/>
-            <a:ext cx="4201109" cy="202825"/>
-          </a:xfrm>
-          <a:prstGeom prst="rect">
-            <a:avLst/>
-          </a:prstGeom>
-          <a:solidFill>
-            <a:srgbClr val="92D050">
-              <a:alpha val="40000"/>
-            </a:srgbClr>
-          </a:solidFill>
-        </p:spPr>
-        <p:style>
-          <a:lnRef idx="2">
-            <a:schemeClr val="accent1">
-              <a:shade val="15000"/>
-            </a:schemeClr>
-          </a:lnRef>
-          <a:fillRef idx="1">
-            <a:schemeClr val="accent1"/>
-          </a:fillRef>
-          <a:effectRef idx="0">
-            <a:schemeClr val="accent1"/>
-          </a:effectRef>
-          <a:fontRef idx="minor">
-            <a:schemeClr val="lt1"/>
-          </a:fontRef>
-        </p:style>
-        <p:txBody>
-          <a:bodyPr rtlCol="0" anchor="ctr"/>
-          <a:lstStyle/>
-          <a:p>
-            <a:pPr algn="ctr"/>
-            <a:endParaRPr lang="en-US"/>
-          </a:p>
-        </p:txBody>
-      </p:sp>
-      <p:sp>
-        <p:nvSpPr>
-          <p:cNvPr id="20" name="Rectangle 19">
-            <a:extLst>
-              <a:ext uri="{FF2B5EF4-FFF2-40B4-BE49-F238E27FC236}">
-                <a16:creationId xmlns:a16="http://schemas.microsoft.com/office/drawing/2014/main" id="{A3793849-E58E-E410-A6EF-F0B17BF9C9EE}"/>
-              </a:ext>
-            </a:extLst>
-          </p:cNvPr>
-          <p:cNvSpPr/>
-          <p:nvPr/>
-        </p:nvSpPr>
-        <p:spPr>
-          <a:xfrm>
-            <a:off x="3853381" y="3858406"/>
-            <a:ext cx="4143952" cy="202825"/>
-          </a:xfrm>
-          <a:prstGeom prst="rect">
-            <a:avLst/>
-          </a:prstGeom>
-          <a:solidFill>
-            <a:srgbClr val="92D050">
-              <a:alpha val="40000"/>
-            </a:srgbClr>
-          </a:solidFill>
-        </p:spPr>
-        <p:style>
-          <a:lnRef idx="2">
-            <a:schemeClr val="accent1">
-              <a:shade val="15000"/>
-            </a:schemeClr>
-          </a:lnRef>
-          <a:fillRef idx="1">
-            <a:schemeClr val="accent1"/>
-          </a:fillRef>
-          <a:effectRef idx="0">
-            <a:schemeClr val="accent1"/>
-          </a:effectRef>
-          <a:fontRef idx="minor">
-            <a:schemeClr val="lt1"/>
-          </a:fontRef>
-        </p:style>
-        <p:txBody>
-          <a:bodyPr rtlCol="0" anchor="ctr"/>
-          <a:lstStyle/>
-          <a:p>
-            <a:pPr algn="ctr"/>
-            <a:endParaRPr lang="en-US"/>
-          </a:p>
-        </p:txBody>
-      </p:sp>
-      <p:sp>
-        <p:nvSpPr>
-          <p:cNvPr id="21" name="Rectangle 20">
-            <a:extLst>
-              <a:ext uri="{FF2B5EF4-FFF2-40B4-BE49-F238E27FC236}">
-                <a16:creationId xmlns:a16="http://schemas.microsoft.com/office/drawing/2014/main" id="{A77F0EF9-439B-956F-48D3-ED7700AD2FF5}"/>
-              </a:ext>
-            </a:extLst>
-          </p:cNvPr>
-          <p:cNvSpPr/>
-          <p:nvPr/>
-        </p:nvSpPr>
-        <p:spPr>
-          <a:xfrm>
-            <a:off x="7959232" y="2537147"/>
-            <a:ext cx="4201109" cy="202825"/>
-          </a:xfrm>
-          <a:prstGeom prst="rect">
-            <a:avLst/>
-          </a:prstGeom>
-          <a:solidFill>
-            <a:srgbClr val="92D050">
-              <a:alpha val="40000"/>
-            </a:srgbClr>
-          </a:solidFill>
-        </p:spPr>
-        <p:style>
-          <a:lnRef idx="2">
-            <a:schemeClr val="accent1">
-              <a:shade val="15000"/>
-            </a:schemeClr>
-          </a:lnRef>
-          <a:fillRef idx="1">
-            <a:schemeClr val="accent1"/>
-          </a:fillRef>
-          <a:effectRef idx="0">
-            <a:schemeClr val="accent1"/>
-          </a:effectRef>
-          <a:fontRef idx="minor">
-            <a:schemeClr val="lt1"/>
-          </a:fontRef>
-        </p:style>
-        <p:txBody>
-          <a:bodyPr rtlCol="0" anchor="ctr"/>
-          <a:lstStyle/>
-          <a:p>
-            <a:pPr algn="ctr"/>
-            <a:endParaRPr lang="en-US"/>
-          </a:p>
-        </p:txBody>
-      </p:sp>
-      <p:sp>
-        <p:nvSpPr>
-          <p:cNvPr id="22" name="Rectangle 21">
-            <a:extLst>
-              <a:ext uri="{FF2B5EF4-FFF2-40B4-BE49-F238E27FC236}">
-                <a16:creationId xmlns:a16="http://schemas.microsoft.com/office/drawing/2014/main" id="{0D39B4C7-730A-1A3B-669A-3568FA66424C}"/>
-              </a:ext>
-            </a:extLst>
-          </p:cNvPr>
-          <p:cNvSpPr/>
-          <p:nvPr/>
-        </p:nvSpPr>
-        <p:spPr>
-          <a:xfrm>
-            <a:off x="7959231" y="4500315"/>
-            <a:ext cx="4201109" cy="202825"/>
-          </a:xfrm>
-          <a:prstGeom prst="rect">
-            <a:avLst/>
-          </a:prstGeom>
-          <a:solidFill>
-            <a:srgbClr val="92D050">
-              <a:alpha val="40000"/>
-            </a:srgbClr>
-          </a:solidFill>
-        </p:spPr>
-        <p:style>
-          <a:lnRef idx="2">
-            <a:schemeClr val="accent1">
-              <a:shade val="15000"/>
-            </a:schemeClr>
-          </a:lnRef>
-          <a:fillRef idx="1">
-            <a:schemeClr val="accent1"/>
-          </a:fillRef>
-          <a:effectRef idx="0">
-            <a:schemeClr val="accent1"/>
-          </a:effectRef>
-          <a:fontRef idx="minor">
-            <a:schemeClr val="lt1"/>
-          </a:fontRef>
-        </p:style>
-        <p:txBody>
-          <a:bodyPr rtlCol="0" anchor="ctr"/>
-          <a:lstStyle/>
-          <a:p>
-            <a:pPr algn="ctr"/>
-            <a:endParaRPr lang="en-US"/>
-          </a:p>
-        </p:txBody>
-      </p:sp>
-      <p:sp>
-        <p:nvSpPr>
-          <p:cNvPr id="23" name="TextBox 22">
-            <a:extLst>
-              <a:ext uri="{FF2B5EF4-FFF2-40B4-BE49-F238E27FC236}">
-                <a16:creationId xmlns:a16="http://schemas.microsoft.com/office/drawing/2014/main" id="{48A47BED-8063-C5E7-031B-FB55B586C2CF}"/>
-              </a:ext>
-            </a:extLst>
-          </p:cNvPr>
-          <p:cNvSpPr txBox="1"/>
-          <p:nvPr/>
-        </p:nvSpPr>
-        <p:spPr>
-          <a:xfrm>
-            <a:off x="402264" y="1514569"/>
-            <a:ext cx="3248772" cy="1200329"/>
-          </a:xfrm>
-          <a:prstGeom prst="rect">
-            <a:avLst/>
-          </a:prstGeom>
-        </p:spPr>
-        <p:txBody>
-          <a:bodyPr vert="horz" lIns="91440" tIns="45720" rIns="91440" bIns="45720" rtlCol="0">
-            <a:normAutofit/>
-          </a:bodyPr>
-          <a:lstStyle>
-            <a:lvl1pPr marL="228594" indent="-228594">
-              <a:lnSpc>
-                <a:spcPct val="90000"/>
-              </a:lnSpc>
-              <a:spcBef>
-                <a:spcPts val="1000"/>
-              </a:spcBef>
-              <a:buFont typeface="Arial" panose="020B0604020202020204" pitchFamily="34" charset="0"/>
-              <a:buChar char="•"/>
-              <a:defRPr sz="2800">
-                <a:solidFill>
-                  <a:schemeClr val="tx2"/>
-                </a:solidFill>
-              </a:defRPr>
-            </a:lvl1pPr>
-            <a:lvl2pPr marL="685783" lvl="1" indent="-228594">
-              <a:lnSpc>
-                <a:spcPct val="90000"/>
-              </a:lnSpc>
-              <a:spcBef>
-                <a:spcPts val="500"/>
-              </a:spcBef>
-              <a:buFont typeface="Arial" panose="020B0604020202020204" pitchFamily="34" charset="0"/>
-              <a:buChar char="•"/>
-              <a:defRPr sz="2400">
-                <a:solidFill>
-                  <a:schemeClr val="tx2"/>
-                </a:solidFill>
-              </a:defRPr>
-            </a:lvl2pPr>
-            <a:lvl3pPr marL="1142971" lvl="2" indent="-228594">
-              <a:lnSpc>
-                <a:spcPct val="90000"/>
-              </a:lnSpc>
-              <a:spcBef>
-                <a:spcPts val="500"/>
-              </a:spcBef>
-              <a:buFont typeface="Arial" panose="020B0604020202020204" pitchFamily="34" charset="0"/>
-              <a:buChar char="•"/>
-              <a:defRPr sz="2000" i="1">
-                <a:solidFill>
-                  <a:schemeClr val="tx2"/>
-                </a:solidFill>
-                <a:latin typeface="Cambria Math" panose="02040503050406030204" pitchFamily="18" charset="0"/>
-              </a:defRPr>
-            </a:lvl3pPr>
-            <a:lvl4pPr marL="1600160" indent="-228594">
-              <a:lnSpc>
-                <a:spcPct val="90000"/>
-              </a:lnSpc>
-              <a:spcBef>
-                <a:spcPts val="500"/>
-              </a:spcBef>
-              <a:buFont typeface="Arial" panose="020B0604020202020204" pitchFamily="34" charset="0"/>
-              <a:buChar char="•"/>
-              <a:defRPr>
-                <a:solidFill>
-                  <a:schemeClr val="tx2"/>
-                </a:solidFill>
-              </a:defRPr>
-            </a:lvl4pPr>
-            <a:lvl5pPr marL="2057349" indent="-228594">
-              <a:lnSpc>
-                <a:spcPct val="90000"/>
-              </a:lnSpc>
-              <a:spcBef>
-                <a:spcPts val="500"/>
-              </a:spcBef>
-              <a:buFont typeface="Arial" panose="020B0604020202020204" pitchFamily="34" charset="0"/>
-              <a:buChar char="•"/>
-              <a:defRPr>
-                <a:solidFill>
-                  <a:schemeClr val="tx2"/>
-                </a:solidFill>
-              </a:defRPr>
-            </a:lvl5pPr>
-            <a:lvl6pPr marL="2514537" indent="-228594">
-              <a:lnSpc>
-                <a:spcPct val="90000"/>
-              </a:lnSpc>
-              <a:spcBef>
-                <a:spcPts val="500"/>
-              </a:spcBef>
-              <a:buFont typeface="Arial" panose="020B0604020202020204" pitchFamily="34" charset="0"/>
-              <a:buChar char="•"/>
-            </a:lvl6pPr>
-            <a:lvl7pPr marL="2971726" indent="-228594">
-              <a:lnSpc>
-                <a:spcPct val="90000"/>
-              </a:lnSpc>
-              <a:spcBef>
-                <a:spcPts val="500"/>
-              </a:spcBef>
-              <a:buFont typeface="Arial" panose="020B0604020202020204" pitchFamily="34" charset="0"/>
-              <a:buChar char="•"/>
-            </a:lvl7pPr>
-            <a:lvl8pPr marL="3428914" indent="-228594">
-              <a:lnSpc>
-                <a:spcPct val="90000"/>
-              </a:lnSpc>
-              <a:spcBef>
-                <a:spcPts val="500"/>
-              </a:spcBef>
-              <a:buFont typeface="Arial" panose="020B0604020202020204" pitchFamily="34" charset="0"/>
-              <a:buChar char="•"/>
-            </a:lvl8pPr>
-            <a:lvl9pPr marL="3886103" indent="-228594">
-              <a:lnSpc>
-                <a:spcPct val="90000"/>
-              </a:lnSpc>
-              <a:spcBef>
-                <a:spcPts val="500"/>
-              </a:spcBef>
-              <a:buFont typeface="Arial" panose="020B0604020202020204" pitchFamily="34" charset="0"/>
-              <a:buChar char="•"/>
-            </a:lvl9pPr>
-          </a:lstStyle>
-          <a:p>
-            <a:r>
-              <a:rPr lang="en-US" dirty="0"/>
-              <a:t>Each manager waits until all dependencies are satisfied before executing their own Catalan number</a:t>
-            </a:r>
-          </a:p>
-        </p:txBody>
-      </p:sp>
-    </p:spTree>
-    <p:extLst>
-      <p:ext uri="{BB962C8B-B14F-4D97-AF65-F5344CB8AC3E}">
-        <p14:creationId xmlns:p14="http://schemas.microsoft.com/office/powerpoint/2010/main" val="4123538328"/>
-      </p:ext>
-    </p:extLst>
-  </p:cSld>
-  <p:clrMapOvr>
-    <a:masterClrMapping/>
-  </p:clrMapOvr>
-</p:sld>
-</file>
-
-<file path=ppt/slides/slide9.xml><?xml version="1.0" encoding="utf-8"?>
 <p:sld xmlns:a="http://schemas.openxmlformats.org/drawingml/2006/main" xmlns:r="http://schemas.openxmlformats.org/officeDocument/2006/relationships" xmlns:p="http://schemas.openxmlformats.org/presentationml/2006/main">
   <p:cSld>
     <p:spTree>
@@ -11390,13 +7372,13 @@
             </p:nvSpPr>
             <p:spPr>
               <a:xfrm>
-                <a:off x="402263" y="1799674"/>
+                <a:off x="68308" y="1433913"/>
                 <a:ext cx="6814729" cy="4351339"/>
               </a:xfrm>
             </p:spPr>
             <p:txBody>
               <a:bodyPr>
-                <a:normAutofit/>
+                <a:normAutofit fontScale="92500"/>
               </a:bodyPr>
               <a:lstStyle/>
               <a:p>
@@ -11573,7 +7555,13 @@
                           <a:rPr lang="en-US" i="1" dirty="0" smtClean="0">
                             <a:latin typeface="Cambria Math" panose="02040503050406030204" pitchFamily="18" charset="0"/>
                           </a:rPr>
-                          <m:t>−1</m:t>
+                          <m:t>−1 −</m:t>
+                        </m:r>
+                        <m:r>
+                          <a:rPr lang="en-US" b="0" i="1" dirty="0" smtClean="0">
+                            <a:latin typeface="Cambria Math" panose="02040503050406030204" pitchFamily="18" charset="0"/>
+                          </a:rPr>
+                          <m:t>𝑖</m:t>
                         </m:r>
                       </m:e>
                     </m:d>
@@ -11618,20 +7606,68 @@
                       <a:rPr lang="en-US" i="1" dirty="0" smtClean="0">
                         <a:latin typeface="Cambria Math" panose="02040503050406030204" pitchFamily="18" charset="0"/>
                       </a:rPr>
-                      <m:t> = 4</m:t>
+                      <m:t> =</m:t>
                     </m:r>
                     <m:r>
-                      <a:rPr lang="en-US" i="1" dirty="0" smtClean="0">
+                      <a:rPr lang="en-US" i="1" dirty="0">
+                        <a:latin typeface="Cambria Math" panose="02040503050406030204" pitchFamily="18" charset="0"/>
+                      </a:rPr>
+                      <m:t>𝑁</m:t>
+                    </m:r>
+                    <m:r>
+                      <a:rPr lang="en-US" i="1" dirty="0">
+                        <a:latin typeface="Cambria Math" panose="02040503050406030204" pitchFamily="18" charset="0"/>
+                      </a:rPr>
+                      <m:t>+∑</m:t>
+                    </m:r>
+                    <m:r>
+                      <a:rPr lang="en-US" i="1" dirty="0">
+                        <a:latin typeface="Cambria Math" panose="02040503050406030204" pitchFamily="18" charset="0"/>
+                      </a:rPr>
+                      <m:t>𝑚𝑖𝑛</m:t>
+                    </m:r>
+                    <m:r>
+                      <a:rPr lang="en-US" i="1" dirty="0">
+                        <a:latin typeface="Cambria Math" panose="02040503050406030204" pitchFamily="18" charset="0"/>
+                      </a:rPr>
+                      <m:t>(</m:t>
+                    </m:r>
+                    <m:r>
+                      <a:rPr lang="en-US" i="1" dirty="0">
                         <a:latin typeface="Cambria Math" panose="02040503050406030204" pitchFamily="18" charset="0"/>
                       </a:rPr>
                       <m:t>𝑛</m:t>
+                    </m:r>
+                    <m:r>
+                      <a:rPr lang="en-US" i="1" dirty="0">
+                        <a:latin typeface="Cambria Math" panose="02040503050406030204" pitchFamily="18" charset="0"/>
+                      </a:rPr>
+                      <m:t>,4)</m:t>
                     </m:r>
                   </m:oMath>
                 </a14:m>
                 <a:endParaRPr lang="en-US" dirty="0"/>
               </a:p>
               <a:p>
-                <a:endParaRPr lang="en-US" dirty="0"/>
+                <a:pPr lvl="2"/>
+                <a:r>
+                  <a:rPr lang="en-US" dirty="0"/>
+                  <a:t>Ex : N = 15 Manager Threads</a:t>
+                </a:r>
+              </a:p>
+              <a:p>
+                <a:pPr lvl="2"/>
+                <a:r>
+                  <a:rPr lang="en-US" dirty="0"/>
+                  <a:t>1+2+3+4+4+4+⋯+4 ​​= 6 + 48 = 54 Worker Threads</a:t>
+                </a:r>
+              </a:p>
+              <a:p>
+                <a:pPr lvl="2"/>
+                <a:r>
+                  <a:rPr lang="en-US" dirty="0"/>
+                  <a:t>15 + 54 = 69 Total Threads </a:t>
+                </a:r>
               </a:p>
             </p:txBody>
           </p:sp>
@@ -11655,13 +7691,13 @@
             </p:nvSpPr>
             <p:spPr>
               <a:xfrm>
-                <a:off x="402263" y="1799674"/>
+                <a:off x="68308" y="1433913"/>
                 <a:ext cx="6814729" cy="4351339"/>
               </a:xfrm>
               <a:blipFill>
                 <a:blip r:embed="rId2"/>
                 <a:stretch>
-                  <a:fillRect l="-1610" t="-2381"/>
+                  <a:fillRect l="-1342" t="-2241" b="-1821"/>
                 </a:stretch>
               </a:blipFill>
             </p:spPr>
@@ -11680,12 +7716,69 @@
           </p:sp>
         </mc:Fallback>
       </mc:AlternateContent>
+      <p:sp>
+        <p:nvSpPr>
+          <p:cNvPr id="2" name="Title 1">
+            <a:extLst>
+              <a:ext uri="{FF2B5EF4-FFF2-40B4-BE49-F238E27FC236}">
+                <a16:creationId xmlns:a16="http://schemas.microsoft.com/office/drawing/2014/main" id="{CAC13388-1C89-A9B9-2F29-AE4A7B288945}"/>
+              </a:ext>
+            </a:extLst>
+          </p:cNvPr>
+          <p:cNvSpPr>
+            <a:spLocks noGrp="1"/>
+          </p:cNvSpPr>
+          <p:nvPr>
+            <p:ph type="title"/>
+          </p:nvPr>
+        </p:nvSpPr>
+        <p:spPr/>
+        <p:txBody>
+          <a:bodyPr/>
+          <a:lstStyle/>
+          <a:p>
+            <a:r>
+              <a:rPr lang="en-US" dirty="0"/>
+              <a:t>Performance Comparison</a:t>
+            </a:r>
+          </a:p>
+        </p:txBody>
+      </p:sp>
+      <p:sp>
+        <p:nvSpPr>
+          <p:cNvPr id="4" name="Footer Placeholder 3">
+            <a:extLst>
+              <a:ext uri="{FF2B5EF4-FFF2-40B4-BE49-F238E27FC236}">
+                <a16:creationId xmlns:a16="http://schemas.microsoft.com/office/drawing/2014/main" id="{E0C4D443-E7EC-4728-027E-CFC8627309BD}"/>
+              </a:ext>
+            </a:extLst>
+          </p:cNvPr>
+          <p:cNvSpPr>
+            <a:spLocks noGrp="1"/>
+          </p:cNvSpPr>
+          <p:nvPr>
+            <p:ph type="ftr" sz="quarter" idx="11"/>
+          </p:nvPr>
+        </p:nvSpPr>
+        <p:spPr/>
+        <p:txBody>
+          <a:bodyPr/>
+          <a:lstStyle/>
+          <a:p>
+            <a:r>
+              <a:rPr lang="en-US"/>
+              <a:t>UNIVERSITY OF SOUTH FLORIDA</a:t>
+            </a:r>
+            <a:endParaRPr lang="en-US" dirty="0"/>
+          </a:p>
+        </p:txBody>
+      </p:sp>
       <p:pic>
         <p:nvPicPr>
-          <p:cNvPr id="8" name="Content Placeholder 7">
+          <p:cNvPr id="11" name="Content Placeholder 10">
             <a:extLst>
               <a:ext uri="{FF2B5EF4-FFF2-40B4-BE49-F238E27FC236}">
-                <a16:creationId xmlns:a16="http://schemas.microsoft.com/office/drawing/2014/main" id="{44678555-E782-D5A3-A81D-B536D45A7C88}"/>
+                <a16:creationId xmlns:a16="http://schemas.microsoft.com/office/drawing/2014/main" id="{DA371BF7-71C9-C795-4F5E-0066BA117445}"/>
               </a:ext>
             </a:extLst>
           </p:cNvPr>
@@ -11704,20 +7797,302 @@
         </p:blipFill>
         <p:spPr>
           <a:xfrm>
-            <a:off x="7216993" y="365125"/>
-            <a:ext cx="4716860" cy="5647078"/>
+            <a:off x="6818997" y="3857813"/>
+            <a:ext cx="5087060" cy="962159"/>
           </a:xfrm>
           <a:prstGeom prst="rect">
             <a:avLst/>
           </a:prstGeom>
         </p:spPr>
       </p:pic>
-      <p:sp>
-        <p:nvSpPr>
-          <p:cNvPr id="2" name="Title 1">
+      <p:pic>
+        <p:nvPicPr>
+          <p:cNvPr id="13" name="Picture 12">
             <a:extLst>
               <a:ext uri="{FF2B5EF4-FFF2-40B4-BE49-F238E27FC236}">
-                <a16:creationId xmlns:a16="http://schemas.microsoft.com/office/drawing/2014/main" id="{CAC13388-1C89-A9B9-2F29-AE4A7B288945}"/>
+                <a16:creationId xmlns:a16="http://schemas.microsoft.com/office/drawing/2014/main" id="{8AE8120E-39C1-0125-2835-6A16555E4EB9}"/>
+              </a:ext>
+            </a:extLst>
+          </p:cNvPr>
+          <p:cNvPicPr>
+            <a:picLocks noChangeAspect="1"/>
+          </p:cNvPicPr>
+          <p:nvPr/>
+        </p:nvPicPr>
+        <p:blipFill>
+          <a:blip r:embed="rId4"/>
+          <a:stretch>
+            <a:fillRect/>
+          </a:stretch>
+        </p:blipFill>
+        <p:spPr>
+          <a:xfrm>
+            <a:off x="6628471" y="1619126"/>
+            <a:ext cx="5468113" cy="2238687"/>
+          </a:xfrm>
+          <a:prstGeom prst="rect">
+            <a:avLst/>
+          </a:prstGeom>
+        </p:spPr>
+      </p:pic>
+      <mc:AlternateContent xmlns:mc="http://schemas.openxmlformats.org/markup-compatibility/2006" xmlns:a14="http://schemas.microsoft.com/office/drawing/2010/main">
+        <mc:Choice Requires="a14">
+          <p:sp>
+            <p:nvSpPr>
+              <p:cNvPr id="21" name="TextBox 20">
+                <a:extLst>
+                  <a:ext uri="{FF2B5EF4-FFF2-40B4-BE49-F238E27FC236}">
+                    <a16:creationId xmlns:a16="http://schemas.microsoft.com/office/drawing/2014/main" id="{E75FECA0-262B-7032-C79A-3D6F217DE8C2}"/>
+                  </a:ext>
+                </a:extLst>
+              </p:cNvPr>
+              <p:cNvSpPr txBox="1"/>
+              <p:nvPr/>
+            </p:nvSpPr>
+            <p:spPr>
+              <a:xfrm>
+                <a:off x="6563802" y="4916068"/>
+                <a:ext cx="6114552" cy="369332"/>
+              </a:xfrm>
+              <a:prstGeom prst="rect">
+                <a:avLst/>
+              </a:prstGeom>
+              <a:noFill/>
+            </p:spPr>
+            <p:txBody>
+              <a:bodyPr wrap="square">
+                <a:spAutoFit/>
+              </a:bodyPr>
+              <a:lstStyle/>
+              <a:p>
+                <a:pPr lvl="2">
+                  <a:lnSpc>
+                    <a:spcPct val="90000"/>
+                  </a:lnSpc>
+                  <a:spcBef>
+                    <a:spcPts val="500"/>
+                  </a:spcBef>
+                  <a:defRPr/>
+                </a:pPr>
+                <a:r>
+                  <a:rPr kumimoji="0" lang="en-US" sz="2000" b="0" u="none" strike="noStrike" kern="1200" cap="none" spc="0" normalizeH="0" baseline="0" noProof="0" dirty="0">
+                    <a:ln>
+                      <a:noFill/>
+                    </a:ln>
+                    <a:solidFill>
+                      <a:srgbClr val="455F69"/>
+                    </a:solidFill>
+                    <a:effectLst/>
+                    <a:uLnTx/>
+                    <a:uFillTx/>
+                    <a:ea typeface="+mn-ea"/>
+                    <a:cs typeface="+mn-cs"/>
+                  </a:rPr>
+                  <a:t>S</a:t>
+                </a:r>
+                <a14:m>
+                  <m:oMath xmlns:m="http://schemas.openxmlformats.org/officeDocument/2006/math">
+                    <m:r>
+                      <m:rPr>
+                        <m:sty m:val="p"/>
+                      </m:rPr>
+                      <a:rPr kumimoji="0" lang="en-US" sz="2000" b="0" i="0" u="none" strike="noStrike" kern="1200" cap="none" spc="0" normalizeH="0" baseline="0" noProof="0" dirty="0" smtClean="0">
+                        <a:ln>
+                          <a:noFill/>
+                        </a:ln>
+                        <a:solidFill>
+                          <a:srgbClr val="455F69"/>
+                        </a:solidFill>
+                        <a:effectLst/>
+                        <a:uLnTx/>
+                        <a:uFillTx/>
+                        <a:latin typeface="Cambria Math" panose="02040503050406030204" pitchFamily="18" charset="0"/>
+                        <a:ea typeface="+mn-ea"/>
+                        <a:cs typeface="+mn-cs"/>
+                      </a:rPr>
+                      <m:t>ingle</m:t>
+                    </m:r>
+                    <m:r>
+                      <a:rPr kumimoji="0" lang="en-US" sz="2000" b="0" i="0" u="none" strike="noStrike" kern="1200" cap="none" spc="0" normalizeH="0" baseline="0" noProof="0" dirty="0" smtClean="0">
+                        <a:ln>
+                          <a:noFill/>
+                        </a:ln>
+                        <a:solidFill>
+                          <a:srgbClr val="455F69"/>
+                        </a:solidFill>
+                        <a:effectLst/>
+                        <a:uLnTx/>
+                        <a:uFillTx/>
+                        <a:latin typeface="Cambria Math" panose="02040503050406030204" pitchFamily="18" charset="0"/>
+                        <a:ea typeface="+mn-ea"/>
+                        <a:cs typeface="+mn-cs"/>
+                      </a:rPr>
+                      <m:t> </m:t>
+                    </m:r>
+                    <m:r>
+                      <m:rPr>
+                        <m:sty m:val="p"/>
+                      </m:rPr>
+                      <a:rPr kumimoji="0" lang="en-US" sz="2000" b="0" i="0" u="none" strike="noStrike" kern="1200" cap="none" spc="0" normalizeH="0" baseline="0" noProof="0" dirty="0" smtClean="0">
+                        <a:ln>
+                          <a:noFill/>
+                        </a:ln>
+                        <a:solidFill>
+                          <a:srgbClr val="455F69"/>
+                        </a:solidFill>
+                        <a:effectLst/>
+                        <a:uLnTx/>
+                        <a:uFillTx/>
+                        <a:latin typeface="Cambria Math" panose="02040503050406030204" pitchFamily="18" charset="0"/>
+                        <a:ea typeface="+mn-ea"/>
+                        <a:cs typeface="+mn-cs"/>
+                      </a:rPr>
+                      <m:t>Thread</m:t>
+                    </m:r>
+                    <m:r>
+                      <a:rPr kumimoji="0" lang="en-US" sz="2000" b="0" i="1" u="none" strike="noStrike" kern="1200" cap="none" spc="0" normalizeH="0" baseline="0" noProof="0" dirty="0" smtClean="0">
+                        <a:ln>
+                          <a:noFill/>
+                        </a:ln>
+                        <a:solidFill>
+                          <a:srgbClr val="455F69"/>
+                        </a:solidFill>
+                        <a:effectLst/>
+                        <a:uLnTx/>
+                        <a:uFillTx/>
+                        <a:latin typeface="Cambria Math" panose="02040503050406030204" pitchFamily="18" charset="0"/>
+                        <a:ea typeface="+mn-ea"/>
+                        <a:cs typeface="+mn-cs"/>
+                      </a:rPr>
+                      <m:t> =</m:t>
+                    </m:r>
+                    <m:r>
+                      <a:rPr lang="en-US" sz="2000" i="1" dirty="0">
+                        <a:solidFill>
+                          <a:srgbClr val="455F69"/>
+                        </a:solidFill>
+                        <a:latin typeface="Cambria Math" panose="02040503050406030204" pitchFamily="18" charset="0"/>
+                      </a:rPr>
+                      <m:t>2,000× </m:t>
+                    </m:r>
+                    <m:r>
+                      <a:rPr lang="en-US" sz="2000" i="1" dirty="0">
+                        <a:solidFill>
+                          <a:srgbClr val="455F69"/>
+                        </a:solidFill>
+                        <a:latin typeface="Cambria Math" panose="02040503050406030204" pitchFamily="18" charset="0"/>
+                      </a:rPr>
+                      <m:t>𝑓𝑎𝑠𝑡𝑒𝑟</m:t>
+                    </m:r>
+                    <m:r>
+                      <a:rPr lang="en-US" sz="2000" b="0" i="0" dirty="0" smtClean="0">
+                        <a:solidFill>
+                          <a:srgbClr val="455F69"/>
+                        </a:solidFill>
+                        <a:latin typeface="Cambria Math" panose="02040503050406030204" pitchFamily="18" charset="0"/>
+                      </a:rPr>
+                      <m:t>!</m:t>
+                    </m:r>
+                  </m:oMath>
+                </a14:m>
+                <a:endParaRPr kumimoji="0" lang="en-US" sz="2000" b="0" u="none" strike="noStrike" kern="1200" cap="none" spc="0" normalizeH="0" baseline="0" noProof="0" dirty="0">
+                  <a:ln>
+                    <a:noFill/>
+                  </a:ln>
+                  <a:solidFill>
+                    <a:srgbClr val="455F69"/>
+                  </a:solidFill>
+                  <a:effectLst/>
+                  <a:uLnTx/>
+                  <a:uFillTx/>
+                  <a:ea typeface="+mn-ea"/>
+                  <a:cs typeface="+mn-cs"/>
+                </a:endParaRPr>
+              </a:p>
+            </p:txBody>
+          </p:sp>
+        </mc:Choice>
+        <mc:Fallback xmlns="">
+          <p:sp>
+            <p:nvSpPr>
+              <p:cNvPr id="21" name="TextBox 20">
+                <a:extLst>
+                  <a:ext uri="{FF2B5EF4-FFF2-40B4-BE49-F238E27FC236}">
+                    <a16:creationId xmlns:a16="http://schemas.microsoft.com/office/drawing/2014/main" id="{E75FECA0-262B-7032-C79A-3D6F217DE8C2}"/>
+                  </a:ext>
+                </a:extLst>
+              </p:cNvPr>
+              <p:cNvSpPr txBox="1">
+                <a:spLocks noRot="1" noChangeAspect="1" noMove="1" noResize="1" noEditPoints="1" noAdjustHandles="1" noChangeArrowheads="1" noChangeShapeType="1" noTextEdit="1"/>
+              </p:cNvSpPr>
+              <p:nvPr/>
+            </p:nvSpPr>
+            <p:spPr>
+              <a:xfrm>
+                <a:off x="6563802" y="4916068"/>
+                <a:ext cx="6114552" cy="369332"/>
+              </a:xfrm>
+              <a:prstGeom prst="rect">
+                <a:avLst/>
+              </a:prstGeom>
+              <a:blipFill>
+                <a:blip r:embed="rId5"/>
+                <a:stretch>
+                  <a:fillRect t="-16393" b="-29508"/>
+                </a:stretch>
+              </a:blipFill>
+            </p:spPr>
+            <p:txBody>
+              <a:bodyPr/>
+              <a:lstStyle/>
+              <a:p>
+                <a:r>
+                  <a:rPr lang="en-US">
+                    <a:noFill/>
+                  </a:rPr>
+                  <a:t> </a:t>
+                </a:r>
+              </a:p>
+            </p:txBody>
+          </p:sp>
+        </mc:Fallback>
+      </mc:AlternateContent>
+    </p:spTree>
+    <p:extLst>
+      <p:ext uri="{BB962C8B-B14F-4D97-AF65-F5344CB8AC3E}">
+        <p14:creationId xmlns:p14="http://schemas.microsoft.com/office/powerpoint/2010/main" val="4013321154"/>
+      </p:ext>
+    </p:extLst>
+  </p:cSld>
+  <p:clrMapOvr>
+    <a:masterClrMapping/>
+  </p:clrMapOvr>
+</p:sld>
+</file>
+
+<file path=ppt/slides/slide11.xml><?xml version="1.0" encoding="utf-8"?>
+<p:sld xmlns:a="http://schemas.openxmlformats.org/drawingml/2006/main" xmlns:r="http://schemas.openxmlformats.org/officeDocument/2006/relationships" xmlns:p="http://schemas.openxmlformats.org/presentationml/2006/main">
+  <p:cSld>
+    <p:spTree>
+      <p:nvGrpSpPr>
+        <p:cNvPr id="1" name=""/>
+        <p:cNvGrpSpPr/>
+        <p:nvPr/>
+      </p:nvGrpSpPr>
+      <p:grpSpPr>
+        <a:xfrm>
+          <a:off x="0" y="0"/>
+          <a:ext cx="0" cy="0"/>
+          <a:chOff x="0" y="0"/>
+          <a:chExt cx="0" cy="0"/>
+        </a:xfrm>
+      </p:grpSpPr>
+      <p:sp>
+        <p:nvSpPr>
+          <p:cNvPr id="4" name="Title 3">
+            <a:extLst>
+              <a:ext uri="{FF2B5EF4-FFF2-40B4-BE49-F238E27FC236}">
+                <a16:creationId xmlns:a16="http://schemas.microsoft.com/office/drawing/2014/main" id="{76870588-E252-23C9-F404-2F04BFE7C525}"/>
               </a:ext>
             </a:extLst>
           </p:cNvPr>
@@ -11735,17 +8110,128 @@
           <a:p>
             <a:r>
               <a:rPr lang="en-US" dirty="0"/>
-              <a:t>Performance Comparison</a:t>
-            </a:r>
-          </a:p>
-        </p:txBody>
-      </p:sp>
-      <p:sp>
-        <p:nvSpPr>
-          <p:cNvPr id="4" name="Footer Placeholder 3">
+              <a:t>Conclusion</a:t>
+            </a:r>
+          </a:p>
+        </p:txBody>
+      </p:sp>
+      <p:sp>
+        <p:nvSpPr>
+          <p:cNvPr id="6" name="Content Placeholder 5">
             <a:extLst>
               <a:ext uri="{FF2B5EF4-FFF2-40B4-BE49-F238E27FC236}">
-                <a16:creationId xmlns:a16="http://schemas.microsoft.com/office/drawing/2014/main" id="{E0C4D443-E7EC-4728-027E-CFC8627309BD}"/>
+                <a16:creationId xmlns:a16="http://schemas.microsoft.com/office/drawing/2014/main" id="{7325E256-9085-B3F3-2B3D-A1A079299B58}"/>
+              </a:ext>
+            </a:extLst>
+          </p:cNvPr>
+          <p:cNvSpPr>
+            <a:spLocks noGrp="1"/>
+          </p:cNvSpPr>
+          <p:nvPr>
+            <p:ph idx="1"/>
+          </p:nvPr>
+        </p:nvSpPr>
+        <p:spPr/>
+        <p:txBody>
+          <a:bodyPr/>
+          <a:lstStyle/>
+          <a:p>
+            <a:r>
+              <a:rPr lang="en-US" dirty="0"/>
+              <a:t>Introducing parallelism does not result in better performance</a:t>
+            </a:r>
+          </a:p>
+          <a:p>
+            <a:pPr lvl="1"/>
+            <a:r>
+              <a:rPr lang="en-US" dirty="0"/>
+              <a:t>Time complexity is worse than sequential because overhead dependencies</a:t>
+            </a:r>
+          </a:p>
+          <a:p>
+            <a:pPr lvl="1"/>
+            <a:r>
+              <a:rPr lang="en-US" dirty="0"/>
+              <a:t>Space complexity is worse than sequential because multithreaded still uses N manager threads and up to 4 worker threads</a:t>
+            </a:r>
+          </a:p>
+          <a:p>
+            <a:pPr marL="1142971" marR="0" lvl="2" indent="-228594" algn="l" defTabSz="914377" rtl="0" eaLnBrk="1" fontAlgn="auto" latinLnBrk="0" hangingPunct="1">
+              <a:lnSpc>
+                <a:spcPct val="90000"/>
+              </a:lnSpc>
+              <a:spcBef>
+                <a:spcPts val="500"/>
+              </a:spcBef>
+              <a:spcAft>
+                <a:spcPts val="0"/>
+              </a:spcAft>
+              <a:buClrTx/>
+              <a:buSzTx/>
+              <a:buFont typeface="Arial" panose="020B0604020202020204" pitchFamily="34" charset="0"/>
+              <a:buChar char="•"/>
+              <a:tabLst/>
+              <a:defRPr/>
+            </a:pPr>
+            <a:r>
+              <a:rPr kumimoji="0" lang="en-US" sz="2000" b="0" i="0" u="none" strike="noStrike" kern="1200" cap="none" spc="0" normalizeH="0" baseline="0" noProof="0" dirty="0">
+                <a:ln>
+                  <a:noFill/>
+                </a:ln>
+                <a:solidFill>
+                  <a:srgbClr val="455F69"/>
+                </a:solidFill>
+                <a:effectLst/>
+                <a:uLnTx/>
+                <a:uFillTx/>
+                <a:latin typeface="Arial" panose="020B0604020202020204"/>
+                <a:ea typeface="+mn-ea"/>
+                <a:cs typeface="+mn-cs"/>
+              </a:rPr>
+              <a:t>Per-thread stack allocation is also higher</a:t>
+            </a:r>
+            <a:endParaRPr lang="en-US" dirty="0"/>
+          </a:p>
+          <a:p>
+            <a:pPr lvl="1"/>
+            <a:r>
+              <a:rPr lang="en-US" dirty="0"/>
+              <a:t>Per-worker workload is a single multiplication C(</a:t>
+            </a:r>
+            <a:r>
+              <a:rPr lang="en-US" dirty="0" err="1"/>
+              <a:t>i</a:t>
+            </a:r>
+            <a:r>
+              <a:rPr lang="en-US" dirty="0"/>
+              <a:t>)⋅C(n−1−i). </a:t>
+            </a:r>
+          </a:p>
+          <a:p>
+            <a:pPr lvl="1"/>
+            <a:r>
+              <a:rPr lang="en-US" dirty="0"/>
+              <a:t>The overhead of creating a thread vastly exceeds the cost of that multiplication. </a:t>
+            </a:r>
+          </a:p>
+          <a:p>
+            <a:pPr lvl="1"/>
+            <a:endParaRPr lang="en-US" dirty="0"/>
+          </a:p>
+          <a:p>
+            <a:r>
+              <a:rPr lang="en-US" dirty="0"/>
+              <a:t>Project demonstrated proper thread creation, use of mutexes, condition variables, and guaranteeing mutual exclusion.</a:t>
+            </a:r>
+          </a:p>
+        </p:txBody>
+      </p:sp>
+      <p:sp>
+        <p:nvSpPr>
+          <p:cNvPr id="5" name="Footer Placeholder 4">
+            <a:extLst>
+              <a:ext uri="{FF2B5EF4-FFF2-40B4-BE49-F238E27FC236}">
+                <a16:creationId xmlns:a16="http://schemas.microsoft.com/office/drawing/2014/main" id="{81FD0F43-8A7B-9794-1870-D2CBC42D8014}"/>
               </a:ext>
             </a:extLst>
           </p:cNvPr>
@@ -11772,7 +8258,4845 @@
     </p:spTree>
     <p:extLst>
       <p:ext uri="{BB962C8B-B14F-4D97-AF65-F5344CB8AC3E}">
-        <p14:creationId xmlns:p14="http://schemas.microsoft.com/office/powerpoint/2010/main" val="4013321154"/>
+        <p14:creationId xmlns:p14="http://schemas.microsoft.com/office/powerpoint/2010/main" val="2288985525"/>
+      </p:ext>
+    </p:extLst>
+  </p:cSld>
+  <p:clrMapOvr>
+    <a:masterClrMapping/>
+  </p:clrMapOvr>
+</p:sld>
+</file>
+
+<file path=ppt/slides/slide2.xml><?xml version="1.0" encoding="utf-8"?>
+<p:sld xmlns:a="http://schemas.openxmlformats.org/drawingml/2006/main" xmlns:r="http://schemas.openxmlformats.org/officeDocument/2006/relationships" xmlns:p="http://schemas.openxmlformats.org/presentationml/2006/main">
+  <p:cSld>
+    <p:spTree>
+      <p:nvGrpSpPr>
+        <p:cNvPr id="1" name=""/>
+        <p:cNvGrpSpPr/>
+        <p:nvPr/>
+      </p:nvGrpSpPr>
+      <p:grpSpPr>
+        <a:xfrm>
+          <a:off x="0" y="0"/>
+          <a:ext cx="0" cy="0"/>
+          <a:chOff x="0" y="0"/>
+          <a:chExt cx="0" cy="0"/>
+        </a:xfrm>
+      </p:grpSpPr>
+      <p:sp>
+        <p:nvSpPr>
+          <p:cNvPr id="2" name="Title 1">
+            <a:extLst>
+              <a:ext uri="{FF2B5EF4-FFF2-40B4-BE49-F238E27FC236}">
+                <a16:creationId xmlns:a16="http://schemas.microsoft.com/office/drawing/2014/main" id="{D5501552-3E8D-AC46-ADA9-3E2E03330691}"/>
+              </a:ext>
+            </a:extLst>
+          </p:cNvPr>
+          <p:cNvSpPr>
+            <a:spLocks noGrp="1"/>
+          </p:cNvSpPr>
+          <p:nvPr>
+            <p:ph type="title"/>
+          </p:nvPr>
+        </p:nvSpPr>
+        <p:spPr/>
+        <p:txBody>
+          <a:bodyPr/>
+          <a:lstStyle/>
+          <a:p>
+            <a:r>
+              <a:rPr lang="en-US" dirty="0"/>
+              <a:t>Catalan Numbers</a:t>
+            </a:r>
+          </a:p>
+        </p:txBody>
+      </p:sp>
+      <mc:AlternateContent xmlns:mc="http://schemas.openxmlformats.org/markup-compatibility/2006">
+        <mc:Choice xmlns:a14="http://schemas.microsoft.com/office/drawing/2010/main" Requires="a14">
+          <p:sp>
+            <p:nvSpPr>
+              <p:cNvPr id="3" name="Content Placeholder 2">
+                <a:extLst>
+                  <a:ext uri="{FF2B5EF4-FFF2-40B4-BE49-F238E27FC236}">
+                    <a16:creationId xmlns:a16="http://schemas.microsoft.com/office/drawing/2014/main" id="{D2899071-5D4E-E842-8268-8CD319DBFD10}"/>
+                  </a:ext>
+                </a:extLst>
+              </p:cNvPr>
+              <p:cNvSpPr>
+                <a:spLocks noGrp="1"/>
+              </p:cNvSpPr>
+              <p:nvPr>
+                <p:ph idx="1"/>
+              </p:nvPr>
+            </p:nvSpPr>
+            <p:spPr>
+              <a:xfrm>
+                <a:off x="402264" y="1825625"/>
+                <a:ext cx="7714693" cy="4351339"/>
+              </a:xfrm>
+            </p:spPr>
+            <p:txBody>
+              <a:bodyPr>
+                <a:normAutofit fontScale="92500" lnSpcReduction="10000"/>
+              </a:bodyPr>
+              <a:lstStyle/>
+              <a:p>
+                <a:r>
+                  <a:rPr lang="en-US" dirty="0"/>
+                  <a:t>Sequence of numbers</a:t>
+                </a:r>
+              </a:p>
+              <a:p>
+                <a:pPr lvl="1"/>
+                <a:r>
+                  <a:rPr lang="en-US" dirty="0">
+                    <a:latin typeface="Cambria Math" panose="02040503050406030204" pitchFamily="18" charset="0"/>
+                    <a:ea typeface="Cambria Math" panose="02040503050406030204" pitchFamily="18" charset="0"/>
+                  </a:rPr>
+                  <a:t>1, 1, 2, 5, 14, 42, 132, 429, 1430, 4862, 16796, 58786, 208012, 742900, 2674440, 9694845…</a:t>
+                </a:r>
+              </a:p>
+              <a:p>
+                <a:r>
+                  <a:rPr lang="en-US" dirty="0">
+                    <a:ea typeface="Cambria Math" panose="02040503050406030204" pitchFamily="18" charset="0"/>
+                  </a:rPr>
+                  <a:t>Commonly denoted as </a:t>
+                </a:r>
+                <a14:m>
+                  <m:oMath xmlns:m="http://schemas.openxmlformats.org/officeDocument/2006/math">
+                    <m:sSub>
+                      <m:sSubPr>
+                        <m:ctrlPr>
+                          <a:rPr lang="en-US" dirty="0">
+                            <a:ea typeface="Cambria Math" panose="02040503050406030204" pitchFamily="18" charset="0"/>
+                          </a:rPr>
+                        </m:ctrlPr>
+                      </m:sSubPr>
+                      <m:e>
+                        <m:r>
+                          <a:rPr lang="en-US" b="0" i="1" dirty="0">
+                            <a:ea typeface="Cambria Math" panose="02040503050406030204" pitchFamily="18" charset="0"/>
+                          </a:rPr>
+                          <m:t>𝐶</m:t>
+                        </m:r>
+                      </m:e>
+                      <m:sub>
+                        <m:r>
+                          <a:rPr lang="en-US" b="0" i="1" dirty="0">
+                            <a:ea typeface="Cambria Math" panose="02040503050406030204" pitchFamily="18" charset="0"/>
+                          </a:rPr>
+                          <m:t>𝑛</m:t>
+                        </m:r>
+                      </m:sub>
+                    </m:sSub>
+                  </m:oMath>
+                </a14:m>
+                <a:r>
+                  <a:rPr lang="en-US" dirty="0">
+                    <a:ea typeface="Cambria Math" panose="02040503050406030204" pitchFamily="18" charset="0"/>
+                  </a:rPr>
+                  <a:t> </a:t>
+                </a:r>
+              </a:p>
+              <a:p>
+                <a:r>
+                  <a:rPr lang="en-US" dirty="0">
+                    <a:ea typeface="Cambria Math" panose="02040503050406030204" pitchFamily="18" charset="0"/>
+                  </a:rPr>
+                  <a:t>Closed form</a:t>
+                </a:r>
+              </a:p>
+              <a:p>
+                <a:pPr marL="0" indent="0">
+                  <a:buNone/>
+                </a:pPr>
+                <a14:m>
+                  <m:oMathPara xmlns:m="http://schemas.openxmlformats.org/officeDocument/2006/math">
+                    <m:oMathParaPr>
+                      <m:jc m:val="center"/>
+                    </m:oMathParaPr>
+                    <m:oMath xmlns:m="http://schemas.openxmlformats.org/officeDocument/2006/math">
+                      <m:r>
+                        <a:rPr lang="en-US" b="0" i="0" smtClean="0">
+                          <a:latin typeface="Cambria Math" panose="02040503050406030204" pitchFamily="18" charset="0"/>
+                          <a:ea typeface="Cambria Math" panose="02040503050406030204" pitchFamily="18" charset="0"/>
+                        </a:rPr>
+                        <m:t> </m:t>
+                      </m:r>
+                      <m:sSub>
+                        <m:sSubPr>
+                          <m:ctrlPr>
+                            <a:rPr lang="en-US" b="0" i="1" smtClean="0">
+                              <a:latin typeface="Cambria Math" panose="02040503050406030204" pitchFamily="18" charset="0"/>
+                              <a:ea typeface="Cambria Math" panose="02040503050406030204" pitchFamily="18" charset="0"/>
+                            </a:rPr>
+                          </m:ctrlPr>
+                        </m:sSubPr>
+                        <m:e>
+                          <m:r>
+                            <a:rPr lang="en-US" b="0" i="1" smtClean="0">
+                              <a:latin typeface="Cambria Math" panose="02040503050406030204" pitchFamily="18" charset="0"/>
+                              <a:ea typeface="Cambria Math" panose="02040503050406030204" pitchFamily="18" charset="0"/>
+                            </a:rPr>
+                            <m:t>𝐶</m:t>
+                          </m:r>
+                        </m:e>
+                        <m:sub>
+                          <m:r>
+                            <a:rPr lang="en-US" b="0" i="1" smtClean="0">
+                              <a:latin typeface="Cambria Math" panose="02040503050406030204" pitchFamily="18" charset="0"/>
+                              <a:ea typeface="Cambria Math" panose="02040503050406030204" pitchFamily="18" charset="0"/>
+                            </a:rPr>
+                            <m:t>𝑛</m:t>
+                          </m:r>
+                        </m:sub>
+                      </m:sSub>
+                      <m:r>
+                        <a:rPr lang="en-US" b="0" i="1" smtClean="0">
+                          <a:latin typeface="Cambria Math" panose="02040503050406030204" pitchFamily="18" charset="0"/>
+                          <a:ea typeface="Cambria Math" panose="02040503050406030204" pitchFamily="18" charset="0"/>
+                        </a:rPr>
+                        <m:t>≡</m:t>
+                      </m:r>
+                      <m:f>
+                        <m:fPr>
+                          <m:ctrlPr>
+                            <a:rPr lang="en-US" b="0" i="1" smtClean="0">
+                              <a:latin typeface="Cambria Math" panose="02040503050406030204" pitchFamily="18" charset="0"/>
+                              <a:ea typeface="Cambria Math" panose="02040503050406030204" pitchFamily="18" charset="0"/>
+                            </a:rPr>
+                          </m:ctrlPr>
+                        </m:fPr>
+                        <m:num>
+                          <m:r>
+                            <a:rPr lang="en-US" b="0" i="1" smtClean="0">
+                              <a:latin typeface="Cambria Math" panose="02040503050406030204" pitchFamily="18" charset="0"/>
+                              <a:ea typeface="Cambria Math" panose="02040503050406030204" pitchFamily="18" charset="0"/>
+                            </a:rPr>
+                            <m:t>1</m:t>
+                          </m:r>
+                        </m:num>
+                        <m:den>
+                          <m:r>
+                            <a:rPr lang="en-US" b="0" i="1" smtClean="0">
+                              <a:latin typeface="Cambria Math" panose="02040503050406030204" pitchFamily="18" charset="0"/>
+                              <a:ea typeface="Cambria Math" panose="02040503050406030204" pitchFamily="18" charset="0"/>
+                            </a:rPr>
+                            <m:t>𝑛</m:t>
+                          </m:r>
+                          <m:r>
+                            <a:rPr lang="en-US" b="0" i="1" smtClean="0">
+                              <a:latin typeface="Cambria Math" panose="02040503050406030204" pitchFamily="18" charset="0"/>
+                              <a:ea typeface="Cambria Math" panose="02040503050406030204" pitchFamily="18" charset="0"/>
+                            </a:rPr>
+                            <m:t>+1</m:t>
+                          </m:r>
+                        </m:den>
+                      </m:f>
+                      <m:d>
+                        <m:dPr>
+                          <m:ctrlPr>
+                            <a:rPr lang="en-US" b="0" i="1" smtClean="0">
+                              <a:latin typeface="Cambria Math" panose="02040503050406030204" pitchFamily="18" charset="0"/>
+                              <a:ea typeface="Cambria Math" panose="02040503050406030204" pitchFamily="18" charset="0"/>
+                            </a:rPr>
+                          </m:ctrlPr>
+                        </m:dPr>
+                        <m:e>
+                          <m:f>
+                            <m:fPr>
+                              <m:type m:val="noBar"/>
+                              <m:ctrlPr>
+                                <a:rPr lang="en-US" b="0" i="1" smtClean="0">
+                                  <a:latin typeface="Cambria Math" panose="02040503050406030204" pitchFamily="18" charset="0"/>
+                                  <a:ea typeface="Cambria Math" panose="02040503050406030204" pitchFamily="18" charset="0"/>
+                                </a:rPr>
+                              </m:ctrlPr>
+                            </m:fPr>
+                            <m:num>
+                              <m:r>
+                                <a:rPr lang="en-US" b="0" i="1" smtClean="0">
+                                  <a:latin typeface="Cambria Math" panose="02040503050406030204" pitchFamily="18" charset="0"/>
+                                  <a:ea typeface="Cambria Math" panose="02040503050406030204" pitchFamily="18" charset="0"/>
+                                </a:rPr>
+                                <m:t>2</m:t>
+                              </m:r>
+                              <m:r>
+                                <a:rPr lang="en-US" b="0" i="1" smtClean="0">
+                                  <a:latin typeface="Cambria Math" panose="02040503050406030204" pitchFamily="18" charset="0"/>
+                                  <a:ea typeface="Cambria Math" panose="02040503050406030204" pitchFamily="18" charset="0"/>
+                                </a:rPr>
+                                <m:t>𝑛</m:t>
+                              </m:r>
+                            </m:num>
+                            <m:den>
+                              <m:r>
+                                <a:rPr lang="en-US" b="0" i="1" smtClean="0">
+                                  <a:latin typeface="Cambria Math" panose="02040503050406030204" pitchFamily="18" charset="0"/>
+                                  <a:ea typeface="Cambria Math" panose="02040503050406030204" pitchFamily="18" charset="0"/>
+                                </a:rPr>
+                                <m:t>𝑛</m:t>
+                              </m:r>
+                            </m:den>
+                          </m:f>
+                        </m:e>
+                      </m:d>
+                    </m:oMath>
+                  </m:oMathPara>
+                </a14:m>
+                <a:endParaRPr lang="en-US" dirty="0">
+                  <a:ea typeface="Cambria Math" panose="02040503050406030204" pitchFamily="18" charset="0"/>
+                </a:endParaRPr>
+              </a:p>
+              <a:p>
+                <a:r>
+                  <a:rPr lang="en-US" dirty="0">
+                    <a:latin typeface="Cambria Math" panose="02040503050406030204" pitchFamily="18" charset="0"/>
+                  </a:rPr>
+                  <a:t>Sums form</a:t>
+                </a:r>
+              </a:p>
+              <a:p>
+                <a:pPr marL="0" indent="0">
+                  <a:buNone/>
+                </a:pPr>
+                <a14:m>
+                  <m:oMathPara xmlns:m="http://schemas.openxmlformats.org/officeDocument/2006/math">
+                    <m:oMathParaPr>
+                      <m:jc m:val="center"/>
+                    </m:oMathParaPr>
+                    <m:oMath xmlns:m="http://schemas.openxmlformats.org/officeDocument/2006/math">
+                      <m:sSub>
+                        <m:sSubPr>
+                          <m:ctrlPr>
+                            <a:rPr lang="en-US" b="0" i="1" smtClean="0">
+                              <a:latin typeface="Cambria Math" panose="02040503050406030204" pitchFamily="18" charset="0"/>
+                            </a:rPr>
+                          </m:ctrlPr>
+                        </m:sSubPr>
+                        <m:e>
+                          <m:r>
+                            <a:rPr lang="en-US" b="0" i="1" smtClean="0">
+                              <a:latin typeface="Cambria Math" panose="02040503050406030204" pitchFamily="18" charset="0"/>
+                            </a:rPr>
+                            <m:t>𝐶</m:t>
+                          </m:r>
+                        </m:e>
+                        <m:sub>
+                          <m:r>
+                            <a:rPr lang="en-US" b="0" i="1" smtClean="0">
+                              <a:latin typeface="Cambria Math" panose="02040503050406030204" pitchFamily="18" charset="0"/>
+                            </a:rPr>
+                            <m:t>𝑛</m:t>
+                          </m:r>
+                        </m:sub>
+                      </m:sSub>
+                      <m:r>
+                        <a:rPr lang="en-US" b="0" i="1" smtClean="0">
+                          <a:latin typeface="Cambria Math" panose="02040503050406030204" pitchFamily="18" charset="0"/>
+                        </a:rPr>
+                        <m:t>= </m:t>
+                      </m:r>
+                      <m:nary>
+                        <m:naryPr>
+                          <m:chr m:val="∑"/>
+                          <m:ctrlPr>
+                            <a:rPr lang="en-US" b="0" i="1" smtClean="0">
+                              <a:latin typeface="Cambria Math" panose="02040503050406030204" pitchFamily="18" charset="0"/>
+                            </a:rPr>
+                          </m:ctrlPr>
+                        </m:naryPr>
+                        <m:sub>
+                          <m:r>
+                            <m:rPr>
+                              <m:brk m:alnAt="23"/>
+                            </m:rPr>
+                            <a:rPr lang="en-US" b="0" i="1" smtClean="0">
+                              <a:latin typeface="Cambria Math" panose="02040503050406030204" pitchFamily="18" charset="0"/>
+                            </a:rPr>
+                            <m:t>𝑖</m:t>
+                          </m:r>
+                          <m:r>
+                            <a:rPr lang="en-US" b="0" i="1" smtClean="0">
+                              <a:latin typeface="Cambria Math" panose="02040503050406030204" pitchFamily="18" charset="0"/>
+                            </a:rPr>
+                            <m:t>=0</m:t>
+                          </m:r>
+                        </m:sub>
+                        <m:sup>
+                          <m:r>
+                            <a:rPr lang="en-US" b="0" i="1" smtClean="0">
+                              <a:latin typeface="Cambria Math" panose="02040503050406030204" pitchFamily="18" charset="0"/>
+                            </a:rPr>
+                            <m:t>𝑛</m:t>
+                          </m:r>
+                          <m:r>
+                            <a:rPr lang="en-US" b="0" i="1" smtClean="0">
+                              <a:latin typeface="Cambria Math" panose="02040503050406030204" pitchFamily="18" charset="0"/>
+                            </a:rPr>
+                            <m:t>−1</m:t>
+                          </m:r>
+                        </m:sup>
+                        <m:e>
+                          <m:sSub>
+                            <m:sSubPr>
+                              <m:ctrlPr>
+                                <a:rPr lang="en-US" b="0" i="1" smtClean="0">
+                                  <a:latin typeface="Cambria Math" panose="02040503050406030204" pitchFamily="18" charset="0"/>
+                                </a:rPr>
+                              </m:ctrlPr>
+                            </m:sSubPr>
+                            <m:e>
+                              <m:r>
+                                <a:rPr lang="en-US" b="0" i="1" smtClean="0">
+                                  <a:latin typeface="Cambria Math" panose="02040503050406030204" pitchFamily="18" charset="0"/>
+                                </a:rPr>
+                                <m:t>𝐶</m:t>
+                              </m:r>
+                            </m:e>
+                            <m:sub>
+                              <m:r>
+                                <a:rPr lang="en-US" b="0" i="1" smtClean="0">
+                                  <a:latin typeface="Cambria Math" panose="02040503050406030204" pitchFamily="18" charset="0"/>
+                                </a:rPr>
+                                <m:t>𝑖</m:t>
+                              </m:r>
+                            </m:sub>
+                          </m:sSub>
+                          <m:sSub>
+                            <m:sSubPr>
+                              <m:ctrlPr>
+                                <a:rPr lang="en-US" b="0" i="1" smtClean="0">
+                                  <a:latin typeface="Cambria Math" panose="02040503050406030204" pitchFamily="18" charset="0"/>
+                                </a:rPr>
+                              </m:ctrlPr>
+                            </m:sSubPr>
+                            <m:e>
+                              <m:r>
+                                <a:rPr lang="en-US" b="0" i="1" smtClean="0">
+                                  <a:latin typeface="Cambria Math" panose="02040503050406030204" pitchFamily="18" charset="0"/>
+                                </a:rPr>
+                                <m:t>𝐶</m:t>
+                              </m:r>
+                            </m:e>
+                            <m:sub>
+                              <m:r>
+                                <a:rPr lang="en-US" b="0" i="1" smtClean="0">
+                                  <a:latin typeface="Cambria Math" panose="02040503050406030204" pitchFamily="18" charset="0"/>
+                                </a:rPr>
+                                <m:t>𝑛</m:t>
+                              </m:r>
+                              <m:r>
+                                <a:rPr lang="en-US" b="0" i="1" smtClean="0">
+                                  <a:latin typeface="Cambria Math" panose="02040503050406030204" pitchFamily="18" charset="0"/>
+                                </a:rPr>
+                                <m:t>−1−</m:t>
+                              </m:r>
+                              <m:r>
+                                <a:rPr lang="en-US" b="0" i="1" smtClean="0">
+                                  <a:latin typeface="Cambria Math" panose="02040503050406030204" pitchFamily="18" charset="0"/>
+                                </a:rPr>
+                                <m:t>𝑖</m:t>
+                              </m:r>
+                            </m:sub>
+                          </m:sSub>
+                        </m:e>
+                      </m:nary>
+                    </m:oMath>
+                  </m:oMathPara>
+                </a14:m>
+                <a:endParaRPr lang="en-US" dirty="0"/>
+              </a:p>
+            </p:txBody>
+          </p:sp>
+        </mc:Choice>
+        <mc:Fallback>
+          <p:sp>
+            <p:nvSpPr>
+              <p:cNvPr id="3" name="Content Placeholder 2">
+                <a:extLst>
+                  <a:ext uri="{FF2B5EF4-FFF2-40B4-BE49-F238E27FC236}">
+                    <a16:creationId xmlns:a16="http://schemas.microsoft.com/office/drawing/2014/main" id="{D2899071-5D4E-E842-8268-8CD319DBFD10}"/>
+                  </a:ext>
+                </a:extLst>
+              </p:cNvPr>
+              <p:cNvSpPr>
+                <a:spLocks noGrp="1" noRot="1" noChangeAspect="1" noMove="1" noResize="1" noEditPoints="1" noAdjustHandles="1" noChangeArrowheads="1" noChangeShapeType="1" noTextEdit="1"/>
+              </p:cNvSpPr>
+              <p:nvPr>
+                <p:ph idx="1"/>
+              </p:nvPr>
+            </p:nvSpPr>
+            <p:spPr>
+              <a:xfrm>
+                <a:off x="402264" y="1825625"/>
+                <a:ext cx="7714693" cy="4351339"/>
+              </a:xfrm>
+              <a:blipFill>
+                <a:blip r:embed="rId2"/>
+                <a:stretch>
+                  <a:fillRect l="-1264" t="-3081"/>
+                </a:stretch>
+              </a:blipFill>
+            </p:spPr>
+            <p:txBody>
+              <a:bodyPr/>
+              <a:lstStyle/>
+              <a:p>
+                <a:r>
+                  <a:rPr lang="en-US">
+                    <a:noFill/>
+                  </a:rPr>
+                  <a:t> </a:t>
+                </a:r>
+              </a:p>
+            </p:txBody>
+          </p:sp>
+        </mc:Fallback>
+      </mc:AlternateContent>
+      <p:sp>
+        <p:nvSpPr>
+          <p:cNvPr id="8" name="Footer Placeholder 7">
+            <a:extLst>
+              <a:ext uri="{FF2B5EF4-FFF2-40B4-BE49-F238E27FC236}">
+                <a16:creationId xmlns:a16="http://schemas.microsoft.com/office/drawing/2014/main" id="{EB74D134-B645-6440-A1F5-73CEC1A36CEC}"/>
+              </a:ext>
+            </a:extLst>
+          </p:cNvPr>
+          <p:cNvSpPr>
+            <a:spLocks noGrp="1"/>
+          </p:cNvSpPr>
+          <p:nvPr>
+            <p:ph type="ftr" sz="quarter" idx="11"/>
+          </p:nvPr>
+        </p:nvSpPr>
+        <p:spPr/>
+        <p:txBody>
+          <a:bodyPr/>
+          <a:lstStyle/>
+          <a:p>
+            <a:r>
+              <a:rPr lang="en-US" dirty="0"/>
+              <a:t>UNIVERSITY OF SOUTH FLORIDA</a:t>
+            </a:r>
+          </a:p>
+        </p:txBody>
+      </p:sp>
+      <p:pic>
+        <p:nvPicPr>
+          <p:cNvPr id="11" name="Content Placeholder 6">
+            <a:extLst>
+              <a:ext uri="{FF2B5EF4-FFF2-40B4-BE49-F238E27FC236}">
+                <a16:creationId xmlns:a16="http://schemas.microsoft.com/office/drawing/2014/main" id="{8F602B06-601E-6787-0493-5B1BFCFED8E6}"/>
+              </a:ext>
+            </a:extLst>
+          </p:cNvPr>
+          <p:cNvPicPr>
+            <a:picLocks noChangeAspect="1"/>
+          </p:cNvPicPr>
+          <p:nvPr/>
+        </p:nvPicPr>
+        <p:blipFill>
+          <a:blip r:embed="rId3"/>
+          <a:srcRect r="29798"/>
+          <a:stretch>
+            <a:fillRect/>
+          </a:stretch>
+        </p:blipFill>
+        <p:spPr>
+          <a:xfrm>
+            <a:off x="7137741" y="3591485"/>
+            <a:ext cx="5054259" cy="2399878"/>
+          </a:xfrm>
+          <a:prstGeom prst="rect">
+            <a:avLst/>
+          </a:prstGeom>
+        </p:spPr>
+      </p:pic>
+    </p:spTree>
+    <p:extLst>
+      <p:ext uri="{BB962C8B-B14F-4D97-AF65-F5344CB8AC3E}">
+        <p14:creationId xmlns:p14="http://schemas.microsoft.com/office/powerpoint/2010/main" val="332255437"/>
+      </p:ext>
+    </p:extLst>
+  </p:cSld>
+  <p:clrMapOvr>
+    <a:masterClrMapping/>
+  </p:clrMapOvr>
+</p:sld>
+</file>
+
+<file path=ppt/slides/slide3.xml><?xml version="1.0" encoding="utf-8"?>
+<p:sld xmlns:a="http://schemas.openxmlformats.org/drawingml/2006/main" xmlns:r="http://schemas.openxmlformats.org/officeDocument/2006/relationships" xmlns:p="http://schemas.openxmlformats.org/presentationml/2006/main">
+  <p:cSld>
+    <p:spTree>
+      <p:nvGrpSpPr>
+        <p:cNvPr id="1" name=""/>
+        <p:cNvGrpSpPr/>
+        <p:nvPr/>
+      </p:nvGrpSpPr>
+      <p:grpSpPr>
+        <a:xfrm>
+          <a:off x="0" y="0"/>
+          <a:ext cx="0" cy="0"/>
+          <a:chOff x="0" y="0"/>
+          <a:chExt cx="0" cy="0"/>
+        </a:xfrm>
+      </p:grpSpPr>
+      <p:sp>
+        <p:nvSpPr>
+          <p:cNvPr id="4" name="Title 3">
+            <a:extLst>
+              <a:ext uri="{FF2B5EF4-FFF2-40B4-BE49-F238E27FC236}">
+                <a16:creationId xmlns:a16="http://schemas.microsoft.com/office/drawing/2014/main" id="{BE36D3A8-FA91-5B17-8129-5BF37FDF3D5B}"/>
+              </a:ext>
+            </a:extLst>
+          </p:cNvPr>
+          <p:cNvSpPr>
+            <a:spLocks noGrp="1"/>
+          </p:cNvSpPr>
+          <p:nvPr>
+            <p:ph type="title"/>
+          </p:nvPr>
+        </p:nvSpPr>
+        <p:spPr>
+          <a:xfrm>
+            <a:off x="402265" y="365125"/>
+            <a:ext cx="4127402" cy="1325563"/>
+          </a:xfrm>
+        </p:spPr>
+        <p:txBody>
+          <a:bodyPr/>
+          <a:lstStyle/>
+          <a:p>
+            <a:r>
+              <a:rPr lang="en-US" dirty="0"/>
+              <a:t>Computer Uses</a:t>
+            </a:r>
+          </a:p>
+        </p:txBody>
+      </p:sp>
+      <p:sp>
+        <p:nvSpPr>
+          <p:cNvPr id="5" name="Footer Placeholder 4">
+            <a:extLst>
+              <a:ext uri="{FF2B5EF4-FFF2-40B4-BE49-F238E27FC236}">
+                <a16:creationId xmlns:a16="http://schemas.microsoft.com/office/drawing/2014/main" id="{740ACE8A-2C8F-4DB4-4DD8-CA2540E4D273}"/>
+              </a:ext>
+            </a:extLst>
+          </p:cNvPr>
+          <p:cNvSpPr>
+            <a:spLocks noGrp="1"/>
+          </p:cNvSpPr>
+          <p:nvPr>
+            <p:ph type="ftr" sz="quarter" idx="11"/>
+          </p:nvPr>
+        </p:nvSpPr>
+        <p:spPr/>
+        <p:txBody>
+          <a:bodyPr/>
+          <a:lstStyle/>
+          <a:p>
+            <a:r>
+              <a:rPr lang="en-US"/>
+              <a:t>UNIVERSITY OF SOUTH FLORIDA</a:t>
+            </a:r>
+            <a:endParaRPr lang="en-US" dirty="0"/>
+          </a:p>
+        </p:txBody>
+      </p:sp>
+      <p:sp>
+        <p:nvSpPr>
+          <p:cNvPr id="15" name="Content Placeholder 14">
+            <a:extLst>
+              <a:ext uri="{FF2B5EF4-FFF2-40B4-BE49-F238E27FC236}">
+                <a16:creationId xmlns:a16="http://schemas.microsoft.com/office/drawing/2014/main" id="{3B01056E-C516-443B-4EE7-4EB9E0819989}"/>
+              </a:ext>
+            </a:extLst>
+          </p:cNvPr>
+          <p:cNvSpPr>
+            <a:spLocks noGrp="1"/>
+          </p:cNvSpPr>
+          <p:nvPr>
+            <p:ph sz="half" idx="1"/>
+          </p:nvPr>
+        </p:nvSpPr>
+        <p:spPr>
+          <a:xfrm>
+            <a:off x="402263" y="1799674"/>
+            <a:ext cx="5693737" cy="4351339"/>
+          </a:xfrm>
+        </p:spPr>
+        <p:txBody>
+          <a:bodyPr>
+            <a:normAutofit fontScale="92500" lnSpcReduction="20000"/>
+          </a:bodyPr>
+          <a:lstStyle/>
+          <a:p>
+            <a:pPr marL="0" indent="0">
+              <a:buNone/>
+            </a:pPr>
+            <a:r>
+              <a:rPr lang="en-US" dirty="0"/>
+              <a:t>“This is probably the longest entry in the OEIS, and rightly so.” (OEIS)</a:t>
+            </a:r>
+          </a:p>
+          <a:p>
+            <a:r>
+              <a:rPr lang="en-US" b="1" dirty="0">
+                <a:solidFill>
+                  <a:srgbClr val="455F69"/>
+                </a:solidFill>
+              </a:rPr>
+              <a:t>Balanced parenthesis: </a:t>
+            </a:r>
+            <a:r>
+              <a:rPr lang="en-US" dirty="0"/>
+              <a:t>nu</a:t>
+            </a:r>
+            <a:r>
+              <a:rPr lang="en-US" dirty="0">
+                <a:solidFill>
+                  <a:srgbClr val="455F69"/>
+                </a:solidFill>
+              </a:rPr>
+              <a:t>m</a:t>
+            </a:r>
+            <a:r>
+              <a:rPr lang="en-US" dirty="0"/>
+              <a:t>ber of ways to insert n pairs of parentheses in a word of n+1 letters.</a:t>
+            </a:r>
+          </a:p>
+          <a:p>
+            <a:r>
+              <a:rPr lang="en-US" b="1" dirty="0">
+                <a:solidFill>
+                  <a:srgbClr val="455F69"/>
+                </a:solidFill>
+              </a:rPr>
+              <a:t>Non-intersecting chords: </a:t>
+            </a:r>
+            <a:r>
+              <a:rPr lang="en-US" dirty="0"/>
+              <a:t>Number of ways of joining 2n points on a circle to form n nonintersecting chords</a:t>
+            </a:r>
+          </a:p>
+          <a:p>
+            <a:r>
+              <a:rPr lang="en-US" b="1" dirty="0">
+                <a:solidFill>
+                  <a:srgbClr val="455F69"/>
+                </a:solidFill>
+              </a:rPr>
+              <a:t>Binary Trees: </a:t>
+            </a:r>
+            <a:r>
+              <a:rPr lang="en-US" dirty="0"/>
+              <a:t>number of rooted binary trees with n internal nodes.</a:t>
+            </a:r>
+          </a:p>
+          <a:p>
+            <a:r>
+              <a:rPr lang="en-US" dirty="0"/>
+              <a:t>…</a:t>
+            </a:r>
+          </a:p>
+          <a:p>
+            <a:endParaRPr lang="en-US" dirty="0"/>
+          </a:p>
+        </p:txBody>
+      </p:sp>
+      <p:pic>
+        <p:nvPicPr>
+          <p:cNvPr id="18" name="Content Placeholder 21">
+            <a:extLst>
+              <a:ext uri="{FF2B5EF4-FFF2-40B4-BE49-F238E27FC236}">
+                <a16:creationId xmlns:a16="http://schemas.microsoft.com/office/drawing/2014/main" id="{2D4CEBBF-0110-FADA-C6C4-37DA4C4D0327}"/>
+              </a:ext>
+            </a:extLst>
+          </p:cNvPr>
+          <p:cNvPicPr>
+            <a:picLocks noGrp="1" noChangeAspect="1"/>
+          </p:cNvPicPr>
+          <p:nvPr>
+            <p:ph sz="half" idx="2"/>
+          </p:nvPr>
+        </p:nvPicPr>
+        <p:blipFill>
+          <a:blip r:embed="rId2"/>
+          <a:stretch>
+            <a:fillRect/>
+          </a:stretch>
+        </p:blipFill>
+        <p:spPr>
+          <a:xfrm>
+            <a:off x="6489198" y="1690688"/>
+            <a:ext cx="5167363" cy="2722013"/>
+          </a:xfrm>
+          <a:prstGeom prst="rect">
+            <a:avLst/>
+          </a:prstGeom>
+        </p:spPr>
+      </p:pic>
+      <p:pic>
+        <p:nvPicPr>
+          <p:cNvPr id="23" name="Picture 22">
+            <a:extLst>
+              <a:ext uri="{FF2B5EF4-FFF2-40B4-BE49-F238E27FC236}">
+                <a16:creationId xmlns:a16="http://schemas.microsoft.com/office/drawing/2014/main" id="{8A909B30-B3AA-05F9-F468-971F488582ED}"/>
+              </a:ext>
+            </a:extLst>
+          </p:cNvPr>
+          <p:cNvPicPr>
+            <a:picLocks noChangeAspect="1"/>
+          </p:cNvPicPr>
+          <p:nvPr/>
+        </p:nvPicPr>
+        <p:blipFill>
+          <a:blip r:embed="rId3"/>
+          <a:srcRect l="3809" r="4593"/>
+          <a:stretch>
+            <a:fillRect/>
+          </a:stretch>
+        </p:blipFill>
+        <p:spPr>
+          <a:xfrm>
+            <a:off x="9269229" y="4412701"/>
+            <a:ext cx="2852421" cy="1624528"/>
+          </a:xfrm>
+          <a:prstGeom prst="rect">
+            <a:avLst/>
+          </a:prstGeom>
+        </p:spPr>
+      </p:pic>
+      <p:pic>
+        <p:nvPicPr>
+          <p:cNvPr id="20" name="Picture 19">
+            <a:extLst>
+              <a:ext uri="{FF2B5EF4-FFF2-40B4-BE49-F238E27FC236}">
+                <a16:creationId xmlns:a16="http://schemas.microsoft.com/office/drawing/2014/main" id="{9909F366-477B-9271-B9D2-D908089A0298}"/>
+              </a:ext>
+            </a:extLst>
+          </p:cNvPr>
+          <p:cNvPicPr>
+            <a:picLocks noChangeAspect="1"/>
+          </p:cNvPicPr>
+          <p:nvPr/>
+        </p:nvPicPr>
+        <p:blipFill>
+          <a:blip r:embed="rId4"/>
+          <a:srcRect l="2003" r="2566"/>
+          <a:stretch>
+            <a:fillRect/>
+          </a:stretch>
+        </p:blipFill>
+        <p:spPr>
+          <a:xfrm>
+            <a:off x="6489198" y="4412701"/>
+            <a:ext cx="2722881" cy="1754465"/>
+          </a:xfrm>
+          <a:prstGeom prst="rect">
+            <a:avLst/>
+          </a:prstGeom>
+        </p:spPr>
+      </p:pic>
+    </p:spTree>
+    <p:extLst>
+      <p:ext uri="{BB962C8B-B14F-4D97-AF65-F5344CB8AC3E}">
+        <p14:creationId xmlns:p14="http://schemas.microsoft.com/office/powerpoint/2010/main" val="42586590"/>
+      </p:ext>
+    </p:extLst>
+  </p:cSld>
+  <p:clrMapOvr>
+    <a:masterClrMapping/>
+  </p:clrMapOvr>
+</p:sld>
+</file>
+
+<file path=ppt/slides/slide4.xml><?xml version="1.0" encoding="utf-8"?>
+<p:sld xmlns:a="http://schemas.openxmlformats.org/drawingml/2006/main" xmlns:r="http://schemas.openxmlformats.org/officeDocument/2006/relationships" xmlns:p="http://schemas.openxmlformats.org/presentationml/2006/main">
+  <p:cSld>
+    <p:spTree>
+      <p:nvGrpSpPr>
+        <p:cNvPr id="1" name=""/>
+        <p:cNvGrpSpPr/>
+        <p:nvPr/>
+      </p:nvGrpSpPr>
+      <p:grpSpPr>
+        <a:xfrm>
+          <a:off x="0" y="0"/>
+          <a:ext cx="0" cy="0"/>
+          <a:chOff x="0" y="0"/>
+          <a:chExt cx="0" cy="0"/>
+        </a:xfrm>
+      </p:grpSpPr>
+      <mc:AlternateContent xmlns:mc="http://schemas.openxmlformats.org/markup-compatibility/2006">
+        <mc:Choice xmlns:a14="http://schemas.microsoft.com/office/drawing/2010/main" Requires="a14">
+          <p:sp>
+            <p:nvSpPr>
+              <p:cNvPr id="2" name="Content Placeholder 1">
+                <a:extLst>
+                  <a:ext uri="{FF2B5EF4-FFF2-40B4-BE49-F238E27FC236}">
+                    <a16:creationId xmlns:a16="http://schemas.microsoft.com/office/drawing/2014/main" id="{3671555A-F350-3CF8-04A4-71144124F362}"/>
+                  </a:ext>
+                </a:extLst>
+              </p:cNvPr>
+              <p:cNvSpPr>
+                <a:spLocks noGrp="1"/>
+              </p:cNvSpPr>
+              <p:nvPr>
+                <p:ph sz="half" idx="1"/>
+              </p:nvPr>
+            </p:nvSpPr>
+            <p:spPr>
+              <a:xfrm>
+                <a:off x="401638" y="1800225"/>
+                <a:ext cx="5862002" cy="4351338"/>
+              </a:xfrm>
+            </p:spPr>
+            <p:txBody>
+              <a:bodyPr>
+                <a:normAutofit/>
+              </a:bodyPr>
+              <a:lstStyle/>
+              <a:p>
+                <a14:m>
+                  <m:oMath xmlns:m="http://schemas.openxmlformats.org/officeDocument/2006/math">
+                    <m:sSub>
+                      <m:sSubPr>
+                        <m:ctrlPr>
+                          <a:rPr lang="en-US" i="1" dirty="0" smtClean="0">
+                            <a:latin typeface="Cambria Math" panose="02040503050406030204" pitchFamily="18" charset="0"/>
+                          </a:rPr>
+                        </m:ctrlPr>
+                      </m:sSubPr>
+                      <m:e>
+                        <m:r>
+                          <a:rPr lang="en-US" i="1" dirty="0" smtClean="0">
+                            <a:latin typeface="Cambria Math" panose="02040503050406030204" pitchFamily="18" charset="0"/>
+                          </a:rPr>
+                          <m:t>𝐶</m:t>
+                        </m:r>
+                      </m:e>
+                      <m:sub>
+                        <m:r>
+                          <a:rPr lang="en-US" i="1" dirty="0" smtClean="0">
+                            <a:latin typeface="Cambria Math" panose="02040503050406030204" pitchFamily="18" charset="0"/>
+                          </a:rPr>
+                          <m:t>𝑛</m:t>
+                        </m:r>
+                      </m:sub>
+                    </m:sSub>
+                    <m:r>
+                      <a:rPr lang="en-US" b="0" i="0" dirty="0" smtClean="0">
+                        <a:latin typeface="Cambria Math" panose="02040503050406030204" pitchFamily="18" charset="0"/>
+                      </a:rPr>
+                      <m:t> </m:t>
+                    </m:r>
+                  </m:oMath>
+                </a14:m>
+                <a:r>
+                  <a:rPr lang="en-US" dirty="0"/>
+                  <a:t>grows exponentially!</a:t>
+                </a:r>
+              </a:p>
+              <a:p>
+                <a:pPr/>
+                <a:r>
+                  <a:rPr lang="en-US" i="0" dirty="0">
+                    <a:latin typeface="+mj-lt"/>
+                  </a:rPr>
+                  <a:t>Time Complexity</a:t>
+                </a:r>
+                <a:endParaRPr lang="en-US" i="1" dirty="0">
+                  <a:latin typeface="Cambria Math" panose="02040503050406030204" pitchFamily="18" charset="0"/>
+                </a:endParaRPr>
+              </a:p>
+              <a:p>
+                <a:pPr lvl="1"/>
+                <a14:m>
+                  <m:oMath xmlns:m="http://schemas.openxmlformats.org/officeDocument/2006/math">
+                    <m:r>
+                      <m:rPr>
+                        <m:sty m:val="p"/>
+                      </m:rPr>
+                      <a:rPr lang="en-US" b="0" i="0" dirty="0" smtClean="0">
+                        <a:latin typeface="Cambria Math" panose="02040503050406030204" pitchFamily="18" charset="0"/>
+                      </a:rPr>
+                      <m:t>Dp</m:t>
+                    </m:r>
+                    <m:r>
+                      <a:rPr lang="en-US" dirty="0" smtClean="0">
+                        <a:latin typeface="Cambria Math" panose="02040503050406030204" pitchFamily="18" charset="0"/>
+                      </a:rPr>
+                      <m:t>=</m:t>
+                    </m:r>
+                    <m:r>
+                      <a:rPr lang="en-US" dirty="0" smtClean="0">
+                        <a:latin typeface="Cambria Math" panose="02040503050406030204" pitchFamily="18" charset="0"/>
+                      </a:rPr>
+                      <m:t>𝑂</m:t>
+                    </m:r>
+                    <m:d>
+                      <m:dPr>
+                        <m:ctrlPr>
+                          <a:rPr lang="en-US" i="1" dirty="0" smtClean="0">
+                            <a:latin typeface="Cambria Math" panose="02040503050406030204" pitchFamily="18" charset="0"/>
+                          </a:rPr>
+                        </m:ctrlPr>
+                      </m:dPr>
+                      <m:e>
+                        <m:sSup>
+                          <m:sSupPr>
+                            <m:ctrlPr>
+                              <a:rPr lang="en-US" i="1" dirty="0" smtClean="0">
+                                <a:latin typeface="Cambria Math" panose="02040503050406030204" pitchFamily="18" charset="0"/>
+                              </a:rPr>
+                            </m:ctrlPr>
+                          </m:sSupPr>
+                          <m:e>
+                            <m:r>
+                              <a:rPr lang="en-US" dirty="0" smtClean="0">
+                                <a:latin typeface="Cambria Math" panose="02040503050406030204" pitchFamily="18" charset="0"/>
+                              </a:rPr>
+                              <m:t>𝑛</m:t>
+                            </m:r>
+                          </m:e>
+                          <m:sup>
+                            <m:r>
+                              <a:rPr lang="en-US" dirty="0" smtClean="0">
+                                <a:latin typeface="Cambria Math" panose="02040503050406030204" pitchFamily="18" charset="0"/>
+                              </a:rPr>
+                              <m:t>2</m:t>
+                            </m:r>
+                          </m:sup>
+                        </m:sSup>
+                      </m:e>
+                    </m:d>
+                  </m:oMath>
+                </a14:m>
+                <a:endParaRPr lang="en-US" dirty="0"/>
+              </a:p>
+              <a:p>
+                <a:pPr lvl="1"/>
+                <a14:m>
+                  <m:oMath xmlns:m="http://schemas.openxmlformats.org/officeDocument/2006/math">
+                    <m:r>
+                      <a:rPr lang="en-US" i="1" dirty="0" smtClean="0">
+                        <a:latin typeface="Cambria Math" panose="02040503050406030204" pitchFamily="18" charset="0"/>
+                      </a:rPr>
+                      <m:t>𝑁𝑎</m:t>
+                    </m:r>
+                    <m:r>
+                      <a:rPr lang="en-US" i="1" dirty="0" smtClean="0">
+                        <a:latin typeface="Cambria Math" panose="02040503050406030204" pitchFamily="18" charset="0"/>
+                      </a:rPr>
+                      <m:t>ï</m:t>
+                    </m:r>
+                    <m:r>
+                      <a:rPr lang="en-US" i="1" dirty="0" smtClean="0">
+                        <a:latin typeface="Cambria Math" panose="02040503050406030204" pitchFamily="18" charset="0"/>
+                      </a:rPr>
+                      <m:t>𝑣𝑒</m:t>
+                    </m:r>
+                    <m:r>
+                      <a:rPr lang="en-US" i="1" dirty="0" smtClean="0">
+                        <a:latin typeface="Cambria Math" panose="02040503050406030204" pitchFamily="18" charset="0"/>
+                      </a:rPr>
+                      <m:t> = </m:t>
+                    </m:r>
+                    <m:r>
+                      <a:rPr lang="en-US" i="1" dirty="0" smtClean="0">
+                        <a:latin typeface="Cambria Math" panose="02040503050406030204" pitchFamily="18" charset="0"/>
+                      </a:rPr>
+                      <m:t>𝑂</m:t>
+                    </m:r>
+                    <m:r>
+                      <a:rPr lang="en-US" i="1" dirty="0" smtClean="0">
+                        <a:latin typeface="Cambria Math" panose="02040503050406030204" pitchFamily="18" charset="0"/>
+                      </a:rPr>
+                      <m:t>(</m:t>
+                    </m:r>
+                    <m:sSup>
+                      <m:sSupPr>
+                        <m:ctrlPr>
+                          <a:rPr lang="en-US" i="1" dirty="0" smtClean="0">
+                            <a:latin typeface="Cambria Math" panose="02040503050406030204" pitchFamily="18" charset="0"/>
+                          </a:rPr>
+                        </m:ctrlPr>
+                      </m:sSupPr>
+                      <m:e>
+                        <m:r>
+                          <a:rPr lang="en-US" i="1" dirty="0" smtClean="0">
+                            <a:latin typeface="Cambria Math" panose="02040503050406030204" pitchFamily="18" charset="0"/>
+                          </a:rPr>
+                          <m:t>2</m:t>
+                        </m:r>
+                      </m:e>
+                      <m:sup>
+                        <m:r>
+                          <a:rPr lang="en-US" i="1" dirty="0" smtClean="0">
+                            <a:latin typeface="Cambria Math" panose="02040503050406030204" pitchFamily="18" charset="0"/>
+                          </a:rPr>
+                          <m:t>𝑛</m:t>
+                        </m:r>
+                      </m:sup>
+                    </m:sSup>
+                    <m:r>
+                      <a:rPr lang="en-US" i="1" dirty="0" smtClean="0">
+                        <a:latin typeface="Cambria Math" panose="02040503050406030204" pitchFamily="18" charset="0"/>
+                      </a:rPr>
+                      <m:t>)</m:t>
+                    </m:r>
+                  </m:oMath>
+                </a14:m>
+                <a:endParaRPr lang="en-US" dirty="0"/>
+              </a:p>
+              <a:p>
+                <a:r>
+                  <a:rPr lang="en-US" dirty="0"/>
+                  <a:t>Space complexity: </a:t>
+                </a:r>
+                <a14:m>
+                  <m:oMath xmlns:m="http://schemas.openxmlformats.org/officeDocument/2006/math">
+                    <m:r>
+                      <a:rPr lang="en-US" i="1" dirty="0" smtClean="0">
+                        <a:latin typeface="Cambria Math" panose="02040503050406030204" pitchFamily="18" charset="0"/>
+                      </a:rPr>
+                      <m:t>𝑂</m:t>
+                    </m:r>
+                    <m:r>
+                      <a:rPr lang="en-US" i="1" dirty="0" smtClean="0">
+                        <a:latin typeface="Cambria Math" panose="02040503050406030204" pitchFamily="18" charset="0"/>
+                      </a:rPr>
+                      <m:t>(</m:t>
+                    </m:r>
+                    <m:r>
+                      <a:rPr lang="en-US" i="1" dirty="0" smtClean="0">
+                        <a:latin typeface="Cambria Math" panose="02040503050406030204" pitchFamily="18" charset="0"/>
+                      </a:rPr>
+                      <m:t>𝑛</m:t>
+                    </m:r>
+                    <m:r>
+                      <a:rPr lang="en-US" i="1" dirty="0" smtClean="0">
+                        <a:latin typeface="Cambria Math" panose="02040503050406030204" pitchFamily="18" charset="0"/>
+                      </a:rPr>
+                      <m:t>)</m:t>
+                    </m:r>
+                  </m:oMath>
+                </a14:m>
+                <a:endParaRPr lang="en-US" dirty="0"/>
+              </a:p>
+              <a:p>
+                <a:pPr lvl="1"/>
+                <a:r>
+                  <a:rPr lang="en-US" dirty="0"/>
+                  <a:t>Must store all previous values</a:t>
+                </a:r>
+              </a:p>
+              <a:p>
+                <a:r>
+                  <a:rPr lang="en-US" dirty="0"/>
+                  <a:t>Integer overflow occurs quickly</a:t>
+                </a:r>
+              </a:p>
+              <a:p>
+                <a:pPr lvl="1"/>
+                <a:r>
+                  <a:rPr lang="en-US" dirty="0"/>
+                  <a:t>Limit reached around</a:t>
+                </a:r>
+                <a14:m>
+                  <m:oMath xmlns:m="http://schemas.openxmlformats.org/officeDocument/2006/math">
+                    <m:r>
+                      <a:rPr lang="en-US" b="0" i="0" dirty="0" smtClean="0">
+                        <a:latin typeface="Cambria Math" panose="02040503050406030204" pitchFamily="18" charset="0"/>
+                      </a:rPr>
+                      <m:t> </m:t>
+                    </m:r>
+                    <m:r>
+                      <a:rPr lang="en-US" i="1" dirty="0" smtClean="0">
+                        <a:latin typeface="Cambria Math" panose="02040503050406030204" pitchFamily="18" charset="0"/>
+                      </a:rPr>
+                      <m:t>𝑛</m:t>
+                    </m:r>
+                    <m:r>
+                      <a:rPr lang="en-US" b="0" i="1" dirty="0" smtClean="0">
+                        <a:latin typeface="Cambria Math" panose="02040503050406030204" pitchFamily="18" charset="0"/>
+                      </a:rPr>
+                      <m:t>≈</m:t>
+                    </m:r>
+                    <m:r>
+                      <a:rPr lang="en-US" i="1" dirty="0" smtClean="0">
+                        <a:latin typeface="Cambria Math" panose="02040503050406030204" pitchFamily="18" charset="0"/>
+                      </a:rPr>
+                      <m:t>3</m:t>
+                    </m:r>
+                    <m:r>
+                      <a:rPr lang="en-US" i="1" dirty="0">
+                        <a:latin typeface="Cambria Math" panose="02040503050406030204" pitchFamily="18" charset="0"/>
+                      </a:rPr>
+                      <m:t>2</m:t>
+                    </m:r>
+                  </m:oMath>
+                </a14:m>
+                <a:endParaRPr lang="en-US" dirty="0"/>
+              </a:p>
+            </p:txBody>
+          </p:sp>
+        </mc:Choice>
+        <mc:Fallback>
+          <p:sp>
+            <p:nvSpPr>
+              <p:cNvPr id="2" name="Content Placeholder 1">
+                <a:extLst>
+                  <a:ext uri="{FF2B5EF4-FFF2-40B4-BE49-F238E27FC236}">
+                    <a16:creationId xmlns:a16="http://schemas.microsoft.com/office/drawing/2014/main" id="{3671555A-F350-3CF8-04A4-71144124F362}"/>
+                  </a:ext>
+                </a:extLst>
+              </p:cNvPr>
+              <p:cNvSpPr>
+                <a:spLocks noGrp="1" noRot="1" noChangeAspect="1" noMove="1" noResize="1" noEditPoints="1" noAdjustHandles="1" noChangeArrowheads="1" noChangeShapeType="1" noTextEdit="1"/>
+              </p:cNvSpPr>
+              <p:nvPr>
+                <p:ph sz="half" idx="1"/>
+              </p:nvPr>
+            </p:nvSpPr>
+            <p:spPr>
+              <a:xfrm>
+                <a:off x="401638" y="1800225"/>
+                <a:ext cx="5862002" cy="4351338"/>
+              </a:xfrm>
+              <a:blipFill>
+                <a:blip r:embed="rId2"/>
+                <a:stretch>
+                  <a:fillRect l="-1871" t="-2381"/>
+                </a:stretch>
+              </a:blipFill>
+            </p:spPr>
+            <p:txBody>
+              <a:bodyPr/>
+              <a:lstStyle/>
+              <a:p>
+                <a:r>
+                  <a:rPr lang="en-US">
+                    <a:noFill/>
+                  </a:rPr>
+                  <a:t> </a:t>
+                </a:r>
+              </a:p>
+            </p:txBody>
+          </p:sp>
+        </mc:Fallback>
+      </mc:AlternateContent>
+      <p:sp>
+        <p:nvSpPr>
+          <p:cNvPr id="4" name="Title 3">
+            <a:extLst>
+              <a:ext uri="{FF2B5EF4-FFF2-40B4-BE49-F238E27FC236}">
+                <a16:creationId xmlns:a16="http://schemas.microsoft.com/office/drawing/2014/main" id="{28AE832F-2D71-D278-EE41-040F14114463}"/>
+              </a:ext>
+            </a:extLst>
+          </p:cNvPr>
+          <p:cNvSpPr>
+            <a:spLocks noGrp="1"/>
+          </p:cNvSpPr>
+          <p:nvPr>
+            <p:ph type="title"/>
+          </p:nvPr>
+        </p:nvSpPr>
+        <p:spPr>
+          <a:xfrm>
+            <a:off x="402264" y="365125"/>
+            <a:ext cx="11410507" cy="1325563"/>
+          </a:xfrm>
+        </p:spPr>
+        <p:txBody>
+          <a:bodyPr/>
+          <a:lstStyle/>
+          <a:p>
+            <a:r>
+              <a:rPr lang="en-US" dirty="0"/>
+              <a:t>Problem</a:t>
+            </a:r>
+          </a:p>
+        </p:txBody>
+      </p:sp>
+      <p:sp>
+        <p:nvSpPr>
+          <p:cNvPr id="5" name="Footer Placeholder 4">
+            <a:extLst>
+              <a:ext uri="{FF2B5EF4-FFF2-40B4-BE49-F238E27FC236}">
+                <a16:creationId xmlns:a16="http://schemas.microsoft.com/office/drawing/2014/main" id="{10F8432E-66C9-8EB6-DD45-6FB8F2A47EAF}"/>
+              </a:ext>
+            </a:extLst>
+          </p:cNvPr>
+          <p:cNvSpPr>
+            <a:spLocks noGrp="1"/>
+          </p:cNvSpPr>
+          <p:nvPr>
+            <p:ph type="ftr" sz="quarter" idx="11"/>
+          </p:nvPr>
+        </p:nvSpPr>
+        <p:spPr>
+          <a:xfrm>
+            <a:off x="402264" y="6431775"/>
+            <a:ext cx="8061251" cy="273050"/>
+          </a:xfrm>
+        </p:spPr>
+        <p:txBody>
+          <a:bodyPr/>
+          <a:lstStyle/>
+          <a:p>
+            <a:r>
+              <a:rPr lang="en-US"/>
+              <a:t>UNIVERSITY OF SOUTH FLORIDA</a:t>
+            </a:r>
+            <a:endParaRPr lang="en-US" dirty="0"/>
+          </a:p>
+        </p:txBody>
+      </p:sp>
+      <p:pic>
+        <p:nvPicPr>
+          <p:cNvPr id="14" name="Content Placeholder 13">
+            <a:extLst>
+              <a:ext uri="{FF2B5EF4-FFF2-40B4-BE49-F238E27FC236}">
+                <a16:creationId xmlns:a16="http://schemas.microsoft.com/office/drawing/2014/main" id="{930A92D6-CA05-13A8-79DC-04B63D637D01}"/>
+              </a:ext>
+            </a:extLst>
+          </p:cNvPr>
+          <p:cNvPicPr>
+            <a:picLocks noGrp="1" noChangeAspect="1"/>
+          </p:cNvPicPr>
+          <p:nvPr>
+            <p:ph sz="half" idx="2"/>
+          </p:nvPr>
+        </p:nvPicPr>
+        <p:blipFill>
+          <a:blip r:embed="rId3"/>
+          <a:stretch>
+            <a:fillRect/>
+          </a:stretch>
+        </p:blipFill>
+        <p:spPr>
+          <a:xfrm>
+            <a:off x="6395880" y="2185255"/>
+            <a:ext cx="5571977" cy="3163986"/>
+          </a:xfrm>
+          <a:prstGeom prst="rect">
+            <a:avLst/>
+          </a:prstGeom>
+          <a:ln>
+            <a:solidFill>
+              <a:schemeClr val="tx1"/>
+            </a:solidFill>
+          </a:ln>
+        </p:spPr>
+      </p:pic>
+      <p:cxnSp>
+        <p:nvCxnSpPr>
+          <p:cNvPr id="16" name="Straight Connector 15">
+            <a:extLst>
+              <a:ext uri="{FF2B5EF4-FFF2-40B4-BE49-F238E27FC236}">
+                <a16:creationId xmlns:a16="http://schemas.microsoft.com/office/drawing/2014/main" id="{670B8CC0-94A3-3FBC-8E66-E22F56DE59DC}"/>
+              </a:ext>
+            </a:extLst>
+          </p:cNvPr>
+          <p:cNvCxnSpPr>
+            <a:cxnSpLocks/>
+          </p:cNvCxnSpPr>
+          <p:nvPr/>
+        </p:nvCxnSpPr>
+        <p:spPr>
+          <a:xfrm flipH="1">
+            <a:off x="10129651" y="2185255"/>
+            <a:ext cx="47501" cy="2826132"/>
+          </a:xfrm>
+          <a:prstGeom prst="line">
+            <a:avLst/>
+          </a:prstGeom>
+          <a:ln w="38100">
+            <a:solidFill>
+              <a:srgbClr val="FF0000">
+                <a:alpha val="57000"/>
+              </a:srgbClr>
+            </a:solidFill>
+            <a:prstDash val="sysDash"/>
+          </a:ln>
+        </p:spPr>
+        <p:style>
+          <a:lnRef idx="1">
+            <a:schemeClr val="accent1"/>
+          </a:lnRef>
+          <a:fillRef idx="0">
+            <a:schemeClr val="accent1"/>
+          </a:fillRef>
+          <a:effectRef idx="0">
+            <a:schemeClr val="accent1"/>
+          </a:effectRef>
+          <a:fontRef idx="minor">
+            <a:schemeClr val="tx1"/>
+          </a:fontRef>
+        </p:style>
+      </p:cxnSp>
+      <mc:AlternateContent xmlns:mc="http://schemas.openxmlformats.org/markup-compatibility/2006">
+        <mc:Choice xmlns:a14="http://schemas.microsoft.com/office/drawing/2010/main" Requires="a14">
+          <p:sp>
+            <p:nvSpPr>
+              <p:cNvPr id="22" name="TextBox 21">
+                <a:extLst>
+                  <a:ext uri="{FF2B5EF4-FFF2-40B4-BE49-F238E27FC236}">
+                    <a16:creationId xmlns:a16="http://schemas.microsoft.com/office/drawing/2014/main" id="{E109733F-D5DF-6C1B-73A0-89F062975101}"/>
+                  </a:ext>
+                </a:extLst>
+              </p:cNvPr>
+              <p:cNvSpPr txBox="1"/>
+              <p:nvPr/>
+            </p:nvSpPr>
+            <p:spPr>
+              <a:xfrm>
+                <a:off x="10305311" y="2316802"/>
+                <a:ext cx="1662546" cy="346615"/>
+              </a:xfrm>
+              <a:prstGeom prst="rect">
+                <a:avLst/>
+              </a:prstGeom>
+            </p:spPr>
+            <p:txBody>
+              <a:bodyPr vert="horz" lIns="91440" tIns="45720" rIns="91440" bIns="45720" rtlCol="0">
+                <a:normAutofit fontScale="85000" lnSpcReduction="10000"/>
+              </a:bodyPr>
+              <a:lstStyle>
+                <a:lvl1pPr marL="228594" indent="-228594">
+                  <a:lnSpc>
+                    <a:spcPct val="90000"/>
+                  </a:lnSpc>
+                  <a:spcBef>
+                    <a:spcPts val="1000"/>
+                  </a:spcBef>
+                  <a:buFont typeface="Arial" panose="020B0604020202020204" pitchFamily="34" charset="0"/>
+                  <a:buChar char="•"/>
+                  <a:defRPr sz="2800" i="1">
+                    <a:solidFill>
+                      <a:schemeClr val="tx2"/>
+                    </a:solidFill>
+                    <a:latin typeface="Cambria Math" panose="02040503050406030204" pitchFamily="18" charset="0"/>
+                  </a:defRPr>
+                </a:lvl1pPr>
+                <a:lvl2pPr marL="685783" lvl="1" indent="-228594">
+                  <a:lnSpc>
+                    <a:spcPct val="90000"/>
+                  </a:lnSpc>
+                  <a:spcBef>
+                    <a:spcPts val="500"/>
+                  </a:spcBef>
+                  <a:buFont typeface="Arial" panose="020B0604020202020204" pitchFamily="34" charset="0"/>
+                  <a:buChar char="•"/>
+                  <a:defRPr sz="2400" b="0" i="0">
+                    <a:solidFill>
+                      <a:schemeClr val="tx2"/>
+                    </a:solidFill>
+                    <a:latin typeface="Cambria Math" panose="02040503050406030204" pitchFamily="18" charset="0"/>
+                  </a:defRPr>
+                </a:lvl2pPr>
+                <a:lvl3pPr marL="1142971" indent="-228594">
+                  <a:lnSpc>
+                    <a:spcPct val="90000"/>
+                  </a:lnSpc>
+                  <a:spcBef>
+                    <a:spcPts val="500"/>
+                  </a:spcBef>
+                  <a:buFont typeface="Arial" panose="020B0604020202020204" pitchFamily="34" charset="0"/>
+                  <a:buChar char="•"/>
+                  <a:defRPr sz="2000">
+                    <a:solidFill>
+                      <a:schemeClr val="tx2"/>
+                    </a:solidFill>
+                  </a:defRPr>
+                </a:lvl3pPr>
+                <a:lvl4pPr marL="1600160" indent="-228594">
+                  <a:lnSpc>
+                    <a:spcPct val="90000"/>
+                  </a:lnSpc>
+                  <a:spcBef>
+                    <a:spcPts val="500"/>
+                  </a:spcBef>
+                  <a:buFont typeface="Arial" panose="020B0604020202020204" pitchFamily="34" charset="0"/>
+                  <a:buChar char="•"/>
+                  <a:defRPr>
+                    <a:solidFill>
+                      <a:schemeClr val="tx2"/>
+                    </a:solidFill>
+                  </a:defRPr>
+                </a:lvl4pPr>
+                <a:lvl5pPr marL="2057349" indent="-228594">
+                  <a:lnSpc>
+                    <a:spcPct val="90000"/>
+                  </a:lnSpc>
+                  <a:spcBef>
+                    <a:spcPts val="500"/>
+                  </a:spcBef>
+                  <a:buFont typeface="Arial" panose="020B0604020202020204" pitchFamily="34" charset="0"/>
+                  <a:buChar char="•"/>
+                  <a:defRPr>
+                    <a:solidFill>
+                      <a:schemeClr val="tx2"/>
+                    </a:solidFill>
+                  </a:defRPr>
+                </a:lvl5pPr>
+                <a:lvl6pPr marL="2514537" indent="-228594">
+                  <a:lnSpc>
+                    <a:spcPct val="90000"/>
+                  </a:lnSpc>
+                  <a:spcBef>
+                    <a:spcPts val="500"/>
+                  </a:spcBef>
+                  <a:buFont typeface="Arial" panose="020B0604020202020204" pitchFamily="34" charset="0"/>
+                  <a:buChar char="•"/>
+                </a:lvl6pPr>
+                <a:lvl7pPr marL="2971726" indent="-228594">
+                  <a:lnSpc>
+                    <a:spcPct val="90000"/>
+                  </a:lnSpc>
+                  <a:spcBef>
+                    <a:spcPts val="500"/>
+                  </a:spcBef>
+                  <a:buFont typeface="Arial" panose="020B0604020202020204" pitchFamily="34" charset="0"/>
+                  <a:buChar char="•"/>
+                </a:lvl7pPr>
+                <a:lvl8pPr marL="3428914" indent="-228594">
+                  <a:lnSpc>
+                    <a:spcPct val="90000"/>
+                  </a:lnSpc>
+                  <a:spcBef>
+                    <a:spcPts val="500"/>
+                  </a:spcBef>
+                  <a:buFont typeface="Arial" panose="020B0604020202020204" pitchFamily="34" charset="0"/>
+                  <a:buChar char="•"/>
+                </a:lvl8pPr>
+                <a:lvl9pPr marL="3886103" indent="-228594">
+                  <a:lnSpc>
+                    <a:spcPct val="90000"/>
+                  </a:lnSpc>
+                  <a:spcBef>
+                    <a:spcPts val="500"/>
+                  </a:spcBef>
+                  <a:buFont typeface="Arial" panose="020B0604020202020204" pitchFamily="34" charset="0"/>
+                  <a:buChar char="•"/>
+                </a:lvl9pPr>
+              </a:lstStyle>
+              <a:p>
+                <a:pPr marL="0" indent="0">
+                  <a:buNone/>
+                </a:pPr>
+                <a:r>
+                  <a:rPr lang="en-US" sz="1400" dirty="0">
+                    <a:solidFill>
+                      <a:srgbClr val="FF0000"/>
+                    </a:solidFill>
+                  </a:rPr>
+                  <a:t>Explodes after </a:t>
+                </a:r>
+                <a14:m>
+                  <m:oMath xmlns:m="http://schemas.openxmlformats.org/officeDocument/2006/math">
+                    <m:r>
+                      <a:rPr lang="en-US" sz="1400" i="1" dirty="0" smtClean="0">
+                        <a:solidFill>
+                          <a:srgbClr val="FF0000"/>
+                        </a:solidFill>
+                        <a:latin typeface="Cambria Math" panose="02040503050406030204" pitchFamily="18" charset="0"/>
+                      </a:rPr>
+                      <m:t>𝑛</m:t>
+                    </m:r>
+                    <m:r>
+                      <a:rPr lang="en-US" sz="1400" i="1" dirty="0" smtClean="0">
+                        <a:solidFill>
+                          <a:srgbClr val="FF0000"/>
+                        </a:solidFill>
+                        <a:latin typeface="Cambria Math" panose="02040503050406030204" pitchFamily="18" charset="0"/>
+                      </a:rPr>
+                      <m:t>=</m:t>
+                    </m:r>
+                    <m:r>
+                      <a:rPr lang="en-US" sz="1400" i="1" dirty="0" smtClean="0">
+                        <a:solidFill>
+                          <a:srgbClr val="FF0000"/>
+                        </a:solidFill>
+                        <a:latin typeface="Cambria Math" panose="02040503050406030204" pitchFamily="18" charset="0"/>
+                      </a:rPr>
+                      <m:t>8</m:t>
+                    </m:r>
+                    <m:r>
+                      <a:rPr lang="en-US" sz="1400" b="0" i="1" dirty="0" smtClean="0">
+                        <a:solidFill>
+                          <a:srgbClr val="FF0000"/>
+                        </a:solidFill>
+                        <a:latin typeface="Cambria Math" panose="02040503050406030204" pitchFamily="18" charset="0"/>
+                      </a:rPr>
+                      <m:t> </m:t>
+                    </m:r>
+                  </m:oMath>
+                </a14:m>
+                <a:r>
+                  <a:rPr lang="en-US" sz="1400" dirty="0">
+                    <a:solidFill>
+                      <a:srgbClr val="FF0000"/>
+                    </a:solidFill>
+                  </a:rPr>
+                  <a:t> </a:t>
+                </a:r>
+              </a:p>
+            </p:txBody>
+          </p:sp>
+        </mc:Choice>
+        <mc:Fallback>
+          <p:sp>
+            <p:nvSpPr>
+              <p:cNvPr id="22" name="TextBox 21">
+                <a:extLst>
+                  <a:ext uri="{FF2B5EF4-FFF2-40B4-BE49-F238E27FC236}">
+                    <a16:creationId xmlns:a16="http://schemas.microsoft.com/office/drawing/2014/main" id="{E109733F-D5DF-6C1B-73A0-89F062975101}"/>
+                  </a:ext>
+                </a:extLst>
+              </p:cNvPr>
+              <p:cNvSpPr txBox="1">
+                <a:spLocks noRot="1" noChangeAspect="1" noMove="1" noResize="1" noEditPoints="1" noAdjustHandles="1" noChangeArrowheads="1" noChangeShapeType="1" noTextEdit="1"/>
+              </p:cNvSpPr>
+              <p:nvPr/>
+            </p:nvSpPr>
+            <p:spPr>
+              <a:xfrm>
+                <a:off x="10305311" y="2316802"/>
+                <a:ext cx="1662546" cy="346615"/>
+              </a:xfrm>
+              <a:prstGeom prst="rect">
+                <a:avLst/>
+              </a:prstGeom>
+              <a:blipFill>
+                <a:blip r:embed="rId4"/>
+                <a:stretch>
+                  <a:fillRect l="-368" t="-10526"/>
+                </a:stretch>
+              </a:blipFill>
+            </p:spPr>
+            <p:txBody>
+              <a:bodyPr/>
+              <a:lstStyle/>
+              <a:p>
+                <a:r>
+                  <a:rPr lang="en-US">
+                    <a:noFill/>
+                  </a:rPr>
+                  <a:t> </a:t>
+                </a:r>
+              </a:p>
+            </p:txBody>
+          </p:sp>
+        </mc:Fallback>
+      </mc:AlternateContent>
+    </p:spTree>
+    <p:extLst>
+      <p:ext uri="{BB962C8B-B14F-4D97-AF65-F5344CB8AC3E}">
+        <p14:creationId xmlns:p14="http://schemas.microsoft.com/office/powerpoint/2010/main" val="2343945214"/>
+      </p:ext>
+    </p:extLst>
+  </p:cSld>
+  <p:clrMapOvr>
+    <a:masterClrMapping/>
+  </p:clrMapOvr>
+</p:sld>
+</file>
+
+<file path=ppt/slides/slide5.xml><?xml version="1.0" encoding="utf-8"?>
+<p:sld xmlns:a="http://schemas.openxmlformats.org/drawingml/2006/main" xmlns:r="http://schemas.openxmlformats.org/officeDocument/2006/relationships" xmlns:p="http://schemas.openxmlformats.org/presentationml/2006/main">
+  <p:cSld>
+    <p:spTree>
+      <p:nvGrpSpPr>
+        <p:cNvPr id="1" name=""/>
+        <p:cNvGrpSpPr/>
+        <p:nvPr/>
+      </p:nvGrpSpPr>
+      <p:grpSpPr>
+        <a:xfrm>
+          <a:off x="0" y="0"/>
+          <a:ext cx="0" cy="0"/>
+          <a:chOff x="0" y="0"/>
+          <a:chExt cx="0" cy="0"/>
+        </a:xfrm>
+      </p:grpSpPr>
+      <mc:AlternateContent xmlns:mc="http://schemas.openxmlformats.org/markup-compatibility/2006">
+        <mc:Choice xmlns:a14="http://schemas.microsoft.com/office/drawing/2010/main" Requires="a14">
+          <p:sp>
+            <p:nvSpPr>
+              <p:cNvPr id="2" name="Content Placeholder 1">
+                <a:extLst>
+                  <a:ext uri="{FF2B5EF4-FFF2-40B4-BE49-F238E27FC236}">
+                    <a16:creationId xmlns:a16="http://schemas.microsoft.com/office/drawing/2014/main" id="{CFC38F14-52B9-8D90-DB5C-3C13B6D0F444}"/>
+                  </a:ext>
+                </a:extLst>
+              </p:cNvPr>
+              <p:cNvSpPr>
+                <a:spLocks noGrp="1"/>
+              </p:cNvSpPr>
+              <p:nvPr>
+                <p:ph sz="half" idx="1"/>
+              </p:nvPr>
+            </p:nvSpPr>
+            <p:spPr>
+              <a:xfrm>
+                <a:off x="402264" y="1799674"/>
+                <a:ext cx="5090074" cy="4351339"/>
+              </a:xfrm>
+            </p:spPr>
+            <p:txBody>
+              <a:bodyPr/>
+              <a:lstStyle/>
+              <a:p>
+                <a14:m>
+                  <m:oMath xmlns:m="http://schemas.openxmlformats.org/officeDocument/2006/math">
+                    <m:sSub>
+                      <m:sSubPr>
+                        <m:ctrlPr>
+                          <a:rPr lang="en-US" i="1" dirty="0" smtClean="0">
+                            <a:latin typeface="Cambria Math" panose="02040503050406030204" pitchFamily="18" charset="0"/>
+                          </a:rPr>
+                        </m:ctrlPr>
+                      </m:sSubPr>
+                      <m:e>
+                        <m:r>
+                          <a:rPr lang="en-US" i="1" dirty="0" smtClean="0">
+                            <a:latin typeface="Cambria Math" panose="02040503050406030204" pitchFamily="18" charset="0"/>
+                          </a:rPr>
+                          <m:t>𝐶</m:t>
+                        </m:r>
+                      </m:e>
+                      <m:sub>
+                        <m:r>
+                          <a:rPr lang="en-US" i="1" dirty="0" err="1">
+                            <a:latin typeface="Cambria Math" panose="02040503050406030204" pitchFamily="18" charset="0"/>
+                          </a:rPr>
+                          <m:t>𝑛</m:t>
+                        </m:r>
+                      </m:sub>
+                    </m:sSub>
+                  </m:oMath>
+                </a14:m>
+                <a:r>
+                  <a:rPr lang="en-US" dirty="0"/>
+                  <a:t> depends on all previous values </a:t>
+                </a:r>
+                <a14:m>
+                  <m:oMath xmlns:m="http://schemas.openxmlformats.org/officeDocument/2006/math">
+                    <m:sSub>
+                      <m:sSubPr>
+                        <m:ctrlPr>
+                          <a:rPr lang="en-US" i="1" dirty="0" smtClean="0">
+                            <a:latin typeface="Cambria Math" panose="02040503050406030204" pitchFamily="18" charset="0"/>
+                          </a:rPr>
+                        </m:ctrlPr>
+                      </m:sSubPr>
+                      <m:e>
+                        <m:r>
+                          <a:rPr lang="en-US" i="1" dirty="0" smtClean="0">
+                            <a:latin typeface="Cambria Math" panose="02040503050406030204" pitchFamily="18" charset="0"/>
+                          </a:rPr>
+                          <m:t>𝐶</m:t>
+                        </m:r>
+                      </m:e>
+                      <m:sub>
+                        <m:r>
+                          <a:rPr lang="en-US" i="1" dirty="0" smtClean="0">
+                            <a:latin typeface="Cambria Math" panose="02040503050406030204" pitchFamily="18" charset="0"/>
+                          </a:rPr>
+                          <m:t>0</m:t>
+                        </m:r>
+                      </m:sub>
+                    </m:sSub>
+                    <m:r>
+                      <a:rPr lang="en-US" i="1" dirty="0" smtClean="0">
+                        <a:latin typeface="Cambria Math" panose="02040503050406030204" pitchFamily="18" charset="0"/>
+                      </a:rPr>
+                      <m:t>​…</m:t>
+                    </m:r>
+                    <m:sSub>
+                      <m:sSubPr>
+                        <m:ctrlPr>
+                          <a:rPr lang="en-US" i="1" dirty="0" smtClean="0">
+                            <a:latin typeface="Cambria Math" panose="02040503050406030204" pitchFamily="18" charset="0"/>
+                          </a:rPr>
+                        </m:ctrlPr>
+                      </m:sSubPr>
+                      <m:e>
+                        <m:r>
+                          <a:rPr lang="en-US" i="1" dirty="0" smtClean="0">
+                            <a:latin typeface="Cambria Math" panose="02040503050406030204" pitchFamily="18" charset="0"/>
+                          </a:rPr>
+                          <m:t>𝐶</m:t>
+                        </m:r>
+                      </m:e>
+                      <m:sub>
+                        <m:r>
+                          <a:rPr lang="en-US" i="1" dirty="0">
+                            <a:latin typeface="Cambria Math" panose="02040503050406030204" pitchFamily="18" charset="0"/>
+                          </a:rPr>
+                          <m:t>𝑛</m:t>
+                        </m:r>
+                        <m:r>
+                          <a:rPr lang="en-US" i="1" dirty="0">
+                            <a:latin typeface="Cambria Math" panose="02040503050406030204" pitchFamily="18" charset="0"/>
+                          </a:rPr>
+                          <m:t>−</m:t>
+                        </m:r>
+                        <m:r>
+                          <a:rPr lang="en-US" i="1" dirty="0">
+                            <a:latin typeface="Cambria Math" panose="02040503050406030204" pitchFamily="18" charset="0"/>
+                          </a:rPr>
+                          <m:t>1</m:t>
+                        </m:r>
+                      </m:sub>
+                    </m:sSub>
+                  </m:oMath>
+                </a14:m>
+                <a:endParaRPr lang="en-US" dirty="0"/>
+              </a:p>
+              <a:p>
+                <a:r>
+                  <a:rPr lang="en-US" dirty="0"/>
+                  <a:t>Each term </a:t>
+                </a:r>
+                <a14:m>
+                  <m:oMath xmlns:m="http://schemas.openxmlformats.org/officeDocument/2006/math">
+                    <m:sSub>
+                      <m:sSubPr>
+                        <m:ctrlPr>
+                          <a:rPr lang="en-US" i="1" dirty="0" smtClean="0">
+                            <a:latin typeface="Cambria Math" panose="02040503050406030204" pitchFamily="18" charset="0"/>
+                          </a:rPr>
+                        </m:ctrlPr>
+                      </m:sSubPr>
+                      <m:e>
+                        <m:r>
+                          <a:rPr lang="en-US" b="0" i="1" dirty="0" smtClean="0">
+                            <a:latin typeface="Cambria Math" panose="02040503050406030204" pitchFamily="18" charset="0"/>
+                          </a:rPr>
+                          <m:t>(</m:t>
+                        </m:r>
+                        <m:r>
+                          <a:rPr lang="en-US" i="1" dirty="0" smtClean="0">
+                            <a:latin typeface="Cambria Math" panose="02040503050406030204" pitchFamily="18" charset="0"/>
+                          </a:rPr>
+                          <m:t>𝐶</m:t>
+                        </m:r>
+                      </m:e>
+                      <m:sub>
+                        <m:r>
+                          <a:rPr lang="en-US" i="1" dirty="0" smtClean="0">
+                            <a:latin typeface="Cambria Math" panose="02040503050406030204" pitchFamily="18" charset="0"/>
+                          </a:rPr>
+                          <m:t>𝑖</m:t>
+                        </m:r>
+                      </m:sub>
+                    </m:sSub>
+                    <m:r>
+                      <a:rPr lang="en-US" i="1" dirty="0" smtClean="0">
+                        <a:latin typeface="Cambria Math" panose="02040503050406030204" pitchFamily="18" charset="0"/>
+                      </a:rPr>
+                      <m:t>×</m:t>
+                    </m:r>
+                    <m:sSub>
+                      <m:sSubPr>
+                        <m:ctrlPr>
+                          <a:rPr lang="en-US" i="1" dirty="0" smtClean="0">
+                            <a:latin typeface="Cambria Math" panose="02040503050406030204" pitchFamily="18" charset="0"/>
+                          </a:rPr>
+                        </m:ctrlPr>
+                      </m:sSubPr>
+                      <m:e>
+                        <m:r>
+                          <a:rPr lang="en-US" i="1" dirty="0" smtClean="0">
+                            <a:latin typeface="Cambria Math" panose="02040503050406030204" pitchFamily="18" charset="0"/>
+                          </a:rPr>
+                          <m:t>𝐶</m:t>
+                        </m:r>
+                      </m:e>
+                      <m:sub>
+                        <m:r>
+                          <a:rPr lang="en-US" i="1" dirty="0" smtClean="0">
+                            <a:latin typeface="Cambria Math" panose="02040503050406030204" pitchFamily="18" charset="0"/>
+                          </a:rPr>
+                          <m:t>𝑛</m:t>
+                        </m:r>
+                        <m:r>
+                          <a:rPr lang="en-US" i="1" dirty="0" smtClean="0">
+                            <a:latin typeface="Cambria Math" panose="02040503050406030204" pitchFamily="18" charset="0"/>
+                          </a:rPr>
+                          <m:t>−</m:t>
+                        </m:r>
+                        <m:r>
+                          <a:rPr lang="en-US" i="1" dirty="0" smtClean="0">
+                            <a:latin typeface="Cambria Math" panose="02040503050406030204" pitchFamily="18" charset="0"/>
+                          </a:rPr>
+                          <m:t>1</m:t>
+                        </m:r>
+                        <m:r>
+                          <a:rPr lang="en-US" i="1" dirty="0" smtClean="0">
+                            <a:latin typeface="Cambria Math" panose="02040503050406030204" pitchFamily="18" charset="0"/>
+                          </a:rPr>
+                          <m:t>−</m:t>
+                        </m:r>
+                        <m:r>
+                          <a:rPr lang="en-US" i="1" dirty="0" smtClean="0">
+                            <a:latin typeface="Cambria Math" panose="02040503050406030204" pitchFamily="18" charset="0"/>
+                          </a:rPr>
+                          <m:t>𝑖</m:t>
+                        </m:r>
+                      </m:sub>
+                    </m:sSub>
+                    <m:r>
+                      <a:rPr lang="en-US" b="0" i="1" dirty="0" smtClean="0">
+                        <a:latin typeface="Cambria Math" panose="02040503050406030204" pitchFamily="18" charset="0"/>
+                      </a:rPr>
+                      <m:t>)</m:t>
+                    </m:r>
+                  </m:oMath>
+                </a14:m>
+                <a:r>
+                  <a:rPr lang="en-US" dirty="0"/>
+                  <a:t> can be computed independently</a:t>
+                </a:r>
+              </a:p>
+              <a:p>
+                <a:pPr lvl="1"/>
+                <a:r>
+                  <a:rPr lang="en-US" dirty="0"/>
+                  <a:t>Threads compute terms in parallel</a:t>
+                </a:r>
+              </a:p>
+              <a:p>
+                <a:pPr lvl="1"/>
+                <a:r>
+                  <a:rPr lang="en-US" dirty="0"/>
+                  <a:t>Parent thread sums the terms</a:t>
+                </a:r>
+              </a:p>
+              <a:p>
+                <a:pPr lvl="1"/>
+                <a:r>
+                  <a:rPr lang="en-US" dirty="0"/>
+                  <a:t>Parallelism applies within each </a:t>
+                </a:r>
+                <a14:m>
+                  <m:oMath xmlns:m="http://schemas.openxmlformats.org/officeDocument/2006/math">
+                    <m:sSub>
+                      <m:sSubPr>
+                        <m:ctrlPr>
+                          <a:rPr lang="en-US" b="0" i="1" smtClean="0">
+                            <a:latin typeface="Cambria Math" panose="02040503050406030204" pitchFamily="18" charset="0"/>
+                          </a:rPr>
+                        </m:ctrlPr>
+                      </m:sSubPr>
+                      <m:e>
+                        <m:r>
+                          <a:rPr lang="en-US" i="1"/>
+                          <m:t>𝐶</m:t>
+                        </m:r>
+                      </m:e>
+                      <m:sub>
+                        <m:r>
+                          <a:rPr lang="en-US" b="0" i="1" smtClean="0">
+                            <a:latin typeface="Cambria Math" panose="02040503050406030204" pitchFamily="18" charset="0"/>
+                          </a:rPr>
+                          <m:t>𝑛</m:t>
+                        </m:r>
+                      </m:sub>
+                    </m:sSub>
+                    <m:r>
+                      <a:rPr lang="en-US" b="0" i="1" smtClean="0">
+                        <a:latin typeface="Cambria Math" panose="02040503050406030204" pitchFamily="18" charset="0"/>
+                      </a:rPr>
+                      <m:t>,</m:t>
+                    </m:r>
+                  </m:oMath>
+                </a14:m>
+                <a:r>
+                  <a:rPr lang="ar-AE" dirty="0"/>
+                  <a:t> </a:t>
+                </a:r>
+                <a:r>
+                  <a:rPr lang="en-US" dirty="0"/>
+                  <a:t>but not across different </a:t>
+                </a:r>
+                <a14:m>
+                  <m:oMath xmlns:m="http://schemas.openxmlformats.org/officeDocument/2006/math">
+                    <m:r>
+                      <a:rPr lang="en-US" i="1"/>
+                      <m:t>𝑛</m:t>
+                    </m:r>
+                  </m:oMath>
+                </a14:m>
+                <a:endParaRPr lang="en-US" dirty="0"/>
+              </a:p>
+            </p:txBody>
+          </p:sp>
+        </mc:Choice>
+        <mc:Fallback>
+          <p:sp>
+            <p:nvSpPr>
+              <p:cNvPr id="2" name="Content Placeholder 1">
+                <a:extLst>
+                  <a:ext uri="{FF2B5EF4-FFF2-40B4-BE49-F238E27FC236}">
+                    <a16:creationId xmlns:a16="http://schemas.microsoft.com/office/drawing/2014/main" id="{CFC38F14-52B9-8D90-DB5C-3C13B6D0F444}"/>
+                  </a:ext>
+                </a:extLst>
+              </p:cNvPr>
+              <p:cNvSpPr>
+                <a:spLocks noGrp="1" noRot="1" noChangeAspect="1" noMove="1" noResize="1" noEditPoints="1" noAdjustHandles="1" noChangeArrowheads="1" noChangeShapeType="1" noTextEdit="1"/>
+              </p:cNvSpPr>
+              <p:nvPr>
+                <p:ph sz="half" idx="1"/>
+              </p:nvPr>
+            </p:nvSpPr>
+            <p:spPr>
+              <a:xfrm>
+                <a:off x="402264" y="1799674"/>
+                <a:ext cx="5090074" cy="4351339"/>
+              </a:xfrm>
+              <a:blipFill>
+                <a:blip r:embed="rId2"/>
+                <a:stretch>
+                  <a:fillRect l="-2156" t="-2381" r="-2275"/>
+                </a:stretch>
+              </a:blipFill>
+            </p:spPr>
+            <p:txBody>
+              <a:bodyPr/>
+              <a:lstStyle/>
+              <a:p>
+                <a:r>
+                  <a:rPr lang="en-US">
+                    <a:noFill/>
+                  </a:rPr>
+                  <a:t> </a:t>
+                </a:r>
+              </a:p>
+            </p:txBody>
+          </p:sp>
+        </mc:Fallback>
+      </mc:AlternateContent>
+      <p:sp>
+        <p:nvSpPr>
+          <p:cNvPr id="4" name="Title 3">
+            <a:extLst>
+              <a:ext uri="{FF2B5EF4-FFF2-40B4-BE49-F238E27FC236}">
+                <a16:creationId xmlns:a16="http://schemas.microsoft.com/office/drawing/2014/main" id="{D4227124-A71A-DF3C-7543-93507A261427}"/>
+              </a:ext>
+            </a:extLst>
+          </p:cNvPr>
+          <p:cNvSpPr>
+            <a:spLocks noGrp="1"/>
+          </p:cNvSpPr>
+          <p:nvPr>
+            <p:ph type="title"/>
+          </p:nvPr>
+        </p:nvSpPr>
+        <p:spPr/>
+        <p:txBody>
+          <a:bodyPr/>
+          <a:lstStyle/>
+          <a:p>
+            <a:r>
+              <a:rPr lang="en-US" dirty="0"/>
+              <a:t>Observations</a:t>
+            </a:r>
+          </a:p>
+        </p:txBody>
+      </p:sp>
+      <p:sp>
+        <p:nvSpPr>
+          <p:cNvPr id="5" name="Footer Placeholder 4">
+            <a:extLst>
+              <a:ext uri="{FF2B5EF4-FFF2-40B4-BE49-F238E27FC236}">
+                <a16:creationId xmlns:a16="http://schemas.microsoft.com/office/drawing/2014/main" id="{8ADC4F44-90E4-A486-9C8D-24DA481532FB}"/>
+              </a:ext>
+            </a:extLst>
+          </p:cNvPr>
+          <p:cNvSpPr>
+            <a:spLocks noGrp="1"/>
+          </p:cNvSpPr>
+          <p:nvPr>
+            <p:ph type="ftr" sz="quarter" idx="11"/>
+          </p:nvPr>
+        </p:nvSpPr>
+        <p:spPr/>
+        <p:txBody>
+          <a:bodyPr/>
+          <a:lstStyle/>
+          <a:p>
+            <a:r>
+              <a:rPr lang="en-US"/>
+              <a:t>UNIVERSITY OF SOUTH FLORIDA</a:t>
+            </a:r>
+            <a:endParaRPr lang="en-US" dirty="0"/>
+          </a:p>
+        </p:txBody>
+      </p:sp>
+      <p:pic>
+        <p:nvPicPr>
+          <p:cNvPr id="11" name="Content Placeholder 6">
+            <a:extLst>
+              <a:ext uri="{FF2B5EF4-FFF2-40B4-BE49-F238E27FC236}">
+                <a16:creationId xmlns:a16="http://schemas.microsoft.com/office/drawing/2014/main" id="{7F6C5769-7E39-A43F-53EC-64E30FCEC4B6}"/>
+              </a:ext>
+            </a:extLst>
+          </p:cNvPr>
+          <p:cNvPicPr>
+            <a:picLocks noGrp="1" noChangeAspect="1"/>
+          </p:cNvPicPr>
+          <p:nvPr>
+            <p:ph sz="half" idx="2"/>
+          </p:nvPr>
+        </p:nvPicPr>
+        <p:blipFill>
+          <a:blip r:embed="rId3"/>
+          <a:srcRect r="28369"/>
+          <a:stretch>
+            <a:fillRect/>
+          </a:stretch>
+        </p:blipFill>
+        <p:spPr>
+          <a:xfrm>
+            <a:off x="5927099" y="1971319"/>
+            <a:ext cx="6264901" cy="2915361"/>
+          </a:xfrm>
+          <a:prstGeom prst="rect">
+            <a:avLst/>
+          </a:prstGeom>
+        </p:spPr>
+      </p:pic>
+      <p:sp>
+        <p:nvSpPr>
+          <p:cNvPr id="12" name="Rectangle: Rounded Corners 11">
+            <a:extLst>
+              <a:ext uri="{FF2B5EF4-FFF2-40B4-BE49-F238E27FC236}">
+                <a16:creationId xmlns:a16="http://schemas.microsoft.com/office/drawing/2014/main" id="{F4FC83F5-ABC2-3894-3C15-FAFE50CA7F30}"/>
+              </a:ext>
+            </a:extLst>
+          </p:cNvPr>
+          <p:cNvSpPr/>
+          <p:nvPr/>
+        </p:nvSpPr>
+        <p:spPr>
+          <a:xfrm>
+            <a:off x="6591030" y="2279331"/>
+            <a:ext cx="735495" cy="400979"/>
+          </a:xfrm>
+          <a:prstGeom prst="roundRect">
+            <a:avLst/>
+          </a:prstGeom>
+          <a:solidFill>
+            <a:schemeClr val="accent1">
+              <a:alpha val="20000"/>
+            </a:schemeClr>
+          </a:solidFill>
+        </p:spPr>
+        <p:style>
+          <a:lnRef idx="2">
+            <a:schemeClr val="accent1">
+              <a:shade val="15000"/>
+            </a:schemeClr>
+          </a:lnRef>
+          <a:fillRef idx="1">
+            <a:schemeClr val="accent1"/>
+          </a:fillRef>
+          <a:effectRef idx="0">
+            <a:schemeClr val="accent1"/>
+          </a:effectRef>
+          <a:fontRef idx="minor">
+            <a:schemeClr val="lt1"/>
+          </a:fontRef>
+        </p:style>
+        <p:txBody>
+          <a:bodyPr rtlCol="0" anchor="ctr"/>
+          <a:lstStyle/>
+          <a:p>
+            <a:pPr algn="ctr"/>
+            <a:endParaRPr lang="en-US"/>
+          </a:p>
+        </p:txBody>
+      </p:sp>
+      <p:sp>
+        <p:nvSpPr>
+          <p:cNvPr id="13" name="Rectangle: Rounded Corners 12">
+            <a:extLst>
+              <a:ext uri="{FF2B5EF4-FFF2-40B4-BE49-F238E27FC236}">
+                <a16:creationId xmlns:a16="http://schemas.microsoft.com/office/drawing/2014/main" id="{03689925-820B-2D46-2DF1-112C5F005A15}"/>
+              </a:ext>
+            </a:extLst>
+          </p:cNvPr>
+          <p:cNvSpPr/>
+          <p:nvPr/>
+        </p:nvSpPr>
+        <p:spPr>
+          <a:xfrm>
+            <a:off x="7549463" y="2680309"/>
+            <a:ext cx="1539600" cy="400979"/>
+          </a:xfrm>
+          <a:prstGeom prst="roundRect">
+            <a:avLst/>
+          </a:prstGeom>
+          <a:solidFill>
+            <a:srgbClr val="F080A0">
+              <a:alpha val="20000"/>
+            </a:srgbClr>
+          </a:solidFill>
+        </p:spPr>
+        <p:style>
+          <a:lnRef idx="2">
+            <a:schemeClr val="accent1">
+              <a:shade val="15000"/>
+            </a:schemeClr>
+          </a:lnRef>
+          <a:fillRef idx="1">
+            <a:schemeClr val="accent1"/>
+          </a:fillRef>
+          <a:effectRef idx="0">
+            <a:schemeClr val="accent1"/>
+          </a:effectRef>
+          <a:fontRef idx="minor">
+            <a:schemeClr val="lt1"/>
+          </a:fontRef>
+        </p:style>
+        <p:txBody>
+          <a:bodyPr rtlCol="0" anchor="ctr"/>
+          <a:lstStyle/>
+          <a:p>
+            <a:pPr algn="ctr"/>
+            <a:endParaRPr lang="en-US"/>
+          </a:p>
+        </p:txBody>
+      </p:sp>
+      <p:sp>
+        <p:nvSpPr>
+          <p:cNvPr id="14" name="Rectangle: Rounded Corners 13">
+            <a:extLst>
+              <a:ext uri="{FF2B5EF4-FFF2-40B4-BE49-F238E27FC236}">
+                <a16:creationId xmlns:a16="http://schemas.microsoft.com/office/drawing/2014/main" id="{3B2D4AAB-49D8-E96B-A692-55C7B62A8075}"/>
+              </a:ext>
+            </a:extLst>
+          </p:cNvPr>
+          <p:cNvSpPr/>
+          <p:nvPr/>
+        </p:nvSpPr>
+        <p:spPr>
+          <a:xfrm>
+            <a:off x="6591030" y="2707485"/>
+            <a:ext cx="735495" cy="400979"/>
+          </a:xfrm>
+          <a:prstGeom prst="roundRect">
+            <a:avLst/>
+          </a:prstGeom>
+          <a:solidFill>
+            <a:schemeClr val="accent1">
+              <a:alpha val="20000"/>
+            </a:schemeClr>
+          </a:solidFill>
+        </p:spPr>
+        <p:style>
+          <a:lnRef idx="2">
+            <a:schemeClr val="accent1">
+              <a:shade val="15000"/>
+            </a:schemeClr>
+          </a:lnRef>
+          <a:fillRef idx="1">
+            <a:schemeClr val="accent1"/>
+          </a:fillRef>
+          <a:effectRef idx="0">
+            <a:schemeClr val="accent1"/>
+          </a:effectRef>
+          <a:fontRef idx="minor">
+            <a:schemeClr val="lt1"/>
+          </a:fontRef>
+        </p:style>
+        <p:txBody>
+          <a:bodyPr rtlCol="0" anchor="ctr"/>
+          <a:lstStyle/>
+          <a:p>
+            <a:pPr algn="ctr"/>
+            <a:endParaRPr lang="en-US"/>
+          </a:p>
+        </p:txBody>
+      </p:sp>
+      <p:sp>
+        <p:nvSpPr>
+          <p:cNvPr id="15" name="Rectangle: Rounded Corners 14">
+            <a:extLst>
+              <a:ext uri="{FF2B5EF4-FFF2-40B4-BE49-F238E27FC236}">
+                <a16:creationId xmlns:a16="http://schemas.microsoft.com/office/drawing/2014/main" id="{2DF16232-B9D5-1C25-F4CF-45D08FA94A64}"/>
+              </a:ext>
+            </a:extLst>
+          </p:cNvPr>
+          <p:cNvSpPr/>
+          <p:nvPr/>
+        </p:nvSpPr>
+        <p:spPr>
+          <a:xfrm>
+            <a:off x="6594544" y="3135308"/>
+            <a:ext cx="1576601" cy="400979"/>
+          </a:xfrm>
+          <a:prstGeom prst="roundRect">
+            <a:avLst/>
+          </a:prstGeom>
+          <a:solidFill>
+            <a:schemeClr val="accent1">
+              <a:alpha val="20000"/>
+            </a:schemeClr>
+          </a:solidFill>
+        </p:spPr>
+        <p:style>
+          <a:lnRef idx="2">
+            <a:schemeClr val="accent1">
+              <a:shade val="15000"/>
+            </a:schemeClr>
+          </a:lnRef>
+          <a:fillRef idx="1">
+            <a:schemeClr val="accent1"/>
+          </a:fillRef>
+          <a:effectRef idx="0">
+            <a:schemeClr val="accent1"/>
+          </a:effectRef>
+          <a:fontRef idx="minor">
+            <a:schemeClr val="lt1"/>
+          </a:fontRef>
+        </p:style>
+        <p:txBody>
+          <a:bodyPr rtlCol="0" anchor="ctr"/>
+          <a:lstStyle/>
+          <a:p>
+            <a:pPr algn="ctr"/>
+            <a:endParaRPr lang="en-US"/>
+          </a:p>
+        </p:txBody>
+      </p:sp>
+      <p:sp>
+        <p:nvSpPr>
+          <p:cNvPr id="17" name="Rectangle: Rounded Corners 16">
+            <a:extLst>
+              <a:ext uri="{FF2B5EF4-FFF2-40B4-BE49-F238E27FC236}">
+                <a16:creationId xmlns:a16="http://schemas.microsoft.com/office/drawing/2014/main" id="{783117D7-99A8-20C0-1304-7971A6B49BE2}"/>
+              </a:ext>
+            </a:extLst>
+          </p:cNvPr>
+          <p:cNvSpPr/>
+          <p:nvPr/>
+        </p:nvSpPr>
+        <p:spPr>
+          <a:xfrm>
+            <a:off x="8467530" y="3108464"/>
+            <a:ext cx="1539600" cy="400979"/>
+          </a:xfrm>
+          <a:prstGeom prst="roundRect">
+            <a:avLst/>
+          </a:prstGeom>
+          <a:solidFill>
+            <a:srgbClr val="F080A0">
+              <a:alpha val="20000"/>
+            </a:srgbClr>
+          </a:solidFill>
+        </p:spPr>
+        <p:style>
+          <a:lnRef idx="2">
+            <a:schemeClr val="accent1">
+              <a:shade val="15000"/>
+            </a:schemeClr>
+          </a:lnRef>
+          <a:fillRef idx="1">
+            <a:schemeClr val="accent1"/>
+          </a:fillRef>
+          <a:effectRef idx="0">
+            <a:schemeClr val="accent1"/>
+          </a:effectRef>
+          <a:fontRef idx="minor">
+            <a:schemeClr val="lt1"/>
+          </a:fontRef>
+        </p:style>
+        <p:txBody>
+          <a:bodyPr rtlCol="0" anchor="ctr"/>
+          <a:lstStyle/>
+          <a:p>
+            <a:pPr algn="ctr"/>
+            <a:endParaRPr lang="en-US"/>
+          </a:p>
+        </p:txBody>
+      </p:sp>
+      <p:sp>
+        <p:nvSpPr>
+          <p:cNvPr id="18" name="Rectangle: Rounded Corners 17">
+            <a:extLst>
+              <a:ext uri="{FF2B5EF4-FFF2-40B4-BE49-F238E27FC236}">
+                <a16:creationId xmlns:a16="http://schemas.microsoft.com/office/drawing/2014/main" id="{9FFA6D23-F3E4-6088-EC42-2068A8956399}"/>
+              </a:ext>
+            </a:extLst>
+          </p:cNvPr>
+          <p:cNvSpPr/>
+          <p:nvPr/>
+        </p:nvSpPr>
+        <p:spPr>
+          <a:xfrm>
+            <a:off x="6587715" y="1851176"/>
+            <a:ext cx="735495" cy="400979"/>
+          </a:xfrm>
+          <a:prstGeom prst="roundRect">
+            <a:avLst/>
+          </a:prstGeom>
+          <a:solidFill>
+            <a:schemeClr val="accent1">
+              <a:alpha val="20000"/>
+            </a:schemeClr>
+          </a:solidFill>
+        </p:spPr>
+        <p:style>
+          <a:lnRef idx="2">
+            <a:schemeClr val="accent1">
+              <a:shade val="15000"/>
+            </a:schemeClr>
+          </a:lnRef>
+          <a:fillRef idx="1">
+            <a:schemeClr val="accent1"/>
+          </a:fillRef>
+          <a:effectRef idx="0">
+            <a:schemeClr val="accent1"/>
+          </a:effectRef>
+          <a:fontRef idx="minor">
+            <a:schemeClr val="lt1"/>
+          </a:fontRef>
+        </p:style>
+        <p:txBody>
+          <a:bodyPr rtlCol="0" anchor="ctr"/>
+          <a:lstStyle/>
+          <a:p>
+            <a:pPr algn="ctr"/>
+            <a:endParaRPr lang="en-US"/>
+          </a:p>
+        </p:txBody>
+      </p:sp>
+      <p:sp>
+        <p:nvSpPr>
+          <p:cNvPr id="19" name="Rectangle: Rounded Corners 18">
+            <a:extLst>
+              <a:ext uri="{FF2B5EF4-FFF2-40B4-BE49-F238E27FC236}">
+                <a16:creationId xmlns:a16="http://schemas.microsoft.com/office/drawing/2014/main" id="{3CBAB640-AED2-2CF7-85D9-944D39B03D12}"/>
+              </a:ext>
+            </a:extLst>
+          </p:cNvPr>
+          <p:cNvSpPr/>
+          <p:nvPr/>
+        </p:nvSpPr>
+        <p:spPr>
+          <a:xfrm>
+            <a:off x="7542839" y="2262871"/>
+            <a:ext cx="1539600" cy="400979"/>
+          </a:xfrm>
+          <a:prstGeom prst="roundRect">
+            <a:avLst/>
+          </a:prstGeom>
+          <a:solidFill>
+            <a:srgbClr val="F080A0">
+              <a:alpha val="20000"/>
+            </a:srgbClr>
+          </a:solidFill>
+        </p:spPr>
+        <p:style>
+          <a:lnRef idx="2">
+            <a:schemeClr val="accent1">
+              <a:shade val="15000"/>
+            </a:schemeClr>
+          </a:lnRef>
+          <a:fillRef idx="1">
+            <a:schemeClr val="accent1"/>
+          </a:fillRef>
+          <a:effectRef idx="0">
+            <a:schemeClr val="accent1"/>
+          </a:effectRef>
+          <a:fontRef idx="minor">
+            <a:schemeClr val="lt1"/>
+          </a:fontRef>
+        </p:style>
+        <p:txBody>
+          <a:bodyPr rtlCol="0" anchor="ctr"/>
+          <a:lstStyle/>
+          <a:p>
+            <a:pPr algn="ctr"/>
+            <a:endParaRPr lang="en-US"/>
+          </a:p>
+        </p:txBody>
+      </p:sp>
+    </p:spTree>
+    <p:extLst>
+      <p:ext uri="{BB962C8B-B14F-4D97-AF65-F5344CB8AC3E}">
+        <p14:creationId xmlns:p14="http://schemas.microsoft.com/office/powerpoint/2010/main" val="3706186684"/>
+      </p:ext>
+    </p:extLst>
+  </p:cSld>
+  <p:clrMapOvr>
+    <a:masterClrMapping/>
+  </p:clrMapOvr>
+</p:sld>
+</file>
+
+<file path=ppt/slides/slide6.xml><?xml version="1.0" encoding="utf-8"?>
+<p:sld xmlns:a="http://schemas.openxmlformats.org/drawingml/2006/main" xmlns:r="http://schemas.openxmlformats.org/officeDocument/2006/relationships" xmlns:p="http://schemas.openxmlformats.org/presentationml/2006/main">
+  <p:cSld>
+    <p:spTree>
+      <p:nvGrpSpPr>
+        <p:cNvPr id="1" name=""/>
+        <p:cNvGrpSpPr/>
+        <p:nvPr/>
+      </p:nvGrpSpPr>
+      <p:grpSpPr>
+        <a:xfrm>
+          <a:off x="0" y="0"/>
+          <a:ext cx="0" cy="0"/>
+          <a:chOff x="0" y="0"/>
+          <a:chExt cx="0" cy="0"/>
+        </a:xfrm>
+      </p:grpSpPr>
+      <mc:AlternateContent xmlns:mc="http://schemas.openxmlformats.org/markup-compatibility/2006">
+        <mc:Choice xmlns:a14="http://schemas.microsoft.com/office/drawing/2010/main" Requires="a14">
+          <p:sp>
+            <p:nvSpPr>
+              <p:cNvPr id="2" name="Content Placeholder 1">
+                <a:extLst>
+                  <a:ext uri="{FF2B5EF4-FFF2-40B4-BE49-F238E27FC236}">
+                    <a16:creationId xmlns:a16="http://schemas.microsoft.com/office/drawing/2014/main" id="{F152A18D-DBEB-07F5-D91D-0C0BB588AD51}"/>
+                  </a:ext>
+                </a:extLst>
+              </p:cNvPr>
+              <p:cNvSpPr>
+                <a:spLocks noGrp="1"/>
+              </p:cNvSpPr>
+              <p:nvPr>
+                <p:ph sz="half" idx="1"/>
+              </p:nvPr>
+            </p:nvSpPr>
+            <p:spPr>
+              <a:xfrm>
+                <a:off x="402264" y="1799674"/>
+                <a:ext cx="4950721" cy="4351339"/>
+              </a:xfrm>
+            </p:spPr>
+            <p:txBody>
+              <a:bodyPr>
+                <a:normAutofit fontScale="70000" lnSpcReduction="20000"/>
+              </a:bodyPr>
+              <a:lstStyle/>
+              <a:p>
+                <a:r>
+                  <a:rPr lang="en-US" b="1" dirty="0">
+                    <a:solidFill>
+                      <a:srgbClr val="455F69"/>
+                    </a:solidFill>
+                  </a:rPr>
+                  <a:t>Plain recursion</a:t>
+                </a:r>
+              </a:p>
+              <a:p>
+                <a:pPr marL="457189" lvl="1" indent="0">
+                  <a:buNone/>
+                </a:pPr>
+                <a:r>
+                  <a:rPr lang="en-US" dirty="0">
+                    <a:solidFill>
+                      <a:srgbClr val="00B0F0"/>
+                    </a:solidFill>
+                  </a:rPr>
+                  <a:t>(+) </a:t>
+                </a:r>
+                <a:r>
+                  <a:rPr lang="en-US" dirty="0"/>
+                  <a:t>Simple implementation</a:t>
+                </a:r>
+              </a:p>
+              <a:p>
+                <a:pPr marL="457189" lvl="1" indent="0">
+                  <a:buNone/>
+                </a:pPr>
+                <a:r>
+                  <a:rPr lang="en-US" dirty="0">
+                    <a:solidFill>
+                      <a:srgbClr val="00B0F0"/>
+                    </a:solidFill>
+                  </a:rPr>
+                  <a:t>(+) </a:t>
+                </a:r>
+                <a:r>
+                  <a:rPr lang="en-US" dirty="0"/>
+                  <a:t>Works for small </a:t>
+                </a:r>
+                <a14:m>
+                  <m:oMath xmlns:m="http://schemas.openxmlformats.org/officeDocument/2006/math">
+                    <m:r>
+                      <a:rPr lang="en-US" i="1" dirty="0" smtClean="0">
+                        <a:latin typeface="Cambria Math" panose="02040503050406030204" pitchFamily="18" charset="0"/>
+                      </a:rPr>
+                      <m:t>𝑛</m:t>
+                    </m:r>
+                    <m:r>
+                      <a:rPr lang="en-US" i="1" dirty="0" smtClean="0">
+                        <a:latin typeface="Cambria Math" panose="02040503050406030204" pitchFamily="18" charset="0"/>
+                      </a:rPr>
+                      <m:t>&lt;= </m:t>
+                    </m:r>
+                    <m:r>
+                      <a:rPr lang="en-US" i="1" dirty="0" smtClean="0">
+                        <a:latin typeface="Cambria Math" panose="02040503050406030204" pitchFamily="18" charset="0"/>
+                      </a:rPr>
+                      <m:t>10</m:t>
+                    </m:r>
+                  </m:oMath>
+                </a14:m>
+                <a:r>
+                  <a:rPr lang="en-US" dirty="0"/>
+                  <a:t> </a:t>
+                </a:r>
+              </a:p>
+              <a:p>
+                <a:pPr marL="457189" lvl="1" indent="0">
+                  <a:buNone/>
+                </a:pPr>
+                <a:r>
+                  <a:rPr lang="en-US" dirty="0">
+                    <a:solidFill>
+                      <a:srgbClr val="FF6987"/>
+                    </a:solidFill>
+                  </a:rPr>
+                  <a:t>(-) </a:t>
+                </a:r>
+                <a:r>
+                  <a:rPr lang="en-US" sz="2500" dirty="0"/>
+                  <a:t>R</a:t>
+                </a:r>
+                <a:r>
+                  <a:rPr lang="en-US" dirty="0"/>
+                  <a:t>edundant computation</a:t>
+                </a:r>
+              </a:p>
+              <a:p>
+                <a:pPr marL="457189" lvl="1" indent="0">
+                  <a:buNone/>
+                </a:pPr>
+                <a:r>
+                  <a:rPr lang="en-US" dirty="0">
+                    <a:solidFill>
+                      <a:srgbClr val="FF6987"/>
+                    </a:solidFill>
+                  </a:rPr>
+                  <a:t>(-) </a:t>
+                </a:r>
+                <a:r>
+                  <a:rPr lang="en-US" dirty="0"/>
+                  <a:t>Stack overflow</a:t>
+                </a:r>
+              </a:p>
+              <a:p>
+                <a:pPr marL="457189" lvl="1" indent="0">
+                  <a:buNone/>
+                </a:pPr>
+                <a:r>
+                  <a:rPr lang="en-US" dirty="0">
+                    <a:solidFill>
+                      <a:srgbClr val="FF6987"/>
+                    </a:solidFill>
+                  </a:rPr>
+                  <a:t>(-)</a:t>
+                </a:r>
+                <a:r>
+                  <a:rPr lang="en-US" dirty="0"/>
+                  <a:t> Poor scalability</a:t>
+                </a:r>
+              </a:p>
+              <a:p>
+                <a:r>
+                  <a:rPr lang="en-US" b="1" dirty="0">
+                    <a:solidFill>
+                      <a:srgbClr val="455F69"/>
+                    </a:solidFill>
+                  </a:rPr>
+                  <a:t>Memoized recursion</a:t>
+                </a:r>
+              </a:p>
+              <a:p>
+                <a:pPr marL="457189" lvl="1" indent="0">
+                  <a:buNone/>
+                </a:pPr>
+                <a:r>
+                  <a:rPr lang="en-US" dirty="0">
+                    <a:solidFill>
+                      <a:srgbClr val="00B0F0"/>
+                    </a:solidFill>
+                  </a:rPr>
+                  <a:t>(+)</a:t>
+                </a:r>
+                <a:r>
+                  <a:rPr lang="en-US" dirty="0"/>
+                  <a:t> Avoids redundant computation</a:t>
+                </a:r>
+              </a:p>
+              <a:p>
+                <a:pPr marL="457189" lvl="1" indent="0">
+                  <a:buNone/>
+                </a:pPr>
+                <a:r>
+                  <a:rPr lang="en-US" dirty="0">
+                    <a:solidFill>
+                      <a:srgbClr val="00B0F0"/>
+                    </a:solidFill>
+                  </a:rPr>
+                  <a:t>(+)</a:t>
+                </a:r>
+                <a:r>
+                  <a:rPr lang="en-US" dirty="0"/>
+                  <a:t> Faster than naïve recursion</a:t>
+                </a:r>
+              </a:p>
+              <a:p>
+                <a:pPr marL="457189" lvl="1" indent="0">
+                  <a:buNone/>
+                </a:pPr>
+                <a:r>
+                  <a:rPr lang="en-US" dirty="0">
+                    <a:solidFill>
+                      <a:srgbClr val="00B0F0"/>
+                    </a:solidFill>
+                  </a:rPr>
+                  <a:t>(+)</a:t>
+                </a:r>
+                <a:r>
+                  <a:rPr lang="en-US" dirty="0"/>
+                  <a:t> Parallelizable</a:t>
+                </a:r>
+              </a:p>
+              <a:p>
+                <a:pPr marL="457189" lvl="1" indent="0">
+                  <a:buNone/>
+                </a:pPr>
+                <a:r>
+                  <a:rPr lang="en-US" dirty="0">
+                    <a:solidFill>
+                      <a:srgbClr val="F080A0"/>
+                    </a:solidFill>
+                  </a:rPr>
+                  <a:t>(-)</a:t>
+                </a:r>
+                <a:r>
+                  <a:rPr lang="en-US" dirty="0"/>
+                  <a:t> Recursion overhead</a:t>
+                </a:r>
+              </a:p>
+              <a:p>
+                <a:r>
+                  <a:rPr lang="en-US" b="1" dirty="0">
+                    <a:solidFill>
+                      <a:srgbClr val="455F69"/>
+                    </a:solidFill>
+                  </a:rPr>
+                  <a:t>Iterative DP</a:t>
+                </a:r>
+              </a:p>
+              <a:p>
+                <a:pPr marL="457189" lvl="1" indent="0">
+                  <a:buNone/>
+                </a:pPr>
+                <a:r>
+                  <a:rPr lang="en-US" dirty="0">
+                    <a:solidFill>
+                      <a:srgbClr val="00B0F0"/>
+                    </a:solidFill>
+                  </a:rPr>
+                  <a:t>(+) </a:t>
+                </a:r>
+                <a:r>
+                  <a:rPr lang="en-US" dirty="0"/>
+                  <a:t>Fast and Efficient</a:t>
+                </a:r>
+              </a:p>
+              <a:p>
+                <a:pPr marL="457189" lvl="1" indent="0">
+                  <a:buNone/>
+                </a:pPr>
+                <a:r>
+                  <a:rPr lang="en-US" dirty="0">
+                    <a:solidFill>
+                      <a:srgbClr val="00B0F0"/>
+                    </a:solidFill>
+                  </a:rPr>
+                  <a:t>(+)</a:t>
+                </a:r>
+                <a:r>
+                  <a:rPr lang="en-US" dirty="0"/>
+                  <a:t> Stable (no recursion)</a:t>
+                </a:r>
+              </a:p>
+              <a:p>
+                <a:pPr marL="457189" lvl="1" indent="0">
+                  <a:buNone/>
+                </a:pPr>
+                <a:r>
+                  <a:rPr lang="en-US" dirty="0">
+                    <a:solidFill>
+                      <a:srgbClr val="00B0F0"/>
+                    </a:solidFill>
+                  </a:rPr>
+                  <a:t>(+)</a:t>
+                </a:r>
+                <a:r>
+                  <a:rPr lang="en-US" dirty="0"/>
+                  <a:t> Best for large n</a:t>
+                </a:r>
+              </a:p>
+              <a:p>
+                <a:pPr marL="457189" lvl="1" indent="0">
+                  <a:buNone/>
+                </a:pPr>
+                <a:r>
+                  <a:rPr lang="en-US" dirty="0">
+                    <a:solidFill>
+                      <a:srgbClr val="FF6987"/>
+                    </a:solidFill>
+                  </a:rPr>
+                  <a:t>(-)</a:t>
+                </a:r>
+                <a:r>
+                  <a:rPr lang="en-US" dirty="0"/>
+                  <a:t> Limited parallelization</a:t>
+                </a:r>
+              </a:p>
+              <a:p>
+                <a:endParaRPr lang="en-US" dirty="0"/>
+              </a:p>
+              <a:p>
+                <a:pPr lvl="1"/>
+                <a:endParaRPr lang="en-US" dirty="0"/>
+              </a:p>
+            </p:txBody>
+          </p:sp>
+        </mc:Choice>
+        <mc:Fallback>
+          <p:sp>
+            <p:nvSpPr>
+              <p:cNvPr id="2" name="Content Placeholder 1">
+                <a:extLst>
+                  <a:ext uri="{FF2B5EF4-FFF2-40B4-BE49-F238E27FC236}">
+                    <a16:creationId xmlns:a16="http://schemas.microsoft.com/office/drawing/2014/main" id="{F152A18D-DBEB-07F5-D91D-0C0BB588AD51}"/>
+                  </a:ext>
+                </a:extLst>
+              </p:cNvPr>
+              <p:cNvSpPr>
+                <a:spLocks noGrp="1" noRot="1" noChangeAspect="1" noMove="1" noResize="1" noEditPoints="1" noAdjustHandles="1" noChangeArrowheads="1" noChangeShapeType="1" noTextEdit="1"/>
+              </p:cNvSpPr>
+              <p:nvPr>
+                <p:ph sz="half" idx="1"/>
+              </p:nvPr>
+            </p:nvSpPr>
+            <p:spPr>
+              <a:xfrm>
+                <a:off x="402264" y="1799674"/>
+                <a:ext cx="4950721" cy="4351339"/>
+              </a:xfrm>
+              <a:blipFill>
+                <a:blip r:embed="rId2"/>
+                <a:stretch>
+                  <a:fillRect l="-1108" t="-2661"/>
+                </a:stretch>
+              </a:blipFill>
+            </p:spPr>
+            <p:txBody>
+              <a:bodyPr/>
+              <a:lstStyle/>
+              <a:p>
+                <a:r>
+                  <a:rPr lang="en-US">
+                    <a:noFill/>
+                  </a:rPr>
+                  <a:t> </a:t>
+                </a:r>
+              </a:p>
+            </p:txBody>
+          </p:sp>
+        </mc:Fallback>
+      </mc:AlternateContent>
+      <p:sp>
+        <p:nvSpPr>
+          <p:cNvPr id="4" name="Title 3">
+            <a:extLst>
+              <a:ext uri="{FF2B5EF4-FFF2-40B4-BE49-F238E27FC236}">
+                <a16:creationId xmlns:a16="http://schemas.microsoft.com/office/drawing/2014/main" id="{50951B58-0855-2B93-5B27-11C3FB655EBC}"/>
+              </a:ext>
+            </a:extLst>
+          </p:cNvPr>
+          <p:cNvSpPr>
+            <a:spLocks noGrp="1"/>
+          </p:cNvSpPr>
+          <p:nvPr>
+            <p:ph type="title"/>
+          </p:nvPr>
+        </p:nvSpPr>
+        <p:spPr/>
+        <p:txBody>
+          <a:bodyPr/>
+          <a:lstStyle/>
+          <a:p>
+            <a:r>
+              <a:rPr lang="en-US" dirty="0"/>
+              <a:t>Possible Solution/Issues</a:t>
+            </a:r>
+          </a:p>
+        </p:txBody>
+      </p:sp>
+      <p:sp>
+        <p:nvSpPr>
+          <p:cNvPr id="5" name="Footer Placeholder 4">
+            <a:extLst>
+              <a:ext uri="{FF2B5EF4-FFF2-40B4-BE49-F238E27FC236}">
+                <a16:creationId xmlns:a16="http://schemas.microsoft.com/office/drawing/2014/main" id="{11365555-6A05-2F81-9E6D-7A4293873804}"/>
+              </a:ext>
+            </a:extLst>
+          </p:cNvPr>
+          <p:cNvSpPr>
+            <a:spLocks noGrp="1"/>
+          </p:cNvSpPr>
+          <p:nvPr>
+            <p:ph type="ftr" sz="quarter" idx="11"/>
+          </p:nvPr>
+        </p:nvSpPr>
+        <p:spPr/>
+        <p:txBody>
+          <a:bodyPr/>
+          <a:lstStyle/>
+          <a:p>
+            <a:r>
+              <a:rPr lang="en-US" dirty="0"/>
+              <a:t>UNIVERSITY OF SOUTH FLORIDA</a:t>
+            </a:r>
+          </a:p>
+        </p:txBody>
+      </p:sp>
+      <p:pic>
+        <p:nvPicPr>
+          <p:cNvPr id="16" name="Picture 15">
+            <a:extLst>
+              <a:ext uri="{FF2B5EF4-FFF2-40B4-BE49-F238E27FC236}">
+                <a16:creationId xmlns:a16="http://schemas.microsoft.com/office/drawing/2014/main" id="{E09D445C-59E2-401F-0816-D148533F91D9}"/>
+              </a:ext>
+            </a:extLst>
+          </p:cNvPr>
+          <p:cNvPicPr>
+            <a:picLocks noChangeAspect="1"/>
+          </p:cNvPicPr>
+          <p:nvPr/>
+        </p:nvPicPr>
+        <p:blipFill>
+          <a:blip r:embed="rId3"/>
+          <a:srcRect l="1433"/>
+          <a:stretch>
+            <a:fillRect/>
+          </a:stretch>
+        </p:blipFill>
+        <p:spPr>
+          <a:xfrm>
+            <a:off x="4738253" y="1787551"/>
+            <a:ext cx="3788231" cy="1704017"/>
+          </a:xfrm>
+          <a:prstGeom prst="rect">
+            <a:avLst/>
+          </a:prstGeom>
+          <a:ln>
+            <a:solidFill>
+              <a:schemeClr val="tx1"/>
+            </a:solidFill>
+          </a:ln>
+        </p:spPr>
+      </p:pic>
+      <p:pic>
+        <p:nvPicPr>
+          <p:cNvPr id="18" name="Picture 17">
+            <a:extLst>
+              <a:ext uri="{FF2B5EF4-FFF2-40B4-BE49-F238E27FC236}">
+                <a16:creationId xmlns:a16="http://schemas.microsoft.com/office/drawing/2014/main" id="{EC574633-52EB-B01D-46DF-66902A6BB96A}"/>
+              </a:ext>
+            </a:extLst>
+          </p:cNvPr>
+          <p:cNvPicPr>
+            <a:picLocks noChangeAspect="1"/>
+          </p:cNvPicPr>
+          <p:nvPr/>
+        </p:nvPicPr>
+        <p:blipFill>
+          <a:blip r:embed="rId4"/>
+          <a:srcRect l="4871"/>
+          <a:stretch>
+            <a:fillRect/>
+          </a:stretch>
+        </p:blipFill>
+        <p:spPr>
+          <a:xfrm>
+            <a:off x="4738252" y="3600554"/>
+            <a:ext cx="3788231" cy="2485401"/>
+          </a:xfrm>
+          <a:prstGeom prst="rect">
+            <a:avLst/>
+          </a:prstGeom>
+          <a:ln>
+            <a:solidFill>
+              <a:schemeClr val="tx1"/>
+            </a:solidFill>
+          </a:ln>
+        </p:spPr>
+      </p:pic>
+      <p:pic>
+        <p:nvPicPr>
+          <p:cNvPr id="20" name="Picture 19">
+            <a:extLst>
+              <a:ext uri="{FF2B5EF4-FFF2-40B4-BE49-F238E27FC236}">
+                <a16:creationId xmlns:a16="http://schemas.microsoft.com/office/drawing/2014/main" id="{A4752B6B-903B-41A2-AAB6-50DA071CE242}"/>
+              </a:ext>
+            </a:extLst>
+          </p:cNvPr>
+          <p:cNvPicPr>
+            <a:picLocks noChangeAspect="1"/>
+          </p:cNvPicPr>
+          <p:nvPr/>
+        </p:nvPicPr>
+        <p:blipFill>
+          <a:blip r:embed="rId5"/>
+          <a:srcRect l="6096"/>
+          <a:stretch>
+            <a:fillRect/>
+          </a:stretch>
+        </p:blipFill>
+        <p:spPr>
+          <a:xfrm>
+            <a:off x="8662056" y="2679762"/>
+            <a:ext cx="3399316" cy="2591162"/>
+          </a:xfrm>
+          <a:prstGeom prst="rect">
+            <a:avLst/>
+          </a:prstGeom>
+          <a:ln>
+            <a:solidFill>
+              <a:schemeClr val="tx1"/>
+            </a:solidFill>
+          </a:ln>
+        </p:spPr>
+      </p:pic>
+    </p:spTree>
+    <p:extLst>
+      <p:ext uri="{BB962C8B-B14F-4D97-AF65-F5344CB8AC3E}">
+        <p14:creationId xmlns:p14="http://schemas.microsoft.com/office/powerpoint/2010/main" val="1335829411"/>
+      </p:ext>
+    </p:extLst>
+  </p:cSld>
+  <p:clrMapOvr>
+    <a:masterClrMapping/>
+  </p:clrMapOvr>
+</p:sld>
+</file>
+
+<file path=ppt/slides/slide7.xml><?xml version="1.0" encoding="utf-8"?>
+<p:sld xmlns:a="http://schemas.openxmlformats.org/drawingml/2006/main" xmlns:r="http://schemas.openxmlformats.org/officeDocument/2006/relationships" xmlns:p="http://schemas.openxmlformats.org/presentationml/2006/main">
+  <p:cSld>
+    <p:spTree>
+      <p:nvGrpSpPr>
+        <p:cNvPr id="1" name=""/>
+        <p:cNvGrpSpPr/>
+        <p:nvPr/>
+      </p:nvGrpSpPr>
+      <p:grpSpPr>
+        <a:xfrm>
+          <a:off x="0" y="0"/>
+          <a:ext cx="0" cy="0"/>
+          <a:chOff x="0" y="0"/>
+          <a:chExt cx="0" cy="0"/>
+        </a:xfrm>
+      </p:grpSpPr>
+      <p:sp>
+        <p:nvSpPr>
+          <p:cNvPr id="6" name="Content Placeholder 5">
+            <a:extLst>
+              <a:ext uri="{FF2B5EF4-FFF2-40B4-BE49-F238E27FC236}">
+                <a16:creationId xmlns:a16="http://schemas.microsoft.com/office/drawing/2014/main" id="{F0405C86-1588-F943-FD88-08AD735CF119}"/>
+              </a:ext>
+            </a:extLst>
+          </p:cNvPr>
+          <p:cNvSpPr>
+            <a:spLocks noGrp="1"/>
+          </p:cNvSpPr>
+          <p:nvPr>
+            <p:ph sz="half" idx="1"/>
+          </p:nvPr>
+        </p:nvSpPr>
+        <p:spPr>
+          <a:xfrm>
+            <a:off x="402264" y="1390262"/>
+            <a:ext cx="5693736" cy="4760752"/>
+          </a:xfrm>
+        </p:spPr>
+        <p:txBody>
+          <a:bodyPr>
+            <a:normAutofit/>
+          </a:bodyPr>
+          <a:lstStyle/>
+          <a:p>
+            <a:pPr marL="0" indent="0">
+              <a:buNone/>
+            </a:pPr>
+            <a:r>
+              <a:rPr lang="en-US" b="1" dirty="0"/>
+              <a:t>Methodology:</a:t>
+            </a:r>
+          </a:p>
+          <a:p>
+            <a:pPr marL="0" indent="0">
+              <a:buNone/>
+            </a:pPr>
+            <a:r>
+              <a:rPr lang="en-US" dirty="0"/>
+              <a:t>1. Initialize C(0)</a:t>
+            </a:r>
+            <a:br>
+              <a:rPr lang="en-US" dirty="0"/>
+            </a:br>
+            <a:r>
+              <a:rPr lang="en-US" dirty="0"/>
+              <a:t>2. Assign one manager thread per Catalan number ( 0 excluded )</a:t>
+            </a:r>
+            <a:br>
+              <a:rPr lang="en-US" dirty="0"/>
+            </a:br>
+            <a:r>
+              <a:rPr lang="en-US" dirty="0"/>
+              <a:t>3. Wait for dependencies to be satisfied</a:t>
+            </a:r>
+            <a:br>
+              <a:rPr lang="en-US" dirty="0"/>
+            </a:br>
+            <a:r>
+              <a:rPr lang="en-US" dirty="0"/>
+              <a:t>4. Split each recurrence into worker-thread chunks</a:t>
+            </a:r>
+            <a:br>
+              <a:rPr lang="en-US" dirty="0"/>
+            </a:br>
+            <a:r>
+              <a:rPr lang="en-US" dirty="0"/>
+              <a:t>5. Compute partial sums in parallel</a:t>
+            </a:r>
+            <a:br>
+              <a:rPr lang="en-US" dirty="0"/>
+            </a:br>
+            <a:r>
+              <a:rPr lang="en-US" dirty="0"/>
+              <a:t>6. Combine and store results</a:t>
+            </a:r>
+            <a:br>
+              <a:rPr lang="en-US" dirty="0"/>
+            </a:br>
+            <a:r>
+              <a:rPr lang="en-US" dirty="0"/>
+              <a:t>7. Notify manager threads</a:t>
+            </a:r>
+          </a:p>
+          <a:p>
+            <a:pPr marL="0" indent="0">
+              <a:buNone/>
+            </a:pPr>
+            <a:endParaRPr lang="en-US" dirty="0"/>
+          </a:p>
+        </p:txBody>
+      </p:sp>
+      <p:pic>
+        <p:nvPicPr>
+          <p:cNvPr id="3" name="Content Placeholder 2">
+            <a:extLst>
+              <a:ext uri="{FF2B5EF4-FFF2-40B4-BE49-F238E27FC236}">
+                <a16:creationId xmlns:a16="http://schemas.microsoft.com/office/drawing/2014/main" id="{8F163B48-7DAC-79C0-49C3-EA5648CAFDCE}"/>
+              </a:ext>
+            </a:extLst>
+          </p:cNvPr>
+          <p:cNvPicPr>
+            <a:picLocks noGrp="1" noChangeAspect="1"/>
+          </p:cNvPicPr>
+          <p:nvPr>
+            <p:ph sz="half" idx="2"/>
+          </p:nvPr>
+        </p:nvPicPr>
+        <p:blipFill>
+          <a:blip r:embed="rId2"/>
+          <a:stretch>
+            <a:fillRect/>
+          </a:stretch>
+        </p:blipFill>
+        <p:spPr>
+          <a:xfrm>
+            <a:off x="6040621" y="1971449"/>
+            <a:ext cx="5772150" cy="1984433"/>
+          </a:xfrm>
+          <a:prstGeom prst="rect">
+            <a:avLst/>
+          </a:prstGeom>
+        </p:spPr>
+      </p:pic>
+      <p:sp>
+        <p:nvSpPr>
+          <p:cNvPr id="4" name="Title 3">
+            <a:extLst>
+              <a:ext uri="{FF2B5EF4-FFF2-40B4-BE49-F238E27FC236}">
+                <a16:creationId xmlns:a16="http://schemas.microsoft.com/office/drawing/2014/main" id="{857DD158-8775-D326-E8A2-DEA92A9DAE5A}"/>
+              </a:ext>
+            </a:extLst>
+          </p:cNvPr>
+          <p:cNvSpPr>
+            <a:spLocks noGrp="1"/>
+          </p:cNvSpPr>
+          <p:nvPr>
+            <p:ph type="title"/>
+          </p:nvPr>
+        </p:nvSpPr>
+        <p:spPr>
+          <a:xfrm>
+            <a:off x="402264" y="365125"/>
+            <a:ext cx="6065113" cy="1325563"/>
+          </a:xfrm>
+        </p:spPr>
+        <p:txBody>
+          <a:bodyPr/>
+          <a:lstStyle/>
+          <a:p>
+            <a:r>
+              <a:rPr lang="en-US" dirty="0"/>
+              <a:t>Multithread Solution</a:t>
+            </a:r>
+          </a:p>
+        </p:txBody>
+      </p:sp>
+      <p:sp>
+        <p:nvSpPr>
+          <p:cNvPr id="5" name="Footer Placeholder 4">
+            <a:extLst>
+              <a:ext uri="{FF2B5EF4-FFF2-40B4-BE49-F238E27FC236}">
+                <a16:creationId xmlns:a16="http://schemas.microsoft.com/office/drawing/2014/main" id="{681395FF-1A3E-6D1D-791C-517B4F2E72E5}"/>
+              </a:ext>
+            </a:extLst>
+          </p:cNvPr>
+          <p:cNvSpPr>
+            <a:spLocks noGrp="1"/>
+          </p:cNvSpPr>
+          <p:nvPr>
+            <p:ph type="ftr" sz="quarter" idx="11"/>
+          </p:nvPr>
+        </p:nvSpPr>
+        <p:spPr/>
+        <p:txBody>
+          <a:bodyPr/>
+          <a:lstStyle/>
+          <a:p>
+            <a:r>
+              <a:rPr lang="en-US"/>
+              <a:t>UNIVERSITY OF SOUTH FLORIDA</a:t>
+            </a:r>
+            <a:endParaRPr lang="en-US" dirty="0"/>
+          </a:p>
+        </p:txBody>
+      </p:sp>
+      <mc:AlternateContent xmlns:mc="http://schemas.openxmlformats.org/markup-compatibility/2006" xmlns:a14="http://schemas.microsoft.com/office/drawing/2010/main">
+        <mc:Choice Requires="a14">
+          <p:sp>
+            <p:nvSpPr>
+              <p:cNvPr id="9" name="TextBox 8">
+                <a:extLst>
+                  <a:ext uri="{FF2B5EF4-FFF2-40B4-BE49-F238E27FC236}">
+                    <a16:creationId xmlns:a16="http://schemas.microsoft.com/office/drawing/2014/main" id="{0A4D7A0E-3DCD-B59C-8124-1E58D8DDD71B}"/>
+                  </a:ext>
+                </a:extLst>
+              </p:cNvPr>
+              <p:cNvSpPr txBox="1"/>
+              <p:nvPr/>
+            </p:nvSpPr>
+            <p:spPr>
+              <a:xfrm>
+                <a:off x="5983355" y="5040026"/>
+                <a:ext cx="6248400" cy="890500"/>
+              </a:xfrm>
+              <a:prstGeom prst="rect">
+                <a:avLst/>
+              </a:prstGeom>
+            </p:spPr>
+            <p:txBody>
+              <a:bodyPr vert="horz" lIns="91440" tIns="45720" rIns="91440" bIns="45720" rtlCol="0">
+                <a:normAutofit fontScale="85000" lnSpcReduction="10000"/>
+              </a:bodyPr>
+              <a:lstStyle>
+                <a:lvl1pPr indent="0">
+                  <a:lnSpc>
+                    <a:spcPct val="90000"/>
+                  </a:lnSpc>
+                  <a:spcBef>
+                    <a:spcPts val="1000"/>
+                  </a:spcBef>
+                  <a:buFont typeface="Arial" panose="020B0604020202020204" pitchFamily="34" charset="0"/>
+                  <a:buNone/>
+                  <a:defRPr sz="2800" b="1">
+                    <a:solidFill>
+                      <a:schemeClr val="tx2"/>
+                    </a:solidFill>
+                  </a:defRPr>
+                </a:lvl1pPr>
+                <a:lvl2pPr marL="685783" indent="-228594">
+                  <a:lnSpc>
+                    <a:spcPct val="90000"/>
+                  </a:lnSpc>
+                  <a:spcBef>
+                    <a:spcPts val="500"/>
+                  </a:spcBef>
+                  <a:buFont typeface="Arial" panose="020B0604020202020204" pitchFamily="34" charset="0"/>
+                  <a:buChar char="•"/>
+                  <a:defRPr sz="2400">
+                    <a:solidFill>
+                      <a:schemeClr val="tx2"/>
+                    </a:solidFill>
+                  </a:defRPr>
+                </a:lvl2pPr>
+                <a:lvl3pPr marL="1142971" indent="-228594">
+                  <a:lnSpc>
+                    <a:spcPct val="90000"/>
+                  </a:lnSpc>
+                  <a:spcBef>
+                    <a:spcPts val="500"/>
+                  </a:spcBef>
+                  <a:buFont typeface="Arial" panose="020B0604020202020204" pitchFamily="34" charset="0"/>
+                  <a:buChar char="•"/>
+                  <a:defRPr sz="2000">
+                    <a:solidFill>
+                      <a:schemeClr val="tx2"/>
+                    </a:solidFill>
+                  </a:defRPr>
+                </a:lvl3pPr>
+                <a:lvl4pPr marL="1600160" indent="-228594">
+                  <a:lnSpc>
+                    <a:spcPct val="90000"/>
+                  </a:lnSpc>
+                  <a:spcBef>
+                    <a:spcPts val="500"/>
+                  </a:spcBef>
+                  <a:buFont typeface="Arial" panose="020B0604020202020204" pitchFamily="34" charset="0"/>
+                  <a:buChar char="•"/>
+                  <a:defRPr>
+                    <a:solidFill>
+                      <a:schemeClr val="tx2"/>
+                    </a:solidFill>
+                  </a:defRPr>
+                </a:lvl4pPr>
+                <a:lvl5pPr marL="2057349" indent="-228594">
+                  <a:lnSpc>
+                    <a:spcPct val="90000"/>
+                  </a:lnSpc>
+                  <a:spcBef>
+                    <a:spcPts val="500"/>
+                  </a:spcBef>
+                  <a:buFont typeface="Arial" panose="020B0604020202020204" pitchFamily="34" charset="0"/>
+                  <a:buChar char="•"/>
+                  <a:defRPr>
+                    <a:solidFill>
+                      <a:schemeClr val="tx2"/>
+                    </a:solidFill>
+                  </a:defRPr>
+                </a:lvl5pPr>
+                <a:lvl6pPr marL="2514537" indent="-228594">
+                  <a:lnSpc>
+                    <a:spcPct val="90000"/>
+                  </a:lnSpc>
+                  <a:spcBef>
+                    <a:spcPts val="500"/>
+                  </a:spcBef>
+                  <a:buFont typeface="Arial" panose="020B0604020202020204" pitchFamily="34" charset="0"/>
+                  <a:buChar char="•"/>
+                </a:lvl6pPr>
+                <a:lvl7pPr marL="2971726" indent="-228594">
+                  <a:lnSpc>
+                    <a:spcPct val="90000"/>
+                  </a:lnSpc>
+                  <a:spcBef>
+                    <a:spcPts val="500"/>
+                  </a:spcBef>
+                  <a:buFont typeface="Arial" panose="020B0604020202020204" pitchFamily="34" charset="0"/>
+                  <a:buChar char="•"/>
+                </a:lvl7pPr>
+                <a:lvl8pPr marL="3428914" indent="-228594">
+                  <a:lnSpc>
+                    <a:spcPct val="90000"/>
+                  </a:lnSpc>
+                  <a:spcBef>
+                    <a:spcPts val="500"/>
+                  </a:spcBef>
+                  <a:buFont typeface="Arial" panose="020B0604020202020204" pitchFamily="34" charset="0"/>
+                  <a:buChar char="•"/>
+                </a:lvl8pPr>
+                <a:lvl9pPr marL="3886103" indent="-228594">
+                  <a:lnSpc>
+                    <a:spcPct val="90000"/>
+                  </a:lnSpc>
+                  <a:spcBef>
+                    <a:spcPts val="500"/>
+                  </a:spcBef>
+                  <a:buFont typeface="Arial" panose="020B0604020202020204" pitchFamily="34" charset="0"/>
+                  <a:buChar char="•"/>
+                </a:lvl9pPr>
+              </a:lstStyle>
+              <a:p>
+                <a:r>
+                  <a:rPr lang="en-US" dirty="0"/>
+                  <a:t>Key formula: </a:t>
+                </a:r>
+                <a14:m>
+                  <m:oMath xmlns:m="http://schemas.openxmlformats.org/officeDocument/2006/math">
+                    <m:sSub>
+                      <m:sSubPr>
+                        <m:ctrlPr>
+                          <a:rPr lang="en-US" i="1">
+                            <a:latin typeface="Cambria Math" panose="02040503050406030204" pitchFamily="18" charset="0"/>
+                          </a:rPr>
+                        </m:ctrlPr>
+                      </m:sSubPr>
+                      <m:e>
+                        <m:r>
+                          <a:rPr lang="en-US">
+                            <a:latin typeface="Cambria Math" panose="02040503050406030204" pitchFamily="18" charset="0"/>
+                          </a:rPr>
+                          <m:t>𝐶</m:t>
+                        </m:r>
+                      </m:e>
+                      <m:sub>
+                        <m:r>
+                          <a:rPr lang="en-US">
+                            <a:latin typeface="Cambria Math" panose="02040503050406030204" pitchFamily="18" charset="0"/>
+                          </a:rPr>
+                          <m:t>𝑛</m:t>
+                        </m:r>
+                      </m:sub>
+                    </m:sSub>
+                    <m:r>
+                      <a:rPr lang="en-US">
+                        <a:latin typeface="Cambria Math" panose="02040503050406030204" pitchFamily="18" charset="0"/>
+                      </a:rPr>
+                      <m:t>= </m:t>
+                    </m:r>
+                    <m:nary>
+                      <m:naryPr>
+                        <m:chr m:val="∑"/>
+                        <m:ctrlPr>
+                          <a:rPr lang="en-US" i="1">
+                            <a:latin typeface="Cambria Math" panose="02040503050406030204" pitchFamily="18" charset="0"/>
+                          </a:rPr>
+                        </m:ctrlPr>
+                      </m:naryPr>
+                      <m:sub>
+                        <m:r>
+                          <m:rPr>
+                            <m:brk m:alnAt="23"/>
+                          </m:rPr>
+                          <a:rPr lang="en-US">
+                            <a:latin typeface="Cambria Math" panose="02040503050406030204" pitchFamily="18" charset="0"/>
+                          </a:rPr>
+                          <m:t>𝑖</m:t>
+                        </m:r>
+                        <m:r>
+                          <a:rPr lang="en-US">
+                            <a:latin typeface="Cambria Math" panose="02040503050406030204" pitchFamily="18" charset="0"/>
+                          </a:rPr>
+                          <m:t>=</m:t>
+                        </m:r>
+                        <m:r>
+                          <a:rPr lang="en-US">
+                            <a:latin typeface="Cambria Math" panose="02040503050406030204" pitchFamily="18" charset="0"/>
+                          </a:rPr>
+                          <m:t>0</m:t>
+                        </m:r>
+                      </m:sub>
+                      <m:sup>
+                        <m:r>
+                          <a:rPr lang="en-US">
+                            <a:latin typeface="Cambria Math" panose="02040503050406030204" pitchFamily="18" charset="0"/>
+                          </a:rPr>
+                          <m:t>𝑛</m:t>
+                        </m:r>
+                        <m:r>
+                          <a:rPr lang="en-US">
+                            <a:latin typeface="Cambria Math" panose="02040503050406030204" pitchFamily="18" charset="0"/>
+                          </a:rPr>
+                          <m:t>−</m:t>
+                        </m:r>
+                        <m:r>
+                          <a:rPr lang="en-US">
+                            <a:latin typeface="Cambria Math" panose="02040503050406030204" pitchFamily="18" charset="0"/>
+                          </a:rPr>
+                          <m:t>1</m:t>
+                        </m:r>
+                      </m:sup>
+                      <m:e>
+                        <m:sSub>
+                          <m:sSubPr>
+                            <m:ctrlPr>
+                              <a:rPr lang="en-US" i="1">
+                                <a:latin typeface="Cambria Math" panose="02040503050406030204" pitchFamily="18" charset="0"/>
+                              </a:rPr>
+                            </m:ctrlPr>
+                          </m:sSubPr>
+                          <m:e>
+                            <m:r>
+                              <a:rPr lang="en-US">
+                                <a:latin typeface="Cambria Math" panose="02040503050406030204" pitchFamily="18" charset="0"/>
+                              </a:rPr>
+                              <m:t>𝐶</m:t>
+                            </m:r>
+                          </m:e>
+                          <m:sub>
+                            <m:r>
+                              <a:rPr lang="en-US">
+                                <a:latin typeface="Cambria Math" panose="02040503050406030204" pitchFamily="18" charset="0"/>
+                              </a:rPr>
+                              <m:t>𝑖</m:t>
+                            </m:r>
+                          </m:sub>
+                        </m:sSub>
+                        <m:sSub>
+                          <m:sSubPr>
+                            <m:ctrlPr>
+                              <a:rPr lang="en-US" i="1">
+                                <a:latin typeface="Cambria Math" panose="02040503050406030204" pitchFamily="18" charset="0"/>
+                              </a:rPr>
+                            </m:ctrlPr>
+                          </m:sSubPr>
+                          <m:e>
+                            <m:r>
+                              <a:rPr lang="en-US">
+                                <a:latin typeface="Cambria Math" panose="02040503050406030204" pitchFamily="18" charset="0"/>
+                              </a:rPr>
+                              <m:t>𝐶</m:t>
+                            </m:r>
+                          </m:e>
+                          <m:sub>
+                            <m:r>
+                              <a:rPr lang="en-US">
+                                <a:latin typeface="Cambria Math" panose="02040503050406030204" pitchFamily="18" charset="0"/>
+                              </a:rPr>
+                              <m:t>𝑛</m:t>
+                            </m:r>
+                            <m:r>
+                              <a:rPr lang="en-US">
+                                <a:latin typeface="Cambria Math" panose="02040503050406030204" pitchFamily="18" charset="0"/>
+                              </a:rPr>
+                              <m:t>−</m:t>
+                            </m:r>
+                            <m:r>
+                              <a:rPr lang="en-US">
+                                <a:latin typeface="Cambria Math" panose="02040503050406030204" pitchFamily="18" charset="0"/>
+                              </a:rPr>
+                              <m:t>1</m:t>
+                            </m:r>
+                            <m:r>
+                              <a:rPr lang="en-US">
+                                <a:latin typeface="Cambria Math" panose="02040503050406030204" pitchFamily="18" charset="0"/>
+                              </a:rPr>
+                              <m:t>−</m:t>
+                            </m:r>
+                            <m:r>
+                              <a:rPr lang="en-US">
+                                <a:latin typeface="Cambria Math" panose="02040503050406030204" pitchFamily="18" charset="0"/>
+                              </a:rPr>
+                              <m:t>𝑖</m:t>
+                            </m:r>
+                          </m:sub>
+                        </m:sSub>
+                      </m:e>
+                    </m:nary>
+                  </m:oMath>
+                </a14:m>
+                <a:endParaRPr lang="en-US" dirty="0"/>
+              </a:p>
+              <a:p>
+                <a:r>
+                  <a:rPr lang="en-US" sz="1900" b="0" dirty="0"/>
+                  <a:t>Ex : C(4) = C(0)C(3)+C(1)C(2)+C(2)C(1)+C(3)C(0)=5+2+2+5 = 14</a:t>
+                </a:r>
+              </a:p>
+            </p:txBody>
+          </p:sp>
+        </mc:Choice>
+        <mc:Fallback xmlns="">
+          <p:sp>
+            <p:nvSpPr>
+              <p:cNvPr id="9" name="TextBox 8">
+                <a:extLst>
+                  <a:ext uri="{FF2B5EF4-FFF2-40B4-BE49-F238E27FC236}">
+                    <a16:creationId xmlns:a16="http://schemas.microsoft.com/office/drawing/2014/main" id="{0A4D7A0E-3DCD-B59C-8124-1E58D8DDD71B}"/>
+                  </a:ext>
+                </a:extLst>
+              </p:cNvPr>
+              <p:cNvSpPr txBox="1">
+                <a:spLocks noRot="1" noChangeAspect="1" noMove="1" noResize="1" noEditPoints="1" noAdjustHandles="1" noChangeArrowheads="1" noChangeShapeType="1" noTextEdit="1"/>
+              </p:cNvSpPr>
+              <p:nvPr/>
+            </p:nvSpPr>
+            <p:spPr>
+              <a:xfrm>
+                <a:off x="5983355" y="5040026"/>
+                <a:ext cx="6248400" cy="890500"/>
+              </a:xfrm>
+              <a:prstGeom prst="rect">
+                <a:avLst/>
+              </a:prstGeom>
+              <a:blipFill>
+                <a:blip r:embed="rId3"/>
+                <a:stretch>
+                  <a:fillRect l="-1561" t="-12329"/>
+                </a:stretch>
+              </a:blipFill>
+            </p:spPr>
+            <p:txBody>
+              <a:bodyPr/>
+              <a:lstStyle/>
+              <a:p>
+                <a:r>
+                  <a:rPr lang="en-US">
+                    <a:noFill/>
+                  </a:rPr>
+                  <a:t> </a:t>
+                </a:r>
+              </a:p>
+            </p:txBody>
+          </p:sp>
+        </mc:Fallback>
+      </mc:AlternateContent>
+      <p:sp>
+        <p:nvSpPr>
+          <p:cNvPr id="11" name="TextBox 10">
+            <a:extLst>
+              <a:ext uri="{FF2B5EF4-FFF2-40B4-BE49-F238E27FC236}">
+                <a16:creationId xmlns:a16="http://schemas.microsoft.com/office/drawing/2014/main" id="{0CED00D9-0798-BEC8-59CB-30CC098F6057}"/>
+              </a:ext>
+            </a:extLst>
+          </p:cNvPr>
+          <p:cNvSpPr txBox="1"/>
+          <p:nvPr/>
+        </p:nvSpPr>
+        <p:spPr>
+          <a:xfrm>
+            <a:off x="6189268" y="810704"/>
+            <a:ext cx="6097554" cy="867930"/>
+          </a:xfrm>
+          <a:prstGeom prst="rect">
+            <a:avLst/>
+          </a:prstGeom>
+        </p:spPr>
+        <p:txBody>
+          <a:bodyPr vert="horz" lIns="91440" tIns="45720" rIns="91440" bIns="45720" rtlCol="0">
+            <a:normAutofit/>
+          </a:bodyPr>
+          <a:lstStyle>
+            <a:defPPr>
+              <a:defRPr lang="en-US"/>
+            </a:defPPr>
+            <a:lvl1pPr indent="0">
+              <a:lnSpc>
+                <a:spcPct val="90000"/>
+              </a:lnSpc>
+              <a:spcBef>
+                <a:spcPts val="1000"/>
+              </a:spcBef>
+              <a:buFont typeface="Arial" panose="020B0604020202020204" pitchFamily="34" charset="0"/>
+              <a:buNone/>
+              <a:defRPr sz="2800" b="1">
+                <a:solidFill>
+                  <a:schemeClr val="tx2"/>
+                </a:solidFill>
+              </a:defRPr>
+            </a:lvl1pPr>
+            <a:lvl2pPr marL="685783" indent="-228594">
+              <a:lnSpc>
+                <a:spcPct val="90000"/>
+              </a:lnSpc>
+              <a:spcBef>
+                <a:spcPts val="500"/>
+              </a:spcBef>
+              <a:buFont typeface="Arial" panose="020B0604020202020204" pitchFamily="34" charset="0"/>
+              <a:buChar char="•"/>
+              <a:defRPr sz="2400">
+                <a:solidFill>
+                  <a:schemeClr val="tx2"/>
+                </a:solidFill>
+              </a:defRPr>
+            </a:lvl2pPr>
+            <a:lvl3pPr marL="1142971" indent="-228594">
+              <a:lnSpc>
+                <a:spcPct val="90000"/>
+              </a:lnSpc>
+              <a:spcBef>
+                <a:spcPts val="500"/>
+              </a:spcBef>
+              <a:buFont typeface="Arial" panose="020B0604020202020204" pitchFamily="34" charset="0"/>
+              <a:buChar char="•"/>
+              <a:defRPr sz="2000">
+                <a:solidFill>
+                  <a:schemeClr val="tx2"/>
+                </a:solidFill>
+              </a:defRPr>
+            </a:lvl3pPr>
+            <a:lvl4pPr marL="1600160" indent="-228594">
+              <a:lnSpc>
+                <a:spcPct val="90000"/>
+              </a:lnSpc>
+              <a:spcBef>
+                <a:spcPts val="500"/>
+              </a:spcBef>
+              <a:buFont typeface="Arial" panose="020B0604020202020204" pitchFamily="34" charset="0"/>
+              <a:buChar char="•"/>
+              <a:defRPr>
+                <a:solidFill>
+                  <a:schemeClr val="tx2"/>
+                </a:solidFill>
+              </a:defRPr>
+            </a:lvl4pPr>
+            <a:lvl5pPr marL="2057349" indent="-228594">
+              <a:lnSpc>
+                <a:spcPct val="90000"/>
+              </a:lnSpc>
+              <a:spcBef>
+                <a:spcPts val="500"/>
+              </a:spcBef>
+              <a:buFont typeface="Arial" panose="020B0604020202020204" pitchFamily="34" charset="0"/>
+              <a:buChar char="•"/>
+              <a:defRPr>
+                <a:solidFill>
+                  <a:schemeClr val="tx2"/>
+                </a:solidFill>
+              </a:defRPr>
+            </a:lvl5pPr>
+            <a:lvl6pPr marL="2514537" indent="-228594">
+              <a:lnSpc>
+                <a:spcPct val="90000"/>
+              </a:lnSpc>
+              <a:spcBef>
+                <a:spcPts val="500"/>
+              </a:spcBef>
+              <a:buFont typeface="Arial" panose="020B0604020202020204" pitchFamily="34" charset="0"/>
+              <a:buChar char="•"/>
+            </a:lvl6pPr>
+            <a:lvl7pPr marL="2971726" indent="-228594">
+              <a:lnSpc>
+                <a:spcPct val="90000"/>
+              </a:lnSpc>
+              <a:spcBef>
+                <a:spcPts val="500"/>
+              </a:spcBef>
+              <a:buFont typeface="Arial" panose="020B0604020202020204" pitchFamily="34" charset="0"/>
+              <a:buChar char="•"/>
+            </a:lvl7pPr>
+            <a:lvl8pPr marL="3428914" indent="-228594">
+              <a:lnSpc>
+                <a:spcPct val="90000"/>
+              </a:lnSpc>
+              <a:spcBef>
+                <a:spcPts val="500"/>
+              </a:spcBef>
+              <a:buFont typeface="Arial" panose="020B0604020202020204" pitchFamily="34" charset="0"/>
+              <a:buChar char="•"/>
+            </a:lvl8pPr>
+            <a:lvl9pPr marL="3886103" indent="-228594">
+              <a:lnSpc>
+                <a:spcPct val="90000"/>
+              </a:lnSpc>
+              <a:spcBef>
+                <a:spcPts val="500"/>
+              </a:spcBef>
+              <a:buFont typeface="Arial" panose="020B0604020202020204" pitchFamily="34" charset="0"/>
+              <a:buChar char="•"/>
+            </a:lvl9pPr>
+          </a:lstStyle>
+          <a:p>
+            <a:r>
+              <a:rPr lang="en-US" dirty="0"/>
+              <a:t>Goal: </a:t>
+            </a:r>
+            <a:r>
+              <a:rPr lang="en-US" b="0" dirty="0"/>
+              <a:t>compute Catalan numbers C(0) to C(n) </a:t>
+            </a:r>
+          </a:p>
+        </p:txBody>
+      </p:sp>
+    </p:spTree>
+    <p:extLst>
+      <p:ext uri="{BB962C8B-B14F-4D97-AF65-F5344CB8AC3E}">
+        <p14:creationId xmlns:p14="http://schemas.microsoft.com/office/powerpoint/2010/main" val="2043867751"/>
+      </p:ext>
+    </p:extLst>
+  </p:cSld>
+  <p:clrMapOvr>
+    <a:masterClrMapping/>
+  </p:clrMapOvr>
+</p:sld>
+</file>
+
+<file path=ppt/slides/slide8.xml><?xml version="1.0" encoding="utf-8"?>
+<p:sld xmlns:a="http://schemas.openxmlformats.org/drawingml/2006/main" xmlns:r="http://schemas.openxmlformats.org/officeDocument/2006/relationships" xmlns:p="http://schemas.openxmlformats.org/presentationml/2006/main">
+  <p:cSld>
+    <p:spTree>
+      <p:nvGrpSpPr>
+        <p:cNvPr id="1" name=""/>
+        <p:cNvGrpSpPr/>
+        <p:nvPr/>
+      </p:nvGrpSpPr>
+      <p:grpSpPr>
+        <a:xfrm>
+          <a:off x="0" y="0"/>
+          <a:ext cx="0" cy="0"/>
+          <a:chOff x="0" y="0"/>
+          <a:chExt cx="0" cy="0"/>
+        </a:xfrm>
+      </p:grpSpPr>
+      <p:sp>
+        <p:nvSpPr>
+          <p:cNvPr id="2" name="Title 1">
+            <a:extLst>
+              <a:ext uri="{FF2B5EF4-FFF2-40B4-BE49-F238E27FC236}">
+                <a16:creationId xmlns:a16="http://schemas.microsoft.com/office/drawing/2014/main" id="{6616F6ED-3640-AFF1-4116-AC1BDCC562FC}"/>
+              </a:ext>
+            </a:extLst>
+          </p:cNvPr>
+          <p:cNvSpPr>
+            <a:spLocks noGrp="1"/>
+          </p:cNvSpPr>
+          <p:nvPr>
+            <p:ph type="title"/>
+          </p:nvPr>
+        </p:nvSpPr>
+        <p:spPr/>
+        <p:txBody>
+          <a:bodyPr/>
+          <a:lstStyle/>
+          <a:p>
+            <a:r>
+              <a:rPr lang="en-US" dirty="0"/>
+              <a:t>Process Flow</a:t>
+            </a:r>
+          </a:p>
+        </p:txBody>
+      </p:sp>
+      <p:sp>
+        <p:nvSpPr>
+          <p:cNvPr id="4" name="Footer Placeholder 3">
+            <a:extLst>
+              <a:ext uri="{FF2B5EF4-FFF2-40B4-BE49-F238E27FC236}">
+                <a16:creationId xmlns:a16="http://schemas.microsoft.com/office/drawing/2014/main" id="{21ADF440-B156-2739-EC49-CD48F34D520B}"/>
+              </a:ext>
+            </a:extLst>
+          </p:cNvPr>
+          <p:cNvSpPr>
+            <a:spLocks noGrp="1"/>
+          </p:cNvSpPr>
+          <p:nvPr>
+            <p:ph type="ftr" sz="quarter" idx="11"/>
+          </p:nvPr>
+        </p:nvSpPr>
+        <p:spPr/>
+        <p:txBody>
+          <a:bodyPr/>
+          <a:lstStyle/>
+          <a:p>
+            <a:r>
+              <a:rPr lang="en-US"/>
+              <a:t>UNIVERSITY OF SOUTH FLORIDA</a:t>
+            </a:r>
+            <a:endParaRPr lang="en-US" dirty="0"/>
+          </a:p>
+        </p:txBody>
+      </p:sp>
+      <p:pic>
+        <p:nvPicPr>
+          <p:cNvPr id="9" name="Picture 8">
+            <a:extLst>
+              <a:ext uri="{FF2B5EF4-FFF2-40B4-BE49-F238E27FC236}">
+                <a16:creationId xmlns:a16="http://schemas.microsoft.com/office/drawing/2014/main" id="{5D2EC52B-D92E-EEC3-FDEB-571C6E6E142B}"/>
+              </a:ext>
+            </a:extLst>
+          </p:cNvPr>
+          <p:cNvPicPr>
+            <a:picLocks noChangeAspect="1"/>
+          </p:cNvPicPr>
+          <p:nvPr/>
+        </p:nvPicPr>
+        <p:blipFill>
+          <a:blip r:embed="rId2"/>
+          <a:stretch>
+            <a:fillRect/>
+          </a:stretch>
+        </p:blipFill>
+        <p:spPr>
+          <a:xfrm>
+            <a:off x="5370078" y="867475"/>
+            <a:ext cx="6442693" cy="4286390"/>
+          </a:xfrm>
+          <a:prstGeom prst="rect">
+            <a:avLst/>
+          </a:prstGeom>
+        </p:spPr>
+      </p:pic>
+      <p:sp>
+        <p:nvSpPr>
+          <p:cNvPr id="10" name="Content Placeholder 9">
+            <a:extLst>
+              <a:ext uri="{FF2B5EF4-FFF2-40B4-BE49-F238E27FC236}">
+                <a16:creationId xmlns:a16="http://schemas.microsoft.com/office/drawing/2014/main" id="{B90541E3-8677-8F82-F7BF-357D6C8E5C3E}"/>
+              </a:ext>
+            </a:extLst>
+          </p:cNvPr>
+          <p:cNvSpPr>
+            <a:spLocks noGrp="1"/>
+          </p:cNvSpPr>
+          <p:nvPr>
+            <p:ph idx="1"/>
+          </p:nvPr>
+        </p:nvSpPr>
+        <p:spPr>
+          <a:xfrm>
+            <a:off x="402264" y="1446245"/>
+            <a:ext cx="7090218" cy="4730720"/>
+          </a:xfrm>
+        </p:spPr>
+        <p:txBody>
+          <a:bodyPr>
+            <a:normAutofit fontScale="70000" lnSpcReduction="20000"/>
+          </a:bodyPr>
+          <a:lstStyle/>
+          <a:p>
+            <a:pPr marL="514350" indent="-514350">
+              <a:buFont typeface="+mj-lt"/>
+              <a:buAutoNum type="arabicPeriod"/>
+            </a:pPr>
+            <a:r>
+              <a:rPr lang="en-US" dirty="0"/>
+              <a:t>Start</a:t>
+            </a:r>
+          </a:p>
+          <a:p>
+            <a:pPr lvl="1"/>
+            <a:r>
+              <a:rPr lang="en-US" dirty="0"/>
+              <a:t>Execute program</a:t>
+            </a:r>
+          </a:p>
+          <a:p>
+            <a:pPr marL="514350" indent="-514350">
+              <a:buFont typeface="+mj-lt"/>
+              <a:buAutoNum type="arabicPeriod"/>
+            </a:pPr>
+            <a:r>
+              <a:rPr lang="en-US" dirty="0"/>
+              <a:t>Read input</a:t>
+            </a:r>
+          </a:p>
+          <a:p>
+            <a:pPr lvl="1"/>
+            <a:r>
+              <a:rPr lang="en-US" dirty="0"/>
+              <a:t>Read input.txt</a:t>
+            </a:r>
+          </a:p>
+          <a:p>
+            <a:pPr lvl="1"/>
+            <a:r>
+              <a:rPr lang="en-US" dirty="0"/>
+              <a:t>Set C(0) = 1</a:t>
+            </a:r>
+          </a:p>
+          <a:p>
+            <a:pPr lvl="1"/>
+            <a:r>
+              <a:rPr lang="en-US" dirty="0"/>
+              <a:t>Spawn manager threads</a:t>
+            </a:r>
+          </a:p>
+          <a:p>
+            <a:pPr lvl="1">
+              <a:buFont typeface="Wingdings" panose="05000000000000000000" pitchFamily="2" charset="2"/>
+              <a:buChar char="§"/>
+            </a:pPr>
+            <a:r>
+              <a:rPr lang="en-US" dirty="0"/>
+              <a:t>Program creates one thread per Catalan Number</a:t>
+            </a:r>
+          </a:p>
+          <a:p>
+            <a:pPr marL="514350" indent="-514350">
+              <a:buFont typeface="+mj-lt"/>
+              <a:buAutoNum type="arabicPeriod"/>
+            </a:pPr>
+            <a:r>
+              <a:rPr lang="en-US" dirty="0"/>
+              <a:t>Wait for dependencies to be satisfied</a:t>
+            </a:r>
+          </a:p>
+          <a:p>
+            <a:pPr lvl="1"/>
+            <a:r>
+              <a:rPr lang="en-US" dirty="0"/>
+              <a:t>Managers wait until all previous Catalan numbers are computed</a:t>
+            </a:r>
+          </a:p>
+          <a:p>
+            <a:pPr marL="514350" indent="-514350">
+              <a:buFont typeface="+mj-lt"/>
+              <a:buAutoNum type="arabicPeriod"/>
+            </a:pPr>
+            <a:r>
+              <a:rPr lang="en-US" dirty="0"/>
+              <a:t>Split each recurrence into worker-thread chunks</a:t>
+            </a:r>
+          </a:p>
+          <a:p>
+            <a:pPr lvl="1">
+              <a:buFont typeface="Wingdings" panose="05000000000000000000" pitchFamily="2" charset="2"/>
+              <a:buChar char="§"/>
+            </a:pPr>
+            <a:r>
+              <a:rPr lang="en-US" dirty="0"/>
+              <a:t>Each manager uses up to 4 threads to compute inner calculation</a:t>
+            </a:r>
+          </a:p>
+          <a:p>
+            <a:pPr marL="514350" indent="-514350">
+              <a:buFont typeface="+mj-lt"/>
+              <a:buAutoNum type="arabicPeriod"/>
+            </a:pPr>
+            <a:r>
+              <a:rPr lang="en-US" dirty="0"/>
+              <a:t>Compute partial sums in parallel</a:t>
+            </a:r>
+          </a:p>
+          <a:p>
+            <a:pPr marL="514350" indent="-514350">
+              <a:buFont typeface="+mj-lt"/>
+              <a:buAutoNum type="arabicPeriod"/>
+            </a:pPr>
+            <a:r>
+              <a:rPr lang="en-US" dirty="0"/>
+              <a:t>Combine and store results</a:t>
+            </a:r>
+          </a:p>
+          <a:p>
+            <a:pPr marL="514350" indent="-514350">
+              <a:buFont typeface="+mj-lt"/>
+              <a:buAutoNum type="arabicPeriod"/>
+            </a:pPr>
+            <a:r>
+              <a:rPr lang="en-US" dirty="0"/>
+              <a:t>Notify waiting threads</a:t>
+            </a:r>
+          </a:p>
+          <a:p>
+            <a:pPr marL="971539" lvl="1" indent="-514350">
+              <a:buFont typeface="+mj-lt"/>
+              <a:buAutoNum type="arabicPeriod"/>
+            </a:pPr>
+            <a:r>
+              <a:rPr lang="en-US" dirty="0"/>
+              <a:t>Each manager begins work once </a:t>
+            </a:r>
+            <a:r>
+              <a:rPr lang="pl-PL" dirty="0"/>
+              <a:t>C(0)…C(n−1)</a:t>
+            </a:r>
+            <a:r>
+              <a:rPr lang="en-US" dirty="0"/>
+              <a:t> are computed</a:t>
+            </a:r>
+          </a:p>
+        </p:txBody>
+      </p:sp>
+    </p:spTree>
+    <p:extLst>
+      <p:ext uri="{BB962C8B-B14F-4D97-AF65-F5344CB8AC3E}">
+        <p14:creationId xmlns:p14="http://schemas.microsoft.com/office/powerpoint/2010/main" val="3309814980"/>
+      </p:ext>
+    </p:extLst>
+  </p:cSld>
+  <p:clrMapOvr>
+    <a:masterClrMapping/>
+  </p:clrMapOvr>
+</p:sld>
+</file>
+
+<file path=ppt/slides/slide9.xml><?xml version="1.0" encoding="utf-8"?>
+<p:sld xmlns:a="http://schemas.openxmlformats.org/drawingml/2006/main" xmlns:r="http://schemas.openxmlformats.org/officeDocument/2006/relationships" xmlns:p="http://schemas.openxmlformats.org/presentationml/2006/main">
+  <p:cSld>
+    <p:spTree>
+      <p:nvGrpSpPr>
+        <p:cNvPr id="1" name=""/>
+        <p:cNvGrpSpPr/>
+        <p:nvPr/>
+      </p:nvGrpSpPr>
+      <p:grpSpPr>
+        <a:xfrm>
+          <a:off x="0" y="0"/>
+          <a:ext cx="0" cy="0"/>
+          <a:chOff x="0" y="0"/>
+          <a:chExt cx="0" cy="0"/>
+        </a:xfrm>
+      </p:grpSpPr>
+      <p:sp>
+        <p:nvSpPr>
+          <p:cNvPr id="2" name="Title 1">
+            <a:extLst>
+              <a:ext uri="{FF2B5EF4-FFF2-40B4-BE49-F238E27FC236}">
+                <a16:creationId xmlns:a16="http://schemas.microsoft.com/office/drawing/2014/main" id="{E2B760E5-37E5-3A10-808B-CBB9DC1C6560}"/>
+              </a:ext>
+            </a:extLst>
+          </p:cNvPr>
+          <p:cNvSpPr>
+            <a:spLocks noGrp="1"/>
+          </p:cNvSpPr>
+          <p:nvPr>
+            <p:ph type="title"/>
+          </p:nvPr>
+        </p:nvSpPr>
+        <p:spPr/>
+        <p:txBody>
+          <a:bodyPr/>
+          <a:lstStyle/>
+          <a:p>
+            <a:r>
+              <a:rPr lang="en-US" dirty="0"/>
+              <a:t>Results</a:t>
+            </a:r>
+          </a:p>
+        </p:txBody>
+      </p:sp>
+      <p:pic>
+        <p:nvPicPr>
+          <p:cNvPr id="8" name="Content Placeholder 7">
+            <a:extLst>
+              <a:ext uri="{FF2B5EF4-FFF2-40B4-BE49-F238E27FC236}">
+                <a16:creationId xmlns:a16="http://schemas.microsoft.com/office/drawing/2014/main" id="{3B2E6F4A-452F-0A37-CE17-BD2EE23CA95D}"/>
+              </a:ext>
+            </a:extLst>
+          </p:cNvPr>
+          <p:cNvPicPr>
+            <a:picLocks noGrp="1" noChangeAspect="1"/>
+          </p:cNvPicPr>
+          <p:nvPr>
+            <p:ph idx="1"/>
+          </p:nvPr>
+        </p:nvPicPr>
+        <p:blipFill>
+          <a:blip r:embed="rId2"/>
+          <a:stretch>
+            <a:fillRect/>
+          </a:stretch>
+        </p:blipFill>
+        <p:spPr>
+          <a:xfrm>
+            <a:off x="3796224" y="859253"/>
+            <a:ext cx="4258269" cy="2000529"/>
+          </a:xfrm>
+          <a:prstGeom prst="rect">
+            <a:avLst/>
+          </a:prstGeom>
+        </p:spPr>
+      </p:pic>
+      <p:sp>
+        <p:nvSpPr>
+          <p:cNvPr id="4" name="Footer Placeholder 3">
+            <a:extLst>
+              <a:ext uri="{FF2B5EF4-FFF2-40B4-BE49-F238E27FC236}">
+                <a16:creationId xmlns:a16="http://schemas.microsoft.com/office/drawing/2014/main" id="{D1465F81-02CA-5378-79A8-C3476530A582}"/>
+              </a:ext>
+            </a:extLst>
+          </p:cNvPr>
+          <p:cNvSpPr>
+            <a:spLocks noGrp="1"/>
+          </p:cNvSpPr>
+          <p:nvPr>
+            <p:ph type="ftr" sz="quarter" idx="11"/>
+          </p:nvPr>
+        </p:nvSpPr>
+        <p:spPr/>
+        <p:txBody>
+          <a:bodyPr/>
+          <a:lstStyle/>
+          <a:p>
+            <a:r>
+              <a:rPr lang="en-US"/>
+              <a:t>UNIVERSITY OF SOUTH FLORIDA</a:t>
+            </a:r>
+            <a:endParaRPr lang="en-US" dirty="0"/>
+          </a:p>
+        </p:txBody>
+      </p:sp>
+      <p:pic>
+        <p:nvPicPr>
+          <p:cNvPr id="10" name="Picture 9">
+            <a:extLst>
+              <a:ext uri="{FF2B5EF4-FFF2-40B4-BE49-F238E27FC236}">
+                <a16:creationId xmlns:a16="http://schemas.microsoft.com/office/drawing/2014/main" id="{EE02A094-4503-8CFA-7967-27B134A0F009}"/>
+              </a:ext>
+            </a:extLst>
+          </p:cNvPr>
+          <p:cNvPicPr>
+            <a:picLocks noChangeAspect="1"/>
+          </p:cNvPicPr>
+          <p:nvPr/>
+        </p:nvPicPr>
+        <p:blipFill>
+          <a:blip r:embed="rId3"/>
+          <a:stretch>
+            <a:fillRect/>
+          </a:stretch>
+        </p:blipFill>
+        <p:spPr>
+          <a:xfrm>
+            <a:off x="3853381" y="3062607"/>
+            <a:ext cx="4143953" cy="2448267"/>
+          </a:xfrm>
+          <a:prstGeom prst="rect">
+            <a:avLst/>
+          </a:prstGeom>
+        </p:spPr>
+      </p:pic>
+      <p:pic>
+        <p:nvPicPr>
+          <p:cNvPr id="12" name="Picture 11">
+            <a:extLst>
+              <a:ext uri="{FF2B5EF4-FFF2-40B4-BE49-F238E27FC236}">
+                <a16:creationId xmlns:a16="http://schemas.microsoft.com/office/drawing/2014/main" id="{FC3D8EF8-189E-177B-FFA9-EEEF1A356D56}"/>
+              </a:ext>
+            </a:extLst>
+          </p:cNvPr>
+          <p:cNvPicPr>
+            <a:picLocks noChangeAspect="1"/>
+          </p:cNvPicPr>
+          <p:nvPr/>
+        </p:nvPicPr>
+        <p:blipFill>
+          <a:blip r:embed="rId4"/>
+          <a:stretch>
+            <a:fillRect/>
+          </a:stretch>
+        </p:blipFill>
+        <p:spPr>
+          <a:xfrm>
+            <a:off x="8054493" y="944525"/>
+            <a:ext cx="4105848" cy="2314898"/>
+          </a:xfrm>
+          <a:prstGeom prst="rect">
+            <a:avLst/>
+          </a:prstGeom>
+        </p:spPr>
+      </p:pic>
+      <p:pic>
+        <p:nvPicPr>
+          <p:cNvPr id="14" name="Picture 13">
+            <a:extLst>
+              <a:ext uri="{FF2B5EF4-FFF2-40B4-BE49-F238E27FC236}">
+                <a16:creationId xmlns:a16="http://schemas.microsoft.com/office/drawing/2014/main" id="{64210DC5-F4F5-DA3F-F5B4-2FEC744164E4}"/>
+              </a:ext>
+            </a:extLst>
+          </p:cNvPr>
+          <p:cNvPicPr>
+            <a:picLocks noChangeAspect="1"/>
+          </p:cNvPicPr>
+          <p:nvPr/>
+        </p:nvPicPr>
+        <p:blipFill>
+          <a:blip r:embed="rId5"/>
+          <a:stretch>
+            <a:fillRect/>
+          </a:stretch>
+        </p:blipFill>
+        <p:spPr>
+          <a:xfrm>
+            <a:off x="8054493" y="3329345"/>
+            <a:ext cx="4105848" cy="2181529"/>
+          </a:xfrm>
+          <a:prstGeom prst="rect">
+            <a:avLst/>
+          </a:prstGeom>
+        </p:spPr>
+      </p:pic>
+      <p:sp>
+        <p:nvSpPr>
+          <p:cNvPr id="15" name="Rectangle 14">
+            <a:extLst>
+              <a:ext uri="{FF2B5EF4-FFF2-40B4-BE49-F238E27FC236}">
+                <a16:creationId xmlns:a16="http://schemas.microsoft.com/office/drawing/2014/main" id="{C229781F-2574-83AB-1573-DAEC4C3A2A76}"/>
+              </a:ext>
+            </a:extLst>
+          </p:cNvPr>
+          <p:cNvSpPr/>
+          <p:nvPr/>
+        </p:nvSpPr>
+        <p:spPr>
+          <a:xfrm>
+            <a:off x="3708197" y="2638295"/>
+            <a:ext cx="3497344" cy="202825"/>
+          </a:xfrm>
+          <a:prstGeom prst="rect">
+            <a:avLst/>
+          </a:prstGeom>
+          <a:solidFill>
+            <a:srgbClr val="00B0F0">
+              <a:alpha val="40000"/>
+            </a:srgbClr>
+          </a:solidFill>
+        </p:spPr>
+        <p:style>
+          <a:lnRef idx="2">
+            <a:schemeClr val="accent1">
+              <a:shade val="15000"/>
+            </a:schemeClr>
+          </a:lnRef>
+          <a:fillRef idx="1">
+            <a:schemeClr val="accent1"/>
+          </a:fillRef>
+          <a:effectRef idx="0">
+            <a:schemeClr val="accent1"/>
+          </a:effectRef>
+          <a:fontRef idx="minor">
+            <a:schemeClr val="lt1"/>
+          </a:fontRef>
+        </p:style>
+        <p:txBody>
+          <a:bodyPr rtlCol="0" anchor="ctr"/>
+          <a:lstStyle/>
+          <a:p>
+            <a:pPr algn="ctr"/>
+            <a:endParaRPr lang="en-US"/>
+          </a:p>
+        </p:txBody>
+      </p:sp>
+      <p:sp>
+        <p:nvSpPr>
+          <p:cNvPr id="16" name="Rectangle 15">
+            <a:extLst>
+              <a:ext uri="{FF2B5EF4-FFF2-40B4-BE49-F238E27FC236}">
+                <a16:creationId xmlns:a16="http://schemas.microsoft.com/office/drawing/2014/main" id="{ACBCD392-7487-3340-615F-0F9F3A91BABF}"/>
+              </a:ext>
+            </a:extLst>
+          </p:cNvPr>
+          <p:cNvSpPr/>
+          <p:nvPr/>
+        </p:nvSpPr>
+        <p:spPr>
+          <a:xfrm>
+            <a:off x="3708197" y="5345051"/>
+            <a:ext cx="3497344" cy="202825"/>
+          </a:xfrm>
+          <a:prstGeom prst="rect">
+            <a:avLst/>
+          </a:prstGeom>
+          <a:solidFill>
+            <a:srgbClr val="00B0F0">
+              <a:alpha val="40000"/>
+            </a:srgbClr>
+          </a:solidFill>
+        </p:spPr>
+        <p:style>
+          <a:lnRef idx="2">
+            <a:schemeClr val="accent1">
+              <a:shade val="15000"/>
+            </a:schemeClr>
+          </a:lnRef>
+          <a:fillRef idx="1">
+            <a:schemeClr val="accent1"/>
+          </a:fillRef>
+          <a:effectRef idx="0">
+            <a:schemeClr val="accent1"/>
+          </a:effectRef>
+          <a:fontRef idx="minor">
+            <a:schemeClr val="lt1"/>
+          </a:fontRef>
+        </p:style>
+        <p:txBody>
+          <a:bodyPr rtlCol="0" anchor="ctr"/>
+          <a:lstStyle/>
+          <a:p>
+            <a:pPr algn="ctr"/>
+            <a:endParaRPr lang="en-US"/>
+          </a:p>
+        </p:txBody>
+      </p:sp>
+      <p:sp>
+        <p:nvSpPr>
+          <p:cNvPr id="17" name="Rectangle 16">
+            <a:extLst>
+              <a:ext uri="{FF2B5EF4-FFF2-40B4-BE49-F238E27FC236}">
+                <a16:creationId xmlns:a16="http://schemas.microsoft.com/office/drawing/2014/main" id="{617EE609-84A9-6273-8EB4-614DBF752B03}"/>
+              </a:ext>
+            </a:extLst>
+          </p:cNvPr>
+          <p:cNvSpPr/>
+          <p:nvPr/>
+        </p:nvSpPr>
+        <p:spPr>
+          <a:xfrm>
+            <a:off x="7997334" y="3034098"/>
+            <a:ext cx="3497344" cy="202825"/>
+          </a:xfrm>
+          <a:prstGeom prst="rect">
+            <a:avLst/>
+          </a:prstGeom>
+          <a:solidFill>
+            <a:srgbClr val="00B0F0">
+              <a:alpha val="40000"/>
+            </a:srgbClr>
+          </a:solidFill>
+        </p:spPr>
+        <p:style>
+          <a:lnRef idx="2">
+            <a:schemeClr val="accent1">
+              <a:shade val="15000"/>
+            </a:schemeClr>
+          </a:lnRef>
+          <a:fillRef idx="1">
+            <a:schemeClr val="accent1"/>
+          </a:fillRef>
+          <a:effectRef idx="0">
+            <a:schemeClr val="accent1"/>
+          </a:effectRef>
+          <a:fontRef idx="minor">
+            <a:schemeClr val="lt1"/>
+          </a:fontRef>
+        </p:style>
+        <p:txBody>
+          <a:bodyPr rtlCol="0" anchor="ctr"/>
+          <a:lstStyle/>
+          <a:p>
+            <a:pPr algn="ctr"/>
+            <a:endParaRPr lang="en-US"/>
+          </a:p>
+        </p:txBody>
+      </p:sp>
+      <p:sp>
+        <p:nvSpPr>
+          <p:cNvPr id="18" name="Rectangle 17">
+            <a:extLst>
+              <a:ext uri="{FF2B5EF4-FFF2-40B4-BE49-F238E27FC236}">
+                <a16:creationId xmlns:a16="http://schemas.microsoft.com/office/drawing/2014/main" id="{326C791C-F75F-8810-ADCA-FEC3FAFA1EAE}"/>
+              </a:ext>
+            </a:extLst>
+          </p:cNvPr>
+          <p:cNvSpPr/>
+          <p:nvPr/>
+        </p:nvSpPr>
+        <p:spPr>
+          <a:xfrm>
+            <a:off x="7997334" y="5326550"/>
+            <a:ext cx="3497344" cy="202825"/>
+          </a:xfrm>
+          <a:prstGeom prst="rect">
+            <a:avLst/>
+          </a:prstGeom>
+          <a:solidFill>
+            <a:srgbClr val="00B0F0">
+              <a:alpha val="40000"/>
+            </a:srgbClr>
+          </a:solidFill>
+        </p:spPr>
+        <p:style>
+          <a:lnRef idx="2">
+            <a:schemeClr val="accent1">
+              <a:shade val="15000"/>
+            </a:schemeClr>
+          </a:lnRef>
+          <a:fillRef idx="1">
+            <a:schemeClr val="accent1"/>
+          </a:fillRef>
+          <a:effectRef idx="0">
+            <a:schemeClr val="accent1"/>
+          </a:effectRef>
+          <a:fontRef idx="minor">
+            <a:schemeClr val="lt1"/>
+          </a:fontRef>
+        </p:style>
+        <p:txBody>
+          <a:bodyPr rtlCol="0" anchor="ctr"/>
+          <a:lstStyle/>
+          <a:p>
+            <a:pPr algn="ctr"/>
+            <a:endParaRPr lang="en-US"/>
+          </a:p>
+        </p:txBody>
+      </p:sp>
+      <p:sp>
+        <p:nvSpPr>
+          <p:cNvPr id="19" name="Rectangle 18">
+            <a:extLst>
+              <a:ext uri="{FF2B5EF4-FFF2-40B4-BE49-F238E27FC236}">
+                <a16:creationId xmlns:a16="http://schemas.microsoft.com/office/drawing/2014/main" id="{4D019782-9F36-8701-CDAB-367875343CAD}"/>
+              </a:ext>
+            </a:extLst>
+          </p:cNvPr>
+          <p:cNvSpPr/>
+          <p:nvPr/>
+        </p:nvSpPr>
+        <p:spPr>
+          <a:xfrm>
+            <a:off x="3796223" y="1514569"/>
+            <a:ext cx="4201109" cy="202825"/>
+          </a:xfrm>
+          <a:prstGeom prst="rect">
+            <a:avLst/>
+          </a:prstGeom>
+          <a:solidFill>
+            <a:srgbClr val="92D050">
+              <a:alpha val="40000"/>
+            </a:srgbClr>
+          </a:solidFill>
+        </p:spPr>
+        <p:style>
+          <a:lnRef idx="2">
+            <a:schemeClr val="accent1">
+              <a:shade val="15000"/>
+            </a:schemeClr>
+          </a:lnRef>
+          <a:fillRef idx="1">
+            <a:schemeClr val="accent1"/>
+          </a:fillRef>
+          <a:effectRef idx="0">
+            <a:schemeClr val="accent1"/>
+          </a:effectRef>
+          <a:fontRef idx="minor">
+            <a:schemeClr val="lt1"/>
+          </a:fontRef>
+        </p:style>
+        <p:txBody>
+          <a:bodyPr rtlCol="0" anchor="ctr"/>
+          <a:lstStyle/>
+          <a:p>
+            <a:pPr algn="ctr"/>
+            <a:endParaRPr lang="en-US"/>
+          </a:p>
+        </p:txBody>
+      </p:sp>
+      <p:sp>
+        <p:nvSpPr>
+          <p:cNvPr id="20" name="Rectangle 19">
+            <a:extLst>
+              <a:ext uri="{FF2B5EF4-FFF2-40B4-BE49-F238E27FC236}">
+                <a16:creationId xmlns:a16="http://schemas.microsoft.com/office/drawing/2014/main" id="{A3793849-E58E-E410-A6EF-F0B17BF9C9EE}"/>
+              </a:ext>
+            </a:extLst>
+          </p:cNvPr>
+          <p:cNvSpPr/>
+          <p:nvPr/>
+        </p:nvSpPr>
+        <p:spPr>
+          <a:xfrm>
+            <a:off x="3853381" y="3858406"/>
+            <a:ext cx="4143952" cy="202825"/>
+          </a:xfrm>
+          <a:prstGeom prst="rect">
+            <a:avLst/>
+          </a:prstGeom>
+          <a:solidFill>
+            <a:srgbClr val="92D050">
+              <a:alpha val="40000"/>
+            </a:srgbClr>
+          </a:solidFill>
+        </p:spPr>
+        <p:style>
+          <a:lnRef idx="2">
+            <a:schemeClr val="accent1">
+              <a:shade val="15000"/>
+            </a:schemeClr>
+          </a:lnRef>
+          <a:fillRef idx="1">
+            <a:schemeClr val="accent1"/>
+          </a:fillRef>
+          <a:effectRef idx="0">
+            <a:schemeClr val="accent1"/>
+          </a:effectRef>
+          <a:fontRef idx="minor">
+            <a:schemeClr val="lt1"/>
+          </a:fontRef>
+        </p:style>
+        <p:txBody>
+          <a:bodyPr rtlCol="0" anchor="ctr"/>
+          <a:lstStyle/>
+          <a:p>
+            <a:pPr algn="ctr"/>
+            <a:endParaRPr lang="en-US"/>
+          </a:p>
+        </p:txBody>
+      </p:sp>
+      <p:sp>
+        <p:nvSpPr>
+          <p:cNvPr id="21" name="Rectangle 20">
+            <a:extLst>
+              <a:ext uri="{FF2B5EF4-FFF2-40B4-BE49-F238E27FC236}">
+                <a16:creationId xmlns:a16="http://schemas.microsoft.com/office/drawing/2014/main" id="{A77F0EF9-439B-956F-48D3-ED7700AD2FF5}"/>
+              </a:ext>
+            </a:extLst>
+          </p:cNvPr>
+          <p:cNvSpPr/>
+          <p:nvPr/>
+        </p:nvSpPr>
+        <p:spPr>
+          <a:xfrm>
+            <a:off x="7959232" y="2537147"/>
+            <a:ext cx="4201109" cy="202825"/>
+          </a:xfrm>
+          <a:prstGeom prst="rect">
+            <a:avLst/>
+          </a:prstGeom>
+          <a:solidFill>
+            <a:srgbClr val="92D050">
+              <a:alpha val="40000"/>
+            </a:srgbClr>
+          </a:solidFill>
+        </p:spPr>
+        <p:style>
+          <a:lnRef idx="2">
+            <a:schemeClr val="accent1">
+              <a:shade val="15000"/>
+            </a:schemeClr>
+          </a:lnRef>
+          <a:fillRef idx="1">
+            <a:schemeClr val="accent1"/>
+          </a:fillRef>
+          <a:effectRef idx="0">
+            <a:schemeClr val="accent1"/>
+          </a:effectRef>
+          <a:fontRef idx="minor">
+            <a:schemeClr val="lt1"/>
+          </a:fontRef>
+        </p:style>
+        <p:txBody>
+          <a:bodyPr rtlCol="0" anchor="ctr"/>
+          <a:lstStyle/>
+          <a:p>
+            <a:pPr algn="ctr"/>
+            <a:endParaRPr lang="en-US"/>
+          </a:p>
+        </p:txBody>
+      </p:sp>
+      <p:sp>
+        <p:nvSpPr>
+          <p:cNvPr id="22" name="Rectangle 21">
+            <a:extLst>
+              <a:ext uri="{FF2B5EF4-FFF2-40B4-BE49-F238E27FC236}">
+                <a16:creationId xmlns:a16="http://schemas.microsoft.com/office/drawing/2014/main" id="{0D39B4C7-730A-1A3B-669A-3568FA66424C}"/>
+              </a:ext>
+            </a:extLst>
+          </p:cNvPr>
+          <p:cNvSpPr/>
+          <p:nvPr/>
+        </p:nvSpPr>
+        <p:spPr>
+          <a:xfrm>
+            <a:off x="7959231" y="4500315"/>
+            <a:ext cx="4201109" cy="202825"/>
+          </a:xfrm>
+          <a:prstGeom prst="rect">
+            <a:avLst/>
+          </a:prstGeom>
+          <a:solidFill>
+            <a:srgbClr val="92D050">
+              <a:alpha val="40000"/>
+            </a:srgbClr>
+          </a:solidFill>
+        </p:spPr>
+        <p:style>
+          <a:lnRef idx="2">
+            <a:schemeClr val="accent1">
+              <a:shade val="15000"/>
+            </a:schemeClr>
+          </a:lnRef>
+          <a:fillRef idx="1">
+            <a:schemeClr val="accent1"/>
+          </a:fillRef>
+          <a:effectRef idx="0">
+            <a:schemeClr val="accent1"/>
+          </a:effectRef>
+          <a:fontRef idx="minor">
+            <a:schemeClr val="lt1"/>
+          </a:fontRef>
+        </p:style>
+        <p:txBody>
+          <a:bodyPr rtlCol="0" anchor="ctr"/>
+          <a:lstStyle/>
+          <a:p>
+            <a:pPr algn="ctr"/>
+            <a:endParaRPr lang="en-US"/>
+          </a:p>
+        </p:txBody>
+      </p:sp>
+      <p:sp>
+        <p:nvSpPr>
+          <p:cNvPr id="23" name="TextBox 22">
+            <a:extLst>
+              <a:ext uri="{FF2B5EF4-FFF2-40B4-BE49-F238E27FC236}">
+                <a16:creationId xmlns:a16="http://schemas.microsoft.com/office/drawing/2014/main" id="{48A47BED-8063-C5E7-031B-FB55B586C2CF}"/>
+              </a:ext>
+            </a:extLst>
+          </p:cNvPr>
+          <p:cNvSpPr txBox="1"/>
+          <p:nvPr/>
+        </p:nvSpPr>
+        <p:spPr>
+          <a:xfrm>
+            <a:off x="402264" y="1514569"/>
+            <a:ext cx="3248772" cy="1200329"/>
+          </a:xfrm>
+          <a:prstGeom prst="rect">
+            <a:avLst/>
+          </a:prstGeom>
+        </p:spPr>
+        <p:txBody>
+          <a:bodyPr vert="horz" lIns="91440" tIns="45720" rIns="91440" bIns="45720" rtlCol="0">
+            <a:normAutofit fontScale="70000" lnSpcReduction="20000"/>
+          </a:bodyPr>
+          <a:lstStyle>
+            <a:lvl1pPr marL="228594" indent="-228594">
+              <a:lnSpc>
+                <a:spcPct val="90000"/>
+              </a:lnSpc>
+              <a:spcBef>
+                <a:spcPts val="1000"/>
+              </a:spcBef>
+              <a:buFont typeface="Arial" panose="020B0604020202020204" pitchFamily="34" charset="0"/>
+              <a:buChar char="•"/>
+              <a:defRPr sz="2800">
+                <a:solidFill>
+                  <a:schemeClr val="tx2"/>
+                </a:solidFill>
+              </a:defRPr>
+            </a:lvl1pPr>
+            <a:lvl2pPr marL="685783" lvl="1" indent="-228594">
+              <a:lnSpc>
+                <a:spcPct val="90000"/>
+              </a:lnSpc>
+              <a:spcBef>
+                <a:spcPts val="500"/>
+              </a:spcBef>
+              <a:buFont typeface="Arial" panose="020B0604020202020204" pitchFamily="34" charset="0"/>
+              <a:buChar char="•"/>
+              <a:defRPr sz="2400">
+                <a:solidFill>
+                  <a:schemeClr val="tx2"/>
+                </a:solidFill>
+              </a:defRPr>
+            </a:lvl2pPr>
+            <a:lvl3pPr marL="1142971" lvl="2" indent="-228594">
+              <a:lnSpc>
+                <a:spcPct val="90000"/>
+              </a:lnSpc>
+              <a:spcBef>
+                <a:spcPts val="500"/>
+              </a:spcBef>
+              <a:buFont typeface="Arial" panose="020B0604020202020204" pitchFamily="34" charset="0"/>
+              <a:buChar char="•"/>
+              <a:defRPr sz="2000" i="1">
+                <a:solidFill>
+                  <a:schemeClr val="tx2"/>
+                </a:solidFill>
+                <a:latin typeface="Cambria Math" panose="02040503050406030204" pitchFamily="18" charset="0"/>
+              </a:defRPr>
+            </a:lvl3pPr>
+            <a:lvl4pPr marL="1600160" indent="-228594">
+              <a:lnSpc>
+                <a:spcPct val="90000"/>
+              </a:lnSpc>
+              <a:spcBef>
+                <a:spcPts val="500"/>
+              </a:spcBef>
+              <a:buFont typeface="Arial" panose="020B0604020202020204" pitchFamily="34" charset="0"/>
+              <a:buChar char="•"/>
+              <a:defRPr>
+                <a:solidFill>
+                  <a:schemeClr val="tx2"/>
+                </a:solidFill>
+              </a:defRPr>
+            </a:lvl4pPr>
+            <a:lvl5pPr marL="2057349" indent="-228594">
+              <a:lnSpc>
+                <a:spcPct val="90000"/>
+              </a:lnSpc>
+              <a:spcBef>
+                <a:spcPts val="500"/>
+              </a:spcBef>
+              <a:buFont typeface="Arial" panose="020B0604020202020204" pitchFamily="34" charset="0"/>
+              <a:buChar char="•"/>
+              <a:defRPr>
+                <a:solidFill>
+                  <a:schemeClr val="tx2"/>
+                </a:solidFill>
+              </a:defRPr>
+            </a:lvl5pPr>
+            <a:lvl6pPr marL="2514537" indent="-228594">
+              <a:lnSpc>
+                <a:spcPct val="90000"/>
+              </a:lnSpc>
+              <a:spcBef>
+                <a:spcPts val="500"/>
+              </a:spcBef>
+              <a:buFont typeface="Arial" panose="020B0604020202020204" pitchFamily="34" charset="0"/>
+              <a:buChar char="•"/>
+            </a:lvl6pPr>
+            <a:lvl7pPr marL="2971726" indent="-228594">
+              <a:lnSpc>
+                <a:spcPct val="90000"/>
+              </a:lnSpc>
+              <a:spcBef>
+                <a:spcPts val="500"/>
+              </a:spcBef>
+              <a:buFont typeface="Arial" panose="020B0604020202020204" pitchFamily="34" charset="0"/>
+              <a:buChar char="•"/>
+            </a:lvl7pPr>
+            <a:lvl8pPr marL="3428914" indent="-228594">
+              <a:lnSpc>
+                <a:spcPct val="90000"/>
+              </a:lnSpc>
+              <a:spcBef>
+                <a:spcPts val="500"/>
+              </a:spcBef>
+              <a:buFont typeface="Arial" panose="020B0604020202020204" pitchFamily="34" charset="0"/>
+              <a:buChar char="•"/>
+            </a:lvl8pPr>
+            <a:lvl9pPr marL="3886103" indent="-228594">
+              <a:lnSpc>
+                <a:spcPct val="90000"/>
+              </a:lnSpc>
+              <a:spcBef>
+                <a:spcPts val="500"/>
+              </a:spcBef>
+              <a:buFont typeface="Arial" panose="020B0604020202020204" pitchFamily="34" charset="0"/>
+              <a:buChar char="•"/>
+            </a:lvl9pPr>
+          </a:lstStyle>
+          <a:p>
+            <a:r>
+              <a:rPr lang="en-US" dirty="0"/>
+              <a:t>Each manager waits until all dependencies are satisfied before executing their own Catalan number</a:t>
+            </a:r>
+          </a:p>
+        </p:txBody>
+      </p:sp>
+    </p:spTree>
+    <p:extLst>
+      <p:ext uri="{BB962C8B-B14F-4D97-AF65-F5344CB8AC3E}">
+        <p14:creationId xmlns:p14="http://schemas.microsoft.com/office/powerpoint/2010/main" val="4123538328"/>
       </p:ext>
     </p:extLst>
   </p:cSld>

--- a/catalan.pptx
+++ b/catalan.pptx
@@ -5,20 +5,22 @@
     <p:sldMasterId id="2147483660" r:id="rId1"/>
   </p:sldMasterIdLst>
   <p:notesMasterIdLst>
-    <p:notesMasterId r:id="rId13"/>
+    <p:notesMasterId r:id="rId15"/>
   </p:notesMasterIdLst>
   <p:sldIdLst>
     <p:sldId id="271" r:id="rId2"/>
-    <p:sldId id="257" r:id="rId3"/>
-    <p:sldId id="280" r:id="rId4"/>
-    <p:sldId id="272" r:id="rId5"/>
+    <p:sldId id="282" r:id="rId3"/>
+    <p:sldId id="257" r:id="rId4"/>
+    <p:sldId id="280" r:id="rId5"/>
     <p:sldId id="279" r:id="rId6"/>
     <p:sldId id="273" r:id="rId7"/>
-    <p:sldId id="274" r:id="rId8"/>
-    <p:sldId id="275" r:id="rId9"/>
-    <p:sldId id="276" r:id="rId10"/>
-    <p:sldId id="277" r:id="rId11"/>
-    <p:sldId id="278" r:id="rId12"/>
+    <p:sldId id="272" r:id="rId8"/>
+    <p:sldId id="274" r:id="rId9"/>
+    <p:sldId id="275" r:id="rId10"/>
+    <p:sldId id="276" r:id="rId11"/>
+    <p:sldId id="277" r:id="rId12"/>
+    <p:sldId id="278" r:id="rId13"/>
+    <p:sldId id="281" r:id="rId14"/>
   </p:sldIdLst>
   <p:sldSz cx="12192000" cy="6858000"/>
   <p:notesSz cx="6858000" cy="9144000"/>
@@ -207,7 +209,7 @@
           <a:p>
             <a:fld id="{2CA80483-8405-594F-95F8-D3FBF1CBF066}" type="datetimeFigureOut">
               <a:rPr lang="en-US" smtClean="0"/>
-              <a:t>4/20/2026</a:t>
+              <a:t>4/23/2026</a:t>
             </a:fld>
             <a:endParaRPr lang="en-US"/>
           </a:p>
@@ -1186,10 +1188,7 @@
             </a:lvl1pPr>
           </a:lstStyle>
           <a:p>
-            <a:r>
-              <a:rPr lang="en-US" dirty="0"/>
-              <a:t>UNIVERSITY OF SOUTH FLORIDA</a:t>
-            </a:r>
+            <a:endParaRPr lang="en-US" dirty="0"/>
           </a:p>
         </p:txBody>
       </p:sp>
@@ -1611,10 +1610,7 @@
             </a:lvl1pPr>
           </a:lstStyle>
           <a:p>
-            <a:r>
-              <a:rPr lang="en-US" dirty="0"/>
-              <a:t>UNIVERSITY OF SOUTH FLORIDA</a:t>
-            </a:r>
+            <a:endParaRPr lang="en-US" dirty="0"/>
           </a:p>
         </p:txBody>
       </p:sp>
@@ -2085,10 +2081,7 @@
             </a:lvl1pPr>
           </a:lstStyle>
           <a:p>
-            <a:r>
-              <a:rPr lang="en-US" dirty="0"/>
-              <a:t>UNIVERSITY OF SOUTH FLORIDA</a:t>
-            </a:r>
+            <a:endParaRPr lang="en-US" dirty="0"/>
           </a:p>
         </p:txBody>
       </p:sp>
@@ -2608,10 +2601,7 @@
             </a:lvl1pPr>
           </a:lstStyle>
           <a:p>
-            <a:r>
-              <a:rPr lang="en-US" dirty="0"/>
-              <a:t>UNIVERSITY OF SOUTH FLORIDA</a:t>
-            </a:r>
+            <a:endParaRPr lang="en-US" dirty="0"/>
           </a:p>
         </p:txBody>
       </p:sp>
@@ -4571,10 +4561,7 @@
             </a:lvl1pPr>
           </a:lstStyle>
           <a:p>
-            <a:r>
-              <a:rPr lang="en-US" dirty="0"/>
-              <a:t>UNIVERSITY OF SOUTH FLORIDA</a:t>
-            </a:r>
+            <a:endParaRPr lang="en-US" dirty="0"/>
           </a:p>
         </p:txBody>
       </p:sp>
@@ -4964,10 +4951,7 @@
             </a:lvl1pPr>
           </a:lstStyle>
           <a:p>
-            <a:r>
-              <a:rPr lang="en-US" dirty="0"/>
-              <a:t>UNIVERSITY OF SOUTH FLORIDA</a:t>
-            </a:r>
+            <a:endParaRPr lang="en-US" dirty="0"/>
           </a:p>
         </p:txBody>
       </p:sp>
@@ -5282,10 +5266,7 @@
             </a:lvl1pPr>
           </a:lstStyle>
           <a:p>
-            <a:r>
-              <a:rPr lang="en-US" dirty="0"/>
-              <a:t>UNIVERSITY OF SOUTH FLORIDA</a:t>
-            </a:r>
+            <a:endParaRPr lang="en-US" dirty="0"/>
           </a:p>
         </p:txBody>
       </p:sp>
@@ -5805,10 +5786,7 @@
             </a:lvl1pPr>
           </a:lstStyle>
           <a:p>
-            <a:r>
-              <a:rPr lang="en-US" dirty="0"/>
-              <a:t>UNIVERSITY OF SOUTH FLORIDA</a:t>
-            </a:r>
+            <a:endParaRPr lang="en-US" dirty="0"/>
           </a:p>
         </p:txBody>
       </p:sp>
@@ -6179,10 +6157,7 @@
             </a:lvl1pPr>
           </a:lstStyle>
           <a:p>
-            <a:r>
-              <a:rPr lang="en-US" dirty="0"/>
-              <a:t>UNIVERSITY OF SOUTH FLORIDA</a:t>
-            </a:r>
+            <a:endParaRPr lang="en-US" dirty="0"/>
           </a:p>
         </p:txBody>
       </p:sp>
@@ -6511,10 +6486,7 @@
             </a:lvl1pPr>
           </a:lstStyle>
           <a:p>
-            <a:r>
-              <a:rPr lang="en-US" dirty="0"/>
-              <a:t>UNIVERSITY OF SOUTH FLORIDA</a:t>
-            </a:r>
+            <a:endParaRPr lang="en-US" dirty="0"/>
           </a:p>
         </p:txBody>
       </p:sp>
@@ -6724,10 +6696,6 @@
             </a:lvl1pPr>
           </a:lstStyle>
           <a:p>
-            <a:fld id="{66E687FF-D228-AF49-87D5-A473DBACE8EB}" type="datetime1">
-              <a:rPr lang="en-US" smtClean="0"/>
-              <a:t>4/20/2026</a:t>
-            </a:fld>
             <a:endParaRPr lang="en-US"/>
           </a:p>
         </p:txBody>
@@ -6765,10 +6733,7 @@
             </a:lvl1pPr>
           </a:lstStyle>
           <a:p>
-            <a:r>
-              <a:rPr lang="en-US"/>
-              <a:t>UNIVERSITY OF SOUTH FLORIDA</a:t>
-            </a:r>
+            <a:endParaRPr lang="en-US"/>
           </a:p>
         </p:txBody>
       </p:sp>
@@ -6845,7 +6810,7 @@
     <p:sldLayoutId id="2147483670" r:id="rId21"/>
     <p:sldLayoutId id="2147483685" r:id="rId22"/>
   </p:sldLayoutIdLst>
-  <p:hf sldNum="0" hdr="0" dt="0"/>
+  <p:hf hdr="0" ftr="0" dt="0"/>
   <p:txStyles>
     <p:titleStyle>
       <a:lvl1pPr algn="l" defTabSz="914377" rtl="0" eaLnBrk="1" latinLnBrk="0" hangingPunct="1">
@@ -7352,6 +7317,775 @@
           <a:chExt cx="0" cy="0"/>
         </a:xfrm>
       </p:grpSpPr>
+      <p:sp>
+        <p:nvSpPr>
+          <p:cNvPr id="2" name="Title 1">
+            <a:extLst>
+              <a:ext uri="{FF2B5EF4-FFF2-40B4-BE49-F238E27FC236}">
+                <a16:creationId xmlns:a16="http://schemas.microsoft.com/office/drawing/2014/main" id="{E2B760E5-37E5-3A10-808B-CBB9DC1C6560}"/>
+              </a:ext>
+            </a:extLst>
+          </p:cNvPr>
+          <p:cNvSpPr>
+            <a:spLocks noGrp="1"/>
+          </p:cNvSpPr>
+          <p:nvPr>
+            <p:ph type="title"/>
+          </p:nvPr>
+        </p:nvSpPr>
+        <p:spPr/>
+        <p:txBody>
+          <a:bodyPr/>
+          <a:lstStyle/>
+          <a:p>
+            <a:r>
+              <a:rPr lang="en-US" dirty="0"/>
+              <a:t>Results</a:t>
+            </a:r>
+          </a:p>
+        </p:txBody>
+      </p:sp>
+      <p:pic>
+        <p:nvPicPr>
+          <p:cNvPr id="8" name="Content Placeholder 7">
+            <a:extLst>
+              <a:ext uri="{FF2B5EF4-FFF2-40B4-BE49-F238E27FC236}">
+                <a16:creationId xmlns:a16="http://schemas.microsoft.com/office/drawing/2014/main" id="{3B2E6F4A-452F-0A37-CE17-BD2EE23CA95D}"/>
+              </a:ext>
+            </a:extLst>
+          </p:cNvPr>
+          <p:cNvPicPr>
+            <a:picLocks noGrp="1" noChangeAspect="1"/>
+          </p:cNvPicPr>
+          <p:nvPr>
+            <p:ph idx="1"/>
+          </p:nvPr>
+        </p:nvPicPr>
+        <p:blipFill>
+          <a:blip r:embed="rId2"/>
+          <a:stretch>
+            <a:fillRect/>
+          </a:stretch>
+        </p:blipFill>
+        <p:spPr>
+          <a:xfrm>
+            <a:off x="3796224" y="859253"/>
+            <a:ext cx="4258269" cy="2000529"/>
+          </a:xfrm>
+          <a:prstGeom prst="rect">
+            <a:avLst/>
+          </a:prstGeom>
+        </p:spPr>
+      </p:pic>
+      <p:pic>
+        <p:nvPicPr>
+          <p:cNvPr id="10" name="Picture 9">
+            <a:extLst>
+              <a:ext uri="{FF2B5EF4-FFF2-40B4-BE49-F238E27FC236}">
+                <a16:creationId xmlns:a16="http://schemas.microsoft.com/office/drawing/2014/main" id="{EE02A094-4503-8CFA-7967-27B134A0F009}"/>
+              </a:ext>
+            </a:extLst>
+          </p:cNvPr>
+          <p:cNvPicPr>
+            <a:picLocks noChangeAspect="1"/>
+          </p:cNvPicPr>
+          <p:nvPr/>
+        </p:nvPicPr>
+        <p:blipFill>
+          <a:blip r:embed="rId3"/>
+          <a:stretch>
+            <a:fillRect/>
+          </a:stretch>
+        </p:blipFill>
+        <p:spPr>
+          <a:xfrm>
+            <a:off x="3853381" y="3062607"/>
+            <a:ext cx="4143953" cy="2448267"/>
+          </a:xfrm>
+          <a:prstGeom prst="rect">
+            <a:avLst/>
+          </a:prstGeom>
+        </p:spPr>
+      </p:pic>
+      <p:pic>
+        <p:nvPicPr>
+          <p:cNvPr id="12" name="Picture 11">
+            <a:extLst>
+              <a:ext uri="{FF2B5EF4-FFF2-40B4-BE49-F238E27FC236}">
+                <a16:creationId xmlns:a16="http://schemas.microsoft.com/office/drawing/2014/main" id="{FC3D8EF8-189E-177B-FFA9-EEEF1A356D56}"/>
+              </a:ext>
+            </a:extLst>
+          </p:cNvPr>
+          <p:cNvPicPr>
+            <a:picLocks noChangeAspect="1"/>
+          </p:cNvPicPr>
+          <p:nvPr/>
+        </p:nvPicPr>
+        <p:blipFill>
+          <a:blip r:embed="rId4"/>
+          <a:stretch>
+            <a:fillRect/>
+          </a:stretch>
+        </p:blipFill>
+        <p:spPr>
+          <a:xfrm>
+            <a:off x="8054493" y="944525"/>
+            <a:ext cx="4105848" cy="2314898"/>
+          </a:xfrm>
+          <a:prstGeom prst="rect">
+            <a:avLst/>
+          </a:prstGeom>
+        </p:spPr>
+      </p:pic>
+      <p:pic>
+        <p:nvPicPr>
+          <p:cNvPr id="14" name="Picture 13">
+            <a:extLst>
+              <a:ext uri="{FF2B5EF4-FFF2-40B4-BE49-F238E27FC236}">
+                <a16:creationId xmlns:a16="http://schemas.microsoft.com/office/drawing/2014/main" id="{64210DC5-F4F5-DA3F-F5B4-2FEC744164E4}"/>
+              </a:ext>
+            </a:extLst>
+          </p:cNvPr>
+          <p:cNvPicPr>
+            <a:picLocks noChangeAspect="1"/>
+          </p:cNvPicPr>
+          <p:nvPr/>
+        </p:nvPicPr>
+        <p:blipFill>
+          <a:blip r:embed="rId5"/>
+          <a:stretch>
+            <a:fillRect/>
+          </a:stretch>
+        </p:blipFill>
+        <p:spPr>
+          <a:xfrm>
+            <a:off x="8054493" y="3329345"/>
+            <a:ext cx="4105848" cy="2181529"/>
+          </a:xfrm>
+          <a:prstGeom prst="rect">
+            <a:avLst/>
+          </a:prstGeom>
+        </p:spPr>
+      </p:pic>
+      <p:sp>
+        <p:nvSpPr>
+          <p:cNvPr id="15" name="Rectangle 14">
+            <a:extLst>
+              <a:ext uri="{FF2B5EF4-FFF2-40B4-BE49-F238E27FC236}">
+                <a16:creationId xmlns:a16="http://schemas.microsoft.com/office/drawing/2014/main" id="{C229781F-2574-83AB-1573-DAEC4C3A2A76}"/>
+              </a:ext>
+            </a:extLst>
+          </p:cNvPr>
+          <p:cNvSpPr/>
+          <p:nvPr/>
+        </p:nvSpPr>
+        <p:spPr>
+          <a:xfrm>
+            <a:off x="3708197" y="2638295"/>
+            <a:ext cx="3497344" cy="202825"/>
+          </a:xfrm>
+          <a:prstGeom prst="rect">
+            <a:avLst/>
+          </a:prstGeom>
+          <a:solidFill>
+            <a:srgbClr val="00B0F0">
+              <a:alpha val="40000"/>
+            </a:srgbClr>
+          </a:solidFill>
+        </p:spPr>
+        <p:style>
+          <a:lnRef idx="2">
+            <a:schemeClr val="accent1">
+              <a:shade val="15000"/>
+            </a:schemeClr>
+          </a:lnRef>
+          <a:fillRef idx="1">
+            <a:schemeClr val="accent1"/>
+          </a:fillRef>
+          <a:effectRef idx="0">
+            <a:schemeClr val="accent1"/>
+          </a:effectRef>
+          <a:fontRef idx="minor">
+            <a:schemeClr val="lt1"/>
+          </a:fontRef>
+        </p:style>
+        <p:txBody>
+          <a:bodyPr rtlCol="0" anchor="ctr"/>
+          <a:lstStyle/>
+          <a:p>
+            <a:pPr algn="ctr"/>
+            <a:endParaRPr lang="en-US"/>
+          </a:p>
+        </p:txBody>
+      </p:sp>
+      <p:sp>
+        <p:nvSpPr>
+          <p:cNvPr id="16" name="Rectangle 15">
+            <a:extLst>
+              <a:ext uri="{FF2B5EF4-FFF2-40B4-BE49-F238E27FC236}">
+                <a16:creationId xmlns:a16="http://schemas.microsoft.com/office/drawing/2014/main" id="{ACBCD392-7487-3340-615F-0F9F3A91BABF}"/>
+              </a:ext>
+            </a:extLst>
+          </p:cNvPr>
+          <p:cNvSpPr/>
+          <p:nvPr/>
+        </p:nvSpPr>
+        <p:spPr>
+          <a:xfrm>
+            <a:off x="3708197" y="5345051"/>
+            <a:ext cx="3497344" cy="202825"/>
+          </a:xfrm>
+          <a:prstGeom prst="rect">
+            <a:avLst/>
+          </a:prstGeom>
+          <a:solidFill>
+            <a:srgbClr val="00B0F0">
+              <a:alpha val="40000"/>
+            </a:srgbClr>
+          </a:solidFill>
+        </p:spPr>
+        <p:style>
+          <a:lnRef idx="2">
+            <a:schemeClr val="accent1">
+              <a:shade val="15000"/>
+            </a:schemeClr>
+          </a:lnRef>
+          <a:fillRef idx="1">
+            <a:schemeClr val="accent1"/>
+          </a:fillRef>
+          <a:effectRef idx="0">
+            <a:schemeClr val="accent1"/>
+          </a:effectRef>
+          <a:fontRef idx="minor">
+            <a:schemeClr val="lt1"/>
+          </a:fontRef>
+        </p:style>
+        <p:txBody>
+          <a:bodyPr rtlCol="0" anchor="ctr"/>
+          <a:lstStyle/>
+          <a:p>
+            <a:pPr algn="ctr"/>
+            <a:endParaRPr lang="en-US"/>
+          </a:p>
+        </p:txBody>
+      </p:sp>
+      <p:sp>
+        <p:nvSpPr>
+          <p:cNvPr id="17" name="Rectangle 16">
+            <a:extLst>
+              <a:ext uri="{FF2B5EF4-FFF2-40B4-BE49-F238E27FC236}">
+                <a16:creationId xmlns:a16="http://schemas.microsoft.com/office/drawing/2014/main" id="{617EE609-84A9-6273-8EB4-614DBF752B03}"/>
+              </a:ext>
+            </a:extLst>
+          </p:cNvPr>
+          <p:cNvSpPr/>
+          <p:nvPr/>
+        </p:nvSpPr>
+        <p:spPr>
+          <a:xfrm>
+            <a:off x="7997334" y="3034098"/>
+            <a:ext cx="3497344" cy="202825"/>
+          </a:xfrm>
+          <a:prstGeom prst="rect">
+            <a:avLst/>
+          </a:prstGeom>
+          <a:solidFill>
+            <a:srgbClr val="00B0F0">
+              <a:alpha val="40000"/>
+            </a:srgbClr>
+          </a:solidFill>
+        </p:spPr>
+        <p:style>
+          <a:lnRef idx="2">
+            <a:schemeClr val="accent1">
+              <a:shade val="15000"/>
+            </a:schemeClr>
+          </a:lnRef>
+          <a:fillRef idx="1">
+            <a:schemeClr val="accent1"/>
+          </a:fillRef>
+          <a:effectRef idx="0">
+            <a:schemeClr val="accent1"/>
+          </a:effectRef>
+          <a:fontRef idx="minor">
+            <a:schemeClr val="lt1"/>
+          </a:fontRef>
+        </p:style>
+        <p:txBody>
+          <a:bodyPr rtlCol="0" anchor="ctr"/>
+          <a:lstStyle/>
+          <a:p>
+            <a:pPr algn="ctr"/>
+            <a:endParaRPr lang="en-US"/>
+          </a:p>
+        </p:txBody>
+      </p:sp>
+      <p:sp>
+        <p:nvSpPr>
+          <p:cNvPr id="18" name="Rectangle 17">
+            <a:extLst>
+              <a:ext uri="{FF2B5EF4-FFF2-40B4-BE49-F238E27FC236}">
+                <a16:creationId xmlns:a16="http://schemas.microsoft.com/office/drawing/2014/main" id="{326C791C-F75F-8810-ADCA-FEC3FAFA1EAE}"/>
+              </a:ext>
+            </a:extLst>
+          </p:cNvPr>
+          <p:cNvSpPr/>
+          <p:nvPr/>
+        </p:nvSpPr>
+        <p:spPr>
+          <a:xfrm>
+            <a:off x="7997334" y="5326550"/>
+            <a:ext cx="3497344" cy="202825"/>
+          </a:xfrm>
+          <a:prstGeom prst="rect">
+            <a:avLst/>
+          </a:prstGeom>
+          <a:solidFill>
+            <a:srgbClr val="00B0F0">
+              <a:alpha val="40000"/>
+            </a:srgbClr>
+          </a:solidFill>
+        </p:spPr>
+        <p:style>
+          <a:lnRef idx="2">
+            <a:schemeClr val="accent1">
+              <a:shade val="15000"/>
+            </a:schemeClr>
+          </a:lnRef>
+          <a:fillRef idx="1">
+            <a:schemeClr val="accent1"/>
+          </a:fillRef>
+          <a:effectRef idx="0">
+            <a:schemeClr val="accent1"/>
+          </a:effectRef>
+          <a:fontRef idx="minor">
+            <a:schemeClr val="lt1"/>
+          </a:fontRef>
+        </p:style>
+        <p:txBody>
+          <a:bodyPr rtlCol="0" anchor="ctr"/>
+          <a:lstStyle/>
+          <a:p>
+            <a:pPr algn="ctr"/>
+            <a:endParaRPr lang="en-US"/>
+          </a:p>
+        </p:txBody>
+      </p:sp>
+      <p:sp>
+        <p:nvSpPr>
+          <p:cNvPr id="19" name="Rectangle 18">
+            <a:extLst>
+              <a:ext uri="{FF2B5EF4-FFF2-40B4-BE49-F238E27FC236}">
+                <a16:creationId xmlns:a16="http://schemas.microsoft.com/office/drawing/2014/main" id="{4D019782-9F36-8701-CDAB-367875343CAD}"/>
+              </a:ext>
+            </a:extLst>
+          </p:cNvPr>
+          <p:cNvSpPr/>
+          <p:nvPr/>
+        </p:nvSpPr>
+        <p:spPr>
+          <a:xfrm>
+            <a:off x="3796223" y="1514569"/>
+            <a:ext cx="4201109" cy="202825"/>
+          </a:xfrm>
+          <a:prstGeom prst="rect">
+            <a:avLst/>
+          </a:prstGeom>
+          <a:solidFill>
+            <a:srgbClr val="92D050">
+              <a:alpha val="40000"/>
+            </a:srgbClr>
+          </a:solidFill>
+        </p:spPr>
+        <p:style>
+          <a:lnRef idx="2">
+            <a:schemeClr val="accent1">
+              <a:shade val="15000"/>
+            </a:schemeClr>
+          </a:lnRef>
+          <a:fillRef idx="1">
+            <a:schemeClr val="accent1"/>
+          </a:fillRef>
+          <a:effectRef idx="0">
+            <a:schemeClr val="accent1"/>
+          </a:effectRef>
+          <a:fontRef idx="minor">
+            <a:schemeClr val="lt1"/>
+          </a:fontRef>
+        </p:style>
+        <p:txBody>
+          <a:bodyPr rtlCol="0" anchor="ctr"/>
+          <a:lstStyle/>
+          <a:p>
+            <a:pPr algn="ctr"/>
+            <a:endParaRPr lang="en-US"/>
+          </a:p>
+        </p:txBody>
+      </p:sp>
+      <p:sp>
+        <p:nvSpPr>
+          <p:cNvPr id="20" name="Rectangle 19">
+            <a:extLst>
+              <a:ext uri="{FF2B5EF4-FFF2-40B4-BE49-F238E27FC236}">
+                <a16:creationId xmlns:a16="http://schemas.microsoft.com/office/drawing/2014/main" id="{A3793849-E58E-E410-A6EF-F0B17BF9C9EE}"/>
+              </a:ext>
+            </a:extLst>
+          </p:cNvPr>
+          <p:cNvSpPr/>
+          <p:nvPr/>
+        </p:nvSpPr>
+        <p:spPr>
+          <a:xfrm>
+            <a:off x="3853381" y="3858406"/>
+            <a:ext cx="4143952" cy="202825"/>
+          </a:xfrm>
+          <a:prstGeom prst="rect">
+            <a:avLst/>
+          </a:prstGeom>
+          <a:solidFill>
+            <a:srgbClr val="92D050">
+              <a:alpha val="40000"/>
+            </a:srgbClr>
+          </a:solidFill>
+        </p:spPr>
+        <p:style>
+          <a:lnRef idx="2">
+            <a:schemeClr val="accent1">
+              <a:shade val="15000"/>
+            </a:schemeClr>
+          </a:lnRef>
+          <a:fillRef idx="1">
+            <a:schemeClr val="accent1"/>
+          </a:fillRef>
+          <a:effectRef idx="0">
+            <a:schemeClr val="accent1"/>
+          </a:effectRef>
+          <a:fontRef idx="minor">
+            <a:schemeClr val="lt1"/>
+          </a:fontRef>
+        </p:style>
+        <p:txBody>
+          <a:bodyPr rtlCol="0" anchor="ctr"/>
+          <a:lstStyle/>
+          <a:p>
+            <a:pPr algn="ctr"/>
+            <a:endParaRPr lang="en-US"/>
+          </a:p>
+        </p:txBody>
+      </p:sp>
+      <p:sp>
+        <p:nvSpPr>
+          <p:cNvPr id="21" name="Rectangle 20">
+            <a:extLst>
+              <a:ext uri="{FF2B5EF4-FFF2-40B4-BE49-F238E27FC236}">
+                <a16:creationId xmlns:a16="http://schemas.microsoft.com/office/drawing/2014/main" id="{A77F0EF9-439B-956F-48D3-ED7700AD2FF5}"/>
+              </a:ext>
+            </a:extLst>
+          </p:cNvPr>
+          <p:cNvSpPr/>
+          <p:nvPr/>
+        </p:nvSpPr>
+        <p:spPr>
+          <a:xfrm>
+            <a:off x="7959232" y="2537147"/>
+            <a:ext cx="4201109" cy="202825"/>
+          </a:xfrm>
+          <a:prstGeom prst="rect">
+            <a:avLst/>
+          </a:prstGeom>
+          <a:solidFill>
+            <a:srgbClr val="92D050">
+              <a:alpha val="40000"/>
+            </a:srgbClr>
+          </a:solidFill>
+        </p:spPr>
+        <p:style>
+          <a:lnRef idx="2">
+            <a:schemeClr val="accent1">
+              <a:shade val="15000"/>
+            </a:schemeClr>
+          </a:lnRef>
+          <a:fillRef idx="1">
+            <a:schemeClr val="accent1"/>
+          </a:fillRef>
+          <a:effectRef idx="0">
+            <a:schemeClr val="accent1"/>
+          </a:effectRef>
+          <a:fontRef idx="minor">
+            <a:schemeClr val="lt1"/>
+          </a:fontRef>
+        </p:style>
+        <p:txBody>
+          <a:bodyPr rtlCol="0" anchor="ctr"/>
+          <a:lstStyle/>
+          <a:p>
+            <a:pPr algn="ctr"/>
+            <a:endParaRPr lang="en-US"/>
+          </a:p>
+        </p:txBody>
+      </p:sp>
+      <p:sp>
+        <p:nvSpPr>
+          <p:cNvPr id="22" name="Rectangle 21">
+            <a:extLst>
+              <a:ext uri="{FF2B5EF4-FFF2-40B4-BE49-F238E27FC236}">
+                <a16:creationId xmlns:a16="http://schemas.microsoft.com/office/drawing/2014/main" id="{0D39B4C7-730A-1A3B-669A-3568FA66424C}"/>
+              </a:ext>
+            </a:extLst>
+          </p:cNvPr>
+          <p:cNvSpPr/>
+          <p:nvPr/>
+        </p:nvSpPr>
+        <p:spPr>
+          <a:xfrm>
+            <a:off x="7959231" y="4500315"/>
+            <a:ext cx="4201109" cy="202825"/>
+          </a:xfrm>
+          <a:prstGeom prst="rect">
+            <a:avLst/>
+          </a:prstGeom>
+          <a:solidFill>
+            <a:srgbClr val="92D050">
+              <a:alpha val="40000"/>
+            </a:srgbClr>
+          </a:solidFill>
+        </p:spPr>
+        <p:style>
+          <a:lnRef idx="2">
+            <a:schemeClr val="accent1">
+              <a:shade val="15000"/>
+            </a:schemeClr>
+          </a:lnRef>
+          <a:fillRef idx="1">
+            <a:schemeClr val="accent1"/>
+          </a:fillRef>
+          <a:effectRef idx="0">
+            <a:schemeClr val="accent1"/>
+          </a:effectRef>
+          <a:fontRef idx="minor">
+            <a:schemeClr val="lt1"/>
+          </a:fontRef>
+        </p:style>
+        <p:txBody>
+          <a:bodyPr rtlCol="0" anchor="ctr"/>
+          <a:lstStyle/>
+          <a:p>
+            <a:pPr algn="ctr"/>
+            <a:endParaRPr lang="en-US"/>
+          </a:p>
+        </p:txBody>
+      </p:sp>
+      <p:sp>
+        <p:nvSpPr>
+          <p:cNvPr id="23" name="TextBox 22">
+            <a:extLst>
+              <a:ext uri="{FF2B5EF4-FFF2-40B4-BE49-F238E27FC236}">
+                <a16:creationId xmlns:a16="http://schemas.microsoft.com/office/drawing/2014/main" id="{48A47BED-8063-C5E7-031B-FB55B586C2CF}"/>
+              </a:ext>
+            </a:extLst>
+          </p:cNvPr>
+          <p:cNvSpPr txBox="1"/>
+          <p:nvPr/>
+        </p:nvSpPr>
+        <p:spPr>
+          <a:xfrm>
+            <a:off x="402264" y="1514569"/>
+            <a:ext cx="3248772" cy="1200329"/>
+          </a:xfrm>
+          <a:prstGeom prst="rect">
+            <a:avLst/>
+          </a:prstGeom>
+        </p:spPr>
+        <p:txBody>
+          <a:bodyPr vert="horz" lIns="91440" tIns="45720" rIns="91440" bIns="45720" rtlCol="0">
+            <a:normAutofit fontScale="70000" lnSpcReduction="20000"/>
+          </a:bodyPr>
+          <a:lstStyle>
+            <a:lvl1pPr marL="228594" indent="-228594">
+              <a:lnSpc>
+                <a:spcPct val="90000"/>
+              </a:lnSpc>
+              <a:spcBef>
+                <a:spcPts val="1000"/>
+              </a:spcBef>
+              <a:buFont typeface="Arial" panose="020B0604020202020204" pitchFamily="34" charset="0"/>
+              <a:buChar char="•"/>
+              <a:defRPr sz="2800">
+                <a:solidFill>
+                  <a:schemeClr val="tx2"/>
+                </a:solidFill>
+              </a:defRPr>
+            </a:lvl1pPr>
+            <a:lvl2pPr marL="685783" lvl="1" indent="-228594">
+              <a:lnSpc>
+                <a:spcPct val="90000"/>
+              </a:lnSpc>
+              <a:spcBef>
+                <a:spcPts val="500"/>
+              </a:spcBef>
+              <a:buFont typeface="Arial" panose="020B0604020202020204" pitchFamily="34" charset="0"/>
+              <a:buChar char="•"/>
+              <a:defRPr sz="2400">
+                <a:solidFill>
+                  <a:schemeClr val="tx2"/>
+                </a:solidFill>
+              </a:defRPr>
+            </a:lvl2pPr>
+            <a:lvl3pPr marL="1142971" lvl="2" indent="-228594">
+              <a:lnSpc>
+                <a:spcPct val="90000"/>
+              </a:lnSpc>
+              <a:spcBef>
+                <a:spcPts val="500"/>
+              </a:spcBef>
+              <a:buFont typeface="Arial" panose="020B0604020202020204" pitchFamily="34" charset="0"/>
+              <a:buChar char="•"/>
+              <a:defRPr sz="2000" i="1">
+                <a:solidFill>
+                  <a:schemeClr val="tx2"/>
+                </a:solidFill>
+                <a:latin typeface="Cambria Math" panose="02040503050406030204" pitchFamily="18" charset="0"/>
+              </a:defRPr>
+            </a:lvl3pPr>
+            <a:lvl4pPr marL="1600160" indent="-228594">
+              <a:lnSpc>
+                <a:spcPct val="90000"/>
+              </a:lnSpc>
+              <a:spcBef>
+                <a:spcPts val="500"/>
+              </a:spcBef>
+              <a:buFont typeface="Arial" panose="020B0604020202020204" pitchFamily="34" charset="0"/>
+              <a:buChar char="•"/>
+              <a:defRPr>
+                <a:solidFill>
+                  <a:schemeClr val="tx2"/>
+                </a:solidFill>
+              </a:defRPr>
+            </a:lvl4pPr>
+            <a:lvl5pPr marL="2057349" indent="-228594">
+              <a:lnSpc>
+                <a:spcPct val="90000"/>
+              </a:lnSpc>
+              <a:spcBef>
+                <a:spcPts val="500"/>
+              </a:spcBef>
+              <a:buFont typeface="Arial" panose="020B0604020202020204" pitchFamily="34" charset="0"/>
+              <a:buChar char="•"/>
+              <a:defRPr>
+                <a:solidFill>
+                  <a:schemeClr val="tx2"/>
+                </a:solidFill>
+              </a:defRPr>
+            </a:lvl5pPr>
+            <a:lvl6pPr marL="2514537" indent="-228594">
+              <a:lnSpc>
+                <a:spcPct val="90000"/>
+              </a:lnSpc>
+              <a:spcBef>
+                <a:spcPts val="500"/>
+              </a:spcBef>
+              <a:buFont typeface="Arial" panose="020B0604020202020204" pitchFamily="34" charset="0"/>
+              <a:buChar char="•"/>
+            </a:lvl6pPr>
+            <a:lvl7pPr marL="2971726" indent="-228594">
+              <a:lnSpc>
+                <a:spcPct val="90000"/>
+              </a:lnSpc>
+              <a:spcBef>
+                <a:spcPts val="500"/>
+              </a:spcBef>
+              <a:buFont typeface="Arial" panose="020B0604020202020204" pitchFamily="34" charset="0"/>
+              <a:buChar char="•"/>
+            </a:lvl7pPr>
+            <a:lvl8pPr marL="3428914" indent="-228594">
+              <a:lnSpc>
+                <a:spcPct val="90000"/>
+              </a:lnSpc>
+              <a:spcBef>
+                <a:spcPts val="500"/>
+              </a:spcBef>
+              <a:buFont typeface="Arial" panose="020B0604020202020204" pitchFamily="34" charset="0"/>
+              <a:buChar char="•"/>
+            </a:lvl8pPr>
+            <a:lvl9pPr marL="3886103" indent="-228594">
+              <a:lnSpc>
+                <a:spcPct val="90000"/>
+              </a:lnSpc>
+              <a:spcBef>
+                <a:spcPts val="500"/>
+              </a:spcBef>
+              <a:buFont typeface="Arial" panose="020B0604020202020204" pitchFamily="34" charset="0"/>
+              <a:buChar char="•"/>
+            </a:lvl9pPr>
+          </a:lstStyle>
+          <a:p>
+            <a:r>
+              <a:rPr lang="en-US" dirty="0"/>
+              <a:t>Each manager waits until all dependencies are satisfied before executing their own Catalan number</a:t>
+            </a:r>
+          </a:p>
+        </p:txBody>
+      </p:sp>
+      <p:sp>
+        <p:nvSpPr>
+          <p:cNvPr id="3" name="Slide Number Placeholder 2">
+            <a:extLst>
+              <a:ext uri="{FF2B5EF4-FFF2-40B4-BE49-F238E27FC236}">
+                <a16:creationId xmlns:a16="http://schemas.microsoft.com/office/drawing/2014/main" id="{6B39DFC8-8191-6F7C-99E1-726DB8EA7D5B}"/>
+              </a:ext>
+            </a:extLst>
+          </p:cNvPr>
+          <p:cNvSpPr>
+            <a:spLocks noGrp="1"/>
+          </p:cNvSpPr>
+          <p:nvPr>
+            <p:ph type="sldNum" sz="quarter" idx="12"/>
+          </p:nvPr>
+        </p:nvSpPr>
+        <p:spPr/>
+        <p:txBody>
+          <a:bodyPr/>
+          <a:lstStyle/>
+          <a:p>
+            <a:fld id="{63954337-777C-478F-BB37-379719107E1B}" type="slidenum">
+              <a:rPr lang="en-US" smtClean="0"/>
+              <a:pPr/>
+              <a:t>10</a:t>
+            </a:fld>
+            <a:endParaRPr lang="en-US" dirty="0"/>
+          </a:p>
+        </p:txBody>
+      </p:sp>
+    </p:spTree>
+    <p:extLst>
+      <p:ext uri="{BB962C8B-B14F-4D97-AF65-F5344CB8AC3E}">
+        <p14:creationId xmlns:p14="http://schemas.microsoft.com/office/powerpoint/2010/main" val="4123538328"/>
+      </p:ext>
+    </p:extLst>
+  </p:cSld>
+  <p:clrMapOvr>
+    <a:masterClrMapping/>
+  </p:clrMapOvr>
+</p:sld>
+</file>
+
+<file path=ppt/slides/slide11.xml><?xml version="1.0" encoding="utf-8"?>
+<p:sld xmlns:a="http://schemas.openxmlformats.org/drawingml/2006/main" xmlns:r="http://schemas.openxmlformats.org/officeDocument/2006/relationships" xmlns:p="http://schemas.openxmlformats.org/presentationml/2006/main">
+  <p:cSld>
+    <p:spTree>
+      <p:nvGrpSpPr>
+        <p:cNvPr id="1" name=""/>
+        <p:cNvGrpSpPr/>
+        <p:nvPr/>
+      </p:nvGrpSpPr>
+      <p:grpSpPr>
+        <a:xfrm>
+          <a:off x="0" y="0"/>
+          <a:ext cx="0" cy="0"/>
+          <a:chOff x="0" y="0"/>
+          <a:chExt cx="0" cy="0"/>
+        </a:xfrm>
+      </p:grpSpPr>
       <mc:AlternateContent xmlns:mc="http://schemas.openxmlformats.org/markup-compatibility/2006" xmlns:a14="http://schemas.microsoft.com/office/drawing/2010/main">
         <mc:Choice Requires="a14">
           <p:sp>
@@ -7402,42 +8136,21 @@
               </a:p>
               <a:p>
                 <a:pPr lvl="2"/>
-                <a14:m>
-                  <m:oMath xmlns:m="http://schemas.openxmlformats.org/officeDocument/2006/math">
-                    <m:r>
-                      <a:rPr lang="en-US" i="1" dirty="0" smtClean="0">
-                        <a:latin typeface="Cambria Math" panose="02040503050406030204" pitchFamily="18" charset="0"/>
-                      </a:rPr>
-                      <m:t>𝐶</m:t>
-                    </m:r>
-                    <m:d>
-                      <m:dPr>
-                        <m:ctrlPr>
-                          <a:rPr lang="en-US" i="1" dirty="0" smtClean="0">
-                            <a:latin typeface="Cambria Math" panose="02040503050406030204" pitchFamily="18" charset="0"/>
-                          </a:rPr>
-                        </m:ctrlPr>
-                      </m:dPr>
-                      <m:e>
-                        <m:r>
-                          <a:rPr lang="en-US" i="1" dirty="0" smtClean="0">
-                            <a:latin typeface="Cambria Math" panose="02040503050406030204" pitchFamily="18" charset="0"/>
-                          </a:rPr>
-                          <m:t>𝑛</m:t>
-                        </m:r>
-                      </m:e>
-                    </m:d>
-                    <m:r>
-                      <a:rPr lang="en-US" i="1" dirty="0" smtClean="0">
-                        <a:latin typeface="Cambria Math" panose="02040503050406030204" pitchFamily="18" charset="0"/>
-                      </a:rPr>
-                      <m:t> </m:t>
-                    </m:r>
-                  </m:oMath>
-                </a14:m>
                 <a:r>
                   <a:rPr lang="en-US" dirty="0"/>
-                  <a:t>depends on </a:t>
+                  <a:t>C</a:t>
+                </a:r>
+                <a:r>
+                  <a:rPr lang="en-US" baseline="-25000" dirty="0"/>
+                  <a:t>n</a:t>
+                </a:r>
+                <a:r>
+                  <a:rPr lang="en-US" dirty="0"/>
+                  <a:t> depends on C</a:t>
+                </a:r>
+                <a:r>
+                  <a:rPr lang="en-US" baseline="-25000" dirty="0"/>
+                  <a:t>0</a:t>
                 </a:r>
                 <a14:m>
                   <m:oMath xmlns:m="http://schemas.openxmlformats.org/officeDocument/2006/math">
@@ -7445,137 +8158,40 @@
                       <a:rPr lang="en-US" i="1" dirty="0" smtClean="0">
                         <a:latin typeface="Cambria Math" panose="02040503050406030204" pitchFamily="18" charset="0"/>
                       </a:rPr>
-                      <m:t>𝐶</m:t>
-                    </m:r>
-                    <m:d>
-                      <m:dPr>
-                        <m:ctrlPr>
-                          <a:rPr lang="en-US" i="1" dirty="0" smtClean="0">
-                            <a:latin typeface="Cambria Math" panose="02040503050406030204" pitchFamily="18" charset="0"/>
-                          </a:rPr>
-                        </m:ctrlPr>
-                      </m:dPr>
-                      <m:e>
-                        <m:r>
-                          <a:rPr lang="en-US" i="1" dirty="0" smtClean="0">
-                            <a:latin typeface="Cambria Math" panose="02040503050406030204" pitchFamily="18" charset="0"/>
-                          </a:rPr>
-                          <m:t>0</m:t>
-                        </m:r>
-                      </m:e>
-                    </m:d>
-                    <m:r>
-                      <a:rPr lang="en-US" i="1" dirty="0" smtClean="0">
-                        <a:latin typeface="Cambria Math" panose="02040503050406030204" pitchFamily="18" charset="0"/>
-                      </a:rPr>
                       <m:t>…</m:t>
-                    </m:r>
-                    <m:r>
-                      <a:rPr lang="en-US" i="1" dirty="0" smtClean="0">
-                        <a:latin typeface="Cambria Math" panose="02040503050406030204" pitchFamily="18" charset="0"/>
-                      </a:rPr>
-                      <m:t>𝐶</m:t>
-                    </m:r>
-                    <m:d>
-                      <m:dPr>
-                        <m:ctrlPr>
-                          <a:rPr lang="en-US" i="1" dirty="0" smtClean="0">
-                            <a:latin typeface="Cambria Math" panose="02040503050406030204" pitchFamily="18" charset="0"/>
-                          </a:rPr>
-                        </m:ctrlPr>
-                      </m:dPr>
-                      <m:e>
-                        <m:r>
-                          <a:rPr lang="en-US" i="1" dirty="0" smtClean="0">
-                            <a:latin typeface="Cambria Math" panose="02040503050406030204" pitchFamily="18" charset="0"/>
-                          </a:rPr>
-                          <m:t>𝑛</m:t>
-                        </m:r>
-                        <m:r>
-                          <a:rPr lang="en-US" i="1" dirty="0" smtClean="0">
-                            <a:latin typeface="Cambria Math" panose="02040503050406030204" pitchFamily="18" charset="0"/>
-                          </a:rPr>
-                          <m:t>−1</m:t>
-                        </m:r>
-                      </m:e>
-                    </m:d>
-                  </m:oMath>
-                </a14:m>
-                <a:endParaRPr lang="en-US" dirty="0"/>
-              </a:p>
-              <a:p>
-                <a:pPr lvl="1"/>
-                <a14:m>
-                  <m:oMath xmlns:m="http://schemas.openxmlformats.org/officeDocument/2006/math">
-                    <m:r>
-                      <a:rPr lang="en-US" i="1" dirty="0" smtClean="0">
-                        <a:latin typeface="Cambria Math" panose="02040503050406030204" pitchFamily="18" charset="0"/>
-                      </a:rPr>
-                      <m:t>𝐶</m:t>
-                    </m:r>
-                    <m:d>
-                      <m:dPr>
-                        <m:ctrlPr>
-                          <a:rPr lang="en-US" i="1" dirty="0" smtClean="0">
-                            <a:latin typeface="Cambria Math" panose="02040503050406030204" pitchFamily="18" charset="0"/>
-                          </a:rPr>
-                        </m:ctrlPr>
-                      </m:dPr>
-                      <m:e>
-                        <m:r>
-                          <a:rPr lang="en-US" i="1" dirty="0" err="1" smtClean="0">
-                            <a:latin typeface="Cambria Math" panose="02040503050406030204" pitchFamily="18" charset="0"/>
-                          </a:rPr>
-                          <m:t>𝑖</m:t>
-                        </m:r>
-                      </m:e>
-                    </m:d>
-                    <m:r>
-                      <a:rPr lang="en-US" i="1" dirty="0" smtClean="0">
-                        <a:latin typeface="Cambria Math" panose="02040503050406030204" pitchFamily="18" charset="0"/>
-                      </a:rPr>
-                      <m:t>𝐶</m:t>
-                    </m:r>
-                    <m:d>
-                      <m:dPr>
-                        <m:ctrlPr>
-                          <a:rPr lang="en-US" i="1" dirty="0" smtClean="0">
-                            <a:latin typeface="Cambria Math" panose="02040503050406030204" pitchFamily="18" charset="0"/>
-                          </a:rPr>
-                        </m:ctrlPr>
-                      </m:dPr>
-                      <m:e>
-                        <m:r>
-                          <a:rPr lang="en-US" i="1" dirty="0" smtClean="0">
-                            <a:latin typeface="Cambria Math" panose="02040503050406030204" pitchFamily="18" charset="0"/>
-                          </a:rPr>
-                          <m:t>𝑛</m:t>
-                        </m:r>
-                        <m:r>
-                          <a:rPr lang="en-US" i="1" dirty="0" smtClean="0">
-                            <a:latin typeface="Cambria Math" panose="02040503050406030204" pitchFamily="18" charset="0"/>
-                          </a:rPr>
-                          <m:t>−1 −</m:t>
-                        </m:r>
-                        <m:r>
-                          <a:rPr lang="en-US" b="0" i="1" dirty="0" smtClean="0">
-                            <a:latin typeface="Cambria Math" panose="02040503050406030204" pitchFamily="18" charset="0"/>
-                          </a:rPr>
-                          <m:t>𝑖</m:t>
-                        </m:r>
-                      </m:e>
-                    </m:d>
-                    <m:r>
-                      <a:rPr lang="en-US" i="1" dirty="0" smtClean="0">
-                        <a:latin typeface="Cambria Math" panose="02040503050406030204" pitchFamily="18" charset="0"/>
-                      </a:rPr>
-                      <m:t> </m:t>
                     </m:r>
                   </m:oMath>
                 </a14:m>
                 <a:r>
                   <a:rPr lang="en-US" dirty="0"/>
-                  <a:t>is tiny</a:t>
+                  <a:t>C</a:t>
+                </a:r>
+                <a:r>
+                  <a:rPr lang="en-US" baseline="-25000" dirty="0"/>
+                  <a:t>n-1</a:t>
+                </a:r>
+              </a:p>
+              <a:p>
+                <a:pPr lvl="1"/>
+                <a:r>
+                  <a:rPr lang="en-US" dirty="0"/>
+                  <a:t>C</a:t>
+                </a:r>
+                <a:r>
+                  <a:rPr lang="en-US" baseline="-25000" dirty="0"/>
+                  <a:t>i</a:t>
+                </a:r>
+                <a:r>
+                  <a:rPr lang="en-US" dirty="0"/>
+                  <a:t>C</a:t>
+                </a:r>
+                <a:r>
+                  <a:rPr lang="en-US" baseline="-25000" dirty="0"/>
+                  <a:t>n-1-i</a:t>
+                </a:r>
+                <a:r>
+                  <a:rPr lang="en-US" dirty="0"/>
+                  <a:t> is tiny </a:t>
                 </a:r>
               </a:p>
               <a:p>
@@ -7600,7 +8216,19 @@
                       <a:rPr lang="en-US" i="1" dirty="0" smtClean="0">
                         <a:latin typeface="Cambria Math" panose="02040503050406030204" pitchFamily="18" charset="0"/>
                       </a:rPr>
-                      <m:t>𝑇h𝑟𝑒𝑎𝑑𝑠</m:t>
+                      <m:t>𝑇</m:t>
+                    </m:r>
+                    <m:r>
+                      <a:rPr lang="en-US" i="1" dirty="0" smtClean="0">
+                        <a:latin typeface="Cambria Math" panose="02040503050406030204" pitchFamily="18" charset="0"/>
+                      </a:rPr>
+                      <m:t>h</m:t>
+                    </m:r>
+                    <m:r>
+                      <a:rPr lang="en-US" i="1" dirty="0" smtClean="0">
+                        <a:latin typeface="Cambria Math" panose="02040503050406030204" pitchFamily="18" charset="0"/>
+                      </a:rPr>
+                      <m:t>𝑟𝑒𝑎𝑑𝑠</m:t>
                     </m:r>
                     <m:r>
                       <a:rPr lang="en-US" i="1" dirty="0" smtClean="0">
@@ -7642,7 +8270,19 @@
                       <a:rPr lang="en-US" i="1" dirty="0">
                         <a:latin typeface="Cambria Math" panose="02040503050406030204" pitchFamily="18" charset="0"/>
                       </a:rPr>
-                      <m:t>,4)</m:t>
+                      <m:t>,</m:t>
+                    </m:r>
+                    <m:r>
+                      <a:rPr lang="en-US" i="1" dirty="0">
+                        <a:latin typeface="Cambria Math" panose="02040503050406030204" pitchFamily="18" charset="0"/>
+                      </a:rPr>
+                      <m:t>4</m:t>
+                    </m:r>
+                    <m:r>
+                      <a:rPr lang="en-US" i="1" dirty="0">
+                        <a:latin typeface="Cambria Math" panose="02040503050406030204" pitchFamily="18" charset="0"/>
+                      </a:rPr>
+                      <m:t>)</m:t>
                     </m:r>
                   </m:oMath>
                 </a14:m>
@@ -7744,67 +8384,6 @@
           </a:p>
         </p:txBody>
       </p:sp>
-      <p:sp>
-        <p:nvSpPr>
-          <p:cNvPr id="4" name="Footer Placeholder 3">
-            <a:extLst>
-              <a:ext uri="{FF2B5EF4-FFF2-40B4-BE49-F238E27FC236}">
-                <a16:creationId xmlns:a16="http://schemas.microsoft.com/office/drawing/2014/main" id="{E0C4D443-E7EC-4728-027E-CFC8627309BD}"/>
-              </a:ext>
-            </a:extLst>
-          </p:cNvPr>
-          <p:cNvSpPr>
-            <a:spLocks noGrp="1"/>
-          </p:cNvSpPr>
-          <p:nvPr>
-            <p:ph type="ftr" sz="quarter" idx="11"/>
-          </p:nvPr>
-        </p:nvSpPr>
-        <p:spPr/>
-        <p:txBody>
-          <a:bodyPr/>
-          <a:lstStyle/>
-          <a:p>
-            <a:r>
-              <a:rPr lang="en-US"/>
-              <a:t>UNIVERSITY OF SOUTH FLORIDA</a:t>
-            </a:r>
-            <a:endParaRPr lang="en-US" dirty="0"/>
-          </a:p>
-        </p:txBody>
-      </p:sp>
-      <p:pic>
-        <p:nvPicPr>
-          <p:cNvPr id="11" name="Content Placeholder 10">
-            <a:extLst>
-              <a:ext uri="{FF2B5EF4-FFF2-40B4-BE49-F238E27FC236}">
-                <a16:creationId xmlns:a16="http://schemas.microsoft.com/office/drawing/2014/main" id="{DA371BF7-71C9-C795-4F5E-0066BA117445}"/>
-              </a:ext>
-            </a:extLst>
-          </p:cNvPr>
-          <p:cNvPicPr>
-            <a:picLocks noGrp="1" noChangeAspect="1"/>
-          </p:cNvPicPr>
-          <p:nvPr>
-            <p:ph sz="half" idx="2"/>
-          </p:nvPr>
-        </p:nvPicPr>
-        <p:blipFill>
-          <a:blip r:embed="rId3"/>
-          <a:stretch>
-            <a:fillRect/>
-          </a:stretch>
-        </p:blipFill>
-        <p:spPr>
-          <a:xfrm>
-            <a:off x="6818997" y="3857813"/>
-            <a:ext cx="5087060" cy="962159"/>
-          </a:xfrm>
-          <a:prstGeom prst="rect">
-            <a:avLst/>
-          </a:prstGeom>
-        </p:spPr>
-      </p:pic>
       <p:pic>
         <p:nvPicPr>
           <p:cNvPr id="13" name="Picture 12">
@@ -7820,15 +8399,16 @@
           <p:nvPr/>
         </p:nvPicPr>
         <p:blipFill>
-          <a:blip r:embed="rId4"/>
+          <a:blip r:embed="rId3"/>
+          <a:srcRect r="2311"/>
           <a:stretch>
             <a:fillRect/>
           </a:stretch>
         </p:blipFill>
         <p:spPr>
           <a:xfrm>
-            <a:off x="6628471" y="1619126"/>
-            <a:ext cx="5468113" cy="2238687"/>
+            <a:off x="6408342" y="1433913"/>
+            <a:ext cx="5783658" cy="2423901"/>
           </a:xfrm>
           <a:prstGeom prst="rect">
             <a:avLst/>
@@ -7973,7 +8553,34 @@
                         </a:solidFill>
                         <a:latin typeface="Cambria Math" panose="02040503050406030204" pitchFamily="18" charset="0"/>
                       </a:rPr>
-                      <m:t>2,000× </m:t>
+                      <m:t>2</m:t>
+                    </m:r>
+                    <m:r>
+                      <a:rPr lang="en-US" sz="2000" i="1" dirty="0">
+                        <a:solidFill>
+                          <a:srgbClr val="455F69"/>
+                        </a:solidFill>
+                        <a:latin typeface="Cambria Math" panose="02040503050406030204" pitchFamily="18" charset="0"/>
+                      </a:rPr>
+                      <m:t>,</m:t>
+                    </m:r>
+                    <m:r>
+                      <a:rPr lang="en-US" sz="2000" i="1" dirty="0">
+                        <a:solidFill>
+                          <a:srgbClr val="455F69"/>
+                        </a:solidFill>
+                        <a:latin typeface="Cambria Math" panose="02040503050406030204" pitchFamily="18" charset="0"/>
+                      </a:rPr>
+                      <m:t>000</m:t>
+                    </m:r>
+                    <m:r>
+                      <a:rPr lang="en-US" sz="2000" i="1" dirty="0">
+                        <a:solidFill>
+                          <a:srgbClr val="455F69"/>
+                        </a:solidFill>
+                        <a:latin typeface="Cambria Math" panose="02040503050406030204" pitchFamily="18" charset="0"/>
+                      </a:rPr>
+                      <m:t>× </m:t>
                     </m:r>
                     <m:r>
                       <a:rPr lang="en-US" sz="2000" i="1" dirty="0">
@@ -8057,6 +8664,98 @@
           </p:sp>
         </mc:Fallback>
       </mc:AlternateContent>
+      <p:pic>
+        <p:nvPicPr>
+          <p:cNvPr id="6" name="Picture 5">
+            <a:extLst>
+              <a:ext uri="{FF2B5EF4-FFF2-40B4-BE49-F238E27FC236}">
+                <a16:creationId xmlns:a16="http://schemas.microsoft.com/office/drawing/2014/main" id="{DAE07326-0B2B-0641-01E7-5DDF41DB3D08}"/>
+              </a:ext>
+            </a:extLst>
+          </p:cNvPr>
+          <p:cNvPicPr>
+            <a:picLocks noChangeAspect="1"/>
+          </p:cNvPicPr>
+          <p:nvPr/>
+        </p:nvPicPr>
+        <p:blipFill>
+          <a:blip r:embed="rId6"/>
+          <a:srcRect t="56503" r="2635" b="2146"/>
+          <a:stretch>
+            <a:fillRect/>
+          </a:stretch>
+        </p:blipFill>
+        <p:spPr>
+          <a:xfrm>
+            <a:off x="6563803" y="4447202"/>
+            <a:ext cx="5628198" cy="433355"/>
+          </a:xfrm>
+          <a:prstGeom prst="rect">
+            <a:avLst/>
+          </a:prstGeom>
+        </p:spPr>
+      </p:pic>
+      <p:pic>
+        <p:nvPicPr>
+          <p:cNvPr id="10" name="Picture 9">
+            <a:extLst>
+              <a:ext uri="{FF2B5EF4-FFF2-40B4-BE49-F238E27FC236}">
+                <a16:creationId xmlns:a16="http://schemas.microsoft.com/office/drawing/2014/main" id="{C06E232C-975B-298C-FC96-748A236A9810}"/>
+              </a:ext>
+            </a:extLst>
+          </p:cNvPr>
+          <p:cNvPicPr>
+            <a:picLocks noChangeAspect="1"/>
+          </p:cNvPicPr>
+          <p:nvPr/>
+        </p:nvPicPr>
+        <p:blipFill>
+          <a:blip r:embed="rId7"/>
+          <a:srcRect r="2688" b="58596"/>
+          <a:stretch>
+            <a:fillRect/>
+          </a:stretch>
+        </p:blipFill>
+        <p:spPr>
+          <a:xfrm>
+            <a:off x="6563802" y="3982861"/>
+            <a:ext cx="5628198" cy="433355"/>
+          </a:xfrm>
+          <a:prstGeom prst="rect">
+            <a:avLst/>
+          </a:prstGeom>
+        </p:spPr>
+      </p:pic>
+      <p:sp>
+        <p:nvSpPr>
+          <p:cNvPr id="3" name="Slide Number Placeholder 2">
+            <a:extLst>
+              <a:ext uri="{FF2B5EF4-FFF2-40B4-BE49-F238E27FC236}">
+                <a16:creationId xmlns:a16="http://schemas.microsoft.com/office/drawing/2014/main" id="{CED8C7C6-296D-C816-732E-03411C5A4C12}"/>
+              </a:ext>
+            </a:extLst>
+          </p:cNvPr>
+          <p:cNvSpPr>
+            <a:spLocks noGrp="1"/>
+          </p:cNvSpPr>
+          <p:nvPr>
+            <p:ph type="sldNum" sz="quarter" idx="12"/>
+          </p:nvPr>
+        </p:nvSpPr>
+        <p:spPr/>
+        <p:txBody>
+          <a:bodyPr/>
+          <a:lstStyle/>
+          <a:p>
+            <a:fld id="{63954337-777C-478F-BB37-379719107E1B}" type="slidenum">
+              <a:rPr lang="en-US" smtClean="0"/>
+              <a:pPr/>
+              <a:t>11</a:t>
+            </a:fld>
+            <a:endParaRPr lang="en-US" dirty="0"/>
+          </a:p>
+        </p:txBody>
+      </p:sp>
     </p:spTree>
     <p:extLst>
       <p:ext uri="{BB962C8B-B14F-4D97-AF65-F5344CB8AC3E}">
@@ -8070,7 +8769,7 @@
 </p:sld>
 </file>
 
-<file path=ppt/slides/slide11.xml><?xml version="1.0" encoding="utf-8"?>
+<file path=ppt/slides/slide12.xml><?xml version="1.0" encoding="utf-8"?>
 <p:sld xmlns:a="http://schemas.openxmlformats.org/drawingml/2006/main" xmlns:r="http://schemas.openxmlformats.org/officeDocument/2006/relationships" xmlns:p="http://schemas.openxmlformats.org/presentationml/2006/main">
   <p:cSld>
     <p:spTree>
@@ -8196,15 +8895,23 @@
             <a:pPr lvl="1"/>
             <a:r>
               <a:rPr lang="en-US" dirty="0"/>
-              <a:t>Per-worker workload is a single multiplication C(</a:t>
-            </a:r>
-            <a:r>
-              <a:rPr lang="en-US" dirty="0" err="1"/>
+              <a:t>Per-worker workload is a single multiplication C</a:t>
+            </a:r>
+            <a:r>
+              <a:rPr lang="en-US" baseline="-25000" dirty="0"/>
               <a:t>i</a:t>
             </a:r>
             <a:r>
               <a:rPr lang="en-US" dirty="0"/>
-              <a:t>)⋅C(n−1−i). </a:t>
+              <a:t>⋅C</a:t>
+            </a:r>
+            <a:r>
+              <a:rPr lang="en-US" baseline="-25000" dirty="0"/>
+              <a:t>n−1−i</a:t>
+            </a:r>
+            <a:r>
+              <a:rPr lang="en-US" dirty="0"/>
+              <a:t> </a:t>
             </a:r>
           </a:p>
           <a:p>
@@ -8228,10 +8935,10 @@
       </p:sp>
       <p:sp>
         <p:nvSpPr>
-          <p:cNvPr id="5" name="Footer Placeholder 4">
+          <p:cNvPr id="2" name="Slide Number Placeholder 1">
             <a:extLst>
               <a:ext uri="{FF2B5EF4-FFF2-40B4-BE49-F238E27FC236}">
-                <a16:creationId xmlns:a16="http://schemas.microsoft.com/office/drawing/2014/main" id="{81FD0F43-8A7B-9794-1870-D2CBC42D8014}"/>
+                <a16:creationId xmlns:a16="http://schemas.microsoft.com/office/drawing/2014/main" id="{39E0E57C-F9D1-C03D-1202-E2E1A6C31793}"/>
               </a:ext>
             </a:extLst>
           </p:cNvPr>
@@ -8239,7 +8946,7 @@
             <a:spLocks noGrp="1"/>
           </p:cNvSpPr>
           <p:nvPr>
-            <p:ph type="ftr" sz="quarter" idx="11"/>
+            <p:ph type="sldNum" sz="quarter" idx="12"/>
           </p:nvPr>
         </p:nvSpPr>
         <p:spPr/>
@@ -8247,10 +8954,11 @@
           <a:bodyPr/>
           <a:lstStyle/>
           <a:p>
-            <a:r>
-              <a:rPr lang="en-US"/>
-              <a:t>UNIVERSITY OF SOUTH FLORIDA</a:t>
-            </a:r>
+            <a:fld id="{63954337-777C-478F-BB37-379719107E1B}" type="slidenum">
+              <a:rPr lang="en-US" smtClean="0"/>
+              <a:pPr/>
+              <a:t>12</a:t>
+            </a:fld>
             <a:endParaRPr lang="en-US" dirty="0"/>
           </a:p>
         </p:txBody>
@@ -8259,6 +8967,99 @@
     <p:extLst>
       <p:ext uri="{BB962C8B-B14F-4D97-AF65-F5344CB8AC3E}">
         <p14:creationId xmlns:p14="http://schemas.microsoft.com/office/powerpoint/2010/main" val="2288985525"/>
+      </p:ext>
+    </p:extLst>
+  </p:cSld>
+  <p:clrMapOvr>
+    <a:masterClrMapping/>
+  </p:clrMapOvr>
+</p:sld>
+</file>
+
+<file path=ppt/slides/slide13.xml><?xml version="1.0" encoding="utf-8"?>
+<p:sld xmlns:a="http://schemas.openxmlformats.org/drawingml/2006/main" xmlns:r="http://schemas.openxmlformats.org/officeDocument/2006/relationships" xmlns:p="http://schemas.openxmlformats.org/presentationml/2006/main">
+  <p:cSld>
+    <p:spTree>
+      <p:nvGrpSpPr>
+        <p:cNvPr id="1" name=""/>
+        <p:cNvGrpSpPr/>
+        <p:nvPr/>
+      </p:nvGrpSpPr>
+      <p:grpSpPr>
+        <a:xfrm>
+          <a:off x="0" y="0"/>
+          <a:ext cx="0" cy="0"/>
+          <a:chOff x="0" y="0"/>
+          <a:chExt cx="0" cy="0"/>
+        </a:xfrm>
+      </p:grpSpPr>
+      <p:sp>
+        <p:nvSpPr>
+          <p:cNvPr id="5" name="Title 4">
+            <a:extLst>
+              <a:ext uri="{FF2B5EF4-FFF2-40B4-BE49-F238E27FC236}">
+                <a16:creationId xmlns:a16="http://schemas.microsoft.com/office/drawing/2014/main" id="{F0D5A7B9-87BB-217F-4A03-186E077EC843}"/>
+              </a:ext>
+            </a:extLst>
+          </p:cNvPr>
+          <p:cNvSpPr>
+            <a:spLocks noGrp="1"/>
+          </p:cNvSpPr>
+          <p:nvPr>
+            <p:ph type="title"/>
+          </p:nvPr>
+        </p:nvSpPr>
+        <p:spPr/>
+        <p:txBody>
+          <a:bodyPr/>
+          <a:lstStyle/>
+          <a:p>
+            <a:r>
+              <a:rPr lang="en-US" dirty="0"/>
+              <a:t>DEMO</a:t>
+            </a:r>
+          </a:p>
+        </p:txBody>
+      </p:sp>
+      <p:sp>
+        <p:nvSpPr>
+          <p:cNvPr id="4" name="Slide Number Placeholder 3">
+            <a:extLst>
+              <a:ext uri="{FF2B5EF4-FFF2-40B4-BE49-F238E27FC236}">
+                <a16:creationId xmlns:a16="http://schemas.microsoft.com/office/drawing/2014/main" id="{8386922A-AE1D-B1F2-468D-39741F3705B2}"/>
+              </a:ext>
+            </a:extLst>
+          </p:cNvPr>
+          <p:cNvSpPr>
+            <a:spLocks noGrp="1"/>
+          </p:cNvSpPr>
+          <p:nvPr>
+            <p:ph type="sldNum" sz="quarter" idx="4294967295"/>
+          </p:nvPr>
+        </p:nvSpPr>
+        <p:spPr>
+          <a:xfrm>
+            <a:off x="11760200" y="6402388"/>
+            <a:ext cx="431800" cy="273050"/>
+          </a:xfrm>
+        </p:spPr>
+        <p:txBody>
+          <a:bodyPr/>
+          <a:lstStyle/>
+          <a:p>
+            <a:fld id="{63954337-777C-478F-BB37-379719107E1B}" type="slidenum">
+              <a:rPr lang="en-US" smtClean="0"/>
+              <a:pPr/>
+              <a:t>13</a:t>
+            </a:fld>
+            <a:endParaRPr lang="en-US" dirty="0"/>
+          </a:p>
+        </p:txBody>
+      </p:sp>
+    </p:spTree>
+    <p:extLst>
+      <p:ext uri="{BB962C8B-B14F-4D97-AF65-F5344CB8AC3E}">
+        <p14:creationId xmlns:p14="http://schemas.microsoft.com/office/powerpoint/2010/main" val="2743504065"/>
       </p:ext>
     </p:extLst>
   </p:cSld>
@@ -8287,10 +9088,10 @@
       </p:grpSpPr>
       <p:sp>
         <p:nvSpPr>
-          <p:cNvPr id="2" name="Title 1">
+          <p:cNvPr id="5" name="Title 4">
             <a:extLst>
               <a:ext uri="{FF2B5EF4-FFF2-40B4-BE49-F238E27FC236}">
-                <a16:creationId xmlns:a16="http://schemas.microsoft.com/office/drawing/2014/main" id="{D5501552-3E8D-AC46-ADA9-3E2E03330691}"/>
+                <a16:creationId xmlns:a16="http://schemas.microsoft.com/office/drawing/2014/main" id="{3C3ECCBF-8EFC-6D13-D50B-5019622637E6}"/>
               </a:ext>
             </a:extLst>
           </p:cNvPr>
@@ -8308,13 +9109,194 @@
           <a:p>
             <a:r>
               <a:rPr lang="en-US" dirty="0"/>
+              <a:t>Agenda</a:t>
+            </a:r>
+          </a:p>
+        </p:txBody>
+      </p:sp>
+      <p:sp>
+        <p:nvSpPr>
+          <p:cNvPr id="6" name="Content Placeholder 5">
+            <a:extLst>
+              <a:ext uri="{FF2B5EF4-FFF2-40B4-BE49-F238E27FC236}">
+                <a16:creationId xmlns:a16="http://schemas.microsoft.com/office/drawing/2014/main" id="{94013981-ACB9-2986-FB50-3CE8CA55C03A}"/>
+              </a:ext>
+            </a:extLst>
+          </p:cNvPr>
+          <p:cNvSpPr>
+            <a:spLocks noGrp="1"/>
+          </p:cNvSpPr>
+          <p:nvPr>
+            <p:ph idx="1"/>
+          </p:nvPr>
+        </p:nvSpPr>
+        <p:spPr/>
+        <p:txBody>
+          <a:bodyPr>
+            <a:normAutofit fontScale="92500" lnSpcReduction="20000"/>
+          </a:bodyPr>
+          <a:lstStyle/>
+          <a:p>
+            <a:r>
+              <a:rPr lang="en-US" dirty="0"/>
+              <a:t>Introduction to Catalan Numbers</a:t>
+            </a:r>
+          </a:p>
+          <a:p>
+            <a:pPr lvl="1"/>
+            <a:r>
+              <a:rPr lang="en-US" dirty="0"/>
+              <a:t>Definition </a:t>
+            </a:r>
+          </a:p>
+          <a:p>
+            <a:pPr lvl="1"/>
+            <a:r>
+              <a:rPr lang="en-US" dirty="0"/>
+              <a:t>Computer Uses</a:t>
+            </a:r>
+          </a:p>
+          <a:p>
+            <a:pPr lvl="1"/>
+            <a:r>
+              <a:rPr lang="en-US" dirty="0"/>
+              <a:t>Observations</a:t>
+            </a:r>
+          </a:p>
+          <a:p>
+            <a:r>
+              <a:rPr lang="en-US" dirty="0"/>
+              <a:t>Standard Implementations</a:t>
+            </a:r>
+          </a:p>
+          <a:p>
+            <a:pPr lvl="1"/>
+            <a:r>
+              <a:rPr lang="en-US" dirty="0"/>
+              <a:t>Naïve Recursion</a:t>
+            </a:r>
+          </a:p>
+          <a:p>
+            <a:pPr lvl="1"/>
+            <a:r>
+              <a:rPr lang="en-US" dirty="0"/>
+              <a:t>Memoized Recursion</a:t>
+            </a:r>
+          </a:p>
+          <a:p>
+            <a:pPr lvl="1"/>
+            <a:r>
+              <a:rPr lang="en-US" dirty="0"/>
+              <a:t>Iterative Dynamic Programming</a:t>
+            </a:r>
+          </a:p>
+          <a:p>
+            <a:r>
+              <a:rPr lang="en-US" dirty="0"/>
+              <a:t>Multithreaded Implementation</a:t>
+            </a:r>
+          </a:p>
+          <a:p>
+            <a:pPr lvl="1"/>
+            <a:r>
+              <a:rPr lang="en-US" dirty="0"/>
+              <a:t>Methodology</a:t>
+            </a:r>
+          </a:p>
+          <a:p>
+            <a:pPr lvl="1"/>
+            <a:r>
+              <a:rPr lang="en-US" dirty="0"/>
+              <a:t>Process Flow</a:t>
+            </a:r>
+          </a:p>
+          <a:p>
+            <a:pPr lvl="1"/>
+            <a:r>
+              <a:rPr lang="en-US" dirty="0"/>
+              <a:t>Results </a:t>
+            </a:r>
+          </a:p>
+          <a:p>
+            <a:pPr lvl="1"/>
+            <a:r>
+              <a:rPr lang="en-US" dirty="0"/>
+              <a:t>Performance  </a:t>
+            </a:r>
+          </a:p>
+          <a:p>
+            <a:pPr lvl="1"/>
+            <a:endParaRPr lang="en-US" dirty="0"/>
+          </a:p>
+          <a:p>
+            <a:pPr lvl="1"/>
+            <a:endParaRPr lang="en-US" dirty="0"/>
+          </a:p>
+          <a:p>
+            <a:endParaRPr lang="en-US" dirty="0"/>
+          </a:p>
+        </p:txBody>
+      </p:sp>
+    </p:spTree>
+    <p:extLst>
+      <p:ext uri="{BB962C8B-B14F-4D97-AF65-F5344CB8AC3E}">
+        <p14:creationId xmlns:p14="http://schemas.microsoft.com/office/powerpoint/2010/main" val="3751221244"/>
+      </p:ext>
+    </p:extLst>
+  </p:cSld>
+  <p:clrMapOvr>
+    <a:masterClrMapping/>
+  </p:clrMapOvr>
+</p:sld>
+</file>
+
+<file path=ppt/slides/slide3.xml><?xml version="1.0" encoding="utf-8"?>
+<p:sld xmlns:a="http://schemas.openxmlformats.org/drawingml/2006/main" xmlns:r="http://schemas.openxmlformats.org/officeDocument/2006/relationships" xmlns:p="http://schemas.openxmlformats.org/presentationml/2006/main">
+  <p:cSld>
+    <p:spTree>
+      <p:nvGrpSpPr>
+        <p:cNvPr id="1" name=""/>
+        <p:cNvGrpSpPr/>
+        <p:nvPr/>
+      </p:nvGrpSpPr>
+      <p:grpSpPr>
+        <a:xfrm>
+          <a:off x="0" y="0"/>
+          <a:ext cx="0" cy="0"/>
+          <a:chOff x="0" y="0"/>
+          <a:chExt cx="0" cy="0"/>
+        </a:xfrm>
+      </p:grpSpPr>
+      <p:sp>
+        <p:nvSpPr>
+          <p:cNvPr id="2" name="Title 1">
+            <a:extLst>
+              <a:ext uri="{FF2B5EF4-FFF2-40B4-BE49-F238E27FC236}">
+                <a16:creationId xmlns:a16="http://schemas.microsoft.com/office/drawing/2014/main" id="{D5501552-3E8D-AC46-ADA9-3E2E03330691}"/>
+              </a:ext>
+            </a:extLst>
+          </p:cNvPr>
+          <p:cNvSpPr>
+            <a:spLocks noGrp="1"/>
+          </p:cNvSpPr>
+          <p:nvPr>
+            <p:ph type="title"/>
+          </p:nvPr>
+        </p:nvSpPr>
+        <p:spPr/>
+        <p:txBody>
+          <a:bodyPr/>
+          <a:lstStyle/>
+          <a:p>
+            <a:r>
+              <a:rPr lang="en-US" dirty="0"/>
               <a:t>Catalan Numbers</a:t>
             </a:r>
           </a:p>
         </p:txBody>
       </p:sp>
-      <mc:AlternateContent xmlns:mc="http://schemas.openxmlformats.org/markup-compatibility/2006">
-        <mc:Choice xmlns:a14="http://schemas.microsoft.com/office/drawing/2010/main" Requires="a14">
+      <mc:AlternateContent xmlns:mc="http://schemas.openxmlformats.org/markup-compatibility/2006" xmlns:a14="http://schemas.microsoft.com/office/drawing/2010/main">
+        <mc:Choice Requires="a14">
           <p:sp>
             <p:nvSpPr>
               <p:cNvPr id="3" name="Content Placeholder 2">
@@ -8331,12 +9313,7 @@
                 <p:ph idx="1"/>
               </p:nvPr>
             </p:nvSpPr>
-            <p:spPr>
-              <a:xfrm>
-                <a:off x="402264" y="1825625"/>
-                <a:ext cx="7714693" cy="4351339"/>
-              </a:xfrm>
-            </p:spPr>
+            <p:spPr/>
             <p:txBody>
               <a:bodyPr>
                 <a:normAutofit fontScale="92500" lnSpcReduction="10000"/>
@@ -8370,7 +9347,8 @@
                     <m:sSub>
                       <m:sSubPr>
                         <m:ctrlPr>
-                          <a:rPr lang="en-US" dirty="0">
+                          <a:rPr lang="en-US" i="1" dirty="0">
+                            <a:latin typeface="Cambria Math" panose="02040503050406030204" pitchFamily="18" charset="0"/>
                             <a:ea typeface="Cambria Math" panose="02040503050406030204" pitchFamily="18" charset="0"/>
                           </a:rPr>
                         </m:ctrlPr>
@@ -8378,6 +9356,7 @@
                       <m:e>
                         <m:r>
                           <a:rPr lang="en-US" b="0" i="1" dirty="0">
+                            <a:latin typeface="Cambria Math" panose="02040503050406030204" pitchFamily="18" charset="0"/>
                             <a:ea typeface="Cambria Math" panose="02040503050406030204" pitchFamily="18" charset="0"/>
                           </a:rPr>
                           <m:t>𝐶</m:t>
@@ -8386,6 +9365,7 @@
                       <m:sub>
                         <m:r>
                           <a:rPr lang="en-US" b="0" i="1" dirty="0">
+                            <a:latin typeface="Cambria Math" panose="02040503050406030204" pitchFamily="18" charset="0"/>
                             <a:ea typeface="Cambria Math" panose="02040503050406030204" pitchFamily="18" charset="0"/>
                           </a:rPr>
                           <m:t>𝑛</m:t>
@@ -8492,7 +9472,14 @@
                               <a:latin typeface="Cambria Math" panose="02040503050406030204" pitchFamily="18" charset="0"/>
                               <a:ea typeface="Cambria Math" panose="02040503050406030204" pitchFamily="18" charset="0"/>
                             </a:rPr>
-                            <m:t>+1</m:t>
+                            <m:t>+</m:t>
+                          </m:r>
+                          <m:r>
+                            <a:rPr lang="en-US" b="0" i="1" smtClean="0">
+                              <a:latin typeface="Cambria Math" panose="02040503050406030204" pitchFamily="18" charset="0"/>
+                              <a:ea typeface="Cambria Math" panose="02040503050406030204" pitchFamily="18" charset="0"/>
+                            </a:rPr>
+                            <m:t>1</m:t>
                           </m:r>
                         </m:den>
                       </m:f>
@@ -8623,7 +9610,13 @@
                             <a:rPr lang="en-US" b="0" i="1" smtClean="0">
                               <a:latin typeface="Cambria Math" panose="02040503050406030204" pitchFamily="18" charset="0"/>
                             </a:rPr>
-                            <m:t>=0</m:t>
+                            <m:t>=</m:t>
+                          </m:r>
+                          <m:r>
+                            <a:rPr lang="en-US" b="0" i="1" smtClean="0">
+                              <a:latin typeface="Cambria Math" panose="02040503050406030204" pitchFamily="18" charset="0"/>
+                            </a:rPr>
+                            <m:t>0</m:t>
                           </m:r>
                         </m:sub>
                         <m:sup>
@@ -8637,7 +9630,13 @@
                             <a:rPr lang="en-US" b="0" i="1" smtClean="0">
                               <a:latin typeface="Cambria Math" panose="02040503050406030204" pitchFamily="18" charset="0"/>
                             </a:rPr>
-                            <m:t>−1</m:t>
+                            <m:t>−</m:t>
+                          </m:r>
+                          <m:r>
+                            <a:rPr lang="en-US" b="0" i="1" smtClean="0">
+                              <a:latin typeface="Cambria Math" panose="02040503050406030204" pitchFamily="18" charset="0"/>
+                            </a:rPr>
+                            <m:t>1</m:t>
                           </m:r>
                         </m:sup>
                         <m:e>
@@ -8693,7 +9692,19 @@
                                 <a:rPr lang="en-US" b="0" i="1" smtClean="0">
                                   <a:latin typeface="Cambria Math" panose="02040503050406030204" pitchFamily="18" charset="0"/>
                                 </a:rPr>
-                                <m:t>−1−</m:t>
+                                <m:t>−</m:t>
+                              </m:r>
+                              <m:r>
+                                <a:rPr lang="en-US" b="0" i="1" smtClean="0">
+                                  <a:latin typeface="Cambria Math" panose="02040503050406030204" pitchFamily="18" charset="0"/>
+                                </a:rPr>
+                                <m:t>1</m:t>
+                              </m:r>
+                              <m:r>
+                                <a:rPr lang="en-US" b="0" i="1" smtClean="0">
+                                  <a:latin typeface="Cambria Math" panose="02040503050406030204" pitchFamily="18" charset="0"/>
+                                </a:rPr>
+                                <m:t>−</m:t>
                               </m:r>
                               <m:r>
                                 <a:rPr lang="en-US" b="0" i="1" smtClean="0">
@@ -8713,7 +9724,7 @@
             </p:txBody>
           </p:sp>
         </mc:Choice>
-        <mc:Fallback>
+        <mc:Fallback xmlns="">
           <p:sp>
             <p:nvSpPr>
               <p:cNvPr id="3" name="Content Placeholder 2">
@@ -8731,14 +9742,10 @@
               </p:nvPr>
             </p:nvSpPr>
             <p:spPr>
-              <a:xfrm>
-                <a:off x="402264" y="1825625"/>
-                <a:ext cx="7714693" cy="4351339"/>
-              </a:xfrm>
               <a:blipFill>
                 <a:blip r:embed="rId2"/>
                 <a:stretch>
-                  <a:fillRect l="-1264" t="-3081"/>
+                  <a:fillRect l="-855" t="-3081"/>
                 </a:stretch>
               </a:blipFill>
             </p:spPr>
@@ -8759,10 +9766,10 @@
       </mc:AlternateContent>
       <p:sp>
         <p:nvSpPr>
-          <p:cNvPr id="8" name="Footer Placeholder 7">
+          <p:cNvPr id="4" name="Slide Number Placeholder 3">
             <a:extLst>
               <a:ext uri="{FF2B5EF4-FFF2-40B4-BE49-F238E27FC236}">
-                <a16:creationId xmlns:a16="http://schemas.microsoft.com/office/drawing/2014/main" id="{EB74D134-B645-6440-A1F5-73CEC1A36CEC}"/>
+                <a16:creationId xmlns:a16="http://schemas.microsoft.com/office/drawing/2014/main" id="{84F26978-6B2D-C27B-82B2-547722CAD4B6}"/>
               </a:ext>
             </a:extLst>
           </p:cNvPr>
@@ -8770,7 +9777,7 @@
             <a:spLocks noGrp="1"/>
           </p:cNvSpPr>
           <p:nvPr>
-            <p:ph type="ftr" sz="quarter" idx="11"/>
+            <p:ph type="sldNum" sz="quarter" idx="12"/>
           </p:nvPr>
         </p:nvSpPr>
         <p:spPr/>
@@ -8778,335 +9785,19 @@
           <a:bodyPr/>
           <a:lstStyle/>
           <a:p>
-            <a:r>
-              <a:rPr lang="en-US" dirty="0"/>
-              <a:t>UNIVERSITY OF SOUTH FLORIDA</a:t>
-            </a:r>
-          </a:p>
-        </p:txBody>
-      </p:sp>
-      <p:pic>
-        <p:nvPicPr>
-          <p:cNvPr id="11" name="Content Placeholder 6">
-            <a:extLst>
-              <a:ext uri="{FF2B5EF4-FFF2-40B4-BE49-F238E27FC236}">
-                <a16:creationId xmlns:a16="http://schemas.microsoft.com/office/drawing/2014/main" id="{8F602B06-601E-6787-0493-5B1BFCFED8E6}"/>
-              </a:ext>
-            </a:extLst>
-          </p:cNvPr>
-          <p:cNvPicPr>
-            <a:picLocks noChangeAspect="1"/>
-          </p:cNvPicPr>
-          <p:nvPr/>
-        </p:nvPicPr>
-        <p:blipFill>
-          <a:blip r:embed="rId3"/>
-          <a:srcRect r="29798"/>
-          <a:stretch>
-            <a:fillRect/>
-          </a:stretch>
-        </p:blipFill>
-        <p:spPr>
-          <a:xfrm>
-            <a:off x="7137741" y="3591485"/>
-            <a:ext cx="5054259" cy="2399878"/>
-          </a:xfrm>
-          <a:prstGeom prst="rect">
-            <a:avLst/>
-          </a:prstGeom>
-        </p:spPr>
-      </p:pic>
+            <a:fld id="{63954337-777C-478F-BB37-379719107E1B}" type="slidenum">
+              <a:rPr lang="en-US" smtClean="0"/>
+              <a:pPr/>
+              <a:t>3</a:t>
+            </a:fld>
+            <a:endParaRPr lang="en-US" dirty="0"/>
+          </a:p>
+        </p:txBody>
+      </p:sp>
     </p:spTree>
     <p:extLst>
       <p:ext uri="{BB962C8B-B14F-4D97-AF65-F5344CB8AC3E}">
         <p14:creationId xmlns:p14="http://schemas.microsoft.com/office/powerpoint/2010/main" val="332255437"/>
-      </p:ext>
-    </p:extLst>
-  </p:cSld>
-  <p:clrMapOvr>
-    <a:masterClrMapping/>
-  </p:clrMapOvr>
-</p:sld>
-</file>
-
-<file path=ppt/slides/slide3.xml><?xml version="1.0" encoding="utf-8"?>
-<p:sld xmlns:a="http://schemas.openxmlformats.org/drawingml/2006/main" xmlns:r="http://schemas.openxmlformats.org/officeDocument/2006/relationships" xmlns:p="http://schemas.openxmlformats.org/presentationml/2006/main">
-  <p:cSld>
-    <p:spTree>
-      <p:nvGrpSpPr>
-        <p:cNvPr id="1" name=""/>
-        <p:cNvGrpSpPr/>
-        <p:nvPr/>
-      </p:nvGrpSpPr>
-      <p:grpSpPr>
-        <a:xfrm>
-          <a:off x="0" y="0"/>
-          <a:ext cx="0" cy="0"/>
-          <a:chOff x="0" y="0"/>
-          <a:chExt cx="0" cy="0"/>
-        </a:xfrm>
-      </p:grpSpPr>
-      <p:sp>
-        <p:nvSpPr>
-          <p:cNvPr id="4" name="Title 3">
-            <a:extLst>
-              <a:ext uri="{FF2B5EF4-FFF2-40B4-BE49-F238E27FC236}">
-                <a16:creationId xmlns:a16="http://schemas.microsoft.com/office/drawing/2014/main" id="{BE36D3A8-FA91-5B17-8129-5BF37FDF3D5B}"/>
-              </a:ext>
-            </a:extLst>
-          </p:cNvPr>
-          <p:cNvSpPr>
-            <a:spLocks noGrp="1"/>
-          </p:cNvSpPr>
-          <p:nvPr>
-            <p:ph type="title"/>
-          </p:nvPr>
-        </p:nvSpPr>
-        <p:spPr>
-          <a:xfrm>
-            <a:off x="402265" y="365125"/>
-            <a:ext cx="4127402" cy="1325563"/>
-          </a:xfrm>
-        </p:spPr>
-        <p:txBody>
-          <a:bodyPr/>
-          <a:lstStyle/>
-          <a:p>
-            <a:r>
-              <a:rPr lang="en-US" dirty="0"/>
-              <a:t>Computer Uses</a:t>
-            </a:r>
-          </a:p>
-        </p:txBody>
-      </p:sp>
-      <p:sp>
-        <p:nvSpPr>
-          <p:cNvPr id="5" name="Footer Placeholder 4">
-            <a:extLst>
-              <a:ext uri="{FF2B5EF4-FFF2-40B4-BE49-F238E27FC236}">
-                <a16:creationId xmlns:a16="http://schemas.microsoft.com/office/drawing/2014/main" id="{740ACE8A-2C8F-4DB4-4DD8-CA2540E4D273}"/>
-              </a:ext>
-            </a:extLst>
-          </p:cNvPr>
-          <p:cNvSpPr>
-            <a:spLocks noGrp="1"/>
-          </p:cNvSpPr>
-          <p:nvPr>
-            <p:ph type="ftr" sz="quarter" idx="11"/>
-          </p:nvPr>
-        </p:nvSpPr>
-        <p:spPr/>
-        <p:txBody>
-          <a:bodyPr/>
-          <a:lstStyle/>
-          <a:p>
-            <a:r>
-              <a:rPr lang="en-US"/>
-              <a:t>UNIVERSITY OF SOUTH FLORIDA</a:t>
-            </a:r>
-            <a:endParaRPr lang="en-US" dirty="0"/>
-          </a:p>
-        </p:txBody>
-      </p:sp>
-      <p:sp>
-        <p:nvSpPr>
-          <p:cNvPr id="15" name="Content Placeholder 14">
-            <a:extLst>
-              <a:ext uri="{FF2B5EF4-FFF2-40B4-BE49-F238E27FC236}">
-                <a16:creationId xmlns:a16="http://schemas.microsoft.com/office/drawing/2014/main" id="{3B01056E-C516-443B-4EE7-4EB9E0819989}"/>
-              </a:ext>
-            </a:extLst>
-          </p:cNvPr>
-          <p:cNvSpPr>
-            <a:spLocks noGrp="1"/>
-          </p:cNvSpPr>
-          <p:nvPr>
-            <p:ph sz="half" idx="1"/>
-          </p:nvPr>
-        </p:nvSpPr>
-        <p:spPr>
-          <a:xfrm>
-            <a:off x="402263" y="1799674"/>
-            <a:ext cx="5693737" cy="4351339"/>
-          </a:xfrm>
-        </p:spPr>
-        <p:txBody>
-          <a:bodyPr>
-            <a:normAutofit fontScale="92500" lnSpcReduction="20000"/>
-          </a:bodyPr>
-          <a:lstStyle/>
-          <a:p>
-            <a:pPr marL="0" indent="0">
-              <a:buNone/>
-            </a:pPr>
-            <a:r>
-              <a:rPr lang="en-US" dirty="0"/>
-              <a:t>“This is probably the longest entry in the OEIS, and rightly so.” (OEIS)</a:t>
-            </a:r>
-          </a:p>
-          <a:p>
-            <a:r>
-              <a:rPr lang="en-US" b="1" dirty="0">
-                <a:solidFill>
-                  <a:srgbClr val="455F69"/>
-                </a:solidFill>
-              </a:rPr>
-              <a:t>Balanced parenthesis: </a:t>
-            </a:r>
-            <a:r>
-              <a:rPr lang="en-US" dirty="0"/>
-              <a:t>nu</a:t>
-            </a:r>
-            <a:r>
-              <a:rPr lang="en-US" dirty="0">
-                <a:solidFill>
-                  <a:srgbClr val="455F69"/>
-                </a:solidFill>
-              </a:rPr>
-              <a:t>m</a:t>
-            </a:r>
-            <a:r>
-              <a:rPr lang="en-US" dirty="0"/>
-              <a:t>ber of ways to insert n pairs of parentheses in a word of n+1 letters.</a:t>
-            </a:r>
-          </a:p>
-          <a:p>
-            <a:r>
-              <a:rPr lang="en-US" b="1" dirty="0">
-                <a:solidFill>
-                  <a:srgbClr val="455F69"/>
-                </a:solidFill>
-              </a:rPr>
-              <a:t>Non-intersecting chords: </a:t>
-            </a:r>
-            <a:r>
-              <a:rPr lang="en-US" dirty="0"/>
-              <a:t>Number of ways of joining 2n points on a circle to form n nonintersecting chords</a:t>
-            </a:r>
-          </a:p>
-          <a:p>
-            <a:r>
-              <a:rPr lang="en-US" b="1" dirty="0">
-                <a:solidFill>
-                  <a:srgbClr val="455F69"/>
-                </a:solidFill>
-              </a:rPr>
-              <a:t>Binary Trees: </a:t>
-            </a:r>
-            <a:r>
-              <a:rPr lang="en-US" dirty="0"/>
-              <a:t>number of rooted binary trees with n internal nodes.</a:t>
-            </a:r>
-          </a:p>
-          <a:p>
-            <a:r>
-              <a:rPr lang="en-US" dirty="0"/>
-              <a:t>…</a:t>
-            </a:r>
-          </a:p>
-          <a:p>
-            <a:endParaRPr lang="en-US" dirty="0"/>
-          </a:p>
-        </p:txBody>
-      </p:sp>
-      <p:pic>
-        <p:nvPicPr>
-          <p:cNvPr id="18" name="Content Placeholder 21">
-            <a:extLst>
-              <a:ext uri="{FF2B5EF4-FFF2-40B4-BE49-F238E27FC236}">
-                <a16:creationId xmlns:a16="http://schemas.microsoft.com/office/drawing/2014/main" id="{2D4CEBBF-0110-FADA-C6C4-37DA4C4D0327}"/>
-              </a:ext>
-            </a:extLst>
-          </p:cNvPr>
-          <p:cNvPicPr>
-            <a:picLocks noGrp="1" noChangeAspect="1"/>
-          </p:cNvPicPr>
-          <p:nvPr>
-            <p:ph sz="half" idx="2"/>
-          </p:nvPr>
-        </p:nvPicPr>
-        <p:blipFill>
-          <a:blip r:embed="rId2"/>
-          <a:stretch>
-            <a:fillRect/>
-          </a:stretch>
-        </p:blipFill>
-        <p:spPr>
-          <a:xfrm>
-            <a:off x="6489198" y="1690688"/>
-            <a:ext cx="5167363" cy="2722013"/>
-          </a:xfrm>
-          <a:prstGeom prst="rect">
-            <a:avLst/>
-          </a:prstGeom>
-        </p:spPr>
-      </p:pic>
-      <p:pic>
-        <p:nvPicPr>
-          <p:cNvPr id="23" name="Picture 22">
-            <a:extLst>
-              <a:ext uri="{FF2B5EF4-FFF2-40B4-BE49-F238E27FC236}">
-                <a16:creationId xmlns:a16="http://schemas.microsoft.com/office/drawing/2014/main" id="{8A909B30-B3AA-05F9-F468-971F488582ED}"/>
-              </a:ext>
-            </a:extLst>
-          </p:cNvPr>
-          <p:cNvPicPr>
-            <a:picLocks noChangeAspect="1"/>
-          </p:cNvPicPr>
-          <p:nvPr/>
-        </p:nvPicPr>
-        <p:blipFill>
-          <a:blip r:embed="rId3"/>
-          <a:srcRect l="3809" r="4593"/>
-          <a:stretch>
-            <a:fillRect/>
-          </a:stretch>
-        </p:blipFill>
-        <p:spPr>
-          <a:xfrm>
-            <a:off x="9269229" y="4412701"/>
-            <a:ext cx="2852421" cy="1624528"/>
-          </a:xfrm>
-          <a:prstGeom prst="rect">
-            <a:avLst/>
-          </a:prstGeom>
-        </p:spPr>
-      </p:pic>
-      <p:pic>
-        <p:nvPicPr>
-          <p:cNvPr id="20" name="Picture 19">
-            <a:extLst>
-              <a:ext uri="{FF2B5EF4-FFF2-40B4-BE49-F238E27FC236}">
-                <a16:creationId xmlns:a16="http://schemas.microsoft.com/office/drawing/2014/main" id="{9909F366-477B-9271-B9D2-D908089A0298}"/>
-              </a:ext>
-            </a:extLst>
-          </p:cNvPr>
-          <p:cNvPicPr>
-            <a:picLocks noChangeAspect="1"/>
-          </p:cNvPicPr>
-          <p:nvPr/>
-        </p:nvPicPr>
-        <p:blipFill>
-          <a:blip r:embed="rId4"/>
-          <a:srcRect l="2003" r="2566"/>
-          <a:stretch>
-            <a:fillRect/>
-          </a:stretch>
-        </p:blipFill>
-        <p:spPr>
-          <a:xfrm>
-            <a:off x="6489198" y="4412701"/>
-            <a:ext cx="2722881" cy="1754465"/>
-          </a:xfrm>
-          <a:prstGeom prst="rect">
-            <a:avLst/>
-          </a:prstGeom>
-        </p:spPr>
-      </p:pic>
-    </p:spTree>
-    <p:extLst>
-      <p:ext uri="{BB962C8B-B14F-4D97-AF65-F5344CB8AC3E}">
-        <p14:creationId xmlns:p14="http://schemas.microsoft.com/office/powerpoint/2010/main" val="42586590"/>
       </p:ext>
     </p:extLst>
   </p:cSld>
@@ -9133,371 +9824,12 @@
           <a:chExt cx="0" cy="0"/>
         </a:xfrm>
       </p:grpSpPr>
-      <mc:AlternateContent xmlns:mc="http://schemas.openxmlformats.org/markup-compatibility/2006">
-        <mc:Choice xmlns:a14="http://schemas.microsoft.com/office/drawing/2010/main" Requires="a14">
-          <p:sp>
-            <p:nvSpPr>
-              <p:cNvPr id="2" name="Content Placeholder 1">
-                <a:extLst>
-                  <a:ext uri="{FF2B5EF4-FFF2-40B4-BE49-F238E27FC236}">
-                    <a16:creationId xmlns:a16="http://schemas.microsoft.com/office/drawing/2014/main" id="{3671555A-F350-3CF8-04A4-71144124F362}"/>
-                  </a:ext>
-                </a:extLst>
-              </p:cNvPr>
-              <p:cNvSpPr>
-                <a:spLocks noGrp="1"/>
-              </p:cNvSpPr>
-              <p:nvPr>
-                <p:ph sz="half" idx="1"/>
-              </p:nvPr>
-            </p:nvSpPr>
-            <p:spPr>
-              <a:xfrm>
-                <a:off x="401638" y="1800225"/>
-                <a:ext cx="5862002" cy="4351338"/>
-              </a:xfrm>
-            </p:spPr>
-            <p:txBody>
-              <a:bodyPr>
-                <a:normAutofit/>
-              </a:bodyPr>
-              <a:lstStyle/>
-              <a:p>
-                <a14:m>
-                  <m:oMath xmlns:m="http://schemas.openxmlformats.org/officeDocument/2006/math">
-                    <m:sSub>
-                      <m:sSubPr>
-                        <m:ctrlPr>
-                          <a:rPr lang="en-US" i="1" dirty="0" smtClean="0">
-                            <a:latin typeface="Cambria Math" panose="02040503050406030204" pitchFamily="18" charset="0"/>
-                          </a:rPr>
-                        </m:ctrlPr>
-                      </m:sSubPr>
-                      <m:e>
-                        <m:r>
-                          <a:rPr lang="en-US" i="1" dirty="0" smtClean="0">
-                            <a:latin typeface="Cambria Math" panose="02040503050406030204" pitchFamily="18" charset="0"/>
-                          </a:rPr>
-                          <m:t>𝐶</m:t>
-                        </m:r>
-                      </m:e>
-                      <m:sub>
-                        <m:r>
-                          <a:rPr lang="en-US" i="1" dirty="0" smtClean="0">
-                            <a:latin typeface="Cambria Math" panose="02040503050406030204" pitchFamily="18" charset="0"/>
-                          </a:rPr>
-                          <m:t>𝑛</m:t>
-                        </m:r>
-                      </m:sub>
-                    </m:sSub>
-                    <m:r>
-                      <a:rPr lang="en-US" b="0" i="0" dirty="0" smtClean="0">
-                        <a:latin typeface="Cambria Math" panose="02040503050406030204" pitchFamily="18" charset="0"/>
-                      </a:rPr>
-                      <m:t> </m:t>
-                    </m:r>
-                  </m:oMath>
-                </a14:m>
-                <a:r>
-                  <a:rPr lang="en-US" dirty="0"/>
-                  <a:t>grows exponentially!</a:t>
-                </a:r>
-              </a:p>
-              <a:p>
-                <a:pPr/>
-                <a:r>
-                  <a:rPr lang="en-US" i="0" dirty="0">
-                    <a:latin typeface="+mj-lt"/>
-                  </a:rPr>
-                  <a:t>Time Complexity</a:t>
-                </a:r>
-                <a:endParaRPr lang="en-US" i="1" dirty="0">
-                  <a:latin typeface="Cambria Math" panose="02040503050406030204" pitchFamily="18" charset="0"/>
-                </a:endParaRPr>
-              </a:p>
-              <a:p>
-                <a:pPr lvl="1"/>
-                <a14:m>
-                  <m:oMath xmlns:m="http://schemas.openxmlformats.org/officeDocument/2006/math">
-                    <m:r>
-                      <m:rPr>
-                        <m:sty m:val="p"/>
-                      </m:rPr>
-                      <a:rPr lang="en-US" b="0" i="0" dirty="0" smtClean="0">
-                        <a:latin typeface="Cambria Math" panose="02040503050406030204" pitchFamily="18" charset="0"/>
-                      </a:rPr>
-                      <m:t>Dp</m:t>
-                    </m:r>
-                    <m:r>
-                      <a:rPr lang="en-US" dirty="0" smtClean="0">
-                        <a:latin typeface="Cambria Math" panose="02040503050406030204" pitchFamily="18" charset="0"/>
-                      </a:rPr>
-                      <m:t>=</m:t>
-                    </m:r>
-                    <m:r>
-                      <a:rPr lang="en-US" dirty="0" smtClean="0">
-                        <a:latin typeface="Cambria Math" panose="02040503050406030204" pitchFamily="18" charset="0"/>
-                      </a:rPr>
-                      <m:t>𝑂</m:t>
-                    </m:r>
-                    <m:d>
-                      <m:dPr>
-                        <m:ctrlPr>
-                          <a:rPr lang="en-US" i="1" dirty="0" smtClean="0">
-                            <a:latin typeface="Cambria Math" panose="02040503050406030204" pitchFamily="18" charset="0"/>
-                          </a:rPr>
-                        </m:ctrlPr>
-                      </m:dPr>
-                      <m:e>
-                        <m:sSup>
-                          <m:sSupPr>
-                            <m:ctrlPr>
-                              <a:rPr lang="en-US" i="1" dirty="0" smtClean="0">
-                                <a:latin typeface="Cambria Math" panose="02040503050406030204" pitchFamily="18" charset="0"/>
-                              </a:rPr>
-                            </m:ctrlPr>
-                          </m:sSupPr>
-                          <m:e>
-                            <m:r>
-                              <a:rPr lang="en-US" dirty="0" smtClean="0">
-                                <a:latin typeface="Cambria Math" panose="02040503050406030204" pitchFamily="18" charset="0"/>
-                              </a:rPr>
-                              <m:t>𝑛</m:t>
-                            </m:r>
-                          </m:e>
-                          <m:sup>
-                            <m:r>
-                              <a:rPr lang="en-US" dirty="0" smtClean="0">
-                                <a:latin typeface="Cambria Math" panose="02040503050406030204" pitchFamily="18" charset="0"/>
-                              </a:rPr>
-                              <m:t>2</m:t>
-                            </m:r>
-                          </m:sup>
-                        </m:sSup>
-                      </m:e>
-                    </m:d>
-                  </m:oMath>
-                </a14:m>
-                <a:endParaRPr lang="en-US" dirty="0"/>
-              </a:p>
-              <a:p>
-                <a:pPr lvl="1"/>
-                <a14:m>
-                  <m:oMath xmlns:m="http://schemas.openxmlformats.org/officeDocument/2006/math">
-                    <m:r>
-                      <a:rPr lang="en-US" i="1" dirty="0" smtClean="0">
-                        <a:latin typeface="Cambria Math" panose="02040503050406030204" pitchFamily="18" charset="0"/>
-                      </a:rPr>
-                      <m:t>𝑁𝑎</m:t>
-                    </m:r>
-                    <m:r>
-                      <a:rPr lang="en-US" i="1" dirty="0" smtClean="0">
-                        <a:latin typeface="Cambria Math" panose="02040503050406030204" pitchFamily="18" charset="0"/>
-                      </a:rPr>
-                      <m:t>ï</m:t>
-                    </m:r>
-                    <m:r>
-                      <a:rPr lang="en-US" i="1" dirty="0" smtClean="0">
-                        <a:latin typeface="Cambria Math" panose="02040503050406030204" pitchFamily="18" charset="0"/>
-                      </a:rPr>
-                      <m:t>𝑣𝑒</m:t>
-                    </m:r>
-                    <m:r>
-                      <a:rPr lang="en-US" i="1" dirty="0" smtClean="0">
-                        <a:latin typeface="Cambria Math" panose="02040503050406030204" pitchFamily="18" charset="0"/>
-                      </a:rPr>
-                      <m:t> = </m:t>
-                    </m:r>
-                    <m:r>
-                      <a:rPr lang="en-US" i="1" dirty="0" smtClean="0">
-                        <a:latin typeface="Cambria Math" panose="02040503050406030204" pitchFamily="18" charset="0"/>
-                      </a:rPr>
-                      <m:t>𝑂</m:t>
-                    </m:r>
-                    <m:r>
-                      <a:rPr lang="en-US" i="1" dirty="0" smtClean="0">
-                        <a:latin typeface="Cambria Math" panose="02040503050406030204" pitchFamily="18" charset="0"/>
-                      </a:rPr>
-                      <m:t>(</m:t>
-                    </m:r>
-                    <m:sSup>
-                      <m:sSupPr>
-                        <m:ctrlPr>
-                          <a:rPr lang="en-US" i="1" dirty="0" smtClean="0">
-                            <a:latin typeface="Cambria Math" panose="02040503050406030204" pitchFamily="18" charset="0"/>
-                          </a:rPr>
-                        </m:ctrlPr>
-                      </m:sSupPr>
-                      <m:e>
-                        <m:r>
-                          <a:rPr lang="en-US" i="1" dirty="0" smtClean="0">
-                            <a:latin typeface="Cambria Math" panose="02040503050406030204" pitchFamily="18" charset="0"/>
-                          </a:rPr>
-                          <m:t>2</m:t>
-                        </m:r>
-                      </m:e>
-                      <m:sup>
-                        <m:r>
-                          <a:rPr lang="en-US" i="1" dirty="0" smtClean="0">
-                            <a:latin typeface="Cambria Math" panose="02040503050406030204" pitchFamily="18" charset="0"/>
-                          </a:rPr>
-                          <m:t>𝑛</m:t>
-                        </m:r>
-                      </m:sup>
-                    </m:sSup>
-                    <m:r>
-                      <a:rPr lang="en-US" i="1" dirty="0" smtClean="0">
-                        <a:latin typeface="Cambria Math" panose="02040503050406030204" pitchFamily="18" charset="0"/>
-                      </a:rPr>
-                      <m:t>)</m:t>
-                    </m:r>
-                  </m:oMath>
-                </a14:m>
-                <a:endParaRPr lang="en-US" dirty="0"/>
-              </a:p>
-              <a:p>
-                <a:r>
-                  <a:rPr lang="en-US" dirty="0"/>
-                  <a:t>Space complexity: </a:t>
-                </a:r>
-                <a14:m>
-                  <m:oMath xmlns:m="http://schemas.openxmlformats.org/officeDocument/2006/math">
-                    <m:r>
-                      <a:rPr lang="en-US" i="1" dirty="0" smtClean="0">
-                        <a:latin typeface="Cambria Math" panose="02040503050406030204" pitchFamily="18" charset="0"/>
-                      </a:rPr>
-                      <m:t>𝑂</m:t>
-                    </m:r>
-                    <m:r>
-                      <a:rPr lang="en-US" i="1" dirty="0" smtClean="0">
-                        <a:latin typeface="Cambria Math" panose="02040503050406030204" pitchFamily="18" charset="0"/>
-                      </a:rPr>
-                      <m:t>(</m:t>
-                    </m:r>
-                    <m:r>
-                      <a:rPr lang="en-US" i="1" dirty="0" smtClean="0">
-                        <a:latin typeface="Cambria Math" panose="02040503050406030204" pitchFamily="18" charset="0"/>
-                      </a:rPr>
-                      <m:t>𝑛</m:t>
-                    </m:r>
-                    <m:r>
-                      <a:rPr lang="en-US" i="1" dirty="0" smtClean="0">
-                        <a:latin typeface="Cambria Math" panose="02040503050406030204" pitchFamily="18" charset="0"/>
-                      </a:rPr>
-                      <m:t>)</m:t>
-                    </m:r>
-                  </m:oMath>
-                </a14:m>
-                <a:endParaRPr lang="en-US" dirty="0"/>
-              </a:p>
-              <a:p>
-                <a:pPr lvl="1"/>
-                <a:r>
-                  <a:rPr lang="en-US" dirty="0"/>
-                  <a:t>Must store all previous values</a:t>
-                </a:r>
-              </a:p>
-              <a:p>
-                <a:r>
-                  <a:rPr lang="en-US" dirty="0"/>
-                  <a:t>Integer overflow occurs quickly</a:t>
-                </a:r>
-              </a:p>
-              <a:p>
-                <a:pPr lvl="1"/>
-                <a:r>
-                  <a:rPr lang="en-US" dirty="0"/>
-                  <a:t>Limit reached around</a:t>
-                </a:r>
-                <a14:m>
-                  <m:oMath xmlns:m="http://schemas.openxmlformats.org/officeDocument/2006/math">
-                    <m:r>
-                      <a:rPr lang="en-US" b="0" i="0" dirty="0" smtClean="0">
-                        <a:latin typeface="Cambria Math" panose="02040503050406030204" pitchFamily="18" charset="0"/>
-                      </a:rPr>
-                      <m:t> </m:t>
-                    </m:r>
-                    <m:r>
-                      <a:rPr lang="en-US" i="1" dirty="0" smtClean="0">
-                        <a:latin typeface="Cambria Math" panose="02040503050406030204" pitchFamily="18" charset="0"/>
-                      </a:rPr>
-                      <m:t>𝑛</m:t>
-                    </m:r>
-                    <m:r>
-                      <a:rPr lang="en-US" b="0" i="1" dirty="0" smtClean="0">
-                        <a:latin typeface="Cambria Math" panose="02040503050406030204" pitchFamily="18" charset="0"/>
-                      </a:rPr>
-                      <m:t>≈</m:t>
-                    </m:r>
-                    <m:r>
-                      <a:rPr lang="en-US" i="1" dirty="0" smtClean="0">
-                        <a:latin typeface="Cambria Math" panose="02040503050406030204" pitchFamily="18" charset="0"/>
-                      </a:rPr>
-                      <m:t>3</m:t>
-                    </m:r>
-                    <m:r>
-                      <a:rPr lang="en-US" i="1" dirty="0">
-                        <a:latin typeface="Cambria Math" panose="02040503050406030204" pitchFamily="18" charset="0"/>
-                      </a:rPr>
-                      <m:t>2</m:t>
-                    </m:r>
-                  </m:oMath>
-                </a14:m>
-                <a:endParaRPr lang="en-US" dirty="0"/>
-              </a:p>
-            </p:txBody>
-          </p:sp>
-        </mc:Choice>
-        <mc:Fallback>
-          <p:sp>
-            <p:nvSpPr>
-              <p:cNvPr id="2" name="Content Placeholder 1">
-                <a:extLst>
-                  <a:ext uri="{FF2B5EF4-FFF2-40B4-BE49-F238E27FC236}">
-                    <a16:creationId xmlns:a16="http://schemas.microsoft.com/office/drawing/2014/main" id="{3671555A-F350-3CF8-04A4-71144124F362}"/>
-                  </a:ext>
-                </a:extLst>
-              </p:cNvPr>
-              <p:cNvSpPr>
-                <a:spLocks noGrp="1" noRot="1" noChangeAspect="1" noMove="1" noResize="1" noEditPoints="1" noAdjustHandles="1" noChangeArrowheads="1" noChangeShapeType="1" noTextEdit="1"/>
-              </p:cNvSpPr>
-              <p:nvPr>
-                <p:ph sz="half" idx="1"/>
-              </p:nvPr>
-            </p:nvSpPr>
-            <p:spPr>
-              <a:xfrm>
-                <a:off x="401638" y="1800225"/>
-                <a:ext cx="5862002" cy="4351338"/>
-              </a:xfrm>
-              <a:blipFill>
-                <a:blip r:embed="rId2"/>
-                <a:stretch>
-                  <a:fillRect l="-1871" t="-2381"/>
-                </a:stretch>
-              </a:blipFill>
-            </p:spPr>
-            <p:txBody>
-              <a:bodyPr/>
-              <a:lstStyle/>
-              <a:p>
-                <a:r>
-                  <a:rPr lang="en-US">
-                    <a:noFill/>
-                  </a:rPr>
-                  <a:t> </a:t>
-                </a:r>
-              </a:p>
-            </p:txBody>
-          </p:sp>
-        </mc:Fallback>
-      </mc:AlternateContent>
       <p:sp>
         <p:nvSpPr>
           <p:cNvPr id="4" name="Title 3">
             <a:extLst>
               <a:ext uri="{FF2B5EF4-FFF2-40B4-BE49-F238E27FC236}">
-                <a16:creationId xmlns:a16="http://schemas.microsoft.com/office/drawing/2014/main" id="{28AE832F-2D71-D278-EE41-040F14114463}"/>
+                <a16:creationId xmlns:a16="http://schemas.microsoft.com/office/drawing/2014/main" id="{BE36D3A8-FA91-5B17-8129-5BF37FDF3D5B}"/>
               </a:ext>
             </a:extLst>
           </p:cNvPr>
@@ -9510,8 +9842,8 @@
         </p:nvSpPr>
         <p:spPr>
           <a:xfrm>
-            <a:off x="402264" y="365125"/>
-            <a:ext cx="11410507" cy="1325563"/>
+            <a:off x="402265" y="365125"/>
+            <a:ext cx="4127402" cy="1325563"/>
           </a:xfrm>
         </p:spPr>
         <p:txBody>
@@ -9520,17 +9852,17 @@
           <a:p>
             <a:r>
               <a:rPr lang="en-US" dirty="0"/>
-              <a:t>Problem</a:t>
-            </a:r>
-          </a:p>
-        </p:txBody>
-      </p:sp>
-      <p:sp>
-        <p:nvSpPr>
-          <p:cNvPr id="5" name="Footer Placeholder 4">
+              <a:t>Computer Uses</a:t>
+            </a:r>
+          </a:p>
+        </p:txBody>
+      </p:sp>
+      <p:sp>
+        <p:nvSpPr>
+          <p:cNvPr id="15" name="Content Placeholder 14">
             <a:extLst>
               <a:ext uri="{FF2B5EF4-FFF2-40B4-BE49-F238E27FC236}">
-                <a16:creationId xmlns:a16="http://schemas.microsoft.com/office/drawing/2014/main" id="{10F8432E-66C9-8EB6-DD45-6FB8F2A47EAF}"/>
+                <a16:creationId xmlns:a16="http://schemas.microsoft.com/office/drawing/2014/main" id="{3B01056E-C516-443B-4EE7-4EB9E0819989}"/>
               </a:ext>
             </a:extLst>
           </p:cNvPr>
@@ -9538,33 +9870,103 @@
             <a:spLocks noGrp="1"/>
           </p:cNvSpPr>
           <p:nvPr>
-            <p:ph type="ftr" sz="quarter" idx="11"/>
+            <p:ph sz="half" idx="1"/>
           </p:nvPr>
         </p:nvSpPr>
         <p:spPr>
           <a:xfrm>
-            <a:off x="402264" y="6431775"/>
-            <a:ext cx="8061251" cy="273050"/>
-          </a:xfrm>
-        </p:spPr>
-        <p:txBody>
-          <a:bodyPr/>
+            <a:off x="402263" y="1799674"/>
+            <a:ext cx="6062545" cy="4351339"/>
+          </a:xfrm>
+        </p:spPr>
+        <p:txBody>
+          <a:bodyPr>
+            <a:normAutofit/>
+          </a:bodyPr>
           <a:lstStyle/>
           <a:p>
-            <a:r>
-              <a:rPr lang="en-US"/>
-              <a:t>UNIVERSITY OF SOUTH FLORIDA</a:t>
-            </a:r>
+            <a:pPr marL="0" indent="0">
+              <a:buNone/>
+            </a:pPr>
+            <a:r>
+              <a:rPr lang="en-US" b="1" dirty="0">
+                <a:solidFill>
+                  <a:srgbClr val="455F69"/>
+                </a:solidFill>
+              </a:rPr>
+              <a:t>Balanced parenthesis: </a:t>
+            </a:r>
+            <a:r>
+              <a:rPr lang="en-US" dirty="0"/>
+              <a:t>nu</a:t>
+            </a:r>
+            <a:r>
+              <a:rPr lang="en-US" dirty="0">
+                <a:solidFill>
+                  <a:srgbClr val="455F69"/>
+                </a:solidFill>
+              </a:rPr>
+              <a:t>m</a:t>
+            </a:r>
+            <a:r>
+              <a:rPr lang="en-US" dirty="0"/>
+              <a:t>ber of ways to insert n pairs of parentheses in a word of n+1 letters.</a:t>
+            </a:r>
+          </a:p>
+          <a:p>
+            <a:pPr marL="0" indent="0">
+              <a:buNone/>
+            </a:pPr>
+            <a:r>
+              <a:rPr lang="en-US" b="1" dirty="0">
+                <a:solidFill>
+                  <a:srgbClr val="455F69"/>
+                </a:solidFill>
+              </a:rPr>
+              <a:t>Non-intersecting chords: </a:t>
+            </a:r>
+            <a:r>
+              <a:rPr lang="en-US" dirty="0"/>
+              <a:t>Number of ways of joining 2n points on a circle to form n nonintersecting chords</a:t>
+            </a:r>
+          </a:p>
+          <a:p>
+            <a:pPr marL="0" indent="0">
+              <a:buNone/>
+            </a:pPr>
+            <a:r>
+              <a:rPr lang="en-US" b="1" dirty="0">
+                <a:solidFill>
+                  <a:srgbClr val="455F69"/>
+                </a:solidFill>
+              </a:rPr>
+              <a:t>Binary Trees: </a:t>
+            </a:r>
+            <a:r>
+              <a:rPr lang="en-US" dirty="0"/>
+              <a:t>number of rooted binary trees with n internal nodes.</a:t>
+            </a:r>
+          </a:p>
+          <a:p>
+            <a:pPr marL="0" indent="0">
+              <a:buNone/>
+            </a:pPr>
+            <a:r>
+              <a:rPr lang="en-US" dirty="0"/>
+              <a:t>… OEIS has many more examples!</a:t>
+            </a:r>
+          </a:p>
+          <a:p>
             <a:endParaRPr lang="en-US" dirty="0"/>
           </a:p>
         </p:txBody>
       </p:sp>
       <p:pic>
         <p:nvPicPr>
-          <p:cNvPr id="14" name="Content Placeholder 13">
+          <p:cNvPr id="18" name="Content Placeholder 21">
             <a:extLst>
               <a:ext uri="{FF2B5EF4-FFF2-40B4-BE49-F238E27FC236}">
-                <a16:creationId xmlns:a16="http://schemas.microsoft.com/office/drawing/2014/main" id="{930A92D6-CA05-13A8-79DC-04B63D637D01}"/>
+                <a16:creationId xmlns:a16="http://schemas.microsoft.com/office/drawing/2014/main" id="{2D4CEBBF-0110-FADA-C6C4-37DA4C4D0327}"/>
               </a:ext>
             </a:extLst>
           </p:cNvPr>
@@ -9576,331 +9978,117 @@
           </p:nvPr>
         </p:nvPicPr>
         <p:blipFill>
-          <a:blip r:embed="rId3"/>
+          <a:blip r:embed="rId2"/>
           <a:stretch>
             <a:fillRect/>
           </a:stretch>
         </p:blipFill>
         <p:spPr>
           <a:xfrm>
-            <a:off x="6395880" y="2185255"/>
-            <a:ext cx="5571977" cy="3163986"/>
+            <a:off x="6754374" y="70879"/>
+            <a:ext cx="5167363" cy="2722013"/>
           </a:xfrm>
           <a:prstGeom prst="rect">
             <a:avLst/>
           </a:prstGeom>
-          <a:ln>
-            <a:solidFill>
-              <a:schemeClr val="tx1"/>
-            </a:solidFill>
-          </a:ln>
         </p:spPr>
       </p:pic>
-      <p:cxnSp>
-        <p:nvCxnSpPr>
-          <p:cNvPr id="16" name="Straight Connector 15">
+      <p:pic>
+        <p:nvPicPr>
+          <p:cNvPr id="23" name="Picture 22">
             <a:extLst>
               <a:ext uri="{FF2B5EF4-FFF2-40B4-BE49-F238E27FC236}">
-                <a16:creationId xmlns:a16="http://schemas.microsoft.com/office/drawing/2014/main" id="{670B8CC0-94A3-3FBC-8E66-E22F56DE59DC}"/>
+                <a16:creationId xmlns:a16="http://schemas.microsoft.com/office/drawing/2014/main" id="{8A909B30-B3AA-05F9-F468-971F488582ED}"/>
               </a:ext>
             </a:extLst>
           </p:cNvPr>
-          <p:cNvCxnSpPr>
-            <a:cxnSpLocks/>
-          </p:cNvCxnSpPr>
+          <p:cNvPicPr>
+            <a:picLocks noChangeAspect="1"/>
+          </p:cNvPicPr>
           <p:nvPr/>
-        </p:nvCxnSpPr>
+        </p:nvPicPr>
+        <p:blipFill>
+          <a:blip r:embed="rId3"/>
+          <a:srcRect l="3809" r="4593"/>
+          <a:stretch>
+            <a:fillRect/>
+          </a:stretch>
+        </p:blipFill>
         <p:spPr>
-          <a:xfrm flipH="1">
-            <a:off x="10129651" y="2185255"/>
-            <a:ext cx="47501" cy="2826132"/>
-          </a:xfrm>
-          <a:prstGeom prst="line">
+          <a:xfrm>
+            <a:off x="7843017" y="4526485"/>
+            <a:ext cx="2852421" cy="1624528"/>
+          </a:xfrm>
+          <a:prstGeom prst="rect">
             <a:avLst/>
           </a:prstGeom>
-          <a:ln w="38100">
-            <a:solidFill>
-              <a:srgbClr val="FF0000">
-                <a:alpha val="57000"/>
-              </a:srgbClr>
-            </a:solidFill>
-            <a:prstDash val="sysDash"/>
-          </a:ln>
-        </p:spPr>
-        <p:style>
-          <a:lnRef idx="1">
-            <a:schemeClr val="accent1"/>
-          </a:lnRef>
-          <a:fillRef idx="0">
-            <a:schemeClr val="accent1"/>
-          </a:fillRef>
-          <a:effectRef idx="0">
-            <a:schemeClr val="accent1"/>
-          </a:effectRef>
-          <a:fontRef idx="minor">
-            <a:schemeClr val="tx1"/>
-          </a:fontRef>
-        </p:style>
-      </p:cxnSp>
-      <mc:AlternateContent xmlns:mc="http://schemas.openxmlformats.org/markup-compatibility/2006">
-        <mc:Choice xmlns:a14="http://schemas.microsoft.com/office/drawing/2010/main" Requires="a14">
-          <p:sp>
-            <p:nvSpPr>
-              <p:cNvPr id="22" name="TextBox 21">
-                <a:extLst>
-                  <a:ext uri="{FF2B5EF4-FFF2-40B4-BE49-F238E27FC236}">
-                    <a16:creationId xmlns:a16="http://schemas.microsoft.com/office/drawing/2014/main" id="{E109733F-D5DF-6C1B-73A0-89F062975101}"/>
-                  </a:ext>
-                </a:extLst>
-              </p:cNvPr>
-              <p:cNvSpPr txBox="1"/>
-              <p:nvPr/>
-            </p:nvSpPr>
-            <p:spPr>
-              <a:xfrm>
-                <a:off x="10305311" y="2316802"/>
-                <a:ext cx="1662546" cy="346615"/>
-              </a:xfrm>
-              <a:prstGeom prst="rect">
-                <a:avLst/>
-              </a:prstGeom>
-            </p:spPr>
-            <p:txBody>
-              <a:bodyPr vert="horz" lIns="91440" tIns="45720" rIns="91440" bIns="45720" rtlCol="0">
-                <a:normAutofit fontScale="85000" lnSpcReduction="10000"/>
-              </a:bodyPr>
-              <a:lstStyle>
-                <a:lvl1pPr marL="228594" indent="-228594">
-                  <a:lnSpc>
-                    <a:spcPct val="90000"/>
-                  </a:lnSpc>
-                  <a:spcBef>
-                    <a:spcPts val="1000"/>
-                  </a:spcBef>
-                  <a:buFont typeface="Arial" panose="020B0604020202020204" pitchFamily="34" charset="0"/>
-                  <a:buChar char="•"/>
-                  <a:defRPr sz="2800" i="1">
-                    <a:solidFill>
-                      <a:schemeClr val="tx2"/>
-                    </a:solidFill>
-                    <a:latin typeface="Cambria Math" panose="02040503050406030204" pitchFamily="18" charset="0"/>
-                  </a:defRPr>
-                </a:lvl1pPr>
-                <a:lvl2pPr marL="685783" lvl="1" indent="-228594">
-                  <a:lnSpc>
-                    <a:spcPct val="90000"/>
-                  </a:lnSpc>
-                  <a:spcBef>
-                    <a:spcPts val="500"/>
-                  </a:spcBef>
-                  <a:buFont typeface="Arial" panose="020B0604020202020204" pitchFamily="34" charset="0"/>
-                  <a:buChar char="•"/>
-                  <a:defRPr sz="2400" b="0" i="0">
-                    <a:solidFill>
-                      <a:schemeClr val="tx2"/>
-                    </a:solidFill>
-                    <a:latin typeface="Cambria Math" panose="02040503050406030204" pitchFamily="18" charset="0"/>
-                  </a:defRPr>
-                </a:lvl2pPr>
-                <a:lvl3pPr marL="1142971" indent="-228594">
-                  <a:lnSpc>
-                    <a:spcPct val="90000"/>
-                  </a:lnSpc>
-                  <a:spcBef>
-                    <a:spcPts val="500"/>
-                  </a:spcBef>
-                  <a:buFont typeface="Arial" panose="020B0604020202020204" pitchFamily="34" charset="0"/>
-                  <a:buChar char="•"/>
-                  <a:defRPr sz="2000">
-                    <a:solidFill>
-                      <a:schemeClr val="tx2"/>
-                    </a:solidFill>
-                  </a:defRPr>
-                </a:lvl3pPr>
-                <a:lvl4pPr marL="1600160" indent="-228594">
-                  <a:lnSpc>
-                    <a:spcPct val="90000"/>
-                  </a:lnSpc>
-                  <a:spcBef>
-                    <a:spcPts val="500"/>
-                  </a:spcBef>
-                  <a:buFont typeface="Arial" panose="020B0604020202020204" pitchFamily="34" charset="0"/>
-                  <a:buChar char="•"/>
-                  <a:defRPr>
-                    <a:solidFill>
-                      <a:schemeClr val="tx2"/>
-                    </a:solidFill>
-                  </a:defRPr>
-                </a:lvl4pPr>
-                <a:lvl5pPr marL="2057349" indent="-228594">
-                  <a:lnSpc>
-                    <a:spcPct val="90000"/>
-                  </a:lnSpc>
-                  <a:spcBef>
-                    <a:spcPts val="500"/>
-                  </a:spcBef>
-                  <a:buFont typeface="Arial" panose="020B0604020202020204" pitchFamily="34" charset="0"/>
-                  <a:buChar char="•"/>
-                  <a:defRPr>
-                    <a:solidFill>
-                      <a:schemeClr val="tx2"/>
-                    </a:solidFill>
-                  </a:defRPr>
-                </a:lvl5pPr>
-                <a:lvl6pPr marL="2514537" indent="-228594">
-                  <a:lnSpc>
-                    <a:spcPct val="90000"/>
-                  </a:lnSpc>
-                  <a:spcBef>
-                    <a:spcPts val="500"/>
-                  </a:spcBef>
-                  <a:buFont typeface="Arial" panose="020B0604020202020204" pitchFamily="34" charset="0"/>
-                  <a:buChar char="•"/>
-                </a:lvl6pPr>
-                <a:lvl7pPr marL="2971726" indent="-228594">
-                  <a:lnSpc>
-                    <a:spcPct val="90000"/>
-                  </a:lnSpc>
-                  <a:spcBef>
-                    <a:spcPts val="500"/>
-                  </a:spcBef>
-                  <a:buFont typeface="Arial" panose="020B0604020202020204" pitchFamily="34" charset="0"/>
-                  <a:buChar char="•"/>
-                </a:lvl7pPr>
-                <a:lvl8pPr marL="3428914" indent="-228594">
-                  <a:lnSpc>
-                    <a:spcPct val="90000"/>
-                  </a:lnSpc>
-                  <a:spcBef>
-                    <a:spcPts val="500"/>
-                  </a:spcBef>
-                  <a:buFont typeface="Arial" panose="020B0604020202020204" pitchFamily="34" charset="0"/>
-                  <a:buChar char="•"/>
-                </a:lvl8pPr>
-                <a:lvl9pPr marL="3886103" indent="-228594">
-                  <a:lnSpc>
-                    <a:spcPct val="90000"/>
-                  </a:lnSpc>
-                  <a:spcBef>
-                    <a:spcPts val="500"/>
-                  </a:spcBef>
-                  <a:buFont typeface="Arial" panose="020B0604020202020204" pitchFamily="34" charset="0"/>
-                  <a:buChar char="•"/>
-                </a:lvl9pPr>
-              </a:lstStyle>
-              <a:p>
-                <a:pPr marL="0" indent="0">
-                  <a:buNone/>
-                </a:pPr>
-                <a:r>
-                  <a:rPr lang="en-US" sz="1400" dirty="0">
-                    <a:solidFill>
-                      <a:srgbClr val="FF0000"/>
-                    </a:solidFill>
-                  </a:rPr>
-                  <a:t>Explodes after </a:t>
-                </a:r>
-                <a14:m>
-                  <m:oMath xmlns:m="http://schemas.openxmlformats.org/officeDocument/2006/math">
-                    <m:r>
-                      <a:rPr lang="en-US" sz="1400" i="1" dirty="0" smtClean="0">
-                        <a:solidFill>
-                          <a:srgbClr val="FF0000"/>
-                        </a:solidFill>
-                        <a:latin typeface="Cambria Math" panose="02040503050406030204" pitchFamily="18" charset="0"/>
-                      </a:rPr>
-                      <m:t>𝑛</m:t>
-                    </m:r>
-                    <m:r>
-                      <a:rPr lang="en-US" sz="1400" i="1" dirty="0" smtClean="0">
-                        <a:solidFill>
-                          <a:srgbClr val="FF0000"/>
-                        </a:solidFill>
-                        <a:latin typeface="Cambria Math" panose="02040503050406030204" pitchFamily="18" charset="0"/>
-                      </a:rPr>
-                      <m:t>=</m:t>
-                    </m:r>
-                    <m:r>
-                      <a:rPr lang="en-US" sz="1400" i="1" dirty="0" smtClean="0">
-                        <a:solidFill>
-                          <a:srgbClr val="FF0000"/>
-                        </a:solidFill>
-                        <a:latin typeface="Cambria Math" panose="02040503050406030204" pitchFamily="18" charset="0"/>
-                      </a:rPr>
-                      <m:t>8</m:t>
-                    </m:r>
-                    <m:r>
-                      <a:rPr lang="en-US" sz="1400" b="0" i="1" dirty="0" smtClean="0">
-                        <a:solidFill>
-                          <a:srgbClr val="FF0000"/>
-                        </a:solidFill>
-                        <a:latin typeface="Cambria Math" panose="02040503050406030204" pitchFamily="18" charset="0"/>
-                      </a:rPr>
-                      <m:t> </m:t>
-                    </m:r>
-                  </m:oMath>
-                </a14:m>
-                <a:r>
-                  <a:rPr lang="en-US" sz="1400" dirty="0">
-                    <a:solidFill>
-                      <a:srgbClr val="FF0000"/>
-                    </a:solidFill>
-                  </a:rPr>
-                  <a:t> </a:t>
-                </a:r>
-              </a:p>
-            </p:txBody>
-          </p:sp>
-        </mc:Choice>
-        <mc:Fallback>
-          <p:sp>
-            <p:nvSpPr>
-              <p:cNvPr id="22" name="TextBox 21">
-                <a:extLst>
-                  <a:ext uri="{FF2B5EF4-FFF2-40B4-BE49-F238E27FC236}">
-                    <a16:creationId xmlns:a16="http://schemas.microsoft.com/office/drawing/2014/main" id="{E109733F-D5DF-6C1B-73A0-89F062975101}"/>
-                  </a:ext>
-                </a:extLst>
-              </p:cNvPr>
-              <p:cNvSpPr txBox="1">
-                <a:spLocks noRot="1" noChangeAspect="1" noMove="1" noResize="1" noEditPoints="1" noAdjustHandles="1" noChangeArrowheads="1" noChangeShapeType="1" noTextEdit="1"/>
-              </p:cNvSpPr>
-              <p:nvPr/>
-            </p:nvSpPr>
-            <p:spPr>
-              <a:xfrm>
-                <a:off x="10305311" y="2316802"/>
-                <a:ext cx="1662546" cy="346615"/>
-              </a:xfrm>
-              <a:prstGeom prst="rect">
-                <a:avLst/>
-              </a:prstGeom>
-              <a:blipFill>
-                <a:blip r:embed="rId4"/>
-                <a:stretch>
-                  <a:fillRect l="-368" t="-10526"/>
-                </a:stretch>
-              </a:blipFill>
-            </p:spPr>
-            <p:txBody>
-              <a:bodyPr/>
-              <a:lstStyle/>
-              <a:p>
-                <a:r>
-                  <a:rPr lang="en-US">
-                    <a:noFill/>
-                  </a:rPr>
-                  <a:t> </a:t>
-                </a:r>
-              </a:p>
-            </p:txBody>
-          </p:sp>
-        </mc:Fallback>
-      </mc:AlternateContent>
+        </p:spPr>
+      </p:pic>
+      <p:pic>
+        <p:nvPicPr>
+          <p:cNvPr id="20" name="Picture 19">
+            <a:extLst>
+              <a:ext uri="{FF2B5EF4-FFF2-40B4-BE49-F238E27FC236}">
+                <a16:creationId xmlns:a16="http://schemas.microsoft.com/office/drawing/2014/main" id="{9909F366-477B-9271-B9D2-D908089A0298}"/>
+              </a:ext>
+            </a:extLst>
+          </p:cNvPr>
+          <p:cNvPicPr>
+            <a:picLocks noChangeAspect="1"/>
+          </p:cNvPicPr>
+          <p:nvPr/>
+        </p:nvPicPr>
+        <p:blipFill>
+          <a:blip r:embed="rId4"/>
+          <a:srcRect l="2003" r="2566"/>
+          <a:stretch>
+            <a:fillRect/>
+          </a:stretch>
+        </p:blipFill>
+        <p:spPr>
+          <a:xfrm>
+            <a:off x="7907788" y="2802036"/>
+            <a:ext cx="2722881" cy="1754465"/>
+          </a:xfrm>
+          <a:prstGeom prst="rect">
+            <a:avLst/>
+          </a:prstGeom>
+        </p:spPr>
+      </p:pic>
+      <p:sp>
+        <p:nvSpPr>
+          <p:cNvPr id="2" name="Slide Number Placeholder 1">
+            <a:extLst>
+              <a:ext uri="{FF2B5EF4-FFF2-40B4-BE49-F238E27FC236}">
+                <a16:creationId xmlns:a16="http://schemas.microsoft.com/office/drawing/2014/main" id="{C6481407-3333-5EC9-45BE-D11C3BCB0399}"/>
+              </a:ext>
+            </a:extLst>
+          </p:cNvPr>
+          <p:cNvSpPr>
+            <a:spLocks noGrp="1"/>
+          </p:cNvSpPr>
+          <p:nvPr>
+            <p:ph type="sldNum" sz="quarter" idx="12"/>
+          </p:nvPr>
+        </p:nvSpPr>
+        <p:spPr/>
+        <p:txBody>
+          <a:bodyPr/>
+          <a:lstStyle/>
+          <a:p>
+            <a:fld id="{63954337-777C-478F-BB37-379719107E1B}" type="slidenum">
+              <a:rPr lang="en-US" smtClean="0"/>
+              <a:pPr/>
+              <a:t>4</a:t>
+            </a:fld>
+            <a:endParaRPr lang="en-US" dirty="0"/>
+          </a:p>
+        </p:txBody>
+      </p:sp>
     </p:spTree>
     <p:extLst>
       <p:ext uri="{BB962C8B-B14F-4D97-AF65-F5344CB8AC3E}">
-        <p14:creationId xmlns:p14="http://schemas.microsoft.com/office/powerpoint/2010/main" val="2343945214"/>
+        <p14:creationId xmlns:p14="http://schemas.microsoft.com/office/powerpoint/2010/main" val="42586590"/>
       </p:ext>
     </p:extLst>
   </p:cSld>
@@ -9927,8 +10115,8 @@
           <a:chExt cx="0" cy="0"/>
         </a:xfrm>
       </p:grpSpPr>
-      <mc:AlternateContent xmlns:mc="http://schemas.openxmlformats.org/markup-compatibility/2006">
-        <mc:Choice xmlns:a14="http://schemas.microsoft.com/office/drawing/2010/main" Requires="a14">
+      <mc:AlternateContent xmlns:mc="http://schemas.openxmlformats.org/markup-compatibility/2006" xmlns:a14="http://schemas.microsoft.com/office/drawing/2010/main">
+        <mc:Choice Requires="a14">
           <p:sp>
             <p:nvSpPr>
               <p:cNvPr id="2" name="Content Placeholder 1">
@@ -10100,12 +10288,6 @@
                         </m:r>
                       </m:sub>
                     </m:sSub>
-                    <m:r>
-                      <a:rPr lang="en-US" i="1" dirty="0" smtClean="0">
-                        <a:latin typeface="Cambria Math" panose="02040503050406030204" pitchFamily="18" charset="0"/>
-                      </a:rPr>
-                      <m:t>×</m:t>
-                    </m:r>
                     <m:sSub>
                       <m:sSubPr>
                         <m:ctrlPr>
@@ -10200,7 +10382,9 @@
                       </m:sSubPr>
                       <m:e>
                         <m:r>
-                          <a:rPr lang="en-US" i="1"/>
+                          <a:rPr lang="en-US" i="1">
+                            <a:latin typeface="Cambria Math" panose="02040503050406030204" pitchFamily="18" charset="0"/>
+                          </a:rPr>
                           <m:t>𝐶</m:t>
                         </m:r>
                       </m:e>
@@ -10232,7 +10416,9 @@
                 <a14:m>
                   <m:oMath xmlns:m="http://schemas.openxmlformats.org/officeDocument/2006/math">
                     <m:r>
-                      <a:rPr lang="en-US" i="1"/>
+                      <a:rPr lang="en-US" i="1">
+                        <a:latin typeface="Cambria Math" panose="02040503050406030204" pitchFamily="18" charset="0"/>
+                      </a:rPr>
                       <m:t>𝑛</m:t>
                     </m:r>
                   </m:oMath>
@@ -10242,7 +10428,7 @@
             </p:txBody>
           </p:sp>
         </mc:Choice>
-        <mc:Fallback>
+        <mc:Fallback xmlns="">
           <p:sp>
             <p:nvSpPr>
               <p:cNvPr id="2" name="Content Placeholder 1">
@@ -10314,41 +10500,12 @@
           </a:p>
         </p:txBody>
       </p:sp>
-      <p:sp>
-        <p:nvSpPr>
-          <p:cNvPr id="5" name="Footer Placeholder 4">
-            <a:extLst>
-              <a:ext uri="{FF2B5EF4-FFF2-40B4-BE49-F238E27FC236}">
-                <a16:creationId xmlns:a16="http://schemas.microsoft.com/office/drawing/2014/main" id="{8ADC4F44-90E4-A486-9C8D-24DA481532FB}"/>
-              </a:ext>
-            </a:extLst>
-          </p:cNvPr>
-          <p:cNvSpPr>
-            <a:spLocks noGrp="1"/>
-          </p:cNvSpPr>
-          <p:nvPr>
-            <p:ph type="ftr" sz="quarter" idx="11"/>
-          </p:nvPr>
-        </p:nvSpPr>
-        <p:spPr/>
-        <p:txBody>
-          <a:bodyPr/>
-          <a:lstStyle/>
-          <a:p>
-            <a:r>
-              <a:rPr lang="en-US"/>
-              <a:t>UNIVERSITY OF SOUTH FLORIDA</a:t>
-            </a:r>
-            <a:endParaRPr lang="en-US" dirty="0"/>
-          </a:p>
-        </p:txBody>
-      </p:sp>
       <p:pic>
         <p:nvPicPr>
-          <p:cNvPr id="11" name="Content Placeholder 6">
+          <p:cNvPr id="10" name="Content Placeholder 9">
             <a:extLst>
               <a:ext uri="{FF2B5EF4-FFF2-40B4-BE49-F238E27FC236}">
-                <a16:creationId xmlns:a16="http://schemas.microsoft.com/office/drawing/2014/main" id="{7F6C5769-7E39-A43F-53EC-64E30FCEC4B6}"/>
+                <a16:creationId xmlns:a16="http://schemas.microsoft.com/office/drawing/2014/main" id="{1A666604-CAE5-7680-898E-A4F666582DA3}"/>
               </a:ext>
             </a:extLst>
           </p:cNvPr>
@@ -10361,15 +10518,14 @@
         </p:nvPicPr>
         <p:blipFill>
           <a:blip r:embed="rId3"/>
-          <a:srcRect r="28369"/>
           <a:stretch>
             <a:fillRect/>
           </a:stretch>
         </p:blipFill>
         <p:spPr>
           <a:xfrm>
-            <a:off x="5927099" y="1971319"/>
-            <a:ext cx="6264901" cy="2915361"/>
+            <a:off x="6107517" y="2230608"/>
+            <a:ext cx="5519738" cy="2769288"/>
           </a:xfrm>
           <a:prstGeom prst="rect">
             <a:avLst/>
@@ -10378,358 +10534,31 @@
       </p:pic>
       <p:sp>
         <p:nvSpPr>
-          <p:cNvPr id="12" name="Rectangle: Rounded Corners 11">
+          <p:cNvPr id="16" name="Slide Number Placeholder 15">
             <a:extLst>
               <a:ext uri="{FF2B5EF4-FFF2-40B4-BE49-F238E27FC236}">
-                <a16:creationId xmlns:a16="http://schemas.microsoft.com/office/drawing/2014/main" id="{F4FC83F5-ABC2-3894-3C15-FAFE50CA7F30}"/>
+                <a16:creationId xmlns:a16="http://schemas.microsoft.com/office/drawing/2014/main" id="{C31C96F5-4214-BE08-3C6F-39804E6E6BA3}"/>
               </a:ext>
             </a:extLst>
           </p:cNvPr>
-          <p:cNvSpPr/>
-          <p:nvPr/>
-        </p:nvSpPr>
-        <p:spPr>
-          <a:xfrm>
-            <a:off x="6591030" y="2279331"/>
-            <a:ext cx="735495" cy="400979"/>
-          </a:xfrm>
-          <a:prstGeom prst="roundRect">
-            <a:avLst/>
-          </a:prstGeom>
-          <a:solidFill>
-            <a:schemeClr val="accent1">
-              <a:alpha val="20000"/>
-            </a:schemeClr>
-          </a:solidFill>
-        </p:spPr>
-        <p:style>
-          <a:lnRef idx="2">
-            <a:schemeClr val="accent1">
-              <a:shade val="15000"/>
-            </a:schemeClr>
-          </a:lnRef>
-          <a:fillRef idx="1">
-            <a:schemeClr val="accent1"/>
-          </a:fillRef>
-          <a:effectRef idx="0">
-            <a:schemeClr val="accent1"/>
-          </a:effectRef>
-          <a:fontRef idx="minor">
-            <a:schemeClr val="lt1"/>
-          </a:fontRef>
-        </p:style>
-        <p:txBody>
-          <a:bodyPr rtlCol="0" anchor="ctr"/>
+          <p:cNvSpPr>
+            <a:spLocks noGrp="1"/>
+          </p:cNvSpPr>
+          <p:nvPr>
+            <p:ph type="sldNum" sz="quarter" idx="12"/>
+          </p:nvPr>
+        </p:nvSpPr>
+        <p:spPr/>
+        <p:txBody>
+          <a:bodyPr/>
           <a:lstStyle/>
           <a:p>
-            <a:pPr algn="ctr"/>
-            <a:endParaRPr lang="en-US"/>
-          </a:p>
-        </p:txBody>
-      </p:sp>
-      <p:sp>
-        <p:nvSpPr>
-          <p:cNvPr id="13" name="Rectangle: Rounded Corners 12">
-            <a:extLst>
-              <a:ext uri="{FF2B5EF4-FFF2-40B4-BE49-F238E27FC236}">
-                <a16:creationId xmlns:a16="http://schemas.microsoft.com/office/drawing/2014/main" id="{03689925-820B-2D46-2DF1-112C5F005A15}"/>
-              </a:ext>
-            </a:extLst>
-          </p:cNvPr>
-          <p:cNvSpPr/>
-          <p:nvPr/>
-        </p:nvSpPr>
-        <p:spPr>
-          <a:xfrm>
-            <a:off x="7549463" y="2680309"/>
-            <a:ext cx="1539600" cy="400979"/>
-          </a:xfrm>
-          <a:prstGeom prst="roundRect">
-            <a:avLst/>
-          </a:prstGeom>
-          <a:solidFill>
-            <a:srgbClr val="F080A0">
-              <a:alpha val="20000"/>
-            </a:srgbClr>
-          </a:solidFill>
-        </p:spPr>
-        <p:style>
-          <a:lnRef idx="2">
-            <a:schemeClr val="accent1">
-              <a:shade val="15000"/>
-            </a:schemeClr>
-          </a:lnRef>
-          <a:fillRef idx="1">
-            <a:schemeClr val="accent1"/>
-          </a:fillRef>
-          <a:effectRef idx="0">
-            <a:schemeClr val="accent1"/>
-          </a:effectRef>
-          <a:fontRef idx="minor">
-            <a:schemeClr val="lt1"/>
-          </a:fontRef>
-        </p:style>
-        <p:txBody>
-          <a:bodyPr rtlCol="0" anchor="ctr"/>
-          <a:lstStyle/>
-          <a:p>
-            <a:pPr algn="ctr"/>
-            <a:endParaRPr lang="en-US"/>
-          </a:p>
-        </p:txBody>
-      </p:sp>
-      <p:sp>
-        <p:nvSpPr>
-          <p:cNvPr id="14" name="Rectangle: Rounded Corners 13">
-            <a:extLst>
-              <a:ext uri="{FF2B5EF4-FFF2-40B4-BE49-F238E27FC236}">
-                <a16:creationId xmlns:a16="http://schemas.microsoft.com/office/drawing/2014/main" id="{3B2D4AAB-49D8-E96B-A692-55C7B62A8075}"/>
-              </a:ext>
-            </a:extLst>
-          </p:cNvPr>
-          <p:cNvSpPr/>
-          <p:nvPr/>
-        </p:nvSpPr>
-        <p:spPr>
-          <a:xfrm>
-            <a:off x="6591030" y="2707485"/>
-            <a:ext cx="735495" cy="400979"/>
-          </a:xfrm>
-          <a:prstGeom prst="roundRect">
-            <a:avLst/>
-          </a:prstGeom>
-          <a:solidFill>
-            <a:schemeClr val="accent1">
-              <a:alpha val="20000"/>
-            </a:schemeClr>
-          </a:solidFill>
-        </p:spPr>
-        <p:style>
-          <a:lnRef idx="2">
-            <a:schemeClr val="accent1">
-              <a:shade val="15000"/>
-            </a:schemeClr>
-          </a:lnRef>
-          <a:fillRef idx="1">
-            <a:schemeClr val="accent1"/>
-          </a:fillRef>
-          <a:effectRef idx="0">
-            <a:schemeClr val="accent1"/>
-          </a:effectRef>
-          <a:fontRef idx="minor">
-            <a:schemeClr val="lt1"/>
-          </a:fontRef>
-        </p:style>
-        <p:txBody>
-          <a:bodyPr rtlCol="0" anchor="ctr"/>
-          <a:lstStyle/>
-          <a:p>
-            <a:pPr algn="ctr"/>
-            <a:endParaRPr lang="en-US"/>
-          </a:p>
-        </p:txBody>
-      </p:sp>
-      <p:sp>
-        <p:nvSpPr>
-          <p:cNvPr id="15" name="Rectangle: Rounded Corners 14">
-            <a:extLst>
-              <a:ext uri="{FF2B5EF4-FFF2-40B4-BE49-F238E27FC236}">
-                <a16:creationId xmlns:a16="http://schemas.microsoft.com/office/drawing/2014/main" id="{2DF16232-B9D5-1C25-F4CF-45D08FA94A64}"/>
-              </a:ext>
-            </a:extLst>
-          </p:cNvPr>
-          <p:cNvSpPr/>
-          <p:nvPr/>
-        </p:nvSpPr>
-        <p:spPr>
-          <a:xfrm>
-            <a:off x="6594544" y="3135308"/>
-            <a:ext cx="1576601" cy="400979"/>
-          </a:xfrm>
-          <a:prstGeom prst="roundRect">
-            <a:avLst/>
-          </a:prstGeom>
-          <a:solidFill>
-            <a:schemeClr val="accent1">
-              <a:alpha val="20000"/>
-            </a:schemeClr>
-          </a:solidFill>
-        </p:spPr>
-        <p:style>
-          <a:lnRef idx="2">
-            <a:schemeClr val="accent1">
-              <a:shade val="15000"/>
-            </a:schemeClr>
-          </a:lnRef>
-          <a:fillRef idx="1">
-            <a:schemeClr val="accent1"/>
-          </a:fillRef>
-          <a:effectRef idx="0">
-            <a:schemeClr val="accent1"/>
-          </a:effectRef>
-          <a:fontRef idx="minor">
-            <a:schemeClr val="lt1"/>
-          </a:fontRef>
-        </p:style>
-        <p:txBody>
-          <a:bodyPr rtlCol="0" anchor="ctr"/>
-          <a:lstStyle/>
-          <a:p>
-            <a:pPr algn="ctr"/>
-            <a:endParaRPr lang="en-US"/>
-          </a:p>
-        </p:txBody>
-      </p:sp>
-      <p:sp>
-        <p:nvSpPr>
-          <p:cNvPr id="17" name="Rectangle: Rounded Corners 16">
-            <a:extLst>
-              <a:ext uri="{FF2B5EF4-FFF2-40B4-BE49-F238E27FC236}">
-                <a16:creationId xmlns:a16="http://schemas.microsoft.com/office/drawing/2014/main" id="{783117D7-99A8-20C0-1304-7971A6B49BE2}"/>
-              </a:ext>
-            </a:extLst>
-          </p:cNvPr>
-          <p:cNvSpPr/>
-          <p:nvPr/>
-        </p:nvSpPr>
-        <p:spPr>
-          <a:xfrm>
-            <a:off x="8467530" y="3108464"/>
-            <a:ext cx="1539600" cy="400979"/>
-          </a:xfrm>
-          <a:prstGeom prst="roundRect">
-            <a:avLst/>
-          </a:prstGeom>
-          <a:solidFill>
-            <a:srgbClr val="F080A0">
-              <a:alpha val="20000"/>
-            </a:srgbClr>
-          </a:solidFill>
-        </p:spPr>
-        <p:style>
-          <a:lnRef idx="2">
-            <a:schemeClr val="accent1">
-              <a:shade val="15000"/>
-            </a:schemeClr>
-          </a:lnRef>
-          <a:fillRef idx="1">
-            <a:schemeClr val="accent1"/>
-          </a:fillRef>
-          <a:effectRef idx="0">
-            <a:schemeClr val="accent1"/>
-          </a:effectRef>
-          <a:fontRef idx="minor">
-            <a:schemeClr val="lt1"/>
-          </a:fontRef>
-        </p:style>
-        <p:txBody>
-          <a:bodyPr rtlCol="0" anchor="ctr"/>
-          <a:lstStyle/>
-          <a:p>
-            <a:pPr algn="ctr"/>
-            <a:endParaRPr lang="en-US"/>
-          </a:p>
-        </p:txBody>
-      </p:sp>
-      <p:sp>
-        <p:nvSpPr>
-          <p:cNvPr id="18" name="Rectangle: Rounded Corners 17">
-            <a:extLst>
-              <a:ext uri="{FF2B5EF4-FFF2-40B4-BE49-F238E27FC236}">
-                <a16:creationId xmlns:a16="http://schemas.microsoft.com/office/drawing/2014/main" id="{9FFA6D23-F3E4-6088-EC42-2068A8956399}"/>
-              </a:ext>
-            </a:extLst>
-          </p:cNvPr>
-          <p:cNvSpPr/>
-          <p:nvPr/>
-        </p:nvSpPr>
-        <p:spPr>
-          <a:xfrm>
-            <a:off x="6587715" y="1851176"/>
-            <a:ext cx="735495" cy="400979"/>
-          </a:xfrm>
-          <a:prstGeom prst="roundRect">
-            <a:avLst/>
-          </a:prstGeom>
-          <a:solidFill>
-            <a:schemeClr val="accent1">
-              <a:alpha val="20000"/>
-            </a:schemeClr>
-          </a:solidFill>
-        </p:spPr>
-        <p:style>
-          <a:lnRef idx="2">
-            <a:schemeClr val="accent1">
-              <a:shade val="15000"/>
-            </a:schemeClr>
-          </a:lnRef>
-          <a:fillRef idx="1">
-            <a:schemeClr val="accent1"/>
-          </a:fillRef>
-          <a:effectRef idx="0">
-            <a:schemeClr val="accent1"/>
-          </a:effectRef>
-          <a:fontRef idx="minor">
-            <a:schemeClr val="lt1"/>
-          </a:fontRef>
-        </p:style>
-        <p:txBody>
-          <a:bodyPr rtlCol="0" anchor="ctr"/>
-          <a:lstStyle/>
-          <a:p>
-            <a:pPr algn="ctr"/>
-            <a:endParaRPr lang="en-US"/>
-          </a:p>
-        </p:txBody>
-      </p:sp>
-      <p:sp>
-        <p:nvSpPr>
-          <p:cNvPr id="19" name="Rectangle: Rounded Corners 18">
-            <a:extLst>
-              <a:ext uri="{FF2B5EF4-FFF2-40B4-BE49-F238E27FC236}">
-                <a16:creationId xmlns:a16="http://schemas.microsoft.com/office/drawing/2014/main" id="{3CBAB640-AED2-2CF7-85D9-944D39B03D12}"/>
-              </a:ext>
-            </a:extLst>
-          </p:cNvPr>
-          <p:cNvSpPr/>
-          <p:nvPr/>
-        </p:nvSpPr>
-        <p:spPr>
-          <a:xfrm>
-            <a:off x="7542839" y="2262871"/>
-            <a:ext cx="1539600" cy="400979"/>
-          </a:xfrm>
-          <a:prstGeom prst="roundRect">
-            <a:avLst/>
-          </a:prstGeom>
-          <a:solidFill>
-            <a:srgbClr val="F080A0">
-              <a:alpha val="20000"/>
-            </a:srgbClr>
-          </a:solidFill>
-        </p:spPr>
-        <p:style>
-          <a:lnRef idx="2">
-            <a:schemeClr val="accent1">
-              <a:shade val="15000"/>
-            </a:schemeClr>
-          </a:lnRef>
-          <a:fillRef idx="1">
-            <a:schemeClr val="accent1"/>
-          </a:fillRef>
-          <a:effectRef idx="0">
-            <a:schemeClr val="accent1"/>
-          </a:effectRef>
-          <a:fontRef idx="minor">
-            <a:schemeClr val="lt1"/>
-          </a:fontRef>
-        </p:style>
-        <p:txBody>
-          <a:bodyPr rtlCol="0" anchor="ctr"/>
-          <a:lstStyle/>
-          <a:p>
-            <a:pPr algn="ctr"/>
-            <a:endParaRPr lang="en-US"/>
+            <a:fld id="{63954337-777C-478F-BB37-379719107E1B}" type="slidenum">
+              <a:rPr lang="en-US" smtClean="0"/>
+              <a:pPr/>
+              <a:t>5</a:t>
+            </a:fld>
+            <a:endParaRPr lang="en-US" dirty="0"/>
           </a:p>
         </p:txBody>
       </p:sp>
@@ -10763,8 +10592,8 @@
           <a:chExt cx="0" cy="0"/>
         </a:xfrm>
       </p:grpSpPr>
-      <mc:AlternateContent xmlns:mc="http://schemas.openxmlformats.org/markup-compatibility/2006">
-        <mc:Choice xmlns:a14="http://schemas.microsoft.com/office/drawing/2010/main" Requires="a14">
+      <mc:AlternateContent xmlns:mc="http://schemas.openxmlformats.org/markup-compatibility/2006" xmlns:a14="http://schemas.microsoft.com/office/drawing/2010/main">
+        <mc:Choice Requires="a14">
           <p:sp>
             <p:nvSpPr>
               <p:cNvPr id="2" name="Content Placeholder 1">
@@ -11083,7 +10912,7 @@
             </p:txBody>
           </p:sp>
         </mc:Choice>
-        <mc:Fallback>
+        <mc:Fallback xmlns="">
           <p:sp>
             <p:nvSpPr>
               <p:cNvPr id="2" name="Content Placeholder 1">
@@ -11155,34 +10984,6 @@
           </a:p>
         </p:txBody>
       </p:sp>
-      <p:sp>
-        <p:nvSpPr>
-          <p:cNvPr id="5" name="Footer Placeholder 4">
-            <a:extLst>
-              <a:ext uri="{FF2B5EF4-FFF2-40B4-BE49-F238E27FC236}">
-                <a16:creationId xmlns:a16="http://schemas.microsoft.com/office/drawing/2014/main" id="{11365555-6A05-2F81-9E6D-7A4293873804}"/>
-              </a:ext>
-            </a:extLst>
-          </p:cNvPr>
-          <p:cNvSpPr>
-            <a:spLocks noGrp="1"/>
-          </p:cNvSpPr>
-          <p:nvPr>
-            <p:ph type="ftr" sz="quarter" idx="11"/>
-          </p:nvPr>
-        </p:nvSpPr>
-        <p:spPr/>
-        <p:txBody>
-          <a:bodyPr/>
-          <a:lstStyle/>
-          <a:p>
-            <a:r>
-              <a:rPr lang="en-US" dirty="0"/>
-              <a:t>UNIVERSITY OF SOUTH FLORIDA</a:t>
-            </a:r>
-          </a:p>
-        </p:txBody>
-      </p:sp>
       <p:pic>
         <p:nvPicPr>
           <p:cNvPr id="16" name="Picture 15">
@@ -11291,6 +11092,36 @@
           </a:ln>
         </p:spPr>
       </p:pic>
+      <p:sp>
+        <p:nvSpPr>
+          <p:cNvPr id="3" name="Slide Number Placeholder 2">
+            <a:extLst>
+              <a:ext uri="{FF2B5EF4-FFF2-40B4-BE49-F238E27FC236}">
+                <a16:creationId xmlns:a16="http://schemas.microsoft.com/office/drawing/2014/main" id="{A6F31EB4-A423-2C8F-E244-A5A666E5C482}"/>
+              </a:ext>
+            </a:extLst>
+          </p:cNvPr>
+          <p:cNvSpPr>
+            <a:spLocks noGrp="1"/>
+          </p:cNvSpPr>
+          <p:nvPr>
+            <p:ph type="sldNum" sz="quarter" idx="12"/>
+          </p:nvPr>
+        </p:nvSpPr>
+        <p:spPr/>
+        <p:txBody>
+          <a:bodyPr/>
+          <a:lstStyle/>
+          <a:p>
+            <a:fld id="{63954337-777C-478F-BB37-379719107E1B}" type="slidenum">
+              <a:rPr lang="en-US" smtClean="0"/>
+              <a:pPr/>
+              <a:t>6</a:t>
+            </a:fld>
+            <a:endParaRPr lang="en-US" dirty="0"/>
+          </a:p>
+        </p:txBody>
+      </p:sp>
     </p:spTree>
     <p:extLst>
       <p:ext uri="{BB962C8B-B14F-4D97-AF65-F5344CB8AC3E}">
@@ -11321,6 +11152,483 @@
           <a:chExt cx="0" cy="0"/>
         </a:xfrm>
       </p:grpSpPr>
+      <mc:AlternateContent xmlns:mc="http://schemas.openxmlformats.org/markup-compatibility/2006" xmlns:a14="http://schemas.microsoft.com/office/drawing/2010/main">
+        <mc:Choice Requires="a14">
+          <p:sp>
+            <p:nvSpPr>
+              <p:cNvPr id="2" name="Content Placeholder 1">
+                <a:extLst>
+                  <a:ext uri="{FF2B5EF4-FFF2-40B4-BE49-F238E27FC236}">
+                    <a16:creationId xmlns:a16="http://schemas.microsoft.com/office/drawing/2014/main" id="{3671555A-F350-3CF8-04A4-71144124F362}"/>
+                  </a:ext>
+                </a:extLst>
+              </p:cNvPr>
+              <p:cNvSpPr>
+                <a:spLocks noGrp="1"/>
+              </p:cNvSpPr>
+              <p:nvPr>
+                <p:ph sz="half" idx="1"/>
+              </p:nvPr>
+            </p:nvSpPr>
+            <p:spPr>
+              <a:xfrm>
+                <a:off x="402264" y="1799674"/>
+                <a:ext cx="5541336" cy="4351339"/>
+              </a:xfrm>
+            </p:spPr>
+            <p:txBody>
+              <a:bodyPr>
+                <a:normAutofit/>
+              </a:bodyPr>
+              <a:lstStyle/>
+              <a:p>
+                <a14:m>
+                  <m:oMath xmlns:m="http://schemas.openxmlformats.org/officeDocument/2006/math">
+                    <m:sSub>
+                      <m:sSubPr>
+                        <m:ctrlPr>
+                          <a:rPr lang="en-US" i="1" dirty="0" smtClean="0">
+                            <a:latin typeface="Cambria Math" panose="02040503050406030204" pitchFamily="18" charset="0"/>
+                          </a:rPr>
+                        </m:ctrlPr>
+                      </m:sSubPr>
+                      <m:e>
+                        <m:r>
+                          <a:rPr lang="en-US" dirty="0" smtClean="0">
+                            <a:latin typeface="Cambria Math" panose="02040503050406030204" pitchFamily="18" charset="0"/>
+                          </a:rPr>
+                          <m:t>𝐶</m:t>
+                        </m:r>
+                      </m:e>
+                      <m:sub>
+                        <m:r>
+                          <a:rPr lang="en-US" dirty="0" smtClean="0">
+                            <a:latin typeface="Cambria Math" panose="02040503050406030204" pitchFamily="18" charset="0"/>
+                          </a:rPr>
+                          <m:t>𝑛</m:t>
+                        </m:r>
+                      </m:sub>
+                    </m:sSub>
+                    <m:r>
+                      <a:rPr lang="en-US" dirty="0" smtClean="0">
+                        <a:latin typeface="Cambria Math" panose="02040503050406030204" pitchFamily="18" charset="0"/>
+                      </a:rPr>
+                      <m:t> </m:t>
+                    </m:r>
+                  </m:oMath>
+                </a14:m>
+                <a:r>
+                  <a:rPr lang="en-US" dirty="0"/>
+                  <a:t>grows exponentially!</a:t>
+                </a:r>
+              </a:p>
+              <a:p>
+                <a:r>
+                  <a:rPr lang="en-US" dirty="0"/>
+                  <a:t>Time Complexity</a:t>
+                </a:r>
+              </a:p>
+              <a:p>
+                <a:pPr lvl="1"/>
+                <a14:m>
+                  <m:oMath xmlns:m="http://schemas.openxmlformats.org/officeDocument/2006/math">
+                    <m:r>
+                      <m:rPr>
+                        <m:sty m:val="p"/>
+                      </m:rPr>
+                      <a:rPr lang="en-US" dirty="0" smtClean="0">
+                        <a:latin typeface="Cambria Math" panose="02040503050406030204" pitchFamily="18" charset="0"/>
+                      </a:rPr>
+                      <m:t>Dp</m:t>
+                    </m:r>
+                    <m:r>
+                      <a:rPr lang="en-US" dirty="0" smtClean="0">
+                        <a:latin typeface="Cambria Math" panose="02040503050406030204" pitchFamily="18" charset="0"/>
+                      </a:rPr>
+                      <m:t>=</m:t>
+                    </m:r>
+                    <m:r>
+                      <a:rPr lang="en-US" dirty="0" smtClean="0">
+                        <a:latin typeface="Cambria Math" panose="02040503050406030204" pitchFamily="18" charset="0"/>
+                      </a:rPr>
+                      <m:t>𝑂</m:t>
+                    </m:r>
+                    <m:d>
+                      <m:dPr>
+                        <m:ctrlPr>
+                          <a:rPr lang="en-US" i="1" dirty="0" smtClean="0">
+                            <a:latin typeface="Cambria Math" panose="02040503050406030204" pitchFamily="18" charset="0"/>
+                          </a:rPr>
+                        </m:ctrlPr>
+                      </m:dPr>
+                      <m:e>
+                        <m:sSup>
+                          <m:sSupPr>
+                            <m:ctrlPr>
+                              <a:rPr lang="en-US" i="1" dirty="0" smtClean="0">
+                                <a:latin typeface="Cambria Math" panose="02040503050406030204" pitchFamily="18" charset="0"/>
+                              </a:rPr>
+                            </m:ctrlPr>
+                          </m:sSupPr>
+                          <m:e>
+                            <m:r>
+                              <a:rPr lang="en-US" dirty="0" smtClean="0">
+                                <a:latin typeface="Cambria Math" panose="02040503050406030204" pitchFamily="18" charset="0"/>
+                              </a:rPr>
+                              <m:t>𝑛</m:t>
+                            </m:r>
+                          </m:e>
+                          <m:sup>
+                            <m:r>
+                              <a:rPr lang="en-US" dirty="0" smtClean="0">
+                                <a:latin typeface="Cambria Math" panose="02040503050406030204" pitchFamily="18" charset="0"/>
+                              </a:rPr>
+                              <m:t>2</m:t>
+                            </m:r>
+                          </m:sup>
+                        </m:sSup>
+                      </m:e>
+                    </m:d>
+                  </m:oMath>
+                </a14:m>
+                <a:endParaRPr lang="en-US" dirty="0"/>
+              </a:p>
+              <a:p>
+                <a:pPr lvl="1"/>
+                <a14:m>
+                  <m:oMath xmlns:m="http://schemas.openxmlformats.org/officeDocument/2006/math">
+                    <m:r>
+                      <a:rPr lang="en-US" dirty="0" smtClean="0">
+                        <a:latin typeface="Cambria Math" panose="02040503050406030204" pitchFamily="18" charset="0"/>
+                      </a:rPr>
+                      <m:t>𝑁𝑎</m:t>
+                    </m:r>
+                    <m:r>
+                      <a:rPr lang="en-US" dirty="0" smtClean="0">
+                        <a:latin typeface="Cambria Math" panose="02040503050406030204" pitchFamily="18" charset="0"/>
+                      </a:rPr>
+                      <m:t>ï</m:t>
+                    </m:r>
+                    <m:r>
+                      <a:rPr lang="en-US" dirty="0" smtClean="0">
+                        <a:latin typeface="Cambria Math" panose="02040503050406030204" pitchFamily="18" charset="0"/>
+                      </a:rPr>
+                      <m:t>𝑣𝑒</m:t>
+                    </m:r>
+                    <m:r>
+                      <a:rPr lang="en-US" dirty="0" smtClean="0">
+                        <a:latin typeface="Cambria Math" panose="02040503050406030204" pitchFamily="18" charset="0"/>
+                      </a:rPr>
+                      <m:t> = </m:t>
+                    </m:r>
+                    <m:r>
+                      <a:rPr lang="en-US" dirty="0" smtClean="0">
+                        <a:latin typeface="Cambria Math" panose="02040503050406030204" pitchFamily="18" charset="0"/>
+                      </a:rPr>
+                      <m:t>𝑂</m:t>
+                    </m:r>
+                    <m:r>
+                      <a:rPr lang="en-US" dirty="0" smtClean="0">
+                        <a:latin typeface="Cambria Math" panose="02040503050406030204" pitchFamily="18" charset="0"/>
+                      </a:rPr>
+                      <m:t>(</m:t>
+                    </m:r>
+                    <m:sSup>
+                      <m:sSupPr>
+                        <m:ctrlPr>
+                          <a:rPr lang="en-US" i="1" dirty="0" smtClean="0">
+                            <a:latin typeface="Cambria Math" panose="02040503050406030204" pitchFamily="18" charset="0"/>
+                          </a:rPr>
+                        </m:ctrlPr>
+                      </m:sSupPr>
+                      <m:e>
+                        <m:r>
+                          <a:rPr lang="en-US" dirty="0" smtClean="0">
+                            <a:latin typeface="Cambria Math" panose="02040503050406030204" pitchFamily="18" charset="0"/>
+                          </a:rPr>
+                          <m:t>2</m:t>
+                        </m:r>
+                      </m:e>
+                      <m:sup>
+                        <m:r>
+                          <a:rPr lang="en-US" dirty="0" smtClean="0">
+                            <a:latin typeface="Cambria Math" panose="02040503050406030204" pitchFamily="18" charset="0"/>
+                          </a:rPr>
+                          <m:t>𝑛</m:t>
+                        </m:r>
+                      </m:sup>
+                    </m:sSup>
+                    <m:r>
+                      <a:rPr lang="en-US" dirty="0" smtClean="0">
+                        <a:latin typeface="Cambria Math" panose="02040503050406030204" pitchFamily="18" charset="0"/>
+                      </a:rPr>
+                      <m:t>)</m:t>
+                    </m:r>
+                  </m:oMath>
+                </a14:m>
+                <a:endParaRPr lang="en-US" dirty="0"/>
+              </a:p>
+              <a:p>
+                <a:r>
+                  <a:rPr lang="en-US" dirty="0"/>
+                  <a:t>Space complexity: </a:t>
+                </a:r>
+                <a14:m>
+                  <m:oMath xmlns:m="http://schemas.openxmlformats.org/officeDocument/2006/math">
+                    <m:r>
+                      <a:rPr lang="en-US" dirty="0" smtClean="0">
+                        <a:latin typeface="Cambria Math" panose="02040503050406030204" pitchFamily="18" charset="0"/>
+                      </a:rPr>
+                      <m:t>𝑂</m:t>
+                    </m:r>
+                    <m:r>
+                      <a:rPr lang="en-US" dirty="0" smtClean="0">
+                        <a:latin typeface="Cambria Math" panose="02040503050406030204" pitchFamily="18" charset="0"/>
+                      </a:rPr>
+                      <m:t>(</m:t>
+                    </m:r>
+                    <m:r>
+                      <a:rPr lang="en-US" dirty="0" smtClean="0">
+                        <a:latin typeface="Cambria Math" panose="02040503050406030204" pitchFamily="18" charset="0"/>
+                      </a:rPr>
+                      <m:t>𝑛</m:t>
+                    </m:r>
+                    <m:r>
+                      <a:rPr lang="en-US" dirty="0" smtClean="0">
+                        <a:latin typeface="Cambria Math" panose="02040503050406030204" pitchFamily="18" charset="0"/>
+                      </a:rPr>
+                      <m:t>)</m:t>
+                    </m:r>
+                  </m:oMath>
+                </a14:m>
+                <a:endParaRPr lang="en-US" dirty="0"/>
+              </a:p>
+              <a:p>
+                <a:pPr lvl="1"/>
+                <a:r>
+                  <a:rPr lang="en-US" dirty="0"/>
+                  <a:t>Must store all previous values</a:t>
+                </a:r>
+              </a:p>
+              <a:p>
+                <a:r>
+                  <a:rPr lang="en-US" dirty="0"/>
+                  <a:t>Integer overflow occurs quickly</a:t>
+                </a:r>
+              </a:p>
+              <a:p>
+                <a:pPr lvl="1"/>
+                <a:r>
+                  <a:rPr lang="en-US" dirty="0"/>
+                  <a:t>Limit reached around</a:t>
+                </a:r>
+                <a14:m>
+                  <m:oMath xmlns:m="http://schemas.openxmlformats.org/officeDocument/2006/math">
+                    <m:r>
+                      <a:rPr lang="en-US" dirty="0" smtClean="0">
+                        <a:latin typeface="Cambria Math" panose="02040503050406030204" pitchFamily="18" charset="0"/>
+                      </a:rPr>
+                      <m:t> </m:t>
+                    </m:r>
+                    <m:r>
+                      <a:rPr lang="en-US" dirty="0" smtClean="0">
+                        <a:latin typeface="Cambria Math" panose="02040503050406030204" pitchFamily="18" charset="0"/>
+                      </a:rPr>
+                      <m:t>𝑛</m:t>
+                    </m:r>
+                    <m:r>
+                      <a:rPr lang="en-US" dirty="0" smtClean="0">
+                        <a:latin typeface="Cambria Math" panose="02040503050406030204" pitchFamily="18" charset="0"/>
+                      </a:rPr>
+                      <m:t>≈</m:t>
+                    </m:r>
+                    <m:r>
+                      <a:rPr lang="en-US" dirty="0" smtClean="0">
+                        <a:latin typeface="Cambria Math" panose="02040503050406030204" pitchFamily="18" charset="0"/>
+                      </a:rPr>
+                      <m:t>32</m:t>
+                    </m:r>
+                  </m:oMath>
+                </a14:m>
+                <a:endParaRPr lang="en-US" dirty="0"/>
+              </a:p>
+            </p:txBody>
+          </p:sp>
+        </mc:Choice>
+        <mc:Fallback xmlns="">
+          <p:sp>
+            <p:nvSpPr>
+              <p:cNvPr id="2" name="Content Placeholder 1">
+                <a:extLst>
+                  <a:ext uri="{FF2B5EF4-FFF2-40B4-BE49-F238E27FC236}">
+                    <a16:creationId xmlns:a16="http://schemas.microsoft.com/office/drawing/2014/main" id="{3671555A-F350-3CF8-04A4-71144124F362}"/>
+                  </a:ext>
+                </a:extLst>
+              </p:cNvPr>
+              <p:cNvSpPr>
+                <a:spLocks noGrp="1" noRot="1" noChangeAspect="1" noMove="1" noResize="1" noEditPoints="1" noAdjustHandles="1" noChangeArrowheads="1" noChangeShapeType="1" noTextEdit="1"/>
+              </p:cNvSpPr>
+              <p:nvPr>
+                <p:ph sz="half" idx="1"/>
+              </p:nvPr>
+            </p:nvSpPr>
+            <p:spPr>
+              <a:xfrm>
+                <a:off x="402264" y="1799674"/>
+                <a:ext cx="5541336" cy="4351339"/>
+              </a:xfrm>
+              <a:blipFill>
+                <a:blip r:embed="rId2"/>
+                <a:stretch>
+                  <a:fillRect l="-1980" t="-2381"/>
+                </a:stretch>
+              </a:blipFill>
+            </p:spPr>
+            <p:txBody>
+              <a:bodyPr/>
+              <a:lstStyle/>
+              <a:p>
+                <a:r>
+                  <a:rPr lang="en-US">
+                    <a:noFill/>
+                  </a:rPr>
+                  <a:t> </a:t>
+                </a:r>
+              </a:p>
+            </p:txBody>
+          </p:sp>
+        </mc:Fallback>
+      </mc:AlternateContent>
+      <p:sp>
+        <p:nvSpPr>
+          <p:cNvPr id="4" name="Title 3">
+            <a:extLst>
+              <a:ext uri="{FF2B5EF4-FFF2-40B4-BE49-F238E27FC236}">
+                <a16:creationId xmlns:a16="http://schemas.microsoft.com/office/drawing/2014/main" id="{28AE832F-2D71-D278-EE41-040F14114463}"/>
+              </a:ext>
+            </a:extLst>
+          </p:cNvPr>
+          <p:cNvSpPr>
+            <a:spLocks noGrp="1"/>
+          </p:cNvSpPr>
+          <p:nvPr>
+            <p:ph type="title"/>
+          </p:nvPr>
+        </p:nvSpPr>
+        <p:spPr>
+          <a:xfrm>
+            <a:off x="402264" y="365125"/>
+            <a:ext cx="11410507" cy="1325563"/>
+          </a:xfrm>
+        </p:spPr>
+        <p:txBody>
+          <a:bodyPr/>
+          <a:lstStyle/>
+          <a:p>
+            <a:r>
+              <a:rPr lang="en-US" dirty="0"/>
+              <a:t>Overall Issues</a:t>
+            </a:r>
+          </a:p>
+        </p:txBody>
+      </p:sp>
+      <p:sp>
+        <p:nvSpPr>
+          <p:cNvPr id="3" name="Slide Number Placeholder 2">
+            <a:extLst>
+              <a:ext uri="{FF2B5EF4-FFF2-40B4-BE49-F238E27FC236}">
+                <a16:creationId xmlns:a16="http://schemas.microsoft.com/office/drawing/2014/main" id="{F75A573A-0CBA-CA84-C3DE-4AFCB089787D}"/>
+              </a:ext>
+            </a:extLst>
+          </p:cNvPr>
+          <p:cNvSpPr>
+            <a:spLocks noGrp="1"/>
+          </p:cNvSpPr>
+          <p:nvPr>
+            <p:ph type="sldNum" sz="quarter" idx="12"/>
+          </p:nvPr>
+        </p:nvSpPr>
+        <p:spPr>
+          <a:xfrm>
+            <a:off x="11380971" y="6402431"/>
+            <a:ext cx="431800" cy="273050"/>
+          </a:xfrm>
+        </p:spPr>
+        <p:txBody>
+          <a:bodyPr/>
+          <a:lstStyle/>
+          <a:p>
+            <a:fld id="{63954337-777C-478F-BB37-379719107E1B}" type="slidenum">
+              <a:rPr lang="en-US" smtClean="0"/>
+              <a:pPr/>
+              <a:t>7</a:t>
+            </a:fld>
+            <a:endParaRPr lang="en-US" dirty="0"/>
+          </a:p>
+        </p:txBody>
+      </p:sp>
+      <p:pic>
+        <p:nvPicPr>
+          <p:cNvPr id="15" name="Content Placeholder 14">
+            <a:extLst>
+              <a:ext uri="{FF2B5EF4-FFF2-40B4-BE49-F238E27FC236}">
+                <a16:creationId xmlns:a16="http://schemas.microsoft.com/office/drawing/2014/main" id="{A2AAB287-B6F0-0872-81EF-F855BD75B796}"/>
+              </a:ext>
+            </a:extLst>
+          </p:cNvPr>
+          <p:cNvPicPr>
+            <a:picLocks noGrp="1" noChangeAspect="1"/>
+          </p:cNvPicPr>
+          <p:nvPr>
+            <p:ph sz="half" idx="2"/>
+          </p:nvPr>
+        </p:nvPicPr>
+        <p:blipFill>
+          <a:blip r:embed="rId3"/>
+          <a:stretch>
+            <a:fillRect/>
+          </a:stretch>
+        </p:blipFill>
+        <p:spPr>
+          <a:xfrm>
+            <a:off x="5861049" y="1352962"/>
+            <a:ext cx="5956891" cy="3954143"/>
+          </a:xfrm>
+          <a:prstGeom prst="rect">
+            <a:avLst/>
+          </a:prstGeom>
+        </p:spPr>
+      </p:pic>
+    </p:spTree>
+    <p:extLst>
+      <p:ext uri="{BB962C8B-B14F-4D97-AF65-F5344CB8AC3E}">
+        <p14:creationId xmlns:p14="http://schemas.microsoft.com/office/powerpoint/2010/main" val="2343945214"/>
+      </p:ext>
+    </p:extLst>
+  </p:cSld>
+  <p:clrMapOvr>
+    <a:masterClrMapping/>
+  </p:clrMapOvr>
+</p:sld>
+</file>
+
+<file path=ppt/slides/slide8.xml><?xml version="1.0" encoding="utf-8"?>
+<p:sld xmlns:a="http://schemas.openxmlformats.org/drawingml/2006/main" xmlns:r="http://schemas.openxmlformats.org/officeDocument/2006/relationships" xmlns:p="http://schemas.openxmlformats.org/presentationml/2006/main">
+  <p:cSld>
+    <p:spTree>
+      <p:nvGrpSpPr>
+        <p:cNvPr id="1" name=""/>
+        <p:cNvGrpSpPr/>
+        <p:nvPr/>
+      </p:nvGrpSpPr>
+      <p:grpSpPr>
+        <a:xfrm>
+          <a:off x="0" y="0"/>
+          <a:ext cx="0" cy="0"/>
+          <a:chOff x="0" y="0"/>
+          <a:chExt cx="0" cy="0"/>
+        </a:xfrm>
+      </p:grpSpPr>
       <p:sp>
         <p:nvSpPr>
           <p:cNvPr id="6" name="Content Placeholder 5">
@@ -11363,7 +11671,11 @@
             </a:pPr>
             <a:r>
               <a:rPr lang="en-US" dirty="0"/>
-              <a:t>1. Initialize C(0)</a:t>
+              <a:t>1. Initialize C</a:t>
+            </a:r>
+            <a:r>
+              <a:rPr lang="en-US" baseline="-25000" dirty="0"/>
+              <a:t>0</a:t>
             </a:r>
             <a:br>
               <a:rPr lang="en-US" dirty="0"/>
@@ -11478,35 +11790,6 @@
               <a:rPr lang="en-US" dirty="0"/>
               <a:t>Multithread Solution</a:t>
             </a:r>
-          </a:p>
-        </p:txBody>
-      </p:sp>
-      <p:sp>
-        <p:nvSpPr>
-          <p:cNvPr id="5" name="Footer Placeholder 4">
-            <a:extLst>
-              <a:ext uri="{FF2B5EF4-FFF2-40B4-BE49-F238E27FC236}">
-                <a16:creationId xmlns:a16="http://schemas.microsoft.com/office/drawing/2014/main" id="{681395FF-1A3E-6D1D-791C-517B4F2E72E5}"/>
-              </a:ext>
-            </a:extLst>
-          </p:cNvPr>
-          <p:cNvSpPr>
-            <a:spLocks noGrp="1"/>
-          </p:cNvSpPr>
-          <p:nvPr>
-            <p:ph type="ftr" sz="quarter" idx="11"/>
-          </p:nvPr>
-        </p:nvSpPr>
-        <p:spPr/>
-        <p:txBody>
-          <a:bodyPr/>
-          <a:lstStyle/>
-          <a:p>
-            <a:r>
-              <a:rPr lang="en-US"/>
-              <a:t>UNIVERSITY OF SOUTH FLORIDA</a:t>
-            </a:r>
-            <a:endParaRPr lang="en-US" dirty="0"/>
           </a:p>
         </p:txBody>
       </p:sp>
@@ -11535,7 +11818,7 @@
             </p:spPr>
             <p:txBody>
               <a:bodyPr vert="horz" lIns="91440" tIns="45720" rIns="91440" bIns="45720" rtlCol="0">
-                <a:normAutofit fontScale="85000" lnSpcReduction="10000"/>
+                <a:normAutofit/>
               </a:bodyPr>
               <a:lstStyle>
                 <a:lvl1pPr indent="0">
@@ -11828,7 +12111,79 @@
               <a:p>
                 <a:r>
                   <a:rPr lang="en-US" sz="1900" b="0" dirty="0"/>
-                  <a:t>Ex : C(4) = C(0)C(3)+C(1)C(2)+C(2)C(1)+C(3)C(0)=5+2+2+5 = 14</a:t>
+                  <a:t>Ex : C</a:t>
+                </a:r>
+                <a:r>
+                  <a:rPr lang="en-US" sz="1900" b="0" baseline="-25000" dirty="0"/>
+                  <a:t>4</a:t>
+                </a:r>
+                <a:r>
+                  <a:rPr lang="en-US" sz="1900" b="0" dirty="0"/>
+                  <a:t> = C</a:t>
+                </a:r>
+                <a:r>
+                  <a:rPr lang="en-US" sz="1900" b="0" baseline="-25000" dirty="0"/>
+                  <a:t>0</a:t>
+                </a:r>
+                <a:r>
+                  <a:rPr lang="en-US" sz="1900" b="0" dirty="0"/>
+                  <a:t>C</a:t>
+                </a:r>
+                <a:r>
+                  <a:rPr lang="en-US" sz="1900" b="0" baseline="-25000" dirty="0"/>
+                  <a:t>3</a:t>
+                </a:r>
+                <a:r>
+                  <a:rPr lang="en-US" sz="1900" b="0" dirty="0"/>
+                  <a:t> +C</a:t>
+                </a:r>
+                <a:r>
+                  <a:rPr lang="en-US" sz="1900" b="0" baseline="-25000" dirty="0"/>
+                  <a:t>1</a:t>
+                </a:r>
+                <a:r>
+                  <a:rPr lang="en-US" sz="1900" b="0" dirty="0"/>
+                  <a:t>C</a:t>
+                </a:r>
+                <a:r>
+                  <a:rPr lang="en-US" sz="1900" b="0" baseline="-25000" dirty="0"/>
+                  <a:t>2</a:t>
+                </a:r>
+                <a:r>
+                  <a:rPr lang="en-US" sz="1900" b="0" dirty="0"/>
+                  <a:t> +C</a:t>
+                </a:r>
+                <a:r>
+                  <a:rPr lang="en-US" sz="1900" b="0" baseline="-25000" dirty="0"/>
+                  <a:t>2</a:t>
+                </a:r>
+                <a:r>
+                  <a:rPr lang="en-US" sz="1900" b="0" dirty="0"/>
+                  <a:t>C</a:t>
+                </a:r>
+                <a:r>
+                  <a:rPr lang="en-US" sz="1900" b="0" baseline="-25000" dirty="0"/>
+                  <a:t>1</a:t>
+                </a:r>
+                <a:r>
+                  <a:rPr lang="en-US" sz="1900" b="0" dirty="0"/>
+                  <a:t> +C</a:t>
+                </a:r>
+                <a:r>
+                  <a:rPr lang="en-US" sz="1900" b="0" baseline="-25000" dirty="0"/>
+                  <a:t>3</a:t>
+                </a:r>
+                <a:r>
+                  <a:rPr lang="en-US" sz="1900" b="0" dirty="0"/>
+                  <a:t>C</a:t>
+                </a:r>
+                <a:r>
+                  <a:rPr lang="en-US" sz="1900" b="0" baseline="-25000" dirty="0"/>
+                  <a:t>0</a:t>
+                </a:r>
+                <a:r>
+                  <a:rPr lang="en-US" sz="1900" b="0" dirty="0"/>
+                  <a:t> = 5 + 2 + 2 + 5 = 14</a:t>
                 </a:r>
               </a:p>
             </p:txBody>
@@ -11860,7 +12215,7 @@
               <a:blipFill>
                 <a:blip r:embed="rId3"/>
                 <a:stretch>
-                  <a:fillRect l="-1561" t="-12329"/>
+                  <a:fillRect l="-2049" t="-10959" b="-10959"/>
                 </a:stretch>
               </a:blipFill>
             </p:spPr>
@@ -12031,47 +12386,33 @@
             </a:r>
             <a:r>
               <a:rPr lang="en-US" b="0" dirty="0"/>
-              <a:t>compute Catalan numbers C(0) to C(n) </a:t>
-            </a:r>
-          </a:p>
-        </p:txBody>
-      </p:sp>
-    </p:spTree>
-    <p:extLst>
-      <p:ext uri="{BB962C8B-B14F-4D97-AF65-F5344CB8AC3E}">
-        <p14:creationId xmlns:p14="http://schemas.microsoft.com/office/powerpoint/2010/main" val="2043867751"/>
-      </p:ext>
-    </p:extLst>
-  </p:cSld>
-  <p:clrMapOvr>
-    <a:masterClrMapping/>
-  </p:clrMapOvr>
-</p:sld>
-</file>
-
-<file path=ppt/slides/slide8.xml><?xml version="1.0" encoding="utf-8"?>
-<p:sld xmlns:a="http://schemas.openxmlformats.org/drawingml/2006/main" xmlns:r="http://schemas.openxmlformats.org/officeDocument/2006/relationships" xmlns:p="http://schemas.openxmlformats.org/presentationml/2006/main">
-  <p:cSld>
-    <p:spTree>
-      <p:nvGrpSpPr>
-        <p:cNvPr id="1" name=""/>
-        <p:cNvGrpSpPr/>
-        <p:nvPr/>
-      </p:nvGrpSpPr>
-      <p:grpSpPr>
-        <a:xfrm>
-          <a:off x="0" y="0"/>
-          <a:ext cx="0" cy="0"/>
-          <a:chOff x="0" y="0"/>
-          <a:chExt cx="0" cy="0"/>
-        </a:xfrm>
-      </p:grpSpPr>
-      <p:sp>
-        <p:nvSpPr>
-          <p:cNvPr id="2" name="Title 1">
+              <a:t>compute Catalan numbers C</a:t>
+            </a:r>
+            <a:r>
+              <a:rPr lang="en-US" b="0" baseline="-25000" dirty="0"/>
+              <a:t>0</a:t>
+            </a:r>
+            <a:r>
+              <a:rPr lang="en-US" b="0" dirty="0"/>
+              <a:t> to C</a:t>
+            </a:r>
+            <a:r>
+              <a:rPr lang="en-US" b="0" baseline="-25000" dirty="0"/>
+              <a:t>n</a:t>
+            </a:r>
+            <a:r>
+              <a:rPr lang="en-US" b="0" dirty="0"/>
+              <a:t> </a:t>
+            </a:r>
+          </a:p>
+        </p:txBody>
+      </p:sp>
+      <p:sp>
+        <p:nvSpPr>
+          <p:cNvPr id="2" name="Slide Number Placeholder 1">
             <a:extLst>
               <a:ext uri="{FF2B5EF4-FFF2-40B4-BE49-F238E27FC236}">
-                <a16:creationId xmlns:a16="http://schemas.microsoft.com/office/drawing/2014/main" id="{6616F6ED-3640-AFF1-4116-AC1BDCC562FC}"/>
+                <a16:creationId xmlns:a16="http://schemas.microsoft.com/office/drawing/2014/main" id="{65D1199C-2C43-ECBC-003D-F6E39FDD2442}"/>
               </a:ext>
             </a:extLst>
           </p:cNvPr>
@@ -12079,7 +12420,7 @@
             <a:spLocks noGrp="1"/>
           </p:cNvSpPr>
           <p:nvPr>
-            <p:ph type="title"/>
+            <p:ph type="sldNum" sz="quarter" idx="12"/>
           </p:nvPr>
         </p:nvSpPr>
         <p:spPr/>
@@ -12087,248 +12428,19 @@
           <a:bodyPr/>
           <a:lstStyle/>
           <a:p>
-            <a:r>
-              <a:rPr lang="en-US" dirty="0"/>
-              <a:t>Process Flow</a:t>
-            </a:r>
-          </a:p>
-        </p:txBody>
-      </p:sp>
-      <p:sp>
-        <p:nvSpPr>
-          <p:cNvPr id="4" name="Footer Placeholder 3">
-            <a:extLst>
-              <a:ext uri="{FF2B5EF4-FFF2-40B4-BE49-F238E27FC236}">
-                <a16:creationId xmlns:a16="http://schemas.microsoft.com/office/drawing/2014/main" id="{21ADF440-B156-2739-EC49-CD48F34D520B}"/>
-              </a:ext>
-            </a:extLst>
-          </p:cNvPr>
-          <p:cNvSpPr>
-            <a:spLocks noGrp="1"/>
-          </p:cNvSpPr>
-          <p:nvPr>
-            <p:ph type="ftr" sz="quarter" idx="11"/>
-          </p:nvPr>
-        </p:nvSpPr>
-        <p:spPr/>
-        <p:txBody>
-          <a:bodyPr/>
-          <a:lstStyle/>
-          <a:p>
-            <a:r>
-              <a:rPr lang="en-US"/>
-              <a:t>UNIVERSITY OF SOUTH FLORIDA</a:t>
-            </a:r>
+            <a:fld id="{63954337-777C-478F-BB37-379719107E1B}" type="slidenum">
+              <a:rPr lang="en-US" smtClean="0"/>
+              <a:pPr/>
+              <a:t>8</a:t>
+            </a:fld>
             <a:endParaRPr lang="en-US" dirty="0"/>
-          </a:p>
-        </p:txBody>
-      </p:sp>
-      <p:pic>
-        <p:nvPicPr>
-          <p:cNvPr id="9" name="Picture 8">
-            <a:extLst>
-              <a:ext uri="{FF2B5EF4-FFF2-40B4-BE49-F238E27FC236}">
-                <a16:creationId xmlns:a16="http://schemas.microsoft.com/office/drawing/2014/main" id="{5D2EC52B-D92E-EEC3-FDEB-571C6E6E142B}"/>
-              </a:ext>
-            </a:extLst>
-          </p:cNvPr>
-          <p:cNvPicPr>
-            <a:picLocks noChangeAspect="1"/>
-          </p:cNvPicPr>
-          <p:nvPr/>
-        </p:nvPicPr>
-        <p:blipFill>
-          <a:blip r:embed="rId2"/>
-          <a:stretch>
-            <a:fillRect/>
-          </a:stretch>
-        </p:blipFill>
-        <p:spPr>
-          <a:xfrm>
-            <a:off x="5370078" y="867475"/>
-            <a:ext cx="6442693" cy="4286390"/>
-          </a:xfrm>
-          <a:prstGeom prst="rect">
-            <a:avLst/>
-          </a:prstGeom>
-        </p:spPr>
-      </p:pic>
-      <p:sp>
-        <p:nvSpPr>
-          <p:cNvPr id="10" name="Content Placeholder 9">
-            <a:extLst>
-              <a:ext uri="{FF2B5EF4-FFF2-40B4-BE49-F238E27FC236}">
-                <a16:creationId xmlns:a16="http://schemas.microsoft.com/office/drawing/2014/main" id="{B90541E3-8677-8F82-F7BF-357D6C8E5C3E}"/>
-              </a:ext>
-            </a:extLst>
-          </p:cNvPr>
-          <p:cNvSpPr>
-            <a:spLocks noGrp="1"/>
-          </p:cNvSpPr>
-          <p:nvPr>
-            <p:ph idx="1"/>
-          </p:nvPr>
-        </p:nvSpPr>
-        <p:spPr>
-          <a:xfrm>
-            <a:off x="402264" y="1446245"/>
-            <a:ext cx="7090218" cy="4730720"/>
-          </a:xfrm>
-        </p:spPr>
-        <p:txBody>
-          <a:bodyPr>
-            <a:normAutofit fontScale="70000" lnSpcReduction="20000"/>
-          </a:bodyPr>
-          <a:lstStyle/>
-          <a:p>
-            <a:pPr marL="514350" indent="-514350">
-              <a:buFont typeface="+mj-lt"/>
-              <a:buAutoNum type="arabicPeriod"/>
-            </a:pPr>
-            <a:r>
-              <a:rPr lang="en-US" dirty="0"/>
-              <a:t>Start</a:t>
-            </a:r>
-          </a:p>
-          <a:p>
-            <a:pPr lvl="1"/>
-            <a:r>
-              <a:rPr lang="en-US" dirty="0"/>
-              <a:t>Execute program</a:t>
-            </a:r>
-          </a:p>
-          <a:p>
-            <a:pPr marL="514350" indent="-514350">
-              <a:buFont typeface="+mj-lt"/>
-              <a:buAutoNum type="arabicPeriod"/>
-            </a:pPr>
-            <a:r>
-              <a:rPr lang="en-US" dirty="0"/>
-              <a:t>Read input</a:t>
-            </a:r>
-          </a:p>
-          <a:p>
-            <a:pPr lvl="1"/>
-            <a:r>
-              <a:rPr lang="en-US" dirty="0"/>
-              <a:t>Read input.txt</a:t>
-            </a:r>
-          </a:p>
-          <a:p>
-            <a:pPr lvl="1"/>
-            <a:r>
-              <a:rPr lang="en-US" dirty="0"/>
-              <a:t>Set C(0) = 1</a:t>
-            </a:r>
-          </a:p>
-          <a:p>
-            <a:pPr lvl="1"/>
-            <a:r>
-              <a:rPr lang="en-US" dirty="0"/>
-              <a:t>Spawn manager threads</a:t>
-            </a:r>
-          </a:p>
-          <a:p>
-            <a:pPr lvl="1">
-              <a:buFont typeface="Wingdings" panose="05000000000000000000" pitchFamily="2" charset="2"/>
-              <a:buChar char="§"/>
-            </a:pPr>
-            <a:r>
-              <a:rPr lang="en-US" dirty="0"/>
-              <a:t>Program creates one thread per Catalan Number</a:t>
-            </a:r>
-          </a:p>
-          <a:p>
-            <a:pPr marL="514350" indent="-514350">
-              <a:buFont typeface="+mj-lt"/>
-              <a:buAutoNum type="arabicPeriod"/>
-            </a:pPr>
-            <a:r>
-              <a:rPr lang="en-US" dirty="0"/>
-              <a:t>Wait for dependencies to be satisfied</a:t>
-            </a:r>
-          </a:p>
-          <a:p>
-            <a:pPr lvl="1"/>
-            <a:r>
-              <a:rPr lang="en-US" dirty="0"/>
-              <a:t>Managers wait until all previous Catalan numbers are computed</a:t>
-            </a:r>
-          </a:p>
-          <a:p>
-            <a:pPr marL="514350" indent="-514350">
-              <a:buFont typeface="+mj-lt"/>
-              <a:buAutoNum type="arabicPeriod"/>
-            </a:pPr>
-            <a:r>
-              <a:rPr lang="en-US" dirty="0"/>
-              <a:t>Split each recurrence into worker-thread chunks</a:t>
-            </a:r>
-          </a:p>
-          <a:p>
-            <a:pPr lvl="1">
-              <a:buFont typeface="Wingdings" panose="05000000000000000000" pitchFamily="2" charset="2"/>
-              <a:buChar char="§"/>
-            </a:pPr>
-            <a:r>
-              <a:rPr lang="en-US" dirty="0"/>
-              <a:t>Each manager uses up to 4 threads to compute inner calculation</a:t>
-            </a:r>
-          </a:p>
-          <a:p>
-            <a:pPr marL="514350" indent="-514350">
-              <a:buFont typeface="+mj-lt"/>
-              <a:buAutoNum type="arabicPeriod"/>
-            </a:pPr>
-            <a:r>
-              <a:rPr lang="en-US" dirty="0"/>
-              <a:t>Compute partial sums in parallel</a:t>
-            </a:r>
-          </a:p>
-          <a:p>
-            <a:pPr marL="514350" indent="-514350">
-              <a:buFont typeface="+mj-lt"/>
-              <a:buAutoNum type="arabicPeriod"/>
-            </a:pPr>
-            <a:r>
-              <a:rPr lang="en-US" dirty="0"/>
-              <a:t>Combine and store results</a:t>
-            </a:r>
-          </a:p>
-          <a:p>
-            <a:pPr marL="514350" indent="-514350">
-              <a:buFont typeface="+mj-lt"/>
-              <a:buAutoNum type="arabicPeriod"/>
-            </a:pPr>
-            <a:r>
-              <a:rPr lang="en-US" dirty="0"/>
-              <a:t>Notify waiting threads</a:t>
-            </a:r>
-          </a:p>
-          <a:p>
-            <a:pPr marL="971539" lvl="1" indent="-514350">
-              <a:buFont typeface="+mj-lt"/>
-              <a:buAutoNum type="arabicPeriod"/>
-            </a:pPr>
-            <a:r>
-              <a:rPr lang="en-US" dirty="0"/>
-              <a:t>Each manager begins work once </a:t>
-            </a:r>
-            <a:r>
-              <a:rPr lang="pl-PL" dirty="0"/>
-              <a:t>C(0)…C(n−1)</a:t>
-            </a:r>
-            <a:r>
-              <a:rPr lang="en-US" dirty="0"/>
-              <a:t> are computed</a:t>
-            </a:r>
           </a:p>
         </p:txBody>
       </p:sp>
     </p:spTree>
     <p:extLst>
       <p:ext uri="{BB962C8B-B14F-4D97-AF65-F5344CB8AC3E}">
-        <p14:creationId xmlns:p14="http://schemas.microsoft.com/office/powerpoint/2010/main" val="3309814980"/>
+        <p14:creationId xmlns:p14="http://schemas.microsoft.com/office/powerpoint/2010/main" val="2043867751"/>
       </p:ext>
     </p:extLst>
   </p:cSld>
@@ -12360,7 +12472,7 @@
           <p:cNvPr id="2" name="Title 1">
             <a:extLst>
               <a:ext uri="{FF2B5EF4-FFF2-40B4-BE49-F238E27FC236}">
-                <a16:creationId xmlns:a16="http://schemas.microsoft.com/office/drawing/2014/main" id="{E2B760E5-37E5-3A10-808B-CBB9DC1C6560}"/>
+                <a16:creationId xmlns:a16="http://schemas.microsoft.com/office/drawing/2014/main" id="{6616F6ED-3640-AFF1-4116-AC1BDCC562FC}"/>
               </a:ext>
             </a:extLst>
           </p:cNvPr>
@@ -12378,26 +12490,24 @@
           <a:p>
             <a:r>
               <a:rPr lang="en-US" dirty="0"/>
-              <a:t>Results</a:t>
+              <a:t>Process Flow</a:t>
             </a:r>
           </a:p>
         </p:txBody>
       </p:sp>
       <p:pic>
         <p:nvPicPr>
-          <p:cNvPr id="8" name="Content Placeholder 7">
+          <p:cNvPr id="9" name="Picture 8">
             <a:extLst>
               <a:ext uri="{FF2B5EF4-FFF2-40B4-BE49-F238E27FC236}">
-                <a16:creationId xmlns:a16="http://schemas.microsoft.com/office/drawing/2014/main" id="{3B2E6F4A-452F-0A37-CE17-BD2EE23CA95D}"/>
+                <a16:creationId xmlns:a16="http://schemas.microsoft.com/office/drawing/2014/main" id="{5D2EC52B-D92E-EEC3-FDEB-571C6E6E142B}"/>
               </a:ext>
             </a:extLst>
           </p:cNvPr>
           <p:cNvPicPr>
-            <a:picLocks noGrp="1" noChangeAspect="1"/>
+            <a:picLocks noChangeAspect="1"/>
           </p:cNvPicPr>
-          <p:nvPr>
-            <p:ph idx="1"/>
-          </p:nvPr>
+          <p:nvPr/>
         </p:nvPicPr>
         <p:blipFill>
           <a:blip r:embed="rId2"/>
@@ -12407,8 +12517,8 @@
         </p:blipFill>
         <p:spPr>
           <a:xfrm>
-            <a:off x="3796224" y="859253"/>
-            <a:ext cx="4258269" cy="2000529"/>
+            <a:off x="5370078" y="867475"/>
+            <a:ext cx="6442693" cy="4286390"/>
           </a:xfrm>
           <a:prstGeom prst="rect">
             <a:avLst/>
@@ -12417,10 +12527,10 @@
       </p:pic>
       <p:sp>
         <p:nvSpPr>
-          <p:cNvPr id="4" name="Footer Placeholder 3">
+          <p:cNvPr id="10" name="Content Placeholder 9">
             <a:extLst>
               <a:ext uri="{FF2B5EF4-FFF2-40B4-BE49-F238E27FC236}">
-                <a16:creationId xmlns:a16="http://schemas.microsoft.com/office/drawing/2014/main" id="{D1465F81-02CA-5378-79A8-C3476530A582}"/>
+                <a16:creationId xmlns:a16="http://schemas.microsoft.com/office/drawing/2014/main" id="{B90541E3-8677-8F82-F7BF-357D6C8E5C3E}"/>
               </a:ext>
             </a:extLst>
           </p:cNvPr>
@@ -12428,7 +12538,203 @@
             <a:spLocks noGrp="1"/>
           </p:cNvSpPr>
           <p:nvPr>
-            <p:ph type="ftr" sz="quarter" idx="11"/>
+            <p:ph idx="1"/>
+          </p:nvPr>
+        </p:nvSpPr>
+        <p:spPr>
+          <a:xfrm>
+            <a:off x="402264" y="1446245"/>
+            <a:ext cx="7090218" cy="4730720"/>
+          </a:xfrm>
+        </p:spPr>
+        <p:txBody>
+          <a:bodyPr>
+            <a:normAutofit fontScale="70000" lnSpcReduction="20000"/>
+          </a:bodyPr>
+          <a:lstStyle/>
+          <a:p>
+            <a:pPr marL="514350" indent="-514350">
+              <a:buFont typeface="+mj-lt"/>
+              <a:buAutoNum type="arabicPeriod"/>
+            </a:pPr>
+            <a:r>
+              <a:rPr lang="en-US" dirty="0"/>
+              <a:t>Start</a:t>
+            </a:r>
+          </a:p>
+          <a:p>
+            <a:pPr lvl="1"/>
+            <a:r>
+              <a:rPr lang="en-US" dirty="0"/>
+              <a:t>Execute program</a:t>
+            </a:r>
+          </a:p>
+          <a:p>
+            <a:pPr marL="514350" indent="-514350">
+              <a:buFont typeface="+mj-lt"/>
+              <a:buAutoNum type="arabicPeriod"/>
+            </a:pPr>
+            <a:r>
+              <a:rPr lang="en-US" dirty="0"/>
+              <a:t>Read input</a:t>
+            </a:r>
+          </a:p>
+          <a:p>
+            <a:pPr lvl="1"/>
+            <a:r>
+              <a:rPr lang="en-US" dirty="0"/>
+              <a:t>Read input.txt</a:t>
+            </a:r>
+          </a:p>
+          <a:p>
+            <a:pPr lvl="1"/>
+            <a:r>
+              <a:rPr lang="en-US" dirty="0"/>
+              <a:t>Set C</a:t>
+            </a:r>
+            <a:r>
+              <a:rPr lang="en-US" baseline="-25000" dirty="0"/>
+              <a:t>0</a:t>
+            </a:r>
+            <a:r>
+              <a:rPr lang="en-US" dirty="0"/>
+              <a:t> = 1</a:t>
+            </a:r>
+          </a:p>
+          <a:p>
+            <a:pPr lvl="1"/>
+            <a:r>
+              <a:rPr lang="en-US" dirty="0"/>
+              <a:t>Spawn manager threads</a:t>
+            </a:r>
+          </a:p>
+          <a:p>
+            <a:pPr lvl="1">
+              <a:buFont typeface="Wingdings" panose="05000000000000000000" pitchFamily="2" charset="2"/>
+              <a:buChar char="§"/>
+            </a:pPr>
+            <a:r>
+              <a:rPr lang="en-US" dirty="0"/>
+              <a:t>Program creates one thread per Catalan Number</a:t>
+            </a:r>
+          </a:p>
+          <a:p>
+            <a:pPr marL="514350" indent="-514350">
+              <a:buFont typeface="+mj-lt"/>
+              <a:buAutoNum type="arabicPeriod"/>
+            </a:pPr>
+            <a:r>
+              <a:rPr lang="en-US" dirty="0"/>
+              <a:t>Wait for dependencies to be satisfied</a:t>
+            </a:r>
+          </a:p>
+          <a:p>
+            <a:pPr lvl="1"/>
+            <a:r>
+              <a:rPr lang="en-US" dirty="0"/>
+              <a:t>Managers wait until all previous Catalan numbers are computed</a:t>
+            </a:r>
+          </a:p>
+          <a:p>
+            <a:pPr marL="514350" indent="-514350">
+              <a:buFont typeface="+mj-lt"/>
+              <a:buAutoNum type="arabicPeriod"/>
+            </a:pPr>
+            <a:r>
+              <a:rPr lang="en-US" dirty="0"/>
+              <a:t>Split each recurrence into worker-thread chunks</a:t>
+            </a:r>
+          </a:p>
+          <a:p>
+            <a:pPr lvl="1">
+              <a:buFont typeface="Wingdings" panose="05000000000000000000" pitchFamily="2" charset="2"/>
+              <a:buChar char="§"/>
+            </a:pPr>
+            <a:r>
+              <a:rPr lang="en-US" dirty="0"/>
+              <a:t>Each manager uses up to 4 threads to compute inner calculation</a:t>
+            </a:r>
+          </a:p>
+          <a:p>
+            <a:pPr marL="514350" indent="-514350">
+              <a:buFont typeface="+mj-lt"/>
+              <a:buAutoNum type="arabicPeriod"/>
+            </a:pPr>
+            <a:r>
+              <a:rPr lang="en-US" dirty="0"/>
+              <a:t>Compute partial sums in parallel</a:t>
+            </a:r>
+          </a:p>
+          <a:p>
+            <a:pPr marL="514350" indent="-514350">
+              <a:buFont typeface="+mj-lt"/>
+              <a:buAutoNum type="arabicPeriod"/>
+            </a:pPr>
+            <a:r>
+              <a:rPr lang="en-US" dirty="0"/>
+              <a:t>Combine and store results</a:t>
+            </a:r>
+          </a:p>
+          <a:p>
+            <a:pPr marL="514350" indent="-514350">
+              <a:buFont typeface="+mj-lt"/>
+              <a:buAutoNum type="arabicPeriod"/>
+            </a:pPr>
+            <a:r>
+              <a:rPr lang="en-US" dirty="0"/>
+              <a:t>Notify waiting threads</a:t>
+            </a:r>
+          </a:p>
+          <a:p>
+            <a:pPr marL="971539" lvl="1" indent="-514350">
+              <a:buFont typeface="+mj-lt"/>
+              <a:buAutoNum type="arabicPeriod"/>
+            </a:pPr>
+            <a:r>
+              <a:rPr lang="en-US" dirty="0"/>
+              <a:t>Each manager begins work once </a:t>
+            </a:r>
+            <a:r>
+              <a:rPr lang="pl-PL" dirty="0"/>
+              <a:t>C</a:t>
+            </a:r>
+            <a:r>
+              <a:rPr lang="pl-PL" baseline="-25000" dirty="0"/>
+              <a:t>0</a:t>
+            </a:r>
+            <a:r>
+              <a:rPr lang="pl-PL" dirty="0"/>
+              <a:t>…C</a:t>
+            </a:r>
+            <a:r>
+              <a:rPr lang="pl-PL" baseline="-25000" dirty="0"/>
+              <a:t>n−1</a:t>
+            </a:r>
+            <a:r>
+              <a:rPr lang="en-US" baseline="-25000" dirty="0"/>
+              <a:t> </a:t>
+            </a:r>
+            <a:r>
+              <a:rPr lang="en-US" dirty="0"/>
+              <a:t>are computed</a:t>
+            </a:r>
+          </a:p>
+        </p:txBody>
+      </p:sp>
+      <p:sp>
+        <p:nvSpPr>
+          <p:cNvPr id="3" name="Slide Number Placeholder 2">
+            <a:extLst>
+              <a:ext uri="{FF2B5EF4-FFF2-40B4-BE49-F238E27FC236}">
+                <a16:creationId xmlns:a16="http://schemas.microsoft.com/office/drawing/2014/main" id="{B5F57084-86FE-A184-DCC2-81AB4E43C0C4}"/>
+              </a:ext>
+            </a:extLst>
+          </p:cNvPr>
+          <p:cNvSpPr>
+            <a:spLocks noGrp="1"/>
+          </p:cNvSpPr>
+          <p:nvPr>
+            <p:ph type="sldNum" sz="quarter" idx="12"/>
           </p:nvPr>
         </p:nvSpPr>
         <p:spPr/>
@@ -12436,667 +12742,19 @@
           <a:bodyPr/>
           <a:lstStyle/>
           <a:p>
-            <a:r>
-              <a:rPr lang="en-US"/>
-              <a:t>UNIVERSITY OF SOUTH FLORIDA</a:t>
-            </a:r>
+            <a:fld id="{63954337-777C-478F-BB37-379719107E1B}" type="slidenum">
+              <a:rPr lang="en-US" smtClean="0"/>
+              <a:pPr/>
+              <a:t>9</a:t>
+            </a:fld>
             <a:endParaRPr lang="en-US" dirty="0"/>
-          </a:p>
-        </p:txBody>
-      </p:sp>
-      <p:pic>
-        <p:nvPicPr>
-          <p:cNvPr id="10" name="Picture 9">
-            <a:extLst>
-              <a:ext uri="{FF2B5EF4-FFF2-40B4-BE49-F238E27FC236}">
-                <a16:creationId xmlns:a16="http://schemas.microsoft.com/office/drawing/2014/main" id="{EE02A094-4503-8CFA-7967-27B134A0F009}"/>
-              </a:ext>
-            </a:extLst>
-          </p:cNvPr>
-          <p:cNvPicPr>
-            <a:picLocks noChangeAspect="1"/>
-          </p:cNvPicPr>
-          <p:nvPr/>
-        </p:nvPicPr>
-        <p:blipFill>
-          <a:blip r:embed="rId3"/>
-          <a:stretch>
-            <a:fillRect/>
-          </a:stretch>
-        </p:blipFill>
-        <p:spPr>
-          <a:xfrm>
-            <a:off x="3853381" y="3062607"/>
-            <a:ext cx="4143953" cy="2448267"/>
-          </a:xfrm>
-          <a:prstGeom prst="rect">
-            <a:avLst/>
-          </a:prstGeom>
-        </p:spPr>
-      </p:pic>
-      <p:pic>
-        <p:nvPicPr>
-          <p:cNvPr id="12" name="Picture 11">
-            <a:extLst>
-              <a:ext uri="{FF2B5EF4-FFF2-40B4-BE49-F238E27FC236}">
-                <a16:creationId xmlns:a16="http://schemas.microsoft.com/office/drawing/2014/main" id="{FC3D8EF8-189E-177B-FFA9-EEEF1A356D56}"/>
-              </a:ext>
-            </a:extLst>
-          </p:cNvPr>
-          <p:cNvPicPr>
-            <a:picLocks noChangeAspect="1"/>
-          </p:cNvPicPr>
-          <p:nvPr/>
-        </p:nvPicPr>
-        <p:blipFill>
-          <a:blip r:embed="rId4"/>
-          <a:stretch>
-            <a:fillRect/>
-          </a:stretch>
-        </p:blipFill>
-        <p:spPr>
-          <a:xfrm>
-            <a:off x="8054493" y="944525"/>
-            <a:ext cx="4105848" cy="2314898"/>
-          </a:xfrm>
-          <a:prstGeom prst="rect">
-            <a:avLst/>
-          </a:prstGeom>
-        </p:spPr>
-      </p:pic>
-      <p:pic>
-        <p:nvPicPr>
-          <p:cNvPr id="14" name="Picture 13">
-            <a:extLst>
-              <a:ext uri="{FF2B5EF4-FFF2-40B4-BE49-F238E27FC236}">
-                <a16:creationId xmlns:a16="http://schemas.microsoft.com/office/drawing/2014/main" id="{64210DC5-F4F5-DA3F-F5B4-2FEC744164E4}"/>
-              </a:ext>
-            </a:extLst>
-          </p:cNvPr>
-          <p:cNvPicPr>
-            <a:picLocks noChangeAspect="1"/>
-          </p:cNvPicPr>
-          <p:nvPr/>
-        </p:nvPicPr>
-        <p:blipFill>
-          <a:blip r:embed="rId5"/>
-          <a:stretch>
-            <a:fillRect/>
-          </a:stretch>
-        </p:blipFill>
-        <p:spPr>
-          <a:xfrm>
-            <a:off x="8054493" y="3329345"/>
-            <a:ext cx="4105848" cy="2181529"/>
-          </a:xfrm>
-          <a:prstGeom prst="rect">
-            <a:avLst/>
-          </a:prstGeom>
-        </p:spPr>
-      </p:pic>
-      <p:sp>
-        <p:nvSpPr>
-          <p:cNvPr id="15" name="Rectangle 14">
-            <a:extLst>
-              <a:ext uri="{FF2B5EF4-FFF2-40B4-BE49-F238E27FC236}">
-                <a16:creationId xmlns:a16="http://schemas.microsoft.com/office/drawing/2014/main" id="{C229781F-2574-83AB-1573-DAEC4C3A2A76}"/>
-              </a:ext>
-            </a:extLst>
-          </p:cNvPr>
-          <p:cNvSpPr/>
-          <p:nvPr/>
-        </p:nvSpPr>
-        <p:spPr>
-          <a:xfrm>
-            <a:off x="3708197" y="2638295"/>
-            <a:ext cx="3497344" cy="202825"/>
-          </a:xfrm>
-          <a:prstGeom prst="rect">
-            <a:avLst/>
-          </a:prstGeom>
-          <a:solidFill>
-            <a:srgbClr val="00B0F0">
-              <a:alpha val="40000"/>
-            </a:srgbClr>
-          </a:solidFill>
-        </p:spPr>
-        <p:style>
-          <a:lnRef idx="2">
-            <a:schemeClr val="accent1">
-              <a:shade val="15000"/>
-            </a:schemeClr>
-          </a:lnRef>
-          <a:fillRef idx="1">
-            <a:schemeClr val="accent1"/>
-          </a:fillRef>
-          <a:effectRef idx="0">
-            <a:schemeClr val="accent1"/>
-          </a:effectRef>
-          <a:fontRef idx="minor">
-            <a:schemeClr val="lt1"/>
-          </a:fontRef>
-        </p:style>
-        <p:txBody>
-          <a:bodyPr rtlCol="0" anchor="ctr"/>
-          <a:lstStyle/>
-          <a:p>
-            <a:pPr algn="ctr"/>
-            <a:endParaRPr lang="en-US"/>
-          </a:p>
-        </p:txBody>
-      </p:sp>
-      <p:sp>
-        <p:nvSpPr>
-          <p:cNvPr id="16" name="Rectangle 15">
-            <a:extLst>
-              <a:ext uri="{FF2B5EF4-FFF2-40B4-BE49-F238E27FC236}">
-                <a16:creationId xmlns:a16="http://schemas.microsoft.com/office/drawing/2014/main" id="{ACBCD392-7487-3340-615F-0F9F3A91BABF}"/>
-              </a:ext>
-            </a:extLst>
-          </p:cNvPr>
-          <p:cNvSpPr/>
-          <p:nvPr/>
-        </p:nvSpPr>
-        <p:spPr>
-          <a:xfrm>
-            <a:off x="3708197" y="5345051"/>
-            <a:ext cx="3497344" cy="202825"/>
-          </a:xfrm>
-          <a:prstGeom prst="rect">
-            <a:avLst/>
-          </a:prstGeom>
-          <a:solidFill>
-            <a:srgbClr val="00B0F0">
-              <a:alpha val="40000"/>
-            </a:srgbClr>
-          </a:solidFill>
-        </p:spPr>
-        <p:style>
-          <a:lnRef idx="2">
-            <a:schemeClr val="accent1">
-              <a:shade val="15000"/>
-            </a:schemeClr>
-          </a:lnRef>
-          <a:fillRef idx="1">
-            <a:schemeClr val="accent1"/>
-          </a:fillRef>
-          <a:effectRef idx="0">
-            <a:schemeClr val="accent1"/>
-          </a:effectRef>
-          <a:fontRef idx="minor">
-            <a:schemeClr val="lt1"/>
-          </a:fontRef>
-        </p:style>
-        <p:txBody>
-          <a:bodyPr rtlCol="0" anchor="ctr"/>
-          <a:lstStyle/>
-          <a:p>
-            <a:pPr algn="ctr"/>
-            <a:endParaRPr lang="en-US"/>
-          </a:p>
-        </p:txBody>
-      </p:sp>
-      <p:sp>
-        <p:nvSpPr>
-          <p:cNvPr id="17" name="Rectangle 16">
-            <a:extLst>
-              <a:ext uri="{FF2B5EF4-FFF2-40B4-BE49-F238E27FC236}">
-                <a16:creationId xmlns:a16="http://schemas.microsoft.com/office/drawing/2014/main" id="{617EE609-84A9-6273-8EB4-614DBF752B03}"/>
-              </a:ext>
-            </a:extLst>
-          </p:cNvPr>
-          <p:cNvSpPr/>
-          <p:nvPr/>
-        </p:nvSpPr>
-        <p:spPr>
-          <a:xfrm>
-            <a:off x="7997334" y="3034098"/>
-            <a:ext cx="3497344" cy="202825"/>
-          </a:xfrm>
-          <a:prstGeom prst="rect">
-            <a:avLst/>
-          </a:prstGeom>
-          <a:solidFill>
-            <a:srgbClr val="00B0F0">
-              <a:alpha val="40000"/>
-            </a:srgbClr>
-          </a:solidFill>
-        </p:spPr>
-        <p:style>
-          <a:lnRef idx="2">
-            <a:schemeClr val="accent1">
-              <a:shade val="15000"/>
-            </a:schemeClr>
-          </a:lnRef>
-          <a:fillRef idx="1">
-            <a:schemeClr val="accent1"/>
-          </a:fillRef>
-          <a:effectRef idx="0">
-            <a:schemeClr val="accent1"/>
-          </a:effectRef>
-          <a:fontRef idx="minor">
-            <a:schemeClr val="lt1"/>
-          </a:fontRef>
-        </p:style>
-        <p:txBody>
-          <a:bodyPr rtlCol="0" anchor="ctr"/>
-          <a:lstStyle/>
-          <a:p>
-            <a:pPr algn="ctr"/>
-            <a:endParaRPr lang="en-US"/>
-          </a:p>
-        </p:txBody>
-      </p:sp>
-      <p:sp>
-        <p:nvSpPr>
-          <p:cNvPr id="18" name="Rectangle 17">
-            <a:extLst>
-              <a:ext uri="{FF2B5EF4-FFF2-40B4-BE49-F238E27FC236}">
-                <a16:creationId xmlns:a16="http://schemas.microsoft.com/office/drawing/2014/main" id="{326C791C-F75F-8810-ADCA-FEC3FAFA1EAE}"/>
-              </a:ext>
-            </a:extLst>
-          </p:cNvPr>
-          <p:cNvSpPr/>
-          <p:nvPr/>
-        </p:nvSpPr>
-        <p:spPr>
-          <a:xfrm>
-            <a:off x="7997334" y="5326550"/>
-            <a:ext cx="3497344" cy="202825"/>
-          </a:xfrm>
-          <a:prstGeom prst="rect">
-            <a:avLst/>
-          </a:prstGeom>
-          <a:solidFill>
-            <a:srgbClr val="00B0F0">
-              <a:alpha val="40000"/>
-            </a:srgbClr>
-          </a:solidFill>
-        </p:spPr>
-        <p:style>
-          <a:lnRef idx="2">
-            <a:schemeClr val="accent1">
-              <a:shade val="15000"/>
-            </a:schemeClr>
-          </a:lnRef>
-          <a:fillRef idx="1">
-            <a:schemeClr val="accent1"/>
-          </a:fillRef>
-          <a:effectRef idx="0">
-            <a:schemeClr val="accent1"/>
-          </a:effectRef>
-          <a:fontRef idx="minor">
-            <a:schemeClr val="lt1"/>
-          </a:fontRef>
-        </p:style>
-        <p:txBody>
-          <a:bodyPr rtlCol="0" anchor="ctr"/>
-          <a:lstStyle/>
-          <a:p>
-            <a:pPr algn="ctr"/>
-            <a:endParaRPr lang="en-US"/>
-          </a:p>
-        </p:txBody>
-      </p:sp>
-      <p:sp>
-        <p:nvSpPr>
-          <p:cNvPr id="19" name="Rectangle 18">
-            <a:extLst>
-              <a:ext uri="{FF2B5EF4-FFF2-40B4-BE49-F238E27FC236}">
-                <a16:creationId xmlns:a16="http://schemas.microsoft.com/office/drawing/2014/main" id="{4D019782-9F36-8701-CDAB-367875343CAD}"/>
-              </a:ext>
-            </a:extLst>
-          </p:cNvPr>
-          <p:cNvSpPr/>
-          <p:nvPr/>
-        </p:nvSpPr>
-        <p:spPr>
-          <a:xfrm>
-            <a:off x="3796223" y="1514569"/>
-            <a:ext cx="4201109" cy="202825"/>
-          </a:xfrm>
-          <a:prstGeom prst="rect">
-            <a:avLst/>
-          </a:prstGeom>
-          <a:solidFill>
-            <a:srgbClr val="92D050">
-              <a:alpha val="40000"/>
-            </a:srgbClr>
-          </a:solidFill>
-        </p:spPr>
-        <p:style>
-          <a:lnRef idx="2">
-            <a:schemeClr val="accent1">
-              <a:shade val="15000"/>
-            </a:schemeClr>
-          </a:lnRef>
-          <a:fillRef idx="1">
-            <a:schemeClr val="accent1"/>
-          </a:fillRef>
-          <a:effectRef idx="0">
-            <a:schemeClr val="accent1"/>
-          </a:effectRef>
-          <a:fontRef idx="minor">
-            <a:schemeClr val="lt1"/>
-          </a:fontRef>
-        </p:style>
-        <p:txBody>
-          <a:bodyPr rtlCol="0" anchor="ctr"/>
-          <a:lstStyle/>
-          <a:p>
-            <a:pPr algn="ctr"/>
-            <a:endParaRPr lang="en-US"/>
-          </a:p>
-        </p:txBody>
-      </p:sp>
-      <p:sp>
-        <p:nvSpPr>
-          <p:cNvPr id="20" name="Rectangle 19">
-            <a:extLst>
-              <a:ext uri="{FF2B5EF4-FFF2-40B4-BE49-F238E27FC236}">
-                <a16:creationId xmlns:a16="http://schemas.microsoft.com/office/drawing/2014/main" id="{A3793849-E58E-E410-A6EF-F0B17BF9C9EE}"/>
-              </a:ext>
-            </a:extLst>
-          </p:cNvPr>
-          <p:cNvSpPr/>
-          <p:nvPr/>
-        </p:nvSpPr>
-        <p:spPr>
-          <a:xfrm>
-            <a:off x="3853381" y="3858406"/>
-            <a:ext cx="4143952" cy="202825"/>
-          </a:xfrm>
-          <a:prstGeom prst="rect">
-            <a:avLst/>
-          </a:prstGeom>
-          <a:solidFill>
-            <a:srgbClr val="92D050">
-              <a:alpha val="40000"/>
-            </a:srgbClr>
-          </a:solidFill>
-        </p:spPr>
-        <p:style>
-          <a:lnRef idx="2">
-            <a:schemeClr val="accent1">
-              <a:shade val="15000"/>
-            </a:schemeClr>
-          </a:lnRef>
-          <a:fillRef idx="1">
-            <a:schemeClr val="accent1"/>
-          </a:fillRef>
-          <a:effectRef idx="0">
-            <a:schemeClr val="accent1"/>
-          </a:effectRef>
-          <a:fontRef idx="minor">
-            <a:schemeClr val="lt1"/>
-          </a:fontRef>
-        </p:style>
-        <p:txBody>
-          <a:bodyPr rtlCol="0" anchor="ctr"/>
-          <a:lstStyle/>
-          <a:p>
-            <a:pPr algn="ctr"/>
-            <a:endParaRPr lang="en-US"/>
-          </a:p>
-        </p:txBody>
-      </p:sp>
-      <p:sp>
-        <p:nvSpPr>
-          <p:cNvPr id="21" name="Rectangle 20">
-            <a:extLst>
-              <a:ext uri="{FF2B5EF4-FFF2-40B4-BE49-F238E27FC236}">
-                <a16:creationId xmlns:a16="http://schemas.microsoft.com/office/drawing/2014/main" id="{A77F0EF9-439B-956F-48D3-ED7700AD2FF5}"/>
-              </a:ext>
-            </a:extLst>
-          </p:cNvPr>
-          <p:cNvSpPr/>
-          <p:nvPr/>
-        </p:nvSpPr>
-        <p:spPr>
-          <a:xfrm>
-            <a:off x="7959232" y="2537147"/>
-            <a:ext cx="4201109" cy="202825"/>
-          </a:xfrm>
-          <a:prstGeom prst="rect">
-            <a:avLst/>
-          </a:prstGeom>
-          <a:solidFill>
-            <a:srgbClr val="92D050">
-              <a:alpha val="40000"/>
-            </a:srgbClr>
-          </a:solidFill>
-        </p:spPr>
-        <p:style>
-          <a:lnRef idx="2">
-            <a:schemeClr val="accent1">
-              <a:shade val="15000"/>
-            </a:schemeClr>
-          </a:lnRef>
-          <a:fillRef idx="1">
-            <a:schemeClr val="accent1"/>
-          </a:fillRef>
-          <a:effectRef idx="0">
-            <a:schemeClr val="accent1"/>
-          </a:effectRef>
-          <a:fontRef idx="minor">
-            <a:schemeClr val="lt1"/>
-          </a:fontRef>
-        </p:style>
-        <p:txBody>
-          <a:bodyPr rtlCol="0" anchor="ctr"/>
-          <a:lstStyle/>
-          <a:p>
-            <a:pPr algn="ctr"/>
-            <a:endParaRPr lang="en-US"/>
-          </a:p>
-        </p:txBody>
-      </p:sp>
-      <p:sp>
-        <p:nvSpPr>
-          <p:cNvPr id="22" name="Rectangle 21">
-            <a:extLst>
-              <a:ext uri="{FF2B5EF4-FFF2-40B4-BE49-F238E27FC236}">
-                <a16:creationId xmlns:a16="http://schemas.microsoft.com/office/drawing/2014/main" id="{0D39B4C7-730A-1A3B-669A-3568FA66424C}"/>
-              </a:ext>
-            </a:extLst>
-          </p:cNvPr>
-          <p:cNvSpPr/>
-          <p:nvPr/>
-        </p:nvSpPr>
-        <p:spPr>
-          <a:xfrm>
-            <a:off x="7959231" y="4500315"/>
-            <a:ext cx="4201109" cy="202825"/>
-          </a:xfrm>
-          <a:prstGeom prst="rect">
-            <a:avLst/>
-          </a:prstGeom>
-          <a:solidFill>
-            <a:srgbClr val="92D050">
-              <a:alpha val="40000"/>
-            </a:srgbClr>
-          </a:solidFill>
-        </p:spPr>
-        <p:style>
-          <a:lnRef idx="2">
-            <a:schemeClr val="accent1">
-              <a:shade val="15000"/>
-            </a:schemeClr>
-          </a:lnRef>
-          <a:fillRef idx="1">
-            <a:schemeClr val="accent1"/>
-          </a:fillRef>
-          <a:effectRef idx="0">
-            <a:schemeClr val="accent1"/>
-          </a:effectRef>
-          <a:fontRef idx="minor">
-            <a:schemeClr val="lt1"/>
-          </a:fontRef>
-        </p:style>
-        <p:txBody>
-          <a:bodyPr rtlCol="0" anchor="ctr"/>
-          <a:lstStyle/>
-          <a:p>
-            <a:pPr algn="ctr"/>
-            <a:endParaRPr lang="en-US"/>
-          </a:p>
-        </p:txBody>
-      </p:sp>
-      <p:sp>
-        <p:nvSpPr>
-          <p:cNvPr id="23" name="TextBox 22">
-            <a:extLst>
-              <a:ext uri="{FF2B5EF4-FFF2-40B4-BE49-F238E27FC236}">
-                <a16:creationId xmlns:a16="http://schemas.microsoft.com/office/drawing/2014/main" id="{48A47BED-8063-C5E7-031B-FB55B586C2CF}"/>
-              </a:ext>
-            </a:extLst>
-          </p:cNvPr>
-          <p:cNvSpPr txBox="1"/>
-          <p:nvPr/>
-        </p:nvSpPr>
-        <p:spPr>
-          <a:xfrm>
-            <a:off x="402264" y="1514569"/>
-            <a:ext cx="3248772" cy="1200329"/>
-          </a:xfrm>
-          <a:prstGeom prst="rect">
-            <a:avLst/>
-          </a:prstGeom>
-        </p:spPr>
-        <p:txBody>
-          <a:bodyPr vert="horz" lIns="91440" tIns="45720" rIns="91440" bIns="45720" rtlCol="0">
-            <a:normAutofit fontScale="70000" lnSpcReduction="20000"/>
-          </a:bodyPr>
-          <a:lstStyle>
-            <a:lvl1pPr marL="228594" indent="-228594">
-              <a:lnSpc>
-                <a:spcPct val="90000"/>
-              </a:lnSpc>
-              <a:spcBef>
-                <a:spcPts val="1000"/>
-              </a:spcBef>
-              <a:buFont typeface="Arial" panose="020B0604020202020204" pitchFamily="34" charset="0"/>
-              <a:buChar char="•"/>
-              <a:defRPr sz="2800">
-                <a:solidFill>
-                  <a:schemeClr val="tx2"/>
-                </a:solidFill>
-              </a:defRPr>
-            </a:lvl1pPr>
-            <a:lvl2pPr marL="685783" lvl="1" indent="-228594">
-              <a:lnSpc>
-                <a:spcPct val="90000"/>
-              </a:lnSpc>
-              <a:spcBef>
-                <a:spcPts val="500"/>
-              </a:spcBef>
-              <a:buFont typeface="Arial" panose="020B0604020202020204" pitchFamily="34" charset="0"/>
-              <a:buChar char="•"/>
-              <a:defRPr sz="2400">
-                <a:solidFill>
-                  <a:schemeClr val="tx2"/>
-                </a:solidFill>
-              </a:defRPr>
-            </a:lvl2pPr>
-            <a:lvl3pPr marL="1142971" lvl="2" indent="-228594">
-              <a:lnSpc>
-                <a:spcPct val="90000"/>
-              </a:lnSpc>
-              <a:spcBef>
-                <a:spcPts val="500"/>
-              </a:spcBef>
-              <a:buFont typeface="Arial" panose="020B0604020202020204" pitchFamily="34" charset="0"/>
-              <a:buChar char="•"/>
-              <a:defRPr sz="2000" i="1">
-                <a:solidFill>
-                  <a:schemeClr val="tx2"/>
-                </a:solidFill>
-                <a:latin typeface="Cambria Math" panose="02040503050406030204" pitchFamily="18" charset="0"/>
-              </a:defRPr>
-            </a:lvl3pPr>
-            <a:lvl4pPr marL="1600160" indent="-228594">
-              <a:lnSpc>
-                <a:spcPct val="90000"/>
-              </a:lnSpc>
-              <a:spcBef>
-                <a:spcPts val="500"/>
-              </a:spcBef>
-              <a:buFont typeface="Arial" panose="020B0604020202020204" pitchFamily="34" charset="0"/>
-              <a:buChar char="•"/>
-              <a:defRPr>
-                <a:solidFill>
-                  <a:schemeClr val="tx2"/>
-                </a:solidFill>
-              </a:defRPr>
-            </a:lvl4pPr>
-            <a:lvl5pPr marL="2057349" indent="-228594">
-              <a:lnSpc>
-                <a:spcPct val="90000"/>
-              </a:lnSpc>
-              <a:spcBef>
-                <a:spcPts val="500"/>
-              </a:spcBef>
-              <a:buFont typeface="Arial" panose="020B0604020202020204" pitchFamily="34" charset="0"/>
-              <a:buChar char="•"/>
-              <a:defRPr>
-                <a:solidFill>
-                  <a:schemeClr val="tx2"/>
-                </a:solidFill>
-              </a:defRPr>
-            </a:lvl5pPr>
-            <a:lvl6pPr marL="2514537" indent="-228594">
-              <a:lnSpc>
-                <a:spcPct val="90000"/>
-              </a:lnSpc>
-              <a:spcBef>
-                <a:spcPts val="500"/>
-              </a:spcBef>
-              <a:buFont typeface="Arial" panose="020B0604020202020204" pitchFamily="34" charset="0"/>
-              <a:buChar char="•"/>
-            </a:lvl6pPr>
-            <a:lvl7pPr marL="2971726" indent="-228594">
-              <a:lnSpc>
-                <a:spcPct val="90000"/>
-              </a:lnSpc>
-              <a:spcBef>
-                <a:spcPts val="500"/>
-              </a:spcBef>
-              <a:buFont typeface="Arial" panose="020B0604020202020204" pitchFamily="34" charset="0"/>
-              <a:buChar char="•"/>
-            </a:lvl7pPr>
-            <a:lvl8pPr marL="3428914" indent="-228594">
-              <a:lnSpc>
-                <a:spcPct val="90000"/>
-              </a:lnSpc>
-              <a:spcBef>
-                <a:spcPts val="500"/>
-              </a:spcBef>
-              <a:buFont typeface="Arial" panose="020B0604020202020204" pitchFamily="34" charset="0"/>
-              <a:buChar char="•"/>
-            </a:lvl8pPr>
-            <a:lvl9pPr marL="3886103" indent="-228594">
-              <a:lnSpc>
-                <a:spcPct val="90000"/>
-              </a:lnSpc>
-              <a:spcBef>
-                <a:spcPts val="500"/>
-              </a:spcBef>
-              <a:buFont typeface="Arial" panose="020B0604020202020204" pitchFamily="34" charset="0"/>
-              <a:buChar char="•"/>
-            </a:lvl9pPr>
-          </a:lstStyle>
-          <a:p>
-            <a:r>
-              <a:rPr lang="en-US" dirty="0"/>
-              <a:t>Each manager waits until all dependencies are satisfied before executing their own Catalan number</a:t>
-            </a:r>
           </a:p>
         </p:txBody>
       </p:sp>
     </p:spTree>
     <p:extLst>
       <p:ext uri="{BB962C8B-B14F-4D97-AF65-F5344CB8AC3E}">
-        <p14:creationId xmlns:p14="http://schemas.microsoft.com/office/powerpoint/2010/main" val="4123538328"/>
+        <p14:creationId xmlns:p14="http://schemas.microsoft.com/office/powerpoint/2010/main" val="3309814980"/>
       </p:ext>
     </p:extLst>
   </p:cSld>
